--- a/fixtures/real-world/worldbank-cpf-concept-note-de.pptx
+++ b/fixtures/real-world/worldbank-cpf-concept-note-de.pptx
@@ -584,7 +584,7 @@
                 <a:ea typeface="+mn-ea"/>
                 <a:cs typeface="Arial" panose="020B0604020202020204" pitchFamily="34" charset="0"/>
               </a:rPr>
-              <a:t>Poverty rates and total number of poor </a:t>
+              <a:t>DE: Poverty rates and total number of poor </a:t>
             </a:r>
           </a:p>
         </c:rich>
@@ -4884,7 +4884,7 @@
                 </a:pPr>
                 <a:r>
                   <a:rPr lang="en-US"/>
-                  <a:t>Taxa de Pobreza (%)</a:t>
+                  <a:t>DE: Taxa de Pobreza (%)</a:t>
                 </a:r>
               </a:p>
             </c:rich>
@@ -4982,7 +4982,7 @@
                 </a:pPr>
                 <a:r>
                   <a:rPr lang="en-US" dirty="0" err="1"/>
-                  <a:t>Número</a:t>
+                  <a:t>DE: Número</a:t>
                 </a:r>
                 <a:r>
                   <a:rPr lang="en-US" dirty="0"/>
@@ -4990,7 +4990,7 @@
                 </a:r>
                 <a:r>
                   <a:rPr lang="en-US" dirty="0" err="1"/>
-                  <a:t>pobres</a:t>
+                  <a:t>DE: pobres</a:t>
                 </a:r>
                 <a:r>
                   <a:rPr lang="en-US" dirty="0"/>
@@ -5325,7 +5325,7 @@
                 </a:solidFill>
                 <a:latin typeface="+mj-lt"/>
               </a:rPr>
-              <a:t>Funding</a:t>
+              <a:t>DE: Funding</a:t>
             </a:r>
             <a:r>
               <a:rPr lang="en-US" sz="1000" b="1" baseline="0" dirty="0">
@@ -5343,7 +5343,7 @@
                 </a:solidFill>
                 <a:latin typeface="+mj-lt"/>
               </a:rPr>
-              <a:t>objectives</a:t>
+              <a:t>DE: objectives</a:t>
             </a:r>
             <a:r>
               <a:rPr lang="en-US" sz="1000" b="1" baseline="0" dirty="0">
@@ -5361,8 +5361,27 @@
                 </a:solidFill>
                 <a:latin typeface="+mj-lt"/>
               </a:rPr>
-              <a:t>in the FY17-21 CPF period (% of total commitments)
-</a:t>
+              <a:t>DE: in the FY17-21 CPF period (% of total commitments)</a:t>
+            </a:r>
+            <a:br/>
+            <a:r>
+              <a:rPr lang="en-US" sz="1000" b="1" dirty="0">
+                <a:solidFill>
+                  <a:schemeClr val="tx1"/>
+                </a:solidFill>
+                <a:latin typeface="+mj-lt"/>
+              </a:rPr>
+              <a:t/>
+            </a:r>
+            <a:br/>
+            <a:r>
+              <a:rPr lang="en-US" sz="1000" b="1" dirty="0">
+                <a:solidFill>
+                  <a:schemeClr val="tx1"/>
+                </a:solidFill>
+                <a:latin typeface="+mj-lt"/>
+              </a:rPr>
+              <a:t/>
             </a:r>
             <a:r>
               <a:rPr lang="pt-BR" sz="1000" b="0" dirty="0">
@@ -5680,8 +5699,17 @@
                     </a:pPr>
                     <a:r>
                       <a:rPr lang="en-US"/>
-                      <a:t>1: Improved economic management, 6.6%
-</a:t>
+                      <a:t>DE: 1: Improved economic management, 6.6%</a:t>
+                    </a:r>
+                    <a:br/>
+                    <a:r>
+                      <a:rPr lang="en-US"/>
+                      <a:t/>
+                    </a:r>
+                    <a:br/>
+                    <a:r>
+                      <a:rPr lang="en-US"/>
+                      <a:t/>
                     </a:r>
                     <a:endParaRPr lang="en-US" baseline="0"/>
                   </a:p>
@@ -5756,8 +5784,17 @@
                     </a:pPr>
                     <a:r>
                       <a:rPr lang="en-US"/>
-                      <a:t>2: Increase in Agricultural Growth, 30.2%
-</a:t>
+                      <a:t>DE: 2: Increase in Agricultural Growth, 30.2%</a:t>
+                    </a:r>
+                    <a:br/>
+                    <a:r>
+                      <a:rPr lang="en-US"/>
+                      <a:t/>
+                    </a:r>
+                    <a:br/>
+                    <a:r>
+                      <a:rPr lang="en-US"/>
+                      <a:t/>
                     </a:r>
                     <a:endParaRPr lang="en-US" baseline="0"/>
                   </a:p>
@@ -5832,8 +5869,17 @@
                     </a:pPr>
                     <a:r>
                       <a:rPr lang="en-US"/>
-                      <a:t>3: Improving the Business Environment for Job Creation, 3.5%
-</a:t>
+                      <a:t>DE: 3: Improving the Business Environment for Job Creation, 3.5%</a:t>
+                    </a:r>
+                    <a:br/>
+                    <a:r>
+                      <a:rPr lang="en-US"/>
+                      <a:t/>
+                    </a:r>
+                    <a:br/>
+                    <a:r>
+                      <a:rPr lang="en-US"/>
+                      <a:t/>
                     </a:r>
                     <a:endParaRPr lang="en-US" baseline="0"/>
                   </a:p>
@@ -5908,8 +5954,17 @@
                     </a:pPr>
                     <a:r>
                       <a:rPr lang="en-US"/>
-                      <a:t>4: Expand access and improve electricity reliability, 8.0%
-</a:t>
+                      <a:t>DE: 4: Expand access and improve electricity reliability, 8.0%</a:t>
+                    </a:r>
+                    <a:br/>
+                    <a:r>
+                      <a:rPr lang="en-US"/>
+                      <a:t/>
+                    </a:r>
+                    <a:br/>
+                    <a:r>
+                      <a:rPr lang="en-US"/>
+                      <a:t/>
                     </a:r>
                     <a:endParaRPr lang="en-US" baseline="0"/>
                   </a:p>
@@ -5984,8 +6039,17 @@
                     </a:pPr>
                     <a:r>
                       <a:rPr lang="en-US"/>
-                      <a:t>5: Improve the Skills Base, 13.8%
-</a:t>
+                      <a:t>DE: 5: Improve the Skills Base, 13.8%</a:t>
+                    </a:r>
+                    <a:br/>
+                    <a:r>
+                      <a:rPr lang="en-US"/>
+                      <a:t/>
+                    </a:r>
+                    <a:br/>
+                    <a:r>
+                      <a:rPr lang="en-US"/>
+                      <a:t/>
                     </a:r>
                     <a:endParaRPr lang="en-US" baseline="0"/>
                   </a:p>
@@ -6060,8 +6124,17 @@
                     </a:pPr>
                     <a:r>
                       <a:rPr lang="en-US"/>
-                      <a:t>6: Improving the provision of the Health Service, 2.8%
-</a:t>
+                      <a:t>DE: 6: Improving the provision of the Health Service, 2.8%</a:t>
+                    </a:r>
+                    <a:br/>
+                    <a:r>
+                      <a:rPr lang="en-US"/>
+                      <a:t/>
+                    </a:r>
+                    <a:br/>
+                    <a:r>
+                      <a:rPr lang="en-US"/>
+                      <a:t/>
                     </a:r>
                     <a:endParaRPr lang="en-US" baseline="0"/>
                   </a:p>
@@ -6136,8 +6209,17 @@
                     </a:pPr>
                     <a:r>
                       <a:rPr lang="en-US"/>
-                      <a:t>7: Improving access to water and sanitation, 6.6%
-</a:t>
+                      <a:t>DE: 7: Improving access to water and sanitation, 6.6%</a:t>
+                    </a:r>
+                    <a:br/>
+                    <a:r>
+                      <a:rPr lang="en-US"/>
+                      <a:t/>
+                    </a:r>
+                    <a:br/>
+                    <a:r>
+                      <a:rPr lang="en-US"/>
+                      <a:t/>
                     </a:r>
                     <a:endParaRPr lang="en-US" baseline="0"/>
                   </a:p>
@@ -6212,8 +6294,17 @@
                     </a:pPr>
                     <a:r>
                       <a:rPr lang="en-US"/>
-                      <a:t>8: Support for Recovery and Resilience, 21.1%
-</a:t>
+                      <a:t>DE: 8: Support for Recovery and Resilience, 21.1%</a:t>
+                    </a:r>
+                    <a:br/>
+                    <a:r>
+                      <a:rPr lang="en-US"/>
+                      <a:t/>
+                    </a:r>
+                    <a:br/>
+                    <a:r>
+                      <a:rPr lang="en-US"/>
+                      <a:t/>
                     </a:r>
                     <a:endParaRPr lang="en-US" baseline="0"/>
                   </a:p>
@@ -6288,8 +6379,17 @@
                     </a:pPr>
                     <a:r>
                       <a:rPr lang="en-US" dirty="0"/>
-                      <a:t>9: Promoting Inclusive Urbanization and Decentralization7.5%
-</a:t>
+                      <a:t>DE: 9: Promoting Inclusive Urbanization and Decentralization7.5%</a:t>
+                    </a:r>
+                    <a:br/>
+                    <a:r>
+                      <a:rPr lang="en-US" dirty="0"/>
+                      <a:t/>
+                    </a:r>
+                    <a:br/>
+                    <a:r>
+                      <a:rPr lang="en-US" dirty="0"/>
+                      <a:t/>
                     </a:r>
                     <a:endParaRPr lang="en-US" baseline="0" dirty="0"/>
                   </a:p>
@@ -6540,12 +6640,21 @@
                   <a:schemeClr val="tx1"/>
                 </a:solidFill>
               </a:rPr>
-              <a:t>% of total undisbursed funds</a:t>
+              <a:t>DE: % of total undisbursed funds</a:t>
             </a:r>
             <a:r>
               <a:rPr lang="en-US" dirty="0"/>
-              <a:t>*
-</a:t>
+              <a:t>*</a:t>
+            </a:r>
+            <a:br/>
+            <a:r>
+              <a:rPr lang="en-US" dirty="0"/>
+              <a:t/>
+            </a:r>
+            <a:br/>
+            <a:r>
+              <a:rPr lang="en-US" dirty="0"/>
+              <a:t/>
             </a:r>
           </a:p>
         </c:rich>
@@ -6896,7 +7005,7 @@
             </a:pPr>
             <a:r>
               <a:rPr lang="en-US" b="1" dirty="0"/>
-              <a:t>Nominal GDP per Capita (1998 - 2021) </a:t>
+              <a:t>DE: Nominal GDP per Capita (1998 - 2021) </a:t>
             </a:r>
           </a:p>
         </c:rich>
@@ -7250,7 +7359,7 @@
                 </a:pPr>
                 <a:r>
                   <a:rPr lang="en-US"/>
-                  <a:t>USD</a:t>
+                  <a:t>DE: USD</a:t>
                 </a:r>
               </a:p>
             </c:rich>
@@ -7394,7 +7503,7 @@
             </a:pPr>
             <a:r>
               <a:rPr lang="en-US" sz="1000" b="1" dirty="0"/>
-              <a:t>Ghana</a:t>
+              <a:t>DE: Ghana</a:t>
             </a:r>
           </a:p>
         </c:rich>
@@ -9250,7 +9359,7 @@
             </a:pPr>
             <a:r>
               <a:rPr lang="en-US" sz="1000" b="1" dirty="0"/>
-              <a:t>Mozambique</a:t>
+              <a:t>DE: Mozambique</a:t>
             </a:r>
           </a:p>
         </c:rich>
@@ -10206,7 +10315,7 @@
             </a:pPr>
             <a:r>
               <a:rPr lang="pt-PT" b="1" dirty="0"/>
-              <a:t>Crescimento Real do PIB (billion de Meticais )</a:t>
+              <a:t>DE: Crescimento Real do PIB (billion de Meticais )</a:t>
             </a:r>
           </a:p>
         </c:rich>
@@ -11100,8 +11209,17 @@
             </a:pPr>
             <a:r>
               <a:rPr lang="en-US" sz="1000" b="1"/>
-              <a:t>Total Public Debt Stock (% GDP)
-</a:t>
+              <a:t>DE: Total Public Debt Stock (% GDP)</a:t>
+            </a:r>
+            <a:br/>
+            <a:r>
+              <a:rPr lang="en-US" sz="1000" b="1"/>
+              <a:t/>
+            </a:r>
+            <a:br/>
+            <a:r>
+              <a:rPr lang="en-US" sz="1000" b="1"/>
+              <a:t/>
             </a:r>
           </a:p>
         </c:rich>
@@ -11537,8 +11655,17 @@
             </a:pPr>
             <a:r>
               <a:rPr lang="en-US" sz="1050" b="1"/>
-              <a:t>Annual GDP Growth
-</a:t>
+              <a:t>DE: Annual GDP Growth</a:t>
+            </a:r>
+            <a:br/>
+            <a:r>
+              <a:rPr lang="en-US" sz="1050" b="1"/>
+              <a:t/>
+            </a:r>
+            <a:br/>
+            <a:r>
+              <a:rPr lang="en-US" sz="1050" b="1"/>
+              <a:t/>
             </a:r>
           </a:p>
         </c:rich>
@@ -14347,8 +14474,17 @@
             </a:pPr>
             <a:r>
               <a:rPr lang="pt-BR" sz="1200" dirty="0"/>
-              <a:t>Annual GDP Growth - Projected
-</a:t>
+              <a:t>DE: Annual GDP Growth - Projected</a:t>
+            </a:r>
+            <a:br/>
+            <a:r>
+              <a:rPr lang="pt-BR" sz="1200" dirty="0"/>
+              <a:t/>
+            </a:r>
+            <a:br/>
+            <a:r>
+              <a:rPr lang="pt-BR" sz="1200" dirty="0"/>
+              <a:t/>
             </a:r>
             <a:endParaRPr lang="en-US" sz="1200" dirty="0"/>
           </a:p>
@@ -26875,7 +27011,31 @@
                 <a:ea typeface="+mn-ea"/>
                 <a:cs typeface="+mn-cs"/>
               </a:rPr>
-              <a:t>Endgültige Mittelzuweisung </a:t>
+              <a:t>Endgültige Mittelzuweisung</a:t>
+            </a:r>
+            <a:br/>
+            <a:r>
+              <a:rPr lang="pt-BR" sz="1000" cap="all" dirty="0">
+                <a:solidFill>
+                  <a:schemeClr val="tx1"/>
+                </a:solidFill>
+                <a:latin typeface="+mj-lt"/>
+                <a:ea typeface="+mn-ea"/>
+                <a:cs typeface="+mn-cs"/>
+              </a:rPr>
+              <a:t/>
+            </a:r>
+            <a:br/>
+            <a:r>
+              <a:rPr lang="pt-BR" sz="1000" cap="all" dirty="0">
+                <a:solidFill>
+                  <a:schemeClr val="tx1"/>
+                </a:solidFill>
+                <a:latin typeface="+mj-lt"/>
+                <a:ea typeface="+mn-ea"/>
+                <a:cs typeface="+mn-cs"/>
+              </a:rPr>
+              <a:t/>
             </a:r>
             <a:endParaRPr lang="en-US" sz="1000" cap="all" dirty="0">
               <a:solidFill>
@@ -27042,7 +27202,17 @@
           <a:p>
             <a:r>
               <a:rPr lang="en-US" sz="2400" dirty="0"/>
-              <a:t>CPF GJ2017-2021: Ergebnisse  </a:t>
+              <a:t>CPF GJ2017-2021: Ergebnisse </a:t>
+            </a:r>
+            <a:br/>
+            <a:r>
+              <a:rPr lang="en-US" sz="2400" dirty="0"/>
+              <a:t/>
+            </a:r>
+            <a:br/>
+            <a:r>
+              <a:rPr lang="en-US" sz="2400" dirty="0"/>
+              <a:t/>
             </a:r>
             <a:endParaRPr lang="en-US" sz="2400" b="0" i="1" dirty="0"/>
           </a:p>
@@ -30022,7 +30192,17 @@
           <a:p>
             <a:r>
               <a:rPr lang="en-US" sz="2400" dirty="0"/>
-              <a:t>CPF GJ2017-2021: Gelernte Lektionen </a:t>
+              <a:t>CPF GJ2017-2021: Gelernte Lektionen</a:t>
+            </a:r>
+            <a:br/>
+            <a:r>
+              <a:rPr lang="en-US" sz="2400" dirty="0"/>
+              <a:t/>
+            </a:r>
+            <a:br/>
+            <a:r>
+              <a:rPr lang="en-US" sz="2400" dirty="0"/>
+              <a:t/>
             </a:r>
             <a:endParaRPr lang="pt" sz="2400" b="0" i="1" u="none" strike="noStrike" dirty="0">
               <a:highlight>
@@ -30423,7 +30603,17 @@
             <a:pPr algn="ctr"/>
             <a:r>
               <a:rPr lang="en-US" sz="4000" dirty="0"/>
-              <a:t>Präsentationsstruktur </a:t>
+              <a:t>Präsentationsstruktur</a:t>
+            </a:r>
+            <a:br/>
+            <a:r>
+              <a:rPr lang="en-US" sz="4000" dirty="0"/>
+              <a:t/>
+            </a:r>
+            <a:br/>
+            <a:r>
+              <a:rPr lang="en-US" sz="4000" dirty="0"/>
+              <a:t/>
             </a:r>
             <a:endParaRPr lang="pt" sz="4000" b="0" i="1" u="none" strike="noStrike" dirty="0">
               <a:highlight>
@@ -30485,7 +30675,29 @@
                   </a:schemeClr>
                 </a:solidFill>
               </a:rPr>
-              <a:t>Sichtweise der Weltbankgruppe auf die wichtigsten strategischen Herausforderungen des Landes    Wichtigste Lehren aus dem vorigen CPF (2017-2021</a:t>
+              <a:t>Sichtweise der Weltbankgruppe auf die wichtigsten strategischen Herausforderungen des Landes   </a:t>
+            </a:r>
+            <a:br/>
+            <a:r>
+              <a:rPr lang="en-US" sz="3200" b="1" dirty="0">
+                <a:solidFill>
+                  <a:schemeClr val="bg2">
+                    <a:lumMod val="90000"/>
+                  </a:schemeClr>
+                </a:solidFill>
+              </a:rPr>
+              <a:t>Wichtigste Lehren aus dem vorigen CPF (2017-2021</a:t>
+            </a:r>
+            <a:br/>
+            <a:r>
+              <a:rPr lang="en-US" sz="3200" b="1" dirty="0">
+                <a:solidFill>
+                  <a:schemeClr val="bg2">
+                    <a:lumMod val="90000"/>
+                  </a:schemeClr>
+                </a:solidFill>
+              </a:rPr>
+              <a:t/>
             </a:r>
             <a:r>
               <a:rPr lang="pt-BR" sz="3200" b="1" i="0" u="none" strike="noStrike" dirty="0">
@@ -31600,7 +31812,25 @@
                   <a:srgbClr val="2F5597"/>
                 </a:solidFill>
               </a:rPr>
-              <a:t>Regierungsprogramm und mittelfristige Strategie (1-2) </a:t>
+              <a:t>Regierungsprogramm und mittelfristige Strategie (1-2)</a:t>
+            </a:r>
+            <a:br/>
+            <a:r>
+              <a:rPr lang="en-US" sz="2400" b="1" dirty="0">
+                <a:solidFill>
+                  <a:srgbClr val="2F5597"/>
+                </a:solidFill>
+              </a:rPr>
+              <a:t/>
+            </a:r>
+            <a:br/>
+            <a:r>
+              <a:rPr lang="en-US" sz="2400" b="1" dirty="0">
+                <a:solidFill>
+                  <a:srgbClr val="2F5597"/>
+                </a:solidFill>
+              </a:rPr>
+              <a:t/>
             </a:r>
             <a:endParaRPr lang="pt" sz="2400" b="1" i="0" u="none" strike="noStrike" dirty="0">
               <a:solidFill>
@@ -32352,7 +32582,19 @@
                 <a:ea typeface="Times New Roman" panose="02020603050405020304" pitchFamily="18" charset="0"/>
                 <a:cs typeface="Times New Roman" panose="02020603050405020304" pitchFamily="18" charset="0"/>
               </a:rPr>
-              <a:t>HLO 1: Inklusivere Institutionen </a:t>
+              <a:t>HLO 1: Inklusivere Institutionen</a:t>
+            </a:r>
+            <a:br/>
+            <a:r>
+              <a:rPr lang="en-US" b="1" dirty="0">
+                <a:solidFill>
+                  <a:srgbClr val="FFFFFF"/>
+                </a:solidFill>
+                <a:latin typeface="Calibri" panose="020F0502020204030204" pitchFamily="34" charset="0"/>
+                <a:ea typeface="Times New Roman" panose="02020603050405020304" pitchFamily="18" charset="0"/>
+                <a:cs typeface="Times New Roman" panose="02020603050405020304" pitchFamily="18" charset="0"/>
+              </a:rPr>
+              <a:t/>
             </a:r>
             <a:r>
               <a:rPr lang="pt-BR" b="1" dirty="0">
@@ -32539,7 +32781,19 @@
                 <a:ea typeface="Times New Roman" panose="02020603050405020304" pitchFamily="18" charset="0"/>
                 <a:cs typeface="Times New Roman" panose="02020603050405020304" pitchFamily="18" charset="0"/>
               </a:rPr>
-              <a:t>Verbesserung des Wirtschaftsmanagements für eine nachhaltige und resiliente Beschäftigungsschaffung, bessere Ausgabekapazität und geringeres Länderrisiko </a:t>
+              <a:t>Verbesserung des Wirtschaftsmanagements für eine nachhaltige und resiliente Beschäftigungsschaffung, bessere Ausgabekapazität und geringeres Länderrisiko</a:t>
+            </a:r>
+            <a:br/>
+            <a:r>
+              <a:rPr lang="en-US" sz="1400" b="1" dirty="0">
+                <a:solidFill>
+                  <a:srgbClr val="FFFFFF"/>
+                </a:solidFill>
+                <a:latin typeface="Calibri" panose="020F0502020204030204" pitchFamily="34" charset="0"/>
+                <a:ea typeface="Times New Roman" panose="02020603050405020304" pitchFamily="18" charset="0"/>
+                <a:cs typeface="Times New Roman" panose="02020603050405020304" pitchFamily="18" charset="0"/>
+              </a:rPr>
+              <a:t/>
             </a:r>
             <a:r>
               <a:rPr lang="pt-BR" sz="1400" b="1" dirty="0">
@@ -32661,7 +32915,19 @@
                   <a:ea typeface="Times New Roman" panose="02020603050405020304" pitchFamily="18" charset="0"/>
                   <a:cs typeface="Times New Roman" panose="02020603050405020304" pitchFamily="18" charset="0"/>
                 </a:rPr>
-                <a:t>Förderung des Produktivitätswachstums in ausgewählten arbeitsintensiven Branchen </a:t>
+                <a:t>Förderung des Produktivitätswachstums in ausgewählten arbeitsintensiven Branchen</a:t>
+              </a:r>
+              <a:br/>
+              <a:r>
+                <a:rPr lang="en-US" sz="1400" b="1" dirty="0">
+                  <a:solidFill>
+                    <a:srgbClr val="FFFFFF"/>
+                  </a:solidFill>
+                  <a:latin typeface="Calibri" panose="020F0502020204030204" pitchFamily="34" charset="0"/>
+                  <a:ea typeface="Times New Roman" panose="02020603050405020304" pitchFamily="18" charset="0"/>
+                  <a:cs typeface="Times New Roman" panose="02020603050405020304" pitchFamily="18" charset="0"/>
+                </a:rPr>
+                <a:t/>
               </a:r>
               <a:r>
                 <a:rPr lang="pt-BR" sz="1400" dirty="0">
@@ -32807,7 +33073,19 @@
                   <a:ea typeface="Times New Roman" panose="02020603050405020304" pitchFamily="18" charset="0"/>
                   <a:cs typeface="Times New Roman" panose="02020603050405020304" pitchFamily="18" charset="0"/>
                 </a:rPr>
-                <a:t>Ermöglichung eines nachhaltigen Wachstums ausgewählter Naturrohstoffsektoren, die regionale und globale komparative Vorteile ausschöpfen </a:t>
+                <a:t>Ermöglichung eines nachhaltigen Wachstums ausgewählter Naturrohstoffsektoren, die regionale und globale komparative Vorteile ausschöpfen</a:t>
+              </a:r>
+              <a:br/>
+              <a:r>
+                <a:rPr lang="en-US" sz="1400" b="1" dirty="0">
+                  <a:solidFill>
+                    <a:srgbClr val="FFFFFF"/>
+                  </a:solidFill>
+                  <a:latin typeface="Calibri" panose="020F0502020204030204" pitchFamily="34" charset="0"/>
+                  <a:ea typeface="Times New Roman" panose="02020603050405020304" pitchFamily="18" charset="0"/>
+                  <a:cs typeface="Times New Roman" panose="02020603050405020304" pitchFamily="18" charset="0"/>
+                </a:rPr>
+                <a:t/>
               </a:r>
               <a:r>
                 <a:rPr lang="pt-BR" sz="1400" dirty="0">
@@ -33159,7 +33437,23 @@
                 <a:latin typeface="Arial"/>
                 <a:cs typeface="Times New Roman"/>
               </a:rPr>
-              <a:t>CPF 2023-2027: Bestrebungen und Ziele </a:t>
+              <a:t>CPF 2023-2027: Bestrebungen und Ziele</a:t>
+            </a:r>
+            <a:br/>
+            <a:r>
+              <a:rPr lang="en-US" b="1" dirty="0">
+                <a:latin typeface="Arial"/>
+                <a:cs typeface="Times New Roman"/>
+              </a:rPr>
+              <a:t/>
+            </a:r>
+            <a:br/>
+            <a:r>
+              <a:rPr lang="en-US" b="1" dirty="0">
+                <a:latin typeface="Arial"/>
+                <a:cs typeface="Times New Roman"/>
+              </a:rPr>
+              <a:t/>
             </a:r>
             <a:endParaRPr lang="pt" i="1" dirty="0">
               <a:highlight>
@@ -33624,7 +33918,23 @@
                 <a:latin typeface="Arial"/>
                 <a:cs typeface="Times New Roman"/>
               </a:rPr>
-              <a:t>CPF-Vorschlag 2023-2027: Ziele und Bestrebungen   </a:t>
+              <a:t>CPF-Vorschlag 2023-2027: Ziele und Bestrebungen  </a:t>
+            </a:r>
+            <a:br/>
+            <a:r>
+              <a:rPr lang="en-US" b="1" dirty="0">
+                <a:latin typeface="Arial"/>
+                <a:cs typeface="Times New Roman"/>
+              </a:rPr>
+              <a:t/>
+            </a:r>
+            <a:br/>
+            <a:r>
+              <a:rPr lang="en-US" b="1" dirty="0">
+                <a:latin typeface="Arial"/>
+                <a:cs typeface="Times New Roman"/>
+              </a:rPr>
+              <a:t/>
             </a:r>
             <a:endParaRPr lang="pt" sz="2000" i="1" dirty="0">
               <a:highlight>
@@ -33879,7 +34189,55 @@
                 <a:ea typeface="Times New Roman"/>
                 <a:cs typeface="Times New Roman"/>
               </a:rPr>
-              <a:t>REGIERUNGSPROGRAMME (ENDE-Pfeiler) </a:t>
+              <a:t>REGIERUNGSPROGRAMME</a:t>
+            </a:r>
+            <a:br/>
+            <a:r>
+              <a:rPr lang="en-US" sz="1000" b="1">
+                <a:solidFill>
+                  <a:srgbClr val="000000"/>
+                </a:solidFill>
+                <a:latin typeface="Calibri"/>
+                <a:ea typeface="Times New Roman"/>
+                <a:cs typeface="Times New Roman"/>
+              </a:rPr>
+              <a:t>(ENDE-Pfeiler)</a:t>
+            </a:r>
+            <a:br/>
+            <a:r>
+              <a:rPr lang="en-US" sz="1000" b="1">
+                <a:solidFill>
+                  <a:srgbClr val="000000"/>
+                </a:solidFill>
+                <a:latin typeface="Calibri"/>
+                <a:ea typeface="Times New Roman"/>
+                <a:cs typeface="Times New Roman"/>
+              </a:rPr>
+              <a:t/>
+            </a:r>
+            <a:br/>
+            <a:r>
+              <a:rPr lang="en-US" sz="1000" b="1">
+                <a:solidFill>
+                  <a:srgbClr val="000000"/>
+                </a:solidFill>
+                <a:latin typeface="Calibri"/>
+                <a:ea typeface="Times New Roman"/>
+                <a:cs typeface="Times New Roman"/>
+              </a:rPr>
+              <a:t/>
+            </a:r>
+            <a:br/>
+            <a:r>
+              <a:rPr lang="en-US" sz="1000" b="1">
+                <a:solidFill>
+                  <a:srgbClr val="000000"/>
+                </a:solidFill>
+                <a:latin typeface="Calibri"/>
+                <a:ea typeface="Times New Roman"/>
+                <a:cs typeface="Times New Roman"/>
+              </a:rPr>
+              <a:t/>
             </a:r>
             <a:endParaRPr kumimoji="0" lang="en-US" altLang="zh-CN" sz="1800" b="0" i="0" u="none" strike="noStrike" cap="none" normalizeH="0" baseline="0" dirty="0">
               <a:ln>
@@ -33949,7 +34307,43 @@
                 <a:ea typeface="Times New Roman" panose="02020603050405020304" pitchFamily="18" charset="0"/>
                 <a:cs typeface="Times New Roman" panose="02020603050405020304" pitchFamily="18" charset="0"/>
               </a:rPr>
-              <a:t>  Soziale Transformation </a:t>
+              <a:t> </a:t>
+            </a:r>
+            <a:br/>
+            <a:r>
+              <a:rPr lang="en-US" altLang="zh-CN" sz="900" b="1" dirty="0">
+                <a:latin typeface="Calibri" panose="020F0502020204030204" pitchFamily="34" charset="0"/>
+                <a:ea typeface="Times New Roman" panose="02020603050405020304" pitchFamily="18" charset="0"/>
+                <a:cs typeface="Times New Roman" panose="02020603050405020304" pitchFamily="18" charset="0"/>
+              </a:rPr>
+              <a:t>Soziale Transformation</a:t>
+            </a:r>
+            <a:br/>
+            <a:r>
+              <a:rPr lang="en-US" altLang="zh-CN" sz="900" b="1" dirty="0">
+                <a:latin typeface="Calibri" panose="020F0502020204030204" pitchFamily="34" charset="0"/>
+                <a:ea typeface="Times New Roman" panose="02020603050405020304" pitchFamily="18" charset="0"/>
+                <a:cs typeface="Times New Roman" panose="02020603050405020304" pitchFamily="18" charset="0"/>
+              </a:rPr>
+              <a:t/>
+            </a:r>
+            <a:br/>
+            <a:r>
+              <a:rPr lang="en-US" altLang="zh-CN" sz="900" b="1" dirty="0">
+                <a:latin typeface="Calibri" panose="020F0502020204030204" pitchFamily="34" charset="0"/>
+                <a:ea typeface="Times New Roman" panose="02020603050405020304" pitchFamily="18" charset="0"/>
+                <a:cs typeface="Times New Roman" panose="02020603050405020304" pitchFamily="18" charset="0"/>
+              </a:rPr>
+              <a:t/>
+            </a:r>
+            <a:br/>
+            <a:r>
+              <a:rPr lang="en-US" altLang="zh-CN" sz="900" b="1" dirty="0">
+                <a:latin typeface="Calibri" panose="020F0502020204030204" pitchFamily="34" charset="0"/>
+                <a:ea typeface="Times New Roman" panose="02020603050405020304" pitchFamily="18" charset="0"/>
+                <a:cs typeface="Times New Roman" panose="02020603050405020304" pitchFamily="18" charset="0"/>
+              </a:rPr>
+              <a:t/>
             </a:r>
             <a:endParaRPr kumimoji="0" lang="en-US" altLang="zh-CN" sz="1800" b="0" i="0" u="none" strike="noStrike" cap="none" normalizeH="0" baseline="0" dirty="0">
               <a:ln>
@@ -34019,7 +34413,43 @@
                 <a:ea typeface="Times New Roman" panose="02020603050405020304" pitchFamily="18" charset="0"/>
                 <a:cs typeface="Times New Roman" panose="02020603050405020304" pitchFamily="18" charset="0"/>
               </a:rPr>
-              <a:t> Wirtschaftliche Transformation </a:t>
+              <a:t/>
+            </a:r>
+            <a:br/>
+            <a:r>
+              <a:rPr lang="en-US" altLang="zh-CN" sz="900" b="1" dirty="0">
+                <a:latin typeface="Calibri" pitchFamily="34" charset="0"/>
+                <a:ea typeface="Times New Roman" panose="02020603050405020304" pitchFamily="18" charset="0"/>
+                <a:cs typeface="Times New Roman" panose="02020603050405020304" pitchFamily="18" charset="0"/>
+              </a:rPr>
+              <a:t>Wirtschaftliche Transformation</a:t>
+            </a:r>
+            <a:br/>
+            <a:r>
+              <a:rPr lang="en-US" altLang="zh-CN" sz="900" b="1" dirty="0">
+                <a:latin typeface="Calibri" pitchFamily="34" charset="0"/>
+                <a:ea typeface="Times New Roman" panose="02020603050405020304" pitchFamily="18" charset="0"/>
+                <a:cs typeface="Times New Roman" panose="02020603050405020304" pitchFamily="18" charset="0"/>
+              </a:rPr>
+              <a:t/>
+            </a:r>
+            <a:br/>
+            <a:r>
+              <a:rPr lang="en-US" altLang="zh-CN" sz="900" b="1" dirty="0">
+                <a:latin typeface="Calibri" pitchFamily="34" charset="0"/>
+                <a:ea typeface="Times New Roman" panose="02020603050405020304" pitchFamily="18" charset="0"/>
+                <a:cs typeface="Times New Roman" panose="02020603050405020304" pitchFamily="18" charset="0"/>
+              </a:rPr>
+              <a:t/>
+            </a:r>
+            <a:br/>
+            <a:r>
+              <a:rPr lang="en-US" altLang="zh-CN" sz="900" b="1" dirty="0">
+                <a:latin typeface="Calibri" pitchFamily="34" charset="0"/>
+                <a:ea typeface="Times New Roman" panose="02020603050405020304" pitchFamily="18" charset="0"/>
+                <a:cs typeface="Times New Roman" panose="02020603050405020304" pitchFamily="18" charset="0"/>
+              </a:rPr>
+              <a:t/>
             </a:r>
             <a:endParaRPr kumimoji="0" lang="en-US" altLang="zh-CN" sz="1800" b="0" i="0" u="none" strike="noStrike" cap="none" normalizeH="0" baseline="0" dirty="0">
               <a:ln>
@@ -34089,9 +34519,43 @@
                 <a:ea typeface="Times New Roman" panose="02020603050405020304" pitchFamily="18" charset="0"/>
                 <a:cs typeface="Times New Roman" panose="02020603050405020304" pitchFamily="18" charset="0"/>
               </a:rPr>
-              <a:t>
-Governance
-</a:t>
+              <a:t/>
+            </a:r>
+            <a:br/>
+            <a:r>
+              <a:rPr lang="en-US" altLang="zh-CN" sz="900" b="1" dirty="0">
+                <a:latin typeface="Calibri" panose="020F0502020204030204" pitchFamily="34" charset="0"/>
+                <a:ea typeface="Times New Roman" panose="02020603050405020304" pitchFamily="18" charset="0"/>
+                <a:cs typeface="Times New Roman" panose="02020603050405020304" pitchFamily="18" charset="0"/>
+              </a:rPr>
+              <a:t>Governance</a:t>
+            </a:r>
+            <a:br/>
+            <a:r>
+              <a:rPr lang="en-US" altLang="zh-CN" sz="900" b="1" dirty="0">
+                <a:latin typeface="Calibri" panose="020F0502020204030204" pitchFamily="34" charset="0"/>
+                <a:ea typeface="Times New Roman" panose="02020603050405020304" pitchFamily="18" charset="0"/>
+                <a:cs typeface="Times New Roman" panose="02020603050405020304" pitchFamily="18" charset="0"/>
+              </a:rPr>
+              <a:t/>
+            </a:r>
+            <a:br/>
+            <a:r>
+              <a:rPr lang="en-US" altLang="zh-CN" sz="900" b="1" dirty="0">
+                <a:latin typeface="Calibri" panose="020F0502020204030204" pitchFamily="34" charset="0"/>
+                <a:ea typeface="Times New Roman" panose="02020603050405020304" pitchFamily="18" charset="0"/>
+                <a:cs typeface="Times New Roman" panose="02020603050405020304" pitchFamily="18" charset="0"/>
+              </a:rPr>
+              <a:t/>
+            </a:r>
+            <a:br/>
+            <a:r>
+              <a:rPr lang="en-US" altLang="zh-CN" sz="900" b="1" dirty="0">
+                <a:latin typeface="Calibri" panose="020F0502020204030204" pitchFamily="34" charset="0"/>
+                <a:ea typeface="Times New Roman" panose="02020603050405020304" pitchFamily="18" charset="0"/>
+                <a:cs typeface="Times New Roman" panose="02020603050405020304" pitchFamily="18" charset="0"/>
+              </a:rPr>
+              <a:t/>
             </a:r>
             <a:endParaRPr kumimoji="0" lang="en-US" altLang="zh-CN" sz="1800" b="0" i="0" u="none" strike="noStrike" cap="none" normalizeH="0" baseline="0" dirty="0">
               <a:ln>
@@ -34164,7 +34628,31 @@
                 <a:ea typeface="Times New Roman"/>
                 <a:cs typeface="Times New Roman"/>
               </a:rPr>
-              <a:t> Umwelt/Natürliche Ressourcen (Kreislaufwirtschaft) </a:t>
+              <a:t> Umwelt/Natürliche Ressourcen (Kreislaufwirtschaft)</a:t>
+            </a:r>
+            <a:br/>
+            <a:r>
+              <a:rPr lang="en-US" sz="900" b="1" dirty="0">
+                <a:solidFill>
+                  <a:srgbClr val="000000"/>
+                </a:solidFill>
+                <a:latin typeface="Calibri"/>
+                <a:ea typeface="Times New Roman"/>
+                <a:cs typeface="Times New Roman"/>
+              </a:rPr>
+              <a:t/>
+            </a:r>
+            <a:br/>
+            <a:r>
+              <a:rPr lang="en-US" sz="900" b="1" dirty="0">
+                <a:solidFill>
+                  <a:srgbClr val="000000"/>
+                </a:solidFill>
+                <a:latin typeface="Calibri"/>
+                <a:ea typeface="Times New Roman"/>
+                <a:cs typeface="Times New Roman"/>
+              </a:rPr>
+              <a:t/>
             </a:r>
             <a:endParaRPr kumimoji="0" lang="en-US" altLang="zh-CN" sz="1800" b="0" i="0" u="none" strike="noStrike" cap="none" normalizeH="0" baseline="0" dirty="0">
               <a:ln>
@@ -34407,7 +34895,31 @@
                 <a:ea typeface="Times New Roman"/>
                 <a:cs typeface="Times New Roman"/>
               </a:rPr>
-              <a:t>ÜBERGEORDNETE ZIELE (HLO) </a:t>
+              <a:t>ÜBERGEORDNETE ZIELE (HLO)</a:t>
+            </a:r>
+            <a:br/>
+            <a:r>
+              <a:rPr lang="en-US" sz="1000" b="1" dirty="0">
+                <a:solidFill>
+                  <a:srgbClr val="000000"/>
+                </a:solidFill>
+                <a:latin typeface="Calibri"/>
+                <a:ea typeface="Times New Roman"/>
+                <a:cs typeface="Times New Roman"/>
+              </a:rPr>
+              <a:t/>
+            </a:r>
+            <a:br/>
+            <a:r>
+              <a:rPr lang="en-US" sz="1000" b="1" dirty="0">
+                <a:solidFill>
+                  <a:srgbClr val="000000"/>
+                </a:solidFill>
+                <a:latin typeface="Calibri"/>
+                <a:ea typeface="Times New Roman"/>
+                <a:cs typeface="Times New Roman"/>
+              </a:rPr>
+              <a:t/>
             </a:r>
             <a:endParaRPr kumimoji="0" lang="en-US" altLang="zh-CN" sz="1800" b="0" i="0" u="none" strike="noStrike" cap="none" normalizeH="0" baseline="0" dirty="0">
               <a:ln>
@@ -34509,7 +35021,31 @@
                 <a:ea typeface="Times New Roman"/>
                 <a:cs typeface="Times New Roman"/>
               </a:rPr>
-              <a:t>HLO 2: Zunahme inklusiver Beschäftigungsschaffung </a:t>
+              <a:t>HLO 2: Zunahme inklusiver Beschäftigungsschaffung</a:t>
+            </a:r>
+            <a:br/>
+            <a:r>
+              <a:rPr lang="en-US" sz="900" dirty="0">
+                <a:solidFill>
+                  <a:srgbClr val="000000"/>
+                </a:solidFill>
+                <a:latin typeface="Calibri"/>
+                <a:ea typeface="Times New Roman"/>
+                <a:cs typeface="Times New Roman"/>
+              </a:rPr>
+              <a:t/>
+            </a:r>
+            <a:br/>
+            <a:r>
+              <a:rPr lang="en-US" sz="900" dirty="0">
+                <a:solidFill>
+                  <a:srgbClr val="000000"/>
+                </a:solidFill>
+                <a:latin typeface="Calibri"/>
+                <a:ea typeface="Times New Roman"/>
+                <a:cs typeface="Times New Roman"/>
+              </a:rPr>
+              <a:t/>
             </a:r>
             <a:endParaRPr kumimoji="0" lang="en-US" altLang="zh-CN" sz="900" b="0" i="1" u="none" strike="noStrike" cap="none" normalizeH="0" baseline="0" dirty="0">
               <a:ln>
@@ -34611,7 +35147,31 @@
                 <a:ea typeface="Times New Roman"/>
                 <a:cs typeface="Times New Roman"/>
               </a:rPr>
-              <a:t>HLO3: Verbesserung des Humankapitals und Stärkung der Stellung der Frau </a:t>
+              <a:t>HLO3: Verbesserung des Humankapitals und Stärkung der Stellung der Frau</a:t>
+            </a:r>
+            <a:br/>
+            <a:r>
+              <a:rPr lang="en-US" sz="900" dirty="0">
+                <a:solidFill>
+                  <a:srgbClr val="000000"/>
+                </a:solidFill>
+                <a:latin typeface="Calibri"/>
+                <a:ea typeface="Times New Roman"/>
+                <a:cs typeface="Times New Roman"/>
+              </a:rPr>
+              <a:t/>
+            </a:r>
+            <a:br/>
+            <a:r>
+              <a:rPr lang="en-US" sz="900" dirty="0">
+                <a:solidFill>
+                  <a:srgbClr val="000000"/>
+                </a:solidFill>
+                <a:latin typeface="Calibri"/>
+                <a:ea typeface="Times New Roman"/>
+                <a:cs typeface="Times New Roman"/>
+              </a:rPr>
+              <a:t/>
             </a:r>
             <a:endParaRPr kumimoji="0" lang="en-US" altLang="zh-CN" sz="900" b="0" i="1" u="none" strike="noStrike" cap="none" normalizeH="0" baseline="0" dirty="0">
               <a:ln>
@@ -34766,7 +35326,31 @@
                 <a:ea typeface="Times New Roman"/>
                 <a:cs typeface="Times New Roman"/>
               </a:rPr>
-              <a:t>HLO 1: Inklusive Institutionen </a:t>
+              <a:t>HLO 1: Inklusive Institutionen</a:t>
+            </a:r>
+            <a:br/>
+            <a:r>
+              <a:rPr lang="en-US" sz="900" dirty="0">
+                <a:solidFill>
+                  <a:srgbClr val="000000"/>
+                </a:solidFill>
+                <a:latin typeface="Calibri"/>
+                <a:ea typeface="Times New Roman"/>
+                <a:cs typeface="Times New Roman"/>
+              </a:rPr>
+              <a:t/>
+            </a:r>
+            <a:br/>
+            <a:r>
+              <a:rPr lang="en-US" sz="900" dirty="0">
+                <a:solidFill>
+                  <a:srgbClr val="000000"/>
+                </a:solidFill>
+                <a:latin typeface="Calibri"/>
+                <a:ea typeface="Times New Roman"/>
+                <a:cs typeface="Times New Roman"/>
+              </a:rPr>
+              <a:t/>
             </a:r>
             <a:endParaRPr kumimoji="0" lang="en-US" altLang="zh-CN" sz="900" b="0" i="1" u="none" strike="noStrike" cap="none" normalizeH="0" baseline="0" dirty="0">
               <a:ln>
@@ -34976,7 +35560,31 @@
                 <a:ea typeface="Times New Roman"/>
                 <a:cs typeface="Times New Roman"/>
               </a:rPr>
-              <a:t>Ein langsamer, unausgewogener und unfinanzierter Dezentralisierungsprozess erschwert die Übertragung von Befugnissen auf lokale Regierungen. </a:t>
+              <a:t>Ein langsamer, unausgewogener und unfinanzierter Dezentralisierungsprozess erschwert die Übertragung von Befugnissen auf lokale Regierungen.</a:t>
+            </a:r>
+            <a:br/>
+            <a:r>
+              <a:rPr lang="en-US" sz="900" dirty="0">
+                <a:solidFill>
+                  <a:srgbClr val="000000"/>
+                </a:solidFill>
+                <a:latin typeface="Calibri"/>
+                <a:ea typeface="Times New Roman"/>
+                <a:cs typeface="Times New Roman"/>
+              </a:rPr>
+              <a:t/>
+            </a:r>
+            <a:br/>
+            <a:r>
+              <a:rPr lang="en-US" sz="900" dirty="0">
+                <a:solidFill>
+                  <a:srgbClr val="000000"/>
+                </a:solidFill>
+                <a:latin typeface="Calibri"/>
+                <a:ea typeface="Times New Roman"/>
+                <a:cs typeface="Times New Roman"/>
+              </a:rPr>
+              <a:t/>
             </a:r>
             <a:endParaRPr kumimoji="0" lang="en-US" altLang="zh-CN" sz="1800" b="0" i="0" u="none" strike="noStrike" cap="none" normalizeH="0" baseline="0" dirty="0">
               <a:ln>
@@ -35049,7 +35657,79 @@
                 <a:ea typeface="Times New Roman"/>
                 <a:cs typeface="Times New Roman"/>
               </a:rPr>
-              <a:t>1. Verbesserung des Wirtschaftsmanagements für die Schaffung nachhaltiger und resilienter Arbeitsplätze, bessere Umsetzungskapazität und geringeres Länderrisiko 2. Steigerung der Effektivität des öffentlichen Sektors für eine inklusive und transparente Leistungserbringung sowie nachhaltigere, resilientere und gerechtere Politiken  3. Stärkung der Koordination, der Politiken und der Kapazitäten für eine bessere Vorbereitung und Reaktion auf Naturkatastrophen, Katastrophen und andere multidimensionale Schocks </a:t>
+              <a:t>1. Verbesserung des Wirtschaftsmanagements für die Schaffung nachhaltiger und resilienter Arbeitsplätze, bessere Umsetzungskapazität und geringeres Länderrisiko</a:t>
+            </a:r>
+            <a:br/>
+            <a:r>
+              <a:rPr lang="en-US" sz="900" dirty="0">
+                <a:solidFill>
+                  <a:srgbClr val="000000"/>
+                </a:solidFill>
+                <a:latin typeface="Calibri"/>
+                <a:ea typeface="Times New Roman"/>
+                <a:cs typeface="Times New Roman"/>
+              </a:rPr>
+              <a:t>2. Steigerung der Effektivität des öffentlichen Sektors für eine inklusive und transparente Leistungserbringung sowie nachhaltigere, resilientere und gerechtere Politiken </a:t>
+            </a:r>
+            <a:br/>
+            <a:r>
+              <a:rPr lang="en-US" sz="900" dirty="0">
+                <a:solidFill>
+                  <a:srgbClr val="000000"/>
+                </a:solidFill>
+                <a:latin typeface="Calibri"/>
+                <a:ea typeface="Times New Roman"/>
+                <a:cs typeface="Times New Roman"/>
+              </a:rPr>
+              <a:t>3. Stärkung der Koordination, der Politiken und der Kapazitäten für eine bessere Vorbereitung und Reaktion auf Naturkatastrophen, Katastrophen und andere multidimensionale Schocks</a:t>
+            </a:r>
+            <a:br/>
+            <a:r>
+              <a:rPr lang="en-US" sz="900" dirty="0">
+                <a:solidFill>
+                  <a:srgbClr val="000000"/>
+                </a:solidFill>
+                <a:latin typeface="Calibri"/>
+                <a:ea typeface="Times New Roman"/>
+                <a:cs typeface="Times New Roman"/>
+              </a:rPr>
+              <a:t/>
+            </a:r>
+            <a:br/>
+            <a:r>
+              <a:rPr lang="en-US" sz="900" dirty="0">
+                <a:solidFill>
+                  <a:srgbClr val="000000"/>
+                </a:solidFill>
+                <a:latin typeface="Calibri"/>
+                <a:ea typeface="Times New Roman"/>
+                <a:cs typeface="Times New Roman"/>
+              </a:rPr>
+              <a:t/>
+            </a:r>
+            <a:br/>
+            <a:r>
+              <a:rPr lang="en-US" sz="900" dirty="0">
+                <a:solidFill>
+                  <a:srgbClr val="000000"/>
+                </a:solidFill>
+                <a:latin typeface="Calibri"/>
+                <a:ea typeface="Times New Roman"/>
+                <a:cs typeface="Times New Roman"/>
+              </a:rPr>
+              <a:t/>
+            </a:r>
+            <a:br/>
+            <a:r>
+              <a:rPr lang="en-US" sz="900" dirty="0">
+                <a:solidFill>
+                  <a:srgbClr val="000000"/>
+                </a:solidFill>
+                <a:latin typeface="Calibri"/>
+                <a:ea typeface="Times New Roman"/>
+                <a:cs typeface="Times New Roman"/>
+              </a:rPr>
+              <a:t/>
             </a:r>
             <a:endParaRPr kumimoji="0" lang="en-US" altLang="zh-CN" sz="1800" b="0" i="0" u="none" strike="noStrike" cap="none" normalizeH="0" baseline="0" dirty="0">
               <a:ln>
@@ -35122,7 +35802,79 @@
                 <a:ea typeface="Times New Roman"/>
                 <a:cs typeface="Times New Roman"/>
               </a:rPr>
-              <a:t>7. Nachhaltige Verbesserung wichtiger Gesundheits- und Bildungsergebnisse 8. Steigerung der Effizienz und effektiven Abdeckung integrierter und nachhaltiger sozialer Dienstleistungen 9. Verbesserung des Zugangs zu Dienstleistungen zur Verhütung von Teenagerschwangerschaften und zur Förderung der Teilhabe von Frauen  </a:t>
+              <a:t>7. Nachhaltige Verbesserung wichtiger Gesundheits- und Bildungsergebnisse</a:t>
+            </a:r>
+            <a:br/>
+            <a:r>
+              <a:rPr lang="en-US" sz="900" dirty="0">
+                <a:solidFill>
+                  <a:srgbClr val="000000"/>
+                </a:solidFill>
+                <a:latin typeface="Calibri"/>
+                <a:ea typeface="Times New Roman"/>
+                <a:cs typeface="Times New Roman"/>
+              </a:rPr>
+              <a:t>8. Steigerung der Effizienz und effektiven Abdeckung integrierter und nachhaltiger sozialer Dienstleistungen</a:t>
+            </a:r>
+            <a:br/>
+            <a:r>
+              <a:rPr lang="en-US" sz="900" dirty="0">
+                <a:solidFill>
+                  <a:srgbClr val="000000"/>
+                </a:solidFill>
+                <a:latin typeface="Calibri"/>
+                <a:ea typeface="Times New Roman"/>
+                <a:cs typeface="Times New Roman"/>
+              </a:rPr>
+              <a:t>9. Verbesserung des Zugangs zu Dienstleistungen zur Verhütung von Teenagerschwangerschaften und zur Förderung der Teilhabe von Frauen </a:t>
+            </a:r>
+            <a:br/>
+            <a:r>
+              <a:rPr lang="en-US" sz="900" dirty="0">
+                <a:solidFill>
+                  <a:srgbClr val="000000"/>
+                </a:solidFill>
+                <a:latin typeface="Calibri"/>
+                <a:ea typeface="Times New Roman"/>
+                <a:cs typeface="Times New Roman"/>
+              </a:rPr>
+              <a:t/>
+            </a:r>
+            <a:br/>
+            <a:r>
+              <a:rPr lang="en-US" sz="900" dirty="0">
+                <a:solidFill>
+                  <a:srgbClr val="000000"/>
+                </a:solidFill>
+                <a:latin typeface="Calibri"/>
+                <a:ea typeface="Times New Roman"/>
+                <a:cs typeface="Times New Roman"/>
+              </a:rPr>
+              <a:t/>
+            </a:r>
+            <a:br/>
+            <a:r>
+              <a:rPr lang="en-US" sz="900" dirty="0">
+                <a:solidFill>
+                  <a:srgbClr val="000000"/>
+                </a:solidFill>
+                <a:latin typeface="Calibri"/>
+                <a:ea typeface="Times New Roman"/>
+                <a:cs typeface="Times New Roman"/>
+              </a:rPr>
+              <a:t/>
+            </a:r>
+            <a:br/>
+            <a:r>
+              <a:rPr lang="en-US" sz="900" dirty="0">
+                <a:solidFill>
+                  <a:srgbClr val="000000"/>
+                </a:solidFill>
+                <a:latin typeface="Calibri"/>
+                <a:ea typeface="Times New Roman"/>
+                <a:cs typeface="Times New Roman"/>
+              </a:rPr>
+              <a:t/>
             </a:r>
             <a:endParaRPr kumimoji="0" lang="en-US" altLang="zh-CN" sz="1800" b="0" i="0" u="none" strike="noStrike" cap="none" normalizeH="0" baseline="0" dirty="0">
               <a:ln>
@@ -35279,7 +36031,79 @@
                 <a:ea typeface="Times New Roman"/>
                 <a:cs typeface="Times New Roman"/>
               </a:rPr>
-              <a:t>4. Ermöglichung eines nachhaltigen Wachstums ausgewählter Naturrohstoffsektoren durch Ausschöpfung regionaler und globaler komparativer Vorteile 5. Förderung des Produktivitätswachstums in ausgewählten arbeitsintensiven Branchen  6. Ausweitung zugänglicher, zuverlässiger und klimaresilienter Dienstleistungen zur Verbesserung des Zugangs für die am stärksten benachteiligten Bevölkerungsgruppen, Stärkung der nachhaltigen Urbanisierung und wirtschaftlichen Agglomeration </a:t>
+              <a:t>4. Ermöglichung eines nachhaltigen Wachstums ausgewählter Naturrohstoffsektoren durch Ausschöpfung regionaler und globaler komparativer Vorteile</a:t>
+            </a:r>
+            <a:br/>
+            <a:r>
+              <a:rPr lang="en-US" sz="900" dirty="0">
+                <a:solidFill>
+                  <a:srgbClr val="000000"/>
+                </a:solidFill>
+                <a:latin typeface="Calibri"/>
+                <a:ea typeface="Times New Roman"/>
+                <a:cs typeface="Times New Roman"/>
+              </a:rPr>
+              <a:t>5. Förderung des Produktivitätswachstums in ausgewählten arbeitsintensiven Branchen </a:t>
+            </a:r>
+            <a:br/>
+            <a:r>
+              <a:rPr lang="en-US" sz="900" dirty="0">
+                <a:solidFill>
+                  <a:srgbClr val="000000"/>
+                </a:solidFill>
+                <a:latin typeface="Calibri"/>
+                <a:ea typeface="Times New Roman"/>
+                <a:cs typeface="Times New Roman"/>
+              </a:rPr>
+              <a:t>6. Ausweitung zugänglicher, zuverlässiger und klimaresilienter Dienstleistungen zur Verbesserung des Zugangs für die am stärksten benachteiligten Bevölkerungsgruppen, Stärkung der nachhaltigen Urbanisierung und wirtschaftlichen Agglomeration</a:t>
+            </a:r>
+            <a:br/>
+            <a:r>
+              <a:rPr lang="en-US" sz="900" dirty="0">
+                <a:solidFill>
+                  <a:srgbClr val="000000"/>
+                </a:solidFill>
+                <a:latin typeface="Calibri"/>
+                <a:ea typeface="Times New Roman"/>
+                <a:cs typeface="Times New Roman"/>
+              </a:rPr>
+              <a:t/>
+            </a:r>
+            <a:br/>
+            <a:r>
+              <a:rPr lang="en-US" sz="900" dirty="0">
+                <a:solidFill>
+                  <a:srgbClr val="000000"/>
+                </a:solidFill>
+                <a:latin typeface="Calibri"/>
+                <a:ea typeface="Times New Roman"/>
+                <a:cs typeface="Times New Roman"/>
+              </a:rPr>
+              <a:t/>
+            </a:r>
+            <a:br/>
+            <a:r>
+              <a:rPr lang="en-US" sz="900" dirty="0">
+                <a:solidFill>
+                  <a:srgbClr val="000000"/>
+                </a:solidFill>
+                <a:latin typeface="Calibri"/>
+                <a:ea typeface="Times New Roman"/>
+                <a:cs typeface="Times New Roman"/>
+              </a:rPr>
+              <a:t/>
+            </a:r>
+            <a:br/>
+            <a:r>
+              <a:rPr lang="en-US" sz="900" dirty="0">
+                <a:solidFill>
+                  <a:srgbClr val="000000"/>
+                </a:solidFill>
+                <a:latin typeface="Calibri"/>
+                <a:ea typeface="Times New Roman"/>
+                <a:cs typeface="Times New Roman"/>
+              </a:rPr>
+              <a:t/>
             </a:r>
             <a:endParaRPr kumimoji="0" lang="en-US" altLang="zh-CN" sz="1800" b="0" i="0" u="none" strike="noStrike" cap="none" normalizeH="0" baseline="0" dirty="0">
               <a:ln>
@@ -35467,7 +36291,31 @@
                 <a:ea typeface="Times New Roman"/>
                 <a:cs typeface="Times New Roman"/>
               </a:rPr>
-              <a:t>Die Bedingungen für Ausbildung, Regulierung und Märkte, die für das Wachstum, die Diversifizierung und die Beschäftigungsschaffung im Privatsektor entscheidend sind, sind unterentwickelt. </a:t>
+              <a:t>Die Bedingungen für Ausbildung, Regulierung und Märkte, die für das Wachstum, die Diversifizierung und die Beschäftigungsschaffung im Privatsektor entscheidend sind, sind unterentwickelt.</a:t>
+            </a:r>
+            <a:br/>
+            <a:r>
+              <a:rPr lang="en-US" sz="900" dirty="0">
+                <a:solidFill>
+                  <a:srgbClr val="000000"/>
+                </a:solidFill>
+                <a:latin typeface="Calibri"/>
+                <a:ea typeface="Times New Roman"/>
+                <a:cs typeface="Times New Roman"/>
+              </a:rPr>
+              <a:t/>
+            </a:r>
+            <a:br/>
+            <a:r>
+              <a:rPr lang="en-US" sz="900" dirty="0">
+                <a:solidFill>
+                  <a:srgbClr val="000000"/>
+                </a:solidFill>
+                <a:latin typeface="Calibri"/>
+                <a:ea typeface="Times New Roman"/>
+                <a:cs typeface="Times New Roman"/>
+              </a:rPr>
+              <a:t/>
             </a:r>
             <a:endParaRPr kumimoji="0" lang="en-US" altLang="zh-CN" sz="1800" b="0" i="0" u="none" strike="noStrike" cap="none" normalizeH="0" baseline="0" dirty="0">
               <a:ln>
@@ -36826,7 +37674,17 @@
             </a:br>
             <a:r>
               <a:rPr lang="en-US" sz="2400" dirty="0"/>
-              <a:t>Umsetzung des CPF 2023-2027: Priorisierung </a:t>
+              <a:t>Umsetzung des CPF 2023-2027: Priorisierung</a:t>
+            </a:r>
+            <a:br/>
+            <a:r>
+              <a:rPr lang="en-US" sz="2400" dirty="0"/>
+              <a:t/>
+            </a:r>
+            <a:br/>
+            <a:r>
+              <a:rPr lang="en-US" sz="2400" dirty="0"/>
+              <a:t/>
             </a:r>
             <a:endParaRPr lang="pt" sz="2400" b="0" i="1" u="none" strike="noStrike" dirty="0">
               <a:highlight>
@@ -37143,7 +38001,17 @@
             <a:pPr algn="ctr"/>
             <a:r>
               <a:rPr lang="en-US" sz="2400" dirty="0"/>
-              <a:t>CPF-Umsetzung 2023-2027: Priorisierung </a:t>
+              <a:t>CPF-Umsetzung 2023-2027: Priorisierung</a:t>
+            </a:r>
+            <a:br/>
+            <a:r>
+              <a:rPr lang="en-US" sz="2400" dirty="0"/>
+              <a:t/>
+            </a:r>
+            <a:br/>
+            <a:r>
+              <a:rPr lang="en-US" sz="2400" dirty="0"/>
+              <a:t/>
             </a:r>
             <a:endParaRPr lang="pt" sz="2400" b="1" i="0" u="none" strike="noStrike" dirty="0">
               <a:highlight>
@@ -37944,7 +38812,17 @@
             <a:pPr algn="ctr"/>
             <a:r>
               <a:rPr lang="en-US" sz="2400" dirty="0"/>
-              <a:t>Potenziell verfügbare Ressourcen  </a:t>
+              <a:t>Potenziell verfügbare Ressourcen </a:t>
+            </a:r>
+            <a:br/>
+            <a:r>
+              <a:rPr lang="en-US" sz="2400" dirty="0"/>
+              <a:t/>
+            </a:r>
+            <a:br/>
+            <a:r>
+              <a:rPr lang="en-US" sz="2400" dirty="0"/>
+              <a:t/>
             </a:r>
           </a:p>
         </p:txBody>
@@ -38127,7 +39005,17 @@
             <a:pPr algn="ctr"/>
             <a:r>
               <a:rPr lang="en-US" dirty="0"/>
-              <a:t>HLO 1: Inklusivere Institutionen </a:t>
+              <a:t>HLO 1: Inklusivere Institutionen</a:t>
+            </a:r>
+            <a:br/>
+            <a:r>
+              <a:rPr lang="en-US" dirty="0"/>
+              <a:t/>
+            </a:r>
+            <a:br/>
+            <a:r>
+              <a:rPr lang="en-US" dirty="0"/>
+              <a:t/>
             </a:r>
             <a:endParaRPr lang="pt-BR" dirty="0"/>
           </a:p>
@@ -38723,7 +39611,39 @@
                 <a:latin typeface="+mn-lt"/>
                 <a:cs typeface="Calibri" panose="020F0502020204030204" pitchFamily="34" charset="0"/>
               </a:rPr>
-              <a:t>Stärkung der Nachhaltigkeit von Investitionen in den Erdgas- und Bergbausektor durch Bewältigung negativer externer Effekte des Sektors und Nutzung positiver Rückwirkungen Steigerung der landwirtschaftlichen Produktivität  Stärkung des Managements natürlicher Ressourcen und Freisetzung privater Investitionen im Grünsektor, einschließlich Ökotourismus, Fischerei und Forstwirtschaft</a:t>
+              <a:t>Stärkung der Nachhaltigkeit von Investitionen in den Erdgas- und Bergbausektor durch Bewältigung negativer externer Effekte des Sektors und Nutzung positiver Rückwirkungen</a:t>
+            </a:r>
+            <a:br/>
+            <a:r>
+              <a:rPr lang="en-US" sz="1600" dirty="0">
+                <a:latin typeface="+mn-lt"/>
+                <a:cs typeface="Calibri" panose="020F0502020204030204" pitchFamily="34" charset="0"/>
+              </a:rPr>
+              <a:t>Steigerung der landwirtschaftlichen Produktivität </a:t>
+            </a:r>
+            <a:br/>
+            <a:r>
+              <a:rPr lang="en-US" sz="1600" dirty="0">
+                <a:latin typeface="+mn-lt"/>
+                <a:cs typeface="Calibri" panose="020F0502020204030204" pitchFamily="34" charset="0"/>
+              </a:rPr>
+              <a:t>Stärkung des Managements natürlicher Ressourcen und Freisetzung privater Investitionen im Grünsektor, einschließlich Ökotourismus, Fischerei und Forstwirtschaft</a:t>
+            </a:r>
+            <a:br/>
+            <a:r>
+              <a:rPr lang="en-US" sz="1600" dirty="0">
+                <a:latin typeface="+mn-lt"/>
+                <a:cs typeface="Calibri" panose="020F0502020204030204" pitchFamily="34" charset="0"/>
+              </a:rPr>
+              <a:t/>
+            </a:r>
+            <a:br/>
+            <a:r>
+              <a:rPr lang="en-US" sz="1600" dirty="0">
+                <a:latin typeface="+mn-lt"/>
+                <a:cs typeface="Calibri" panose="020F0502020204030204" pitchFamily="34" charset="0"/>
+              </a:rPr>
+              <a:t/>
             </a:r>
             <a:endParaRPr lang="en-US" sz="1600" b="1" dirty="0">
               <a:solidFill>
@@ -38857,7 +39777,85 @@
                 <a:latin typeface="+mn-lt"/>
                 <a:cs typeface="Calibri" panose="020F0502020204030204" pitchFamily="34" charset="0"/>
               </a:rPr>
-              <a:t> Ziel 6: Erschwingliche, zuverlässige und klimaresistente Dienstleistungen ausbauen, um den Zugang für Arme zu verbessern und eine nachhaltige Urbanisierung sowie wirtschaftliche Agglomeration zu fördern.  </a:t>
+              <a:t/>
+            </a:r>
+            <a:br/>
+            <a:r>
+              <a:rPr lang="en-US" sz="1600" b="1" dirty="0">
+                <a:solidFill>
+                  <a:schemeClr val="accent1">
+                    <a:lumMod val="75000"/>
+                  </a:schemeClr>
+                </a:solidFill>
+                <a:latin typeface="+mn-lt"/>
+                <a:cs typeface="Calibri" panose="020F0502020204030204" pitchFamily="34" charset="0"/>
+              </a:rPr>
+              <a:t>Während das bestehende Portfolio weiterhin Infrastrukturinvestitionen in ländlichen Gebieten finanziert, werden neue Maßnahmen auf Infrastrukturinvestitionen setzen, die Wachstum unterstützen können, unter anderem in den Bereichen Digitalwirtschaft und Straßen. </a:t>
+            </a:r>
+            <a:br/>
+            <a:r>
+              <a:rPr lang="en-US" sz="1600" b="1" dirty="0">
+                <a:solidFill>
+                  <a:schemeClr val="accent1">
+                    <a:lumMod val="75000"/>
+                  </a:schemeClr>
+                </a:solidFill>
+                <a:latin typeface="+mn-lt"/>
+                <a:cs typeface="Calibri" panose="020F0502020204030204" pitchFamily="34" charset="0"/>
+              </a:rPr>
+              <a:t/>
+            </a:r>
+            <a:br/>
+            <a:r>
+              <a:rPr lang="en-US" sz="1600" b="1" dirty="0">
+                <a:solidFill>
+                  <a:schemeClr val="accent1">
+                    <a:lumMod val="75000"/>
+                  </a:schemeClr>
+                </a:solidFill>
+                <a:latin typeface="+mn-lt"/>
+                <a:cs typeface="Calibri" panose="020F0502020204030204" pitchFamily="34" charset="0"/>
+              </a:rPr>
+              <a:t/>
+            </a:r>
+            <a:br/>
+            <a:r>
+              <a:rPr lang="en-US" sz="1600" b="1" dirty="0">
+                <a:solidFill>
+                  <a:schemeClr val="accent1">
+                    <a:lumMod val="75000"/>
+                  </a:schemeClr>
+                </a:solidFill>
+                <a:latin typeface="+mn-lt"/>
+                <a:cs typeface="Calibri" panose="020F0502020204030204" pitchFamily="34" charset="0"/>
+              </a:rPr>
+              <a:t/>
+            </a:r>
+            <a:br/>
+            <a:r>
+              <a:rPr lang="en-US" sz="1600" b="1" dirty="0">
+                <a:solidFill>
+                  <a:schemeClr val="accent1">
+                    <a:lumMod val="75000"/>
+                  </a:schemeClr>
+                </a:solidFill>
+                <a:latin typeface="+mn-lt"/>
+                <a:cs typeface="Calibri" panose="020F0502020204030204" pitchFamily="34" charset="0"/>
+              </a:rPr>
+              <a:t/>
+            </a:r>
+            <a:br/>
+            <a:r>
+              <a:rPr lang="en-US" sz="1600" b="1" dirty="0">
+                <a:solidFill>
+                  <a:schemeClr val="accent1">
+                    <a:lumMod val="75000"/>
+                  </a:schemeClr>
+                </a:solidFill>
+                <a:latin typeface="+mn-lt"/>
+                <a:cs typeface="Calibri" panose="020F0502020204030204" pitchFamily="34" charset="0"/>
+              </a:rPr>
+              <a:t/>
             </a:r>
             <a:r>
               <a:rPr lang="en-US" sz="1600" dirty="0">
@@ -38867,7 +39865,8 @@
                 <a:latin typeface="+mn-lt"/>
                 <a:cs typeface="Calibri" panose="020F0502020204030204" pitchFamily="34" charset="0"/>
               </a:rPr>
-              <a:t>Während das bestehende Portfolio weiterhin Infrastrukturinvestitionen in ländlichen Gebieten finanziert, werden neue Maßnahmen auf Infrastrukturinvestitionen setzen, die Wachstum unterstützen können, unter anderem in den Bereichen Digitalwirtschaft und Straßen.  </a:t>
+              <a:t>While the existing portfolio continues to finance infrastructure investments in rural areas, new activities will emphasize infrastructure investments that can support growth, including in the areas of the digital economy and roads. 
+</a:t>
             </a:r>
           </a:p>
           <a:p>
@@ -39150,15 +40149,9 @@
                 <a:latin typeface="+mn-lt"/>
                 <a:cs typeface="Calibri" panose="020F0502020204030204" pitchFamily="34" charset="0"/>
               </a:rPr>
-              <a:t>Ziel 8: Steigerung der Ausgabeneffizienz und effektiven Abdeckung integrierter Sozialdienste.  </a:t>
-            </a:r>
-            <a:r>
-              <a:rPr lang="en-US" sz="1600" dirty="0">
-                <a:latin typeface="+mn-lt"/>
-                <a:cs typeface="Calibri" panose="020F0502020204030204" pitchFamily="34" charset="0"/>
-              </a:rPr>
-              <a:t>Die nächste Sozialschutzkommission wird den Fokus der Sozialen Sicherungsprogramme stärken, um das Kosten-Nutzen-Verhältnis zu verbessern, einschließlich der Förderung der Konsolidierung der Sozialpolitik, der Sicherstellung von Grundversorgungsmechanismen sowie von Beschäftigungsverbindungen und Arbeitskräftebeteiligung und der Unterstützung einer nationalen schocksensitiven Sozialschutzstrategie.  Das Hauptziel besteht darin, eine fiskalisch nachhaltige Struktur für die Integration der Sozialpolitik zur Akkumulation von Humankapital und zur Reduzierung extremer Armut zu schaffen und gleichzeitig Frauen zu stärken und Resilienz gegenüber Schocks zu gewährleisten</a:t>
-            </a:r>
+              <a:t>Ziel 8: Steigerung der Ausgabeneffizienz und effektiven Abdeckung integrierter Sozialdienste. </a:t>
+            </a:r>
+            <a:br/>
             <a:r>
               <a:rPr lang="en-US" sz="1600" b="1" dirty="0">
                 <a:solidFill>
@@ -39169,28 +40162,141 @@
                 <a:latin typeface="+mn-lt"/>
                 <a:cs typeface="Calibri" panose="020F0502020204030204" pitchFamily="34" charset="0"/>
               </a:rPr>
-              <a:t> Ziel 9: Verbesserung des Zugangs zu Dienstleistungen zur Prävention von Teenagerschwangerschaften und zur Förderung der wirtschaftlichen Beteiligung von Frauen. </a:t>
+              <a:t>Die nächste Sozialschutzkommission wird den Fokus der Sozialen Sicherungsprogramme stärken, um das Kosten-Nutzen-Verhältnis zu verbessern, einschließlich der Förderung der Konsolidierung der Sozialpolitik, der Sicherstellung von Grundversorgungsmechanismen sowie von Beschäftigungsverbindungen und Arbeitskräftebeteiligung und der Unterstützung einer nationalen schocksensitiven Sozialschutzstrategie. </a:t>
+            </a:r>
+            <a:br/>
+            <a:r>
+              <a:rPr lang="en-US" sz="1600" b="1" dirty="0">
+                <a:solidFill>
+                  <a:schemeClr val="accent1">
+                    <a:lumMod val="75000"/>
+                  </a:schemeClr>
+                </a:solidFill>
+                <a:latin typeface="+mn-lt"/>
+                <a:cs typeface="Calibri" panose="020F0502020204030204" pitchFamily="34" charset="0"/>
+              </a:rPr>
+              <a:t/>
+            </a:r>
+            <a:br/>
+            <a:r>
+              <a:rPr lang="en-US" sz="1600" b="1" dirty="0">
+                <a:solidFill>
+                  <a:schemeClr val="accent1">
+                    <a:lumMod val="75000"/>
+                  </a:schemeClr>
+                </a:solidFill>
+                <a:latin typeface="+mn-lt"/>
+                <a:cs typeface="Calibri" panose="020F0502020204030204" pitchFamily="34" charset="0"/>
+              </a:rPr>
+              <a:t>Mosambik hat die vierthöchste Geburtenrate bei Jugendlichen und die zehnthohe Rate von Kinderehen weltweit, und diese Raten steigen statt zu sinken, was zu geringen Qualifikationen und geringer Produktivität von Frauen auf dem </a:t>
+            </a:r>
+            <a:br/>
+            <a:r>
+              <a:rPr lang="en-US" sz="1600" b="1" dirty="0">
+                <a:solidFill>
+                  <a:schemeClr val="accent1">
+                    <a:lumMod val="75000"/>
+                  </a:schemeClr>
+                </a:solidFill>
+                <a:latin typeface="+mn-lt"/>
+                <a:cs typeface="Calibri" panose="020F0502020204030204" pitchFamily="34" charset="0"/>
+              </a:rPr>
+              <a:t>Arbeits</a:t>
+            </a:r>
+            <a:br/>
+            <a:r>
+              <a:rPr lang="en-US" sz="1600" b="1" dirty="0">
+                <a:solidFill>
+                  <a:schemeClr val="accent1">
+                    <a:lumMod val="75000"/>
+                  </a:schemeClr>
+                </a:solidFill>
+                <a:latin typeface="+mn-lt"/>
+                <a:cs typeface="Calibri" panose="020F0502020204030204" pitchFamily="34" charset="0"/>
+              </a:rPr>
+              <a:t>markt beiträgt.</a:t>
+            </a:r>
+            <a:br/>
+            <a:r>
+              <a:rPr lang="en-US" sz="1600" b="1" dirty="0">
+                <a:solidFill>
+                  <a:schemeClr val="accent1">
+                    <a:lumMod val="75000"/>
+                  </a:schemeClr>
+                </a:solidFill>
+                <a:latin typeface="+mn-lt"/>
+                <a:cs typeface="Calibri" panose="020F0502020204030204" pitchFamily="34" charset="0"/>
+              </a:rPr>
+              <a:t/>
+            </a:r>
+            <a:br/>
+            <a:r>
+              <a:rPr lang="en-US" sz="1600" b="1" dirty="0">
+                <a:solidFill>
+                  <a:schemeClr val="accent1">
+                    <a:lumMod val="75000"/>
+                  </a:schemeClr>
+                </a:solidFill>
+                <a:latin typeface="+mn-lt"/>
+                <a:cs typeface="Calibri" panose="020F0502020204030204" pitchFamily="34" charset="0"/>
+              </a:rPr>
+              <a:t>Der CPF wird sich auf Fragen der Kinderehe, Teenagerschwangerschaft und die Deckung des ungedeckten Bedarfs an Familienplanung, den Gymnasialbesuch von Mädchen und den Übergang in den Arbeitsmarkt konzentrieren – unter anderem. </a:t>
+            </a:r>
+            <a:br/>
+            <a:r>
+              <a:rPr lang="en-US" sz="1600" b="1" dirty="0">
+                <a:solidFill>
+                  <a:schemeClr val="accent1">
+                    <a:lumMod val="75000"/>
+                  </a:schemeClr>
+                </a:solidFill>
+                <a:latin typeface="+mn-lt"/>
+                <a:cs typeface="Calibri" panose="020F0502020204030204" pitchFamily="34" charset="0"/>
+              </a:rPr>
+              <a:t/>
             </a:r>
             <a:r>
               <a:rPr lang="en-US" sz="1600" dirty="0">
                 <a:latin typeface="+mn-lt"/>
                 <a:cs typeface="Calibri" panose="020F0502020204030204" pitchFamily="34" charset="0"/>
               </a:rPr>
-              <a:t>Mosambik hat die vierthöchste Geburtenrate bei Jugendlichen und die zehnthohe Rate von Kinderehen weltweit, und diese Raten steigen statt zu sinken, was zu geringen Qualifikationen und geringer Produktivität von Frauen auf dem </a:t>
+              <a:t>The next Social Security Commission will increase the focus of Social Protection programs to improve cost-benefit ratio, including encouraging the consolidation of social policies, ensuring undergraduate mechanisms and employment ties and participation in the workforce, and supporting a national shock-sensitive social protection strategy. 
+The main objective is to create a fiscally sustainable structure for the integration of social policies for the accumulation of human capital and reduction of extreme poverty, while empowering women and ensuring resilience to shocks</a:t>
+            </a:r>
+            <a:r>
+              <a:rPr lang="en-US" sz="1600" b="1" dirty="0">
+                <a:solidFill>
+                  <a:schemeClr val="accent1">
+                    <a:lumMod val="75000"/>
+                  </a:schemeClr>
+                </a:solidFill>
+                <a:latin typeface="+mn-lt"/>
+                <a:cs typeface="Calibri" panose="020F0502020204030204" pitchFamily="34" charset="0"/>
+              </a:rPr>
+              <a:t>
+Objective 9: To improve access to services to prevent teenage pregnancy and promote women's economic participation.
+</a:t>
+            </a:r>
+            <a:r>
+              <a:rPr lang="en-US" sz="1600" dirty="0">
+                <a:latin typeface="+mn-lt"/>
+                <a:cs typeface="Calibri" panose="020F0502020204030204" pitchFamily="34" charset="0"/>
+              </a:rPr>
+              <a:t>Mozambique has the fourth highest fertility rate in adolescence and the tenth highest rate of child marriage in the world and these rates are increasing and not decreasing, contributing to women's low skills and low productivity in the </a:t>
             </a:r>
             <a:r>
               <a:rPr lang="en-US" sz="1600" dirty="0" err="1">
                 <a:latin typeface="+mn-lt"/>
                 <a:cs typeface="Calibri" panose="020F0502020204030204" pitchFamily="34" charset="0"/>
               </a:rPr>
-              <a:t>Arbeits</a:t>
+              <a:t>labour</a:t>
             </a:r>
             <a:r>
               <a:rPr lang="en-US" sz="1600" dirty="0">
                 <a:latin typeface="+mn-lt"/>
                 <a:cs typeface="Calibri" panose="020F0502020204030204" pitchFamily="34" charset="0"/>
               </a:rPr>
-              <a:t>markt beiträgt.</a:t>
+              <a:t> market.</a:t>
             </a:r>
             <a:r>
               <a:rPr lang="en-US" sz="1600" b="1" dirty="0">
@@ -39210,7 +40316,7 @@
                 <a:latin typeface="+mn-lt"/>
                 <a:cs typeface="Calibri" panose="020F0502020204030204" pitchFamily="34" charset="0"/>
               </a:rPr>
-              <a:t>Der CPF wird sich auf Fragen der Kinderehe, Teenagerschwangerschaft und die Deckung des ungedeckten Bedarfs an Familienplanung, den Gymnasialbesuch von Mädchen und den Übergang in den Arbeitsmarkt konzentrieren – unter anderem. </a:t>
+              <a:t>The CPF will focus on issues of child marriage, teenage pregnancy and meeting unmet needs of family planning, girls' high school and the transition from the labor market – among others. </a:t>
             </a:r>
             <a:endParaRPr lang="pt-BR" sz="1600" dirty="0">
               <a:latin typeface="+mn-lt"/>
@@ -39519,7 +40625,17 @@
             <a:pPr algn="ctr"/>
             <a:r>
               <a:rPr lang="en-US" sz="4000" dirty="0"/>
-              <a:t>Präsentationsstruktur </a:t>
+              <a:t>Präsentationsstruktur</a:t>
+            </a:r>
+            <a:br/>
+            <a:r>
+              <a:rPr lang="en-US" sz="4000" dirty="0"/>
+              <a:t/>
+            </a:r>
+            <a:br/>
+            <a:r>
+              <a:rPr lang="en-US" sz="4000" dirty="0"/>
+              <a:t/>
             </a:r>
             <a:endParaRPr lang="pt" sz="4000" b="0" i="1" u="none" strike="noStrike" dirty="0">
               <a:highlight>
@@ -39575,7 +40691,27 @@
             </a:pPr>
             <a:r>
               <a:rPr lang="en-US" sz="3200" b="1" dirty="0"/>
-              <a:t>Einschätzung der Weltbankgruppe zu den wichtigsten strategischen Herausforderungen des Landes    Hauptlehren aus dem vorherigen CPF (2017-2021) Erster Vorschlag für den CPF 2023-2027</a:t>
+              <a:t>Einschätzung der Weltbankgruppe zu den wichtigsten strategischen Herausforderungen des Landes   </a:t>
+            </a:r>
+            <a:br/>
+            <a:r>
+              <a:rPr lang="en-US" sz="3200" b="1" dirty="0"/>
+              <a:t>Hauptlehren aus dem vorherigen CPF (2017-2021)</a:t>
+            </a:r>
+            <a:br/>
+            <a:r>
+              <a:rPr lang="en-US" sz="3200" b="1" dirty="0"/>
+              <a:t>Erster Vorschlag für den CPF 2023-2027</a:t>
+            </a:r>
+            <a:br/>
+            <a:r>
+              <a:rPr lang="en-US" sz="3200" b="1" dirty="0"/>
+              <a:t/>
+            </a:r>
+            <a:br/>
+            <a:r>
+              <a:rPr lang="en-US" sz="3200" b="1" dirty="0"/>
+              <a:t/>
             </a:r>
             <a:endParaRPr lang="pt" sz="3200" b="1" i="0" u="none" strike="noStrike" dirty="0">
               <a:highlight>
@@ -39738,7 +40874,17 @@
             <a:pPr algn="ctr"/>
             <a:r>
               <a:rPr lang="en-US" sz="4000" dirty="0"/>
-              <a:t>Präsentationsstruktur </a:t>
+              <a:t>Präsentationsstruktur</a:t>
+            </a:r>
+            <a:br/>
+            <a:r>
+              <a:rPr lang="en-US" sz="4000" dirty="0"/>
+              <a:t/>
+            </a:r>
+            <a:br/>
+            <a:r>
+              <a:rPr lang="en-US" sz="4000" dirty="0"/>
+              <a:t/>
             </a:r>
             <a:endParaRPr lang="pt" sz="4000" b="0" i="1" u="none" strike="noStrike" dirty="0">
               <a:highlight>
@@ -39794,7 +40940,27 @@
             </a:pPr>
             <a:r>
               <a:rPr lang="en-US" sz="3200" b="1" dirty="0"/>
-              <a:t>Sichtweise der Weltbankgruppe auf die wichtigsten strategischen Herausforderungen des Landes    </a:t>
+              <a:t>Sichtweise der Weltbankgruppe auf die wichtigsten strategischen Herausforderungen des Landes   </a:t>
+            </a:r>
+            <a:br/>
+            <a:r>
+              <a:rPr lang="en-US" sz="3200" b="1" dirty="0"/>
+              <a:t>Wichtigste Lehren aus dem vorigen CPF (2017-2021) </a:t>
+            </a:r>
+            <a:br/>
+            <a:r>
+              <a:rPr lang="en-US" sz="3200" b="1" dirty="0"/>
+              <a:t>Erster Vorschlag für den CPF 2023-2027</a:t>
+            </a:r>
+            <a:br/>
+            <a:r>
+              <a:rPr lang="en-US" sz="3200" b="1" dirty="0"/>
+              <a:t/>
+            </a:r>
+            <a:br/>
+            <a:r>
+              <a:rPr lang="en-US" sz="3200" b="1" dirty="0"/>
+              <a:t/>
             </a:r>
             <a:r>
               <a:rPr lang="en-US" sz="3200" b="1" dirty="0">
@@ -39804,7 +40970,8 @@
                   </a:schemeClr>
                 </a:solidFill>
               </a:rPr>
-              <a:t>Wichtigste Lehren aus dem vorigen CPF (2017-2021)  Erster Vorschlag für den CPF 2023-2027</a:t>
+              <a:t>Main lessons from the previous CPF (2017-2021) 
+Initial Proposal for CPF 2023-2027</a:t>
             </a:r>
             <a:endParaRPr lang="pt" sz="3200" b="1" i="0" u="none" strike="noStrike" dirty="0">
               <a:solidFill>
@@ -41791,7 +42958,17 @@
           <a:p>
             <a:r>
               <a:rPr lang="en-US" sz="1050" dirty="0"/>
-              <a:t>Systematische Länderdiagnose (SCD) der Weltbank gemäß den 2016 identifizierten Zielen </a:t>
+              <a:t>Systematische Länderdiagnose (SCD) der Weltbank gemäß den 2016 identifizierten Zielen</a:t>
+            </a:r>
+            <a:br/>
+            <a:r>
+              <a:rPr lang="en-US" sz="1050" dirty="0"/>
+              <a:t/>
+            </a:r>
+            <a:br/>
+            <a:r>
+              <a:rPr lang="en-US" sz="1050" dirty="0"/>
+              <a:t/>
             </a:r>
             <a:endParaRPr lang="pt-BR" sz="1050" dirty="0"/>
           </a:p>
@@ -41947,7 +43124,17 @@
             <a:pPr algn="ctr"/>
             <a:r>
               <a:rPr lang="en-US" sz="4000" dirty="0"/>
-              <a:t>Präsentationsstruktur </a:t>
+              <a:t>Präsentationsstruktur</a:t>
+            </a:r>
+            <a:br/>
+            <a:r>
+              <a:rPr lang="en-US" sz="4000" dirty="0"/>
+              <a:t/>
+            </a:r>
+            <a:br/>
+            <a:r>
+              <a:rPr lang="en-US" sz="4000" dirty="0"/>
+              <a:t/>
             </a:r>
             <a:endParaRPr lang="pt" sz="4000" b="0" i="1" u="none" strike="noStrike" dirty="0">
               <a:highlight>
@@ -42009,12 +43196,20 @@
                   </a:schemeClr>
                 </a:solidFill>
               </a:rPr>
-              <a:t>Sichtweise der Weltbankgruppe auf die wichtigsten strategischen Herausforderungen des Landes    </a:t>
-            </a:r>
-            <a:r>
-              <a:rPr lang="en-US" sz="3200" b="1" dirty="0"/>
-              <a:t>Wichtigste Lehren aus dem vorigen CPF (2017-2021) </a:t>
-            </a:r>
+              <a:t>Sichtweise der Weltbankgruppe auf die wichtigsten strategischen Herausforderungen des Landes   </a:t>
+            </a:r>
+            <a:br/>
+            <a:r>
+              <a:rPr lang="en-US" sz="3200" b="1" dirty="0">
+                <a:solidFill>
+                  <a:schemeClr val="bg2">
+                    <a:lumMod val="90000"/>
+                  </a:schemeClr>
+                </a:solidFill>
+              </a:rPr>
+              <a:t>Wichtigste Lehren aus dem vorigen CPF (2017-2021)</a:t>
+            </a:r>
+            <a:br/>
             <a:r>
               <a:rPr lang="en-US" sz="3200" b="1" dirty="0">
                 <a:solidFill>
@@ -42024,6 +43219,43 @@
                 </a:solidFill>
               </a:rPr>
               <a:t>Erster Vorschlag für den CPF 2023-2027</a:t>
+            </a:r>
+            <a:br/>
+            <a:r>
+              <a:rPr lang="en-US" sz="3200" b="1" dirty="0">
+                <a:solidFill>
+                  <a:schemeClr val="bg2">
+                    <a:lumMod val="90000"/>
+                  </a:schemeClr>
+                </a:solidFill>
+              </a:rPr>
+              <a:t/>
+            </a:r>
+            <a:br/>
+            <a:r>
+              <a:rPr lang="en-US" sz="3200" b="1" dirty="0">
+                <a:solidFill>
+                  <a:schemeClr val="bg2">
+                    <a:lumMod val="90000"/>
+                  </a:schemeClr>
+                </a:solidFill>
+              </a:rPr>
+              <a:t/>
+            </a:r>
+            <a:r>
+              <a:rPr lang="en-US" sz="3200" b="1" dirty="0"/>
+              <a:t>Main lessons from the previous CPF (2017-2021)
+</a:t>
+            </a:r>
+            <a:r>
+              <a:rPr lang="en-US" sz="3200" b="1" dirty="0">
+                <a:solidFill>
+                  <a:schemeClr val="bg2">
+                    <a:lumMod val="90000"/>
+                  </a:schemeClr>
+                </a:solidFill>
+              </a:rPr>
+              <a:t>Initial Proposal for CPF 2023-2027</a:t>
             </a:r>
             <a:endParaRPr lang="pt-BR" sz="3200" b="1" i="0" u="none" strike="noStrike" dirty="0">
               <a:solidFill>

--- a/fixtures/real-world/worldbank-cpf-concept-note-de.pptx
+++ b/fixtures/real-world/worldbank-cpf-concept-note-de.pptx
@@ -584,7 +584,7 @@
                 <a:ea typeface="+mn-ea"/>
                 <a:cs typeface="Arial" panose="020B0604020202020204" pitchFamily="34" charset="0"/>
               </a:rPr>
-              <a:t>DE: Poverty rates and total number of poor </a:t>
+              <a:t>Armutsraten und Gesamtzahl der Armen </a:t>
             </a:r>
           </a:p>
         </c:rich>
@@ -4884,7 +4884,7 @@
                 </a:pPr>
                 <a:r>
                   <a:rPr lang="en-US"/>
-                  <a:t>DE: Taxa de Pobreza (%)</a:t>
+                  <a:t>Armutsrate (%)</a:t>
                 </a:r>
               </a:p>
             </c:rich>
@@ -4982,15 +4982,15 @@
                 </a:pPr>
                 <a:r>
                   <a:rPr lang="en-US" dirty="0" err="1"/>
-                  <a:t>DE: Número</a:t>
+                  <a:t>Zahl</a:t>
                 </a:r>
                 <a:r>
                   <a:rPr lang="en-US" dirty="0"/>
-                  <a:t> de </a:t>
+                  <a:t> der </a:t>
                 </a:r>
                 <a:r>
                   <a:rPr lang="en-US" dirty="0" err="1"/>
-                  <a:t>DE: pobres</a:t>
+                  <a:t>Armen</a:t>
                 </a:r>
                 <a:r>
                   <a:rPr lang="en-US" dirty="0"/>
@@ -5325,7 +5325,7 @@
                 </a:solidFill>
                 <a:latin typeface="+mj-lt"/>
               </a:rPr>
-              <a:t>DE: Funding</a:t>
+              <a:t>Finanzierungs</a:t>
             </a:r>
             <a:r>
               <a:rPr lang="en-US" sz="1000" b="1" baseline="0" dirty="0">
@@ -5343,7 +5343,7 @@
                 </a:solidFill>
                 <a:latin typeface="+mj-lt"/>
               </a:rPr>
-              <a:t>DE: objectives</a:t>
+              <a:t>ziele</a:t>
             </a:r>
             <a:r>
               <a:rPr lang="en-US" sz="1000" b="1" baseline="0" dirty="0">
@@ -5361,27 +5361,7 @@
                 </a:solidFill>
                 <a:latin typeface="+mj-lt"/>
               </a:rPr>
-              <a:t>DE: in the FY17-21 CPF period (% of total commitments)</a:t>
-            </a:r>
-            <a:br/>
-            <a:r>
-              <a:rPr lang="en-US" sz="1000" b="1" dirty="0">
-                <a:solidFill>
-                  <a:schemeClr val="tx1"/>
-                </a:solidFill>
-                <a:latin typeface="+mj-lt"/>
-              </a:rPr>
-              <a:t/>
-            </a:r>
-            <a:br/>
-            <a:r>
-              <a:rPr lang="en-US" sz="1000" b="1" dirty="0">
-                <a:solidFill>
-                  <a:schemeClr val="tx1"/>
-                </a:solidFill>
-                <a:latin typeface="+mj-lt"/>
-              </a:rPr>
-              <a:t/>
+              <a:t>im CPF-Zeitraum HJ17-21 (% der Gesamtzusagen)</a:t>
             </a:r>
             <a:r>
               <a:rPr lang="pt-BR" sz="1000" b="0" dirty="0">
@@ -5699,17 +5679,7 @@
                     </a:pPr>
                     <a:r>
                       <a:rPr lang="en-US"/>
-                      <a:t>DE: 1: Improved economic management, 6.6%</a:t>
-                    </a:r>
-                    <a:br/>
-                    <a:r>
-                      <a:rPr lang="en-US"/>
-                      <a:t/>
-                    </a:r>
-                    <a:br/>
-                    <a:r>
-                      <a:rPr lang="en-US"/>
-                      <a:t/>
+                      <a:t>1: Verbessertes Wirtschaftsmanagement, 6,6 %</a:t>
                     </a:r>
                     <a:endParaRPr lang="en-US" baseline="0"/>
                   </a:p>
@@ -5784,17 +5754,7 @@
                     </a:pPr>
                     <a:r>
                       <a:rPr lang="en-US"/>
-                      <a:t>DE: 2: Increase in Agricultural Growth, 30.2%</a:t>
-                    </a:r>
-                    <a:br/>
-                    <a:r>
-                      <a:rPr lang="en-US"/>
-                      <a:t/>
-                    </a:r>
-                    <a:br/>
-                    <a:r>
-                      <a:rPr lang="en-US"/>
-                      <a:t/>
+                      <a:t>2: Steigerung des landwirtschaftlichen Wachstums, 30,2 %</a:t>
                     </a:r>
                     <a:endParaRPr lang="en-US" baseline="0"/>
                   </a:p>
@@ -5869,17 +5829,7 @@
                     </a:pPr>
                     <a:r>
                       <a:rPr lang="en-US"/>
-                      <a:t>DE: 3: Improving the Business Environment for Job Creation, 3.5%</a:t>
-                    </a:r>
-                    <a:br/>
-                    <a:r>
-                      <a:rPr lang="en-US"/>
-                      <a:t/>
-                    </a:r>
-                    <a:br/>
-                    <a:r>
-                      <a:rPr lang="en-US"/>
-                      <a:t/>
+                      <a:t>3: Verbesserung des Geschäftsumfelds zur Schaffung von Arbeitsplätzen, 3,5 %</a:t>
                     </a:r>
                     <a:endParaRPr lang="en-US" baseline="0"/>
                   </a:p>
@@ -5954,17 +5904,7 @@
                     </a:pPr>
                     <a:r>
                       <a:rPr lang="en-US"/>
-                      <a:t>DE: 4: Expand access and improve electricity reliability, 8.0%</a:t>
-                    </a:r>
-                    <a:br/>
-                    <a:r>
-                      <a:rPr lang="en-US"/>
-                      <a:t/>
-                    </a:r>
-                    <a:br/>
-                    <a:r>
-                      <a:rPr lang="en-US"/>
-                      <a:t/>
+                      <a:t>4: Zugang ausweiten und Zuverlässigkeit der Stromversorgung verbessern, 8,0 %</a:t>
                     </a:r>
                     <a:endParaRPr lang="en-US" baseline="0"/>
                   </a:p>
@@ -6039,17 +5979,7 @@
                     </a:pPr>
                     <a:r>
                       <a:rPr lang="en-US"/>
-                      <a:t>DE: 5: Improve the Skills Base, 13.8%</a:t>
-                    </a:r>
-                    <a:br/>
-                    <a:r>
-                      <a:rPr lang="en-US"/>
-                      <a:t/>
-                    </a:r>
-                    <a:br/>
-                    <a:r>
-                      <a:rPr lang="en-US"/>
-                      <a:t/>
+                      <a:t>5: Verbesserung der Qualifikationsbasis, 13,8 %</a:t>
                     </a:r>
                     <a:endParaRPr lang="en-US" baseline="0"/>
                   </a:p>
@@ -6124,17 +6054,7 @@
                     </a:pPr>
                     <a:r>
                       <a:rPr lang="en-US"/>
-                      <a:t>DE: 6: Improving the provision of the Health Service, 2.8%</a:t>
-                    </a:r>
-                    <a:br/>
-                    <a:r>
-                      <a:rPr lang="en-US"/>
-                      <a:t/>
-                    </a:r>
-                    <a:br/>
-                    <a:r>
-                      <a:rPr lang="en-US"/>
-                      <a:t/>
+                      <a:t>6: Verbesserung der Bereitstellung des Gesundheitsdienstes, 2,8 %</a:t>
                     </a:r>
                     <a:endParaRPr lang="en-US" baseline="0"/>
                   </a:p>
@@ -6209,17 +6129,7 @@
                     </a:pPr>
                     <a:r>
                       <a:rPr lang="en-US"/>
-                      <a:t>DE: 7: Improving access to water and sanitation, 6.6%</a:t>
-                    </a:r>
-                    <a:br/>
-                    <a:r>
-                      <a:rPr lang="en-US"/>
-                      <a:t/>
-                    </a:r>
-                    <a:br/>
-                    <a:r>
-                      <a:rPr lang="en-US"/>
-                      <a:t/>
+                      <a:t>7: Verbesserung des Zugangs zu Wasser und Sanitärversorgung, 6,6 %</a:t>
                     </a:r>
                     <a:endParaRPr lang="en-US" baseline="0"/>
                   </a:p>
@@ -6294,17 +6204,7 @@
                     </a:pPr>
                     <a:r>
                       <a:rPr lang="en-US"/>
-                      <a:t>DE: 8: Support for Recovery and Resilience, 21.1%</a:t>
-                    </a:r>
-                    <a:br/>
-                    <a:r>
-                      <a:rPr lang="en-US"/>
-                      <a:t/>
-                    </a:r>
-                    <a:br/>
-                    <a:r>
-                      <a:rPr lang="en-US"/>
-                      <a:t/>
+                      <a:t>8: Unterstützung für Erholung und Resilienz, 21,1 %</a:t>
                     </a:r>
                     <a:endParaRPr lang="en-US" baseline="0"/>
                   </a:p>
@@ -6379,17 +6279,7 @@
                     </a:pPr>
                     <a:r>
                       <a:rPr lang="en-US" dirty="0"/>
-                      <a:t>DE: 9: Promoting Inclusive Urbanization and Decentralization7.5%</a:t>
-                    </a:r>
-                    <a:br/>
-                    <a:r>
-                      <a:rPr lang="en-US" dirty="0"/>
-                      <a:t/>
-                    </a:r>
-                    <a:br/>
-                    <a:r>
-                      <a:rPr lang="en-US" dirty="0"/>
-                      <a:t/>
+                      <a:t>9: Förderung inklusiver Urbanisierung und Dezentralisierung, 7,5 %</a:t>
                     </a:r>
                     <a:endParaRPr lang="en-US" baseline="0" dirty="0"/>
                   </a:p>
@@ -6640,21 +6530,12 @@
                   <a:schemeClr val="tx1"/>
                 </a:solidFill>
               </a:rPr>
-              <a:t>DE: % of total undisbursed funds</a:t>
+              <a:t>% der gesamten nicht ausgezahlten Mittel</a:t>
             </a:r>
             <a:r>
               <a:rPr lang="en-US" dirty="0"/>
-              <a:t>*</a:t>
-            </a:r>
-            <a:br/>
-            <a:r>
-              <a:rPr lang="en-US" dirty="0"/>
-              <a:t/>
-            </a:r>
-            <a:br/>
-            <a:r>
-              <a:rPr lang="en-US" dirty="0"/>
-              <a:t/>
+              <a:t>*
+</a:t>
             </a:r>
           </a:p>
         </c:rich>
@@ -7005,7 +6886,7 @@
             </a:pPr>
             <a:r>
               <a:rPr lang="en-US" b="1" dirty="0"/>
-              <a:t>DE: Nominal GDP per Capita (1998 - 2021) </a:t>
+              <a:t>Nominales BIP pro Kopf (1998 - 2021) </a:t>
             </a:r>
           </a:p>
         </c:rich>
@@ -7359,7 +7240,7 @@
                 </a:pPr>
                 <a:r>
                   <a:rPr lang="en-US"/>
-                  <a:t>DE: USD</a:t>
+                  <a:t>USD</a:t>
                 </a:r>
               </a:p>
             </c:rich>
@@ -7503,7 +7384,7 @@
             </a:pPr>
             <a:r>
               <a:rPr lang="en-US" sz="1000" b="1" dirty="0"/>
-              <a:t>DE: Ghana</a:t>
+              <a:t>Ghana</a:t>
             </a:r>
           </a:p>
         </c:rich>
@@ -9359,7 +9240,7 @@
             </a:pPr>
             <a:r>
               <a:rPr lang="en-US" sz="1000" b="1" dirty="0"/>
-              <a:t>DE: Mozambique</a:t>
+              <a:t>Mosambik</a:t>
             </a:r>
           </a:p>
         </c:rich>
@@ -10315,7 +10196,7 @@
             </a:pPr>
             <a:r>
               <a:rPr lang="pt-PT" b="1" dirty="0"/>
-              <a:t>DE: Crescimento Real do PIB (billion de Meticais )</a:t>
+              <a:t>Reales BIP-Wachstum (Milliarden Meticais )</a:t>
             </a:r>
           </a:p>
         </c:rich>
@@ -11209,17 +11090,7 @@
             </a:pPr>
             <a:r>
               <a:rPr lang="en-US" sz="1000" b="1"/>
-              <a:t>DE: Total Public Debt Stock (% GDP)</a:t>
-            </a:r>
-            <a:br/>
-            <a:r>
-              <a:rPr lang="en-US" sz="1000" b="1"/>
-              <a:t/>
-            </a:r>
-            <a:br/>
-            <a:r>
-              <a:rPr lang="en-US" sz="1000" b="1"/>
-              <a:t/>
+              <a:t>Gesamtbestand der öffentlichen Schulden (% des BIP)</a:t>
             </a:r>
           </a:p>
         </c:rich>
@@ -11655,17 +11526,7 @@
             </a:pPr>
             <a:r>
               <a:rPr lang="en-US" sz="1050" b="1"/>
-              <a:t>DE: Annual GDP Growth</a:t>
-            </a:r>
-            <a:br/>
-            <a:r>
-              <a:rPr lang="en-US" sz="1050" b="1"/>
-              <a:t/>
-            </a:r>
-            <a:br/>
-            <a:r>
-              <a:rPr lang="en-US" sz="1050" b="1"/>
-              <a:t/>
+              <a:t>Jährliches BIP-Wachstum</a:t>
             </a:r>
           </a:p>
         </c:rich>
@@ -14474,17 +14335,7 @@
             </a:pPr>
             <a:r>
               <a:rPr lang="pt-BR" sz="1200" dirty="0"/>
-              <a:t>DE: Annual GDP Growth - Projected</a:t>
-            </a:r>
-            <a:br/>
-            <a:r>
-              <a:rPr lang="pt-BR" sz="1200" dirty="0"/>
-              <a:t/>
-            </a:r>
-            <a:br/>
-            <a:r>
-              <a:rPr lang="pt-BR" sz="1200" dirty="0"/>
-              <a:t/>
+              <a:t>Jährliches BIP-Wachstum – Prognose</a:t>
             </a:r>
             <a:endParaRPr lang="en-US" sz="1200" dirty="0"/>
           </a:p>
@@ -25975,170 +25826,8 @@
                 <a:latin typeface="Times New Roman" panose="02020603050405020304" pitchFamily="18" charset="0"/>
                 <a:cs typeface="Times New Roman" panose="02020603050405020304" pitchFamily="18" charset="0"/>
               </a:rPr>
-              <a:t>Weltbankgruppe (WBG) </a:t>
+              <a:t>Weltbankgruppe (WBG) Mosambik: Country Partnership Framework (CPF) 2023-2027 Zusammenfassung des Konzeptpapiers Öffentliche Fassung  Maputo, Mai 2022</a:t>
             </a:r>
-            <a:br>
-              <a:rPr lang="pt" sz="3600" b="1" dirty="0">
-                <a:highlight>
-                  <a:srgbClr val="000000">
-                    <a:alpha val="0"/>
-                  </a:srgbClr>
-                </a:highlight>
-                <a:latin typeface="Times New Roman" panose="02020603050405020304" pitchFamily="18" charset="0"/>
-                <a:cs typeface="Times New Roman" panose="02020603050405020304" pitchFamily="18" charset="0"/>
-              </a:rPr>
-            </a:br>
-            <a:br>
-              <a:rPr lang="pt" sz="3600" b="1" dirty="0">
-                <a:highlight>
-                  <a:srgbClr val="000000">
-                    <a:alpha val="0"/>
-                  </a:srgbClr>
-                </a:highlight>
-                <a:latin typeface="Times New Roman" panose="02020603050405020304" pitchFamily="18" charset="0"/>
-                <a:cs typeface="Times New Roman" panose="02020603050405020304" pitchFamily="18" charset="0"/>
-              </a:rPr>
-            </a:br>
-            <a:r>
-              <a:rPr lang="en-US" sz="3600" b="1" dirty="0">
-                <a:highlight>
-                  <a:srgbClr val="000000">
-                    <a:alpha val="0"/>
-                  </a:srgbClr>
-                </a:highlight>
-                <a:latin typeface="Times New Roman" panose="02020603050405020304" pitchFamily="18" charset="0"/>
-                <a:cs typeface="Times New Roman" panose="02020603050405020304" pitchFamily="18" charset="0"/>
-              </a:rPr>
-              <a:t>Mosambik: Länderpartnerschaftsrahmen (CPF) 2023-2027 </a:t>
-            </a:r>
-            <a:br>
-              <a:rPr lang="en-US" sz="3600" b="1" dirty="0">
-                <a:highlight>
-                  <a:srgbClr val="000000">
-                    <a:alpha val="0"/>
-                  </a:srgbClr>
-                </a:highlight>
-                <a:latin typeface="Times New Roman" panose="02020603050405020304" pitchFamily="18" charset="0"/>
-                <a:cs typeface="Times New Roman" panose="02020603050405020304" pitchFamily="18" charset="0"/>
-              </a:rPr>
-            </a:br>
-            <a:br>
-              <a:rPr lang="en-US" sz="3600" b="1" dirty="0">
-                <a:highlight>
-                  <a:srgbClr val="000000">
-                    <a:alpha val="0"/>
-                  </a:srgbClr>
-                </a:highlight>
-                <a:latin typeface="Times New Roman" panose="02020603050405020304" pitchFamily="18" charset="0"/>
-                <a:cs typeface="Times New Roman" panose="02020603050405020304" pitchFamily="18" charset="0"/>
-              </a:rPr>
-            </a:br>
-            <a:r>
-              <a:rPr lang="en-US" sz="3600" b="1" dirty="0">
-                <a:highlight>
-                  <a:srgbClr val="000000">
-                    <a:alpha val="0"/>
-                  </a:srgbClr>
-                </a:highlight>
-                <a:latin typeface="Times New Roman" panose="02020603050405020304" pitchFamily="18" charset="0"/>
-                <a:cs typeface="Times New Roman" panose="02020603050405020304" pitchFamily="18" charset="0"/>
-              </a:rPr>
-              <a:t>Zusammenfassung der Konzeptnotiz </a:t>
-            </a:r>
-            <a:br>
-              <a:rPr lang="en-US" sz="3600" b="1" dirty="0">
-                <a:highlight>
-                  <a:srgbClr val="000000">
-                    <a:alpha val="0"/>
-                  </a:srgbClr>
-                </a:highlight>
-                <a:latin typeface="Times New Roman" panose="02020603050405020304" pitchFamily="18" charset="0"/>
-                <a:cs typeface="Times New Roman" panose="02020603050405020304" pitchFamily="18" charset="0"/>
-              </a:rPr>
-            </a:br>
-            <a:br>
-              <a:rPr lang="en-US" sz="3600" b="1" dirty="0">
-                <a:highlight>
-                  <a:srgbClr val="000000">
-                    <a:alpha val="0"/>
-                  </a:srgbClr>
-                </a:highlight>
-                <a:latin typeface="Times New Roman" panose="02020603050405020304" pitchFamily="18" charset="0"/>
-                <a:cs typeface="Times New Roman" panose="02020603050405020304" pitchFamily="18" charset="0"/>
-              </a:rPr>
-            </a:br>
-            <a:r>
-              <a:rPr lang="en-US" sz="3600" b="1" dirty="0">
-                <a:highlight>
-                  <a:srgbClr val="000000">
-                    <a:alpha val="0"/>
-                  </a:srgbClr>
-                </a:highlight>
-                <a:latin typeface="Times New Roman" panose="02020603050405020304" pitchFamily="18" charset="0"/>
-                <a:cs typeface="Times New Roman" panose="02020603050405020304" pitchFamily="18" charset="0"/>
-              </a:rPr>
-              <a:t>Öffentliche Fassung  </a:t>
-            </a:r>
-            <a:br>
-              <a:rPr lang="en-US" sz="3600" b="1" dirty="0">
-                <a:highlight>
-                  <a:srgbClr val="000000">
-                    <a:alpha val="0"/>
-                  </a:srgbClr>
-                </a:highlight>
-                <a:latin typeface="Times New Roman" panose="02020603050405020304" pitchFamily="18" charset="0"/>
-                <a:cs typeface="Times New Roman" panose="02020603050405020304" pitchFamily="18" charset="0"/>
-              </a:rPr>
-            </a:br>
-            <a:br>
-              <a:rPr lang="en-US" sz="3600" b="1" dirty="0">
-                <a:highlight>
-                  <a:srgbClr val="000000">
-                    <a:alpha val="0"/>
-                  </a:srgbClr>
-                </a:highlight>
-                <a:latin typeface="Times New Roman" panose="02020603050405020304" pitchFamily="18" charset="0"/>
-                <a:cs typeface="Times New Roman" panose="02020603050405020304" pitchFamily="18" charset="0"/>
-              </a:rPr>
-            </a:br>
-            <a:r>
-              <a:rPr lang="en-US" sz="3600" b="1" dirty="0">
-                <a:highlight>
-                  <a:srgbClr val="000000">
-                    <a:alpha val="0"/>
-                  </a:srgbClr>
-                </a:highlight>
-                <a:latin typeface="Times New Roman" panose="02020603050405020304" pitchFamily="18" charset="0"/>
-                <a:cs typeface="Times New Roman" panose="02020603050405020304" pitchFamily="18" charset="0"/>
-              </a:rPr>
-              <a:t>Maputo, Mai 2022</a:t>
-            </a:r>
-            <a:br>
-              <a:rPr lang="en-US" sz="3600" b="1" dirty="0">
-                <a:highlight>
-                  <a:srgbClr val="000000">
-                    <a:alpha val="0"/>
-                  </a:srgbClr>
-                </a:highlight>
-                <a:latin typeface="Times New Roman" panose="02020603050405020304" pitchFamily="18" charset="0"/>
-                <a:cs typeface="Times New Roman" panose="02020603050405020304" pitchFamily="18" charset="0"/>
-              </a:rPr>
-            </a:br>
-            <a:br>
-              <a:rPr lang="pt" sz="3600" b="1" dirty="0">
-                <a:highlight>
-                  <a:srgbClr val="000000">
-                    <a:alpha val="0"/>
-                  </a:srgbClr>
-                </a:highlight>
-                <a:latin typeface="Times New Roman" panose="02020603050405020304" pitchFamily="18" charset="0"/>
-                <a:cs typeface="Times New Roman" panose="02020603050405020304" pitchFamily="18" charset="0"/>
-              </a:rPr>
-            </a:br>
-            <a:endParaRPr lang="en-US" sz="3600" b="1" dirty="0">
-              <a:latin typeface="Times New Roman" panose="02020603050405020304" pitchFamily="18" charset="0"/>
-              <a:cs typeface="Times New Roman" panose="02020603050405020304" pitchFamily="18" charset="0"/>
-            </a:endParaRPr>
           </a:p>
         </p:txBody>
       </p:sp>
@@ -26323,9 +26012,8 @@
           <a:p>
             <a:r>
               <a:rPr lang="en-US" sz="2400" dirty="0"/>
-              <a:t>CPF GJ2017-2021: Hauptmerkmale</a:t>
+              <a:t>CPF HJ2017-2021: Wesentliche Merkmale</a:t>
             </a:r>
-            <a:endParaRPr lang="en-US" sz="2400" b="0" i="1" dirty="0"/>
           </a:p>
         </p:txBody>
       </p:sp>
@@ -26357,166 +26045,107 @@
           </a:bodyPr>
           <a:lstStyle/>
           <a:p>
-            <a:pPr marL="0" algn="just">
-              <a:spcBef>
-                <a:spcPts val="0"/>
-              </a:spcBef>
-            </a:pPr>
             <a:r>
               <a:rPr lang="en-US" dirty="0">
                 <a:latin typeface="+mn-lt"/>
               </a:rPr>
-              <a:t>Ein Kontext, in dem das rasche Wachstum der Vorjahre zu Ende gegangen war. Das Verständnis, dass die Auswirkungen des Wachstums auf die Armutsreduzierung geringer als notwendig gewesen waren.</a:t>
+              <a:t>Ein Kontext, in dem das rasche Wachstum der Vorjahre zum Erliegen gekommen war. Die Erkenntnis, dass die Wirkung des Wachstums auf die Armutsbekämpfung geringer als nötig ausgefallen war.</a:t>
             </a:r>
           </a:p>
           <a:p>
-            <a:pPr marL="0" algn="just">
-              <a:spcBef>
-                <a:spcPts val="0"/>
-              </a:spcBef>
-            </a:pPr>
-            <a:endParaRPr lang="en-US" dirty="0">
-              <a:latin typeface="+mn-lt"/>
-            </a:endParaRPr>
-          </a:p>
-          <a:p>
-            <a:pPr marL="0" algn="just">
-              <a:spcBef>
-                <a:spcPts val="0"/>
-              </a:spcBef>
-            </a:pPr>
             <a:r>
               <a:rPr lang="en-US" dirty="0">
                 <a:latin typeface="+mn-lt"/>
               </a:rPr>
-              <a:t>Der Schock durch versteckte Schulden erschütterte das Vertrauen in das Land und verringerte die Investitionen.</a:t>
+              <a:t/>
             </a:r>
           </a:p>
           <a:p>
-            <a:pPr marL="0" algn="just">
-              <a:spcBef>
-                <a:spcPts val="0"/>
-              </a:spcBef>
-            </a:pPr>
-            <a:endParaRPr lang="en-US" dirty="0">
-              <a:latin typeface="+mn-lt"/>
-            </a:endParaRPr>
-          </a:p>
-          <a:p>
-            <a:pPr marL="0" algn="just">
-              <a:spcBef>
-                <a:spcPts val="0"/>
-              </a:spcBef>
-            </a:pPr>
             <a:r>
               <a:rPr lang="en-US" dirty="0">
                 <a:latin typeface="+mn-lt"/>
               </a:rPr>
-              <a:t>CPF AF17-GJ21 hatte das übergeordnete Ziel, Mosambik dabei zu helfen, „</a:t>
+              <a:t>Der Schock der versteckten Schulden untergrub das Vertrauen in das Land und verringerte die Investitionen.</a:t>
             </a:r>
-            <a:r>
-              <a:rPr lang="en-US" b="1" dirty="0">
-                <a:latin typeface="+mn-lt"/>
-              </a:rPr>
-              <a:t>inklusives Wachstum durch Förderung der Beschäftigung und Verbesserung der Produktivität auf nachhaltige Weise zu erzielen</a:t>
-            </a:r>
+          </a:p>
+          <a:p>
             <a:r>
               <a:rPr lang="en-US" dirty="0">
                 <a:latin typeface="+mn-lt"/>
               </a:rPr>
-              <a:t>“.</a:t>
+              <a:t/>
             </a:r>
           </a:p>
           <a:p>
-            <a:pPr marL="0" algn="just">
-              <a:spcBef>
-                <a:spcPts val="0"/>
-              </a:spcBef>
-            </a:pPr>
-            <a:endParaRPr lang="en-US" dirty="0">
-              <a:latin typeface="+mn-lt"/>
-            </a:endParaRPr>
-          </a:p>
-          <a:p>
-            <a:pPr marL="0" algn="just">
-              <a:spcBef>
-                <a:spcPts val="0"/>
-              </a:spcBef>
-            </a:pPr>
             <a:r>
               <a:rPr lang="en-US" dirty="0">
                 <a:latin typeface="+mn-lt"/>
               </a:rPr>
-              <a:t>Das Programm umfasste 3 Schwerpunktbereiche: (i) Förderung von diversifiziertem Wachstum und gesteigerter Produktivität, (ii) Investitionen in Humankapital und (iii) Stärkung von Nachhaltigkeit und Resilienz.</a:t>
+              <a:t>Der CPF HJ17-HJ21 hatte das übergeordnete Ziel, Mosambik dabei zu helfen, „inklusives Wachstum durch die Förderung von Beschäftigung und die nachhaltige Steigerung der Produktivität zu erreichen“.</a:t>
             </a:r>
           </a:p>
           <a:p>
-            <a:pPr marL="0" algn="just">
-              <a:spcBef>
-                <a:spcPts val="0"/>
-              </a:spcBef>
-            </a:pPr>
-            <a:endParaRPr lang="en-US" dirty="0">
-              <a:latin typeface="+mn-lt"/>
-            </a:endParaRPr>
-          </a:p>
-          <a:p>
-            <a:pPr marL="0" algn="just">
-              <a:spcBef>
-                <a:spcPts val="0"/>
-              </a:spcBef>
-            </a:pPr>
             <a:r>
               <a:rPr lang="en-US" dirty="0">
                 <a:latin typeface="+mn-lt"/>
               </a:rPr>
-              <a:t>Das Portfolio der Weltbank wuchs von anfänglich US$ 1,6 Mrd. auf etwa US$ 2,9 Mrd. an gebundenen Mitteln über den gesamten CPF-Zeitraum.</a:t>
+              <a:t/>
             </a:r>
           </a:p>
           <a:p>
-            <a:pPr marL="0" algn="just">
-              <a:spcBef>
-                <a:spcPts val="0"/>
-              </a:spcBef>
-            </a:pPr>
-            <a:endParaRPr lang="en-US" dirty="0">
-              <a:latin typeface="+mn-lt"/>
-            </a:endParaRPr>
-          </a:p>
-          <a:p>
-            <a:pPr marL="0" algn="just">
-              <a:spcBef>
-                <a:spcPts val="0"/>
-              </a:spcBef>
-            </a:pPr>
             <a:r>
               <a:rPr lang="en-US" dirty="0">
                 <a:latin typeface="+mn-lt"/>
               </a:rPr>
-              <a:t>Zusätzlich: US$ 700 Mio. für die Konflikt- und Gewaltprävention (GJ 2022) durch die</a:t>
+              <a:t>Das Programm hatte 3 Schwerpunktbereiche: (i) Förderung diversifizierten Wachstums und gesteigerter Produktivität, (ii) Investitionen in Humankapital und (iii) Stärkung von Nachhaltigkeit und Resilienz.</a:t>
             </a:r>
           </a:p>
           <a:p>
-            <a:pPr marL="0" algn="just">
-              <a:spcBef>
-                <a:spcPts val="0"/>
-              </a:spcBef>
-            </a:pPr>
-            <a:endParaRPr lang="en-US" dirty="0">
-              <a:latin typeface="+mn-lt"/>
-            </a:endParaRPr>
-          </a:p>
-          <a:p>
-            <a:pPr marL="0" algn="just">
-              <a:spcBef>
-                <a:spcPts val="0"/>
-              </a:spcBef>
-            </a:pPr>
             <a:r>
               <a:rPr lang="en-US" dirty="0">
                 <a:latin typeface="+mn-lt"/>
               </a:rPr>
-              <a:t>IFC- und MIGA-Investitionen im Privatsektor konzentrierten sich auf transformative Projekte zur Schaffung von Arbeitsplätzen und Armutsreduzierung.</a:t>
+              <a:t/>
+            </a:r>
+          </a:p>
+          <a:p>
+            <a:r>
+              <a:rPr lang="en-US" dirty="0">
+                <a:latin typeface="+mn-lt"/>
+              </a:rPr>
+              <a:t>Das Portfolio der Weltbank wuchs von anfänglich 1,6 Mrd. US$ auf rund 2,9 Mrd. US$ an Zusagen über den gesamten CPF-Zeitraum.</a:t>
+            </a:r>
+          </a:p>
+          <a:p>
+            <a:r>
+              <a:rPr lang="en-US" dirty="0">
+                <a:latin typeface="+mn-lt"/>
+              </a:rPr>
+              <a:t/>
+            </a:r>
+          </a:p>
+          <a:p>
+            <a:r>
+              <a:rPr lang="en-US" dirty="0">
+                <a:latin typeface="+mn-lt"/>
+              </a:rPr>
+              <a:t>Zusätzlich: 700 Mio. US$ für die Prävention von Konflikten und Gewalt (HJ 2022) über die</a:t>
+            </a:r>
+          </a:p>
+          <a:p>
+            <a:r>
+              <a:rPr lang="en-US" dirty="0">
+                <a:latin typeface="+mn-lt"/>
+              </a:rPr>
+              <a:t/>
+            </a:r>
+          </a:p>
+          <a:p>
+            <a:r>
+              <a:rPr lang="en-US" dirty="0">
+                <a:latin typeface="+mn-lt"/>
+              </a:rPr>
+              <a:t>Investitionen von IFC und MIGA im Privatsektor mit Schwerpunkt auf transformativen Projekten zur Schaffung von Arbeitsplätzen und zur Armutsbekämpfung.</a:t>
             </a:r>
           </a:p>
         </p:txBody>
@@ -26626,9 +26255,8 @@
           <a:p>
             <a:r>
               <a:rPr lang="en-US"/>
-              <a:t>CPF 2023-2027. Öffentliche Version. Maputo, Mai 2022.</a:t>
+              <a:t>CPF 2023-2027. Öffentliche Fassung. Maputo, Mai 2022.</a:t>
             </a:r>
-            <a:endParaRPr lang="en-US" dirty="0"/>
           </a:p>
         </p:txBody>
       </p:sp>
@@ -26750,17 +26378,10 @@
           </a:bodyPr>
           <a:lstStyle/>
           <a:p>
-            <a:br>
-              <a:rPr lang="en-US" sz="2400" dirty="0"/>
-            </a:br>
-            <a:br>
-              <a:rPr lang="en-US" sz="2400" dirty="0"/>
-            </a:br>
             <a:r>
               <a:rPr lang="en-US" sz="2400" dirty="0"/>
-              <a:t>CPF GJ2017-2021: Hauptmerkmale</a:t>
+              <a:t>CPF HJ2017-2021: Wesentliche Merkmale</a:t>
             </a:r>
-            <a:endParaRPr lang="en-US" sz="2400" b="0" i="1" dirty="0"/>
           </a:p>
         </p:txBody>
       </p:sp>
@@ -26792,134 +26413,82 @@
           </a:bodyPr>
           <a:lstStyle/>
           <a:p>
-            <a:pPr algn="just"/>
-            <a:endParaRPr lang="pt-BR" b="1" u="sng" dirty="0">
-              <a:latin typeface="+mn-lt"/>
-              <a:ea typeface="Times New Roman" panose="02020603050405020304" pitchFamily="18" charset="0"/>
-              <a:cs typeface="Times New Roman" panose="02020603050405020304" pitchFamily="18" charset="0"/>
-            </a:endParaRPr>
-          </a:p>
-          <a:p>
-            <a:pPr lvl="2" algn="just"/>
             <a:r>
               <a:rPr lang="en-US" sz="1400" b="1" dirty="0"/>
-              <a:t>Fokus auf Regionen und Sektoren, in denen die Armen konzentriert sind. </a:t>
+              <a:t/>
             </a:r>
           </a:p>
           <a:p>
-            <a:pPr marL="914400" lvl="3" indent="-365760" algn="just"/>
             <a:r>
-              <a:rPr lang="en-US" sz="1300" dirty="0">
-                <a:solidFill>
-                  <a:srgbClr val="000000"/>
-                </a:solidFill>
-                <a:cs typeface="Calibri" panose="020F0502020204030204" pitchFamily="34" charset="0"/>
-              </a:rPr>
-              <a:t>Der Anteil der Subsistenzlandwirtschaft sollte von 6% im vorherigen CPF auf 20% steigen</a:t>
+              <a:rPr lang="en-US" sz="1400" b="1" dirty="0"/>
+              <a:t>Fokus auf Regionen und Sektoren, in denen sich die Armen konzentrieren. </a:t>
             </a:r>
           </a:p>
           <a:p>
-            <a:pPr marL="914400" lvl="3" indent="-365760" algn="just"/>
             <a:r>
-              <a:rPr lang="en-US" sz="1300" dirty="0">
-                <a:solidFill>
-                  <a:srgbClr val="000000"/>
-                </a:solidFill>
-                <a:cs typeface="Calibri" panose="020F0502020204030204" pitchFamily="34" charset="0"/>
-              </a:rPr>
-              <a:t>Etwa 30% des Portfolios flossen in Landwirtschaft und ländliche Gebiete (gegenüber 6% im vorherigen Zyklus)</a:t>
+              <a:rPr lang="en-US" sz="1400" b="1" dirty="0"/>
+              <a:t>Subsistenzlandwirtschaftliche Vorhaben sollen von 6 % im vorherigen CPF auf 20 % steigen.</a:t>
             </a:r>
-            <a:endParaRPr lang="en-US" sz="1400" dirty="0"/>
-          </a:p>
-          <a:p>
-            <a:pPr lvl="2" algn="just"/>
+          </a:p>
+          <a:p>
             <a:r>
-              <a:rPr lang="en-US" sz="1400" dirty="0"/>
-              <a:t>Ein Großteil der Ressourcen wurde für Investitionen in die Infrastruktur aufgewendet, insbesondere für den ländlichen Wiederaufbau und die Wiederherstellung nach Zyklonen.</a:t>
+              <a:rPr lang="en-US" sz="1400" b="1" dirty="0"/>
+              <a:t>Rund 30 % des Portfolios entfielen auf die Landwirtschaft und ländliche Gebiete (gegenüber 6 % im vorherigen Zyklus).</a:t>
             </a:r>
           </a:p>
           <a:p>
-            <a:pPr marL="914400" lvl="3" indent="-365760" algn="just"/>
             <a:r>
-              <a:rPr lang="en-US" sz="1300" dirty="0">
-                <a:solidFill>
-                  <a:srgbClr val="000000"/>
-                </a:solidFill>
-                <a:cs typeface="Calibri" panose="020F0502020204030204" pitchFamily="34" charset="0"/>
-              </a:rPr>
-              <a:t>Übernahme eines integrativen Ansatzes, der Investitionen in Infrastruktur und sozialen Schutz bündelt.</a:t>
+              <a:rPr lang="en-US" sz="1400" b="1" dirty="0"/>
+              <a:t>Ein großer Teil der Mittel war Investitionen in die Infrastruktur gewidmet, insbesondere in ländlichen Gebieten und im Wiederaufbau nach Wirbelstürmen.</a:t>
             </a:r>
           </a:p>
           <a:p>
-            <a:pPr marL="914400" lvl="3" indent="-365760" algn="just"/>
             <a:r>
-              <a:rPr lang="en-US" sz="1300" dirty="0">
-                <a:solidFill>
-                  <a:srgbClr val="000000"/>
-                </a:solidFill>
-                <a:cs typeface="Calibri" panose="020F0502020204030204" pitchFamily="34" charset="0"/>
-              </a:rPr>
-              <a:t>Priorisierung von Maßnahmen für Cabo Delgado (GJ 2022).</a:t>
+              <a:rPr lang="en-US" sz="1400" b="1" dirty="0"/>
+              <a:t>Einführung eines integrativen Ansatzes, der Investitionen in Infrastruktur und sozialen Schutz bündelt.</a:t>
             </a:r>
           </a:p>
           <a:p>
-            <a:pPr lvl="2" algn="just"/>
             <a:r>
-              <a:rPr lang="en-US" sz="1400" dirty="0"/>
-              <a:t>Fokus auf die Verbesserung der makroökonomischen Managementkapazitäten, insbesondere im Schuldenmanagement, bei Fiskalrisiken und bei öffentlichen Investitionen.</a:t>
+              <a:rPr lang="en-US" sz="1400" b="1" dirty="0"/>
+              <a:t>Priorisierung der Reaktionen auf Cabo Delgado (HJ 2022).</a:t>
             </a:r>
           </a:p>
           <a:p>
-            <a:pPr lvl="2" algn="just"/>
             <a:r>
-              <a:rPr lang="en-US" sz="1400" dirty="0"/>
-              <a:t>Der vorherige CPF legte großen Wert auf Studien, die ein besseres Verständnis der Herausforderungen des Landes ermöglichen sollten, wie die Privatsektor-Diagnose des Landes, das Country Economic Memorandum, die Stadtüberprüfung und die Diagnose ländlicher Einkommen, unter anderem. </a:t>
+              <a:rPr lang="en-US" sz="1400" b="1" dirty="0"/>
+              <a:t>Fokus auf die Verbesserung der Fähigkeit zum makroökonomischen Management, insbesondere des Schuldenmanagements, der Haushaltsrisiken und der öffentlichen Investitionen.</a:t>
             </a:r>
           </a:p>
           <a:p>
-            <a:pPr marL="914400" lvl="3" indent="-365760" algn="just"/>
             <a:r>
-              <a:rPr lang="en-US" sz="1300" dirty="0">
-                <a:solidFill>
-                  <a:srgbClr val="000000"/>
-                </a:solidFill>
-                <a:cs typeface="Calibri" panose="020F0502020204030204" pitchFamily="34" charset="0"/>
-              </a:rPr>
-              <a:t>Eine Studie zu den Auswirkungen des Klimawandels (CCDR), eine Aktualisierung der Armutsstudie (Poverty Assessment) und eine detaillierte Analyse der Geschlechterproblematik (Gender Assessment) sind in Bearbeitung.</a:t>
+              <a:rPr lang="en-US" sz="1400" b="1" dirty="0"/>
+              <a:t>Der vorherige CPF maß Studien große Priorität bei, die ein besseres Verständnis der Herausforderungen des Landes ermöglichen sollten, etwa die Diagnose des Privatsektors des Landes, das Wirtschaftsmemorandum des Landes, die Stadtüberprüfung und die Diagnose der ländlichen Einkommen, unter anderem. </a:t>
             </a:r>
-            <a:endParaRPr lang="pt" sz="1300" dirty="0">
-              <a:solidFill>
-                <a:srgbClr val="000000"/>
-              </a:solidFill>
-              <a:cs typeface="Calibri" panose="020F0502020204030204" pitchFamily="34" charset="0"/>
-            </a:endParaRPr>
-          </a:p>
-          <a:p>
-            <a:pPr marL="0" lvl="2" indent="0" algn="just">
-              <a:buNone/>
-            </a:pPr>
-            <a:endParaRPr lang="en-US" sz="1400" dirty="0">
-              <a:solidFill>
-                <a:srgbClr val="000000"/>
-              </a:solidFill>
-              <a:ea typeface="Times New Roman" panose="02020603050405020304" pitchFamily="18" charset="0"/>
-              <a:cs typeface="Times New Roman" panose="02020603050405020304" pitchFamily="18" charset="0"/>
-            </a:endParaRPr>
-          </a:p>
-          <a:p>
-            <a:pPr lvl="2" algn="just"/>
-            <a:endParaRPr lang="en-US" sz="1400" dirty="0">
-              <a:solidFill>
-                <a:srgbClr val="000000"/>
-              </a:solidFill>
-              <a:cs typeface="Times New Roman" panose="02020603050405020304" pitchFamily="18" charset="0"/>
-            </a:endParaRPr>
-          </a:p>
-          <a:p>
-            <a:pPr algn="just"/>
-            <a:endParaRPr lang="en-US" dirty="0">
-              <a:latin typeface="+mn-lt"/>
-            </a:endParaRPr>
+          </a:p>
+          <a:p>
+            <a:r>
+              <a:rPr lang="en-US" sz="1400" b="1" dirty="0"/>
+              <a:t>Eine Studie zu den Auswirkungen des Klimawandels (CCDR), eine Aktualisierung der Armutsstudie (Poverty Assessment) und eine detaillierte Analyse der Geschlechterfrage (Gender Assessment) sind in Arbeit.</a:t>
+            </a:r>
+          </a:p>
+          <a:p>
+            <a:r>
+              <a:rPr lang="en-US" sz="1400" b="1" dirty="0"/>
+              <a:t/>
+            </a:r>
+          </a:p>
+          <a:p>
+            <a:r>
+              <a:rPr lang="en-US" sz="1400" b="1" dirty="0"/>
+              <a:t/>
+            </a:r>
+          </a:p>
+          <a:p>
+            <a:r>
+              <a:rPr lang="en-US" sz="1400" b="1" dirty="0"/>
+              <a:t/>
+            </a:r>
           </a:p>
         </p:txBody>
       </p:sp>
@@ -27011,9 +26580,11 @@
                 <a:ea typeface="+mn-ea"/>
                 <a:cs typeface="+mn-cs"/>
               </a:rPr>
-              <a:t>Endgültige Mittelzuweisung</a:t>
+              <a:t>Endgültige Mittelzuweisung
+</a:t>
             </a:r>
-            <a:br/>
+          </a:p>
+          <a:p>
             <a:r>
               <a:rPr lang="pt-BR" sz="1000" cap="all" dirty="0">
                 <a:solidFill>
@@ -27025,26 +26596,6 @@
               </a:rPr>
               <a:t/>
             </a:r>
-            <a:br/>
-            <a:r>
-              <a:rPr lang="pt-BR" sz="1000" cap="all" dirty="0">
-                <a:solidFill>
-                  <a:schemeClr val="tx1"/>
-                </a:solidFill>
-                <a:latin typeface="+mj-lt"/>
-                <a:ea typeface="+mn-ea"/>
-                <a:cs typeface="+mn-cs"/>
-              </a:rPr>
-              <a:t/>
-            </a:r>
-            <a:endParaRPr lang="en-US" sz="1000" cap="all" dirty="0">
-              <a:solidFill>
-                <a:schemeClr val="tx1"/>
-              </a:solidFill>
-              <a:latin typeface="+mj-lt"/>
-              <a:ea typeface="+mn-ea"/>
-              <a:cs typeface="+mn-cs"/>
-            </a:endParaRPr>
           </a:p>
         </p:txBody>
       </p:sp>
@@ -27076,9 +26627,8 @@
           <a:p>
             <a:r>
               <a:rPr lang="en-US"/>
-              <a:t>CPF 2023-2027. Öffentliche Version. Maputo, Mai 2022.</a:t>
+              <a:t>CPF 2023-2027. Öffentliche Fassung. Maputo, Mai 2022.</a:t>
             </a:r>
-            <a:endParaRPr lang="en-US" dirty="0"/>
           </a:p>
         </p:txBody>
       </p:sp>
@@ -27202,19 +26752,15 @@
           <a:p>
             <a:r>
               <a:rPr lang="en-US" sz="2400" dirty="0"/>
-              <a:t>CPF GJ2017-2021: Ergebnisse </a:t>
+              <a:t>CPF HJ2017-2021: Ergebnisse 
+</a:t>
             </a:r>
-            <a:br/>
+          </a:p>
+          <a:p>
             <a:r>
               <a:rPr lang="en-US" sz="2400" dirty="0"/>
               <a:t/>
             </a:r>
-            <a:br/>
-            <a:r>
-              <a:rPr lang="en-US" sz="2400" dirty="0"/>
-              <a:t/>
-            </a:r>
-            <a:endParaRPr lang="en-US" sz="2400" b="0" i="1" dirty="0"/>
           </a:p>
         </p:txBody>
       </p:sp>
@@ -27244,9 +26790,6 @@
           <a:bodyPr/>
           <a:lstStyle/>
           <a:p>
-            <a:pPr marL="0" indent="0" algn="just">
-              <a:buNone/>
-            </a:pPr>
             <a:r>
               <a:rPr lang="en-US" sz="1400" b="0" i="0" u="none" strike="noStrike" dirty="0">
                 <a:highlight>
@@ -27256,19 +26799,10 @@
                 </a:highlight>
                 <a:latin typeface="Arial"/>
               </a:rPr>
-              <a:t>Der CPF - AF17-AF21 wurde in einem schwierigen wirtschaftlichen Umfeld vorbereitet und umgesetzt. Die Umsetzung war jedoch </a:t>
+              <a:t>Der CPF HJ17-HJ21 wurde in einem ungünstigen wirtschaftlichen Kontext erarbeitet und umgesetzt. Dennoch verlief die Umsetzung mäßig zufriedenstellend.</a:t>
             </a:r>
-            <a:r>
-              <a:rPr lang="en-US" sz="1400" b="1" i="0" u="none" strike="noStrike" dirty="0">
-                <a:highlight>
-                  <a:srgbClr val="000000">
-                    <a:alpha val="0"/>
-                  </a:srgbClr>
-                </a:highlight>
-                <a:latin typeface="Arial"/>
-              </a:rPr>
-              <a:t>mäßig zufriedenstellend</a:t>
-            </a:r>
+          </a:p>
+          <a:p>
             <a:r>
               <a:rPr lang="en-US" sz="1400" b="0" i="0" u="none" strike="noStrike" dirty="0">
                 <a:highlight>
@@ -27278,25 +26812,8 @@
                 </a:highlight>
                 <a:latin typeface="Arial"/>
               </a:rPr>
-              <a:t>.</a:t>
+              <a:t>Der CPF erreichte eines seiner neun strategischen Ziele (SO) zu 100 %; sechs wurden weitgehend erreicht und zwei „teilweise erreicht“.</a:t>
             </a:r>
-          </a:p>
-          <a:p>
-            <a:pPr marL="0" indent="0" algn="just">
-              <a:buNone/>
-            </a:pPr>
-            <a:r>
-              <a:rPr lang="en-US" sz="1400" b="0" i="0" u="none" strike="noStrike" dirty="0">
-                <a:highlight>
-                  <a:srgbClr val="000000">
-                    <a:alpha val="0"/>
-                  </a:srgbClr>
-                </a:highlight>
-                <a:latin typeface="Arial"/>
-              </a:rPr>
-              <a:t>Der CPF erreichte 100% eines seiner neun strategischen Ziele (SO); sechs wurden größtenteils erreicht und zwei wurden „teilweise erreicht“.</a:t>
-            </a:r>
-            <a:endParaRPr lang="en-US" dirty="0"/>
           </a:p>
         </p:txBody>
       </p:sp>
@@ -27461,7 +26978,7 @@
                           <a:ea typeface="Times New Roman" panose="02020603050405020304" pitchFamily="18" charset="0"/>
                           <a:cs typeface="Times New Roman" panose="02020603050405020304" pitchFamily="18" charset="0"/>
                         </a:rPr>
-                        <a:t>Classification</a:t>
+                        <a:t>Klassifizierung</a:t>
                       </a:r>
                       <a:endParaRPr lang="en-US" sz="1300" dirty="0">
                         <a:effectLst/>
@@ -27576,7 +27093,7 @@
                           <a:ea typeface="Times New Roman" panose="02020603050405020304" pitchFamily="18" charset="0"/>
                           <a:cs typeface="Times New Roman" panose="02020603050405020304" pitchFamily="18" charset="0"/>
                         </a:rPr>
-                        <a:t>Focus Area 1: </a:t>
+                        <a:t>Schwerpunktbereich 1: </a:t>
                       </a:r>
                       <a:endParaRPr lang="en-US" sz="1300" dirty="0">
                         <a:effectLst/>
@@ -27821,8 +27338,20 @@
                           <a:ea typeface="Times New Roman" panose="02020603050405020304" pitchFamily="18" charset="0"/>
                           <a:cs typeface="Times New Roman" panose="02020603050405020304" pitchFamily="18" charset="0"/>
                         </a:rPr>
-                        <a:t>Mostly achieved 
-</a:t>
+                        <a:t>Größtenteils erreicht </a:t>
+                      </a:r>
+                      <a:br/>
+                      <a:r>
+                        <a:rPr lang="en-US" sz="1300" dirty="0">
+                          <a:solidFill>
+                            <a:srgbClr val="000000"/>
+                          </a:solidFill>
+                          <a:effectLst/>
+                          <a:latin typeface="+mn-lt"/>
+                          <a:ea typeface="Times New Roman" panose="02020603050405020304" pitchFamily="18" charset="0"/>
+                          <a:cs typeface="Times New Roman" panose="02020603050405020304" pitchFamily="18" charset="0"/>
+                        </a:rPr>
+                        <a:t/>
                       </a:r>
                       <a:endParaRPr lang="en-US" sz="1300" dirty="0">
                         <a:effectLst/>
@@ -28022,7 +27551,7 @@
                           <a:ea typeface="Times New Roman" panose="02020603050405020304" pitchFamily="18" charset="0"/>
                           <a:cs typeface="Times New Roman" panose="02020603050405020304" pitchFamily="18" charset="0"/>
                         </a:rPr>
-                        <a:t>Mostly achieved </a:t>
+                        <a:t>Größtenteils erreicht </a:t>
                       </a:r>
                       <a:endParaRPr lang="en-US" sz="1300" dirty="0">
                         <a:effectLst/>
@@ -28225,8 +27754,20 @@
                           <a:ea typeface="Times New Roman" panose="02020603050405020304" pitchFamily="18" charset="0"/>
                           <a:cs typeface="Times New Roman" panose="02020603050405020304" pitchFamily="18" charset="0"/>
                         </a:rPr>
-                        <a:t>Partially achieved 
-</a:t>
+                        <a:t>Teilweise erreicht </a:t>
+                      </a:r>
+                      <a:br/>
+                      <a:r>
+                        <a:rPr lang="en-US" sz="1300" dirty="0">
+                          <a:solidFill>
+                            <a:srgbClr val="000000"/>
+                          </a:solidFill>
+                          <a:effectLst/>
+                          <a:latin typeface="+mn-lt"/>
+                          <a:ea typeface="Times New Roman" panose="02020603050405020304" pitchFamily="18" charset="0"/>
+                          <a:cs typeface="Times New Roman" panose="02020603050405020304" pitchFamily="18" charset="0"/>
+                        </a:rPr>
+                        <a:t/>
                       </a:r>
                       <a:endParaRPr lang="en-US" sz="1300" dirty="0">
                         <a:effectLst/>
@@ -28429,7 +27970,20 @@
                           <a:ea typeface="Times New Roman" panose="02020603050405020304" pitchFamily="18" charset="0"/>
                           <a:cs typeface="Times New Roman" panose="02020603050405020304" pitchFamily="18" charset="0"/>
                         </a:rPr>
-                        <a:t>Achieved </a:t>
+                        <a:t>Erreicht </a:t>
+                      </a:r>
+                      <a:br/>
+                      <a:r>
+                        <a:rPr lang="en-US" sz="1300" kern="1200" dirty="0">
+                          <a:solidFill>
+                            <a:srgbClr val="000000"/>
+                          </a:solidFill>
+                          <a:effectLst/>
+                          <a:latin typeface="+mn-lt"/>
+                          <a:ea typeface="Times New Roman" panose="02020603050405020304" pitchFamily="18" charset="0"/>
+                          <a:cs typeface="Times New Roman" panose="02020603050405020304" pitchFamily="18" charset="0"/>
+                        </a:rPr>
+                        <a:t/>
                       </a:r>
                       <a:r>
                         <a:rPr lang="en-US" sz="1300" dirty="0">
@@ -28563,7 +28117,7 @@
                           <a:ea typeface="Times New Roman" panose="02020603050405020304" pitchFamily="18" charset="0"/>
                           <a:cs typeface="Times New Roman" panose="02020603050405020304" pitchFamily="18" charset="0"/>
                         </a:rPr>
-                        <a:t>Focus Area 2: </a:t>
+                        <a:t>Schwerpunktbereich 2: </a:t>
                       </a:r>
                       <a:endParaRPr lang="en-US" sz="1300" dirty="0">
                         <a:effectLst/>
@@ -28631,7 +28185,7 @@
                           <a:ea typeface="Times New Roman" panose="02020603050405020304" pitchFamily="18" charset="0"/>
                           <a:cs typeface="Times New Roman" panose="02020603050405020304" pitchFamily="18" charset="0"/>
                         </a:rPr>
-                        <a:t>Investing in Human Capital – Moderately Satisfactory</a:t>
+                        <a:t>Investitionen in das Humankapital – Mäßig zufriedenstellend</a:t>
                       </a:r>
                       <a:endParaRPr lang="en-US" sz="1300" dirty="0">
                         <a:effectLst/>
@@ -28898,7 +28452,7 @@
                           <a:ea typeface="Times New Roman" panose="02020603050405020304" pitchFamily="18" charset="0"/>
                           <a:cs typeface="Times New Roman" panose="02020603050405020304" pitchFamily="18" charset="0"/>
                         </a:rPr>
-                        <a:t>Mostly </a:t>
+                        <a:t>Größtenteils erreicht</a:t>
                       </a:r>
                       <a:r>
                         <a:rPr lang="en-US" sz="1300" dirty="0" err="1">
@@ -29113,7 +28667,7 @@
                           <a:ea typeface="Times New Roman" panose="02020603050405020304" pitchFamily="18" charset="0"/>
                           <a:cs typeface="Times New Roman" panose="02020603050405020304" pitchFamily="18" charset="0"/>
                         </a:rPr>
-                        <a:t>Mostly </a:t>
+                        <a:t>Größtenteils erreicht</a:t>
                       </a:r>
                       <a:r>
                         <a:rPr lang="en-US" sz="1300" dirty="0" err="1">
@@ -29328,7 +28882,7 @@
                           <a:ea typeface="Times New Roman" panose="02020603050405020304" pitchFamily="18" charset="0"/>
                           <a:cs typeface="Times New Roman" panose="02020603050405020304" pitchFamily="18" charset="0"/>
                         </a:rPr>
-                        <a:t>Mostly achieved </a:t>
+                        <a:t>Größtenteils erreicht </a:t>
                       </a:r>
                       <a:endParaRPr lang="en-US" sz="1300" dirty="0">
                         <a:effectLst/>
@@ -29449,7 +29003,7 @@
                           <a:ea typeface="Times New Roman" panose="02020603050405020304" pitchFamily="18" charset="0"/>
                           <a:cs typeface="Times New Roman" panose="02020603050405020304" pitchFamily="18" charset="0"/>
                         </a:rPr>
-                        <a:t>Focus Area 3: </a:t>
+                        <a:t>Schwerpunktbereich 3: </a:t>
                       </a:r>
                       <a:endParaRPr lang="en-US" sz="1300" dirty="0">
                         <a:effectLst/>
@@ -29691,8 +29245,17 @@
                           <a:ea typeface="Times New Roman" panose="02020603050405020304" pitchFamily="18" charset="0"/>
                           <a:cs typeface="Times New Roman" panose="02020603050405020304" pitchFamily="18" charset="0"/>
                         </a:rPr>
-                        <a:t>Mostly achieved 
-</a:t>
+                        <a:t>Größtenteils erreicht </a:t>
+                      </a:r>
+                      <a:br/>
+                      <a:r>
+                        <a:rPr lang="en-US" sz="1300" dirty="0">
+                          <a:effectLst/>
+                          <a:latin typeface="+mn-lt"/>
+                          <a:ea typeface="Times New Roman" panose="02020603050405020304" pitchFamily="18" charset="0"/>
+                          <a:cs typeface="Times New Roman" panose="02020603050405020304" pitchFamily="18" charset="0"/>
+                        </a:rPr>
+                        <a:t/>
                       </a:r>
                     </a:p>
                   </a:txBody>
@@ -29904,8 +29467,20 @@
                           <a:ea typeface="Times New Roman" panose="02020603050405020304" pitchFamily="18" charset="0"/>
                           <a:cs typeface="Times New Roman" panose="02020603050405020304" pitchFamily="18" charset="0"/>
                         </a:rPr>
-                        <a:t>Partially achieved 
-</a:t>
+                        <a:t>Teilweise erreicht </a:t>
+                      </a:r>
+                      <a:br/>
+                      <a:r>
+                        <a:rPr lang="en-US" sz="1300" dirty="0">
+                          <a:solidFill>
+                            <a:srgbClr val="000000"/>
+                          </a:solidFill>
+                          <a:effectLst/>
+                          <a:latin typeface="+mn-lt"/>
+                          <a:ea typeface="Times New Roman" panose="02020603050405020304" pitchFamily="18" charset="0"/>
+                          <a:cs typeface="Times New Roman" panose="02020603050405020304" pitchFamily="18" charset="0"/>
+                        </a:rPr>
+                        <a:t/>
                       </a:r>
                       <a:endParaRPr lang="en-US" sz="1300" dirty="0">
                         <a:effectLst/>
@@ -30031,14 +29606,11 @@
           </a:bodyPr>
           <a:lstStyle/>
           <a:p>
-            <a:pPr marL="0" indent="0">
-              <a:buNone/>
-            </a:pPr>
             <a:r>
               <a:rPr lang="en-US" sz="1100" i="1" dirty="0">
                 <a:latin typeface="+mj-lt"/>
               </a:rPr>
-              <a:t>Die Einstufung der Ziele folgt der Kategorie „erreicht“, „größtenteils erreicht“, „teilweise erreicht“ und „nicht erreicht“, abhängig vom Erreichungsgrad der Indikatoren und dem Vorhandensein qualitativer Belege.</a:t>
+              <a:t>Die Einstufung der Ziele folgt den Kategorien „erreicht“, „weitgehend erreicht“, „teilweise erreicht“ und „nicht erreicht“, abhängig vom Grad der Erreichung der Indikatoren und vom Vorliegen qualitativer Belege.</a:t>
             </a:r>
           </a:p>
         </p:txBody>
@@ -30066,9 +29638,8 @@
           <a:p>
             <a:r>
               <a:rPr lang="en-US"/>
-              <a:t>CPF 2023-2027. Öffentliche Version. Maputo, Mai 2022.</a:t>
+              <a:t>CPF 2023-2027. Öffentliche Fassung. Maputo, Mai 2022.</a:t>
             </a:r>
-            <a:endParaRPr lang="en-US" dirty="0"/>
           </a:p>
         </p:txBody>
       </p:sp>
@@ -30192,26 +29763,15 @@
           <a:p>
             <a:r>
               <a:rPr lang="en-US" sz="2400" dirty="0"/>
-              <a:t>CPF GJ2017-2021: Gelernte Lektionen</a:t>
+              <a:t>CPF HJ2017-2021: Gewonnene Erkenntnisse
+</a:t>
             </a:r>
-            <a:br/>
+          </a:p>
+          <a:p>
             <a:r>
               <a:rPr lang="en-US" sz="2400" dirty="0"/>
               <a:t/>
             </a:r>
-            <a:br/>
-            <a:r>
-              <a:rPr lang="en-US" sz="2400" dirty="0"/>
-              <a:t/>
-            </a:r>
-            <a:endParaRPr lang="pt" sz="2400" b="0" i="1" u="none" strike="noStrike" dirty="0">
-              <a:highlight>
-                <a:srgbClr val="000000">
-                  <a:alpha val="0"/>
-                </a:srgbClr>
-              </a:highlight>
-              <a:latin typeface="Arial"/>
-            </a:endParaRPr>
           </a:p>
         </p:txBody>
       </p:sp>
@@ -30243,13 +29803,6 @@
           </a:bodyPr>
           <a:lstStyle/>
           <a:p>
-            <a:pPr marL="365760" lvl="3" indent="-342900" algn="just">
-              <a:spcBef>
-                <a:spcPts val="1200"/>
-              </a:spcBef>
-              <a:buFont typeface="+mj-lt"/>
-              <a:buAutoNum type="arabicPeriod"/>
-            </a:pPr>
             <a:r>
               <a:rPr lang="en-US" b="1" dirty="0">
                 <a:highlight>
@@ -30258,36 +29811,10 @@
                   </a:srgbClr>
                 </a:highlight>
               </a:rPr>
-              <a:t>Bedeutung einer soliden Ausrichtung an den Regierungszielen, </a:t>
+              <a:t>Bedeutung einer soliden Ausrichtung an den Zielen der Regierung, des Einsatzes zusätzlicher Mittel, der Nutzung einer Reihe von Finanzierungsinstrumenten und weiterer Aspekte (zusätzliche Finanzierung).</a:t>
             </a:r>
-            <a:r>
-              <a:rPr lang="en-US" dirty="0">
-                <a:highlight>
-                  <a:srgbClr val="000000">
-                    <a:alpha val="0"/>
-                  </a:srgbClr>
-                </a:highlight>
-              </a:rPr>
-              <a:t>der Nutzung zusätzlicher Ressourcen, der Verwendung einer Reihe von Finanzierungsinstrumenten und weiterer Maßnahmen (Zusatzfinanzierung).</a:t>
-            </a:r>
-          </a:p>
-          <a:p>
-            <a:pPr marL="365760" lvl="3" indent="0" algn="just">
-              <a:spcBef>
-                <a:spcPts val="1200"/>
-              </a:spcBef>
-              <a:buNone/>
-            </a:pPr>
-            <a:r>
-              <a:rPr lang="pt" b="1" dirty="0">
-                <a:highlight>
-                  <a:srgbClr val="000000">
-                    <a:alpha val="0"/>
-                  </a:srgbClr>
-                </a:highlight>
-              </a:rPr>
-              <a:t>	</a:t>
-            </a:r>
+          </a:p>
+          <a:p>
             <a:r>
               <a:rPr lang="en-US" b="1" dirty="0">
                 <a:highlight>
@@ -30296,160 +29823,44 @@
                   </a:srgbClr>
                 </a:highlight>
               </a:rPr>
-              <a:t>Flexibilität</a:t>
+              <a:t>	Flexibilität, um das Programm rasch an sich verändernde Gegebenheiten und neue Regierungsprioritäten anzupassen.</a:t>
             </a:r>
+          </a:p>
+          <a:p>
             <a:r>
-              <a:rPr lang="en-US" dirty="0">
+              <a:rPr lang="en-US" b="1" dirty="0">
                 <a:highlight>
                   <a:srgbClr val="000000">
                     <a:alpha val="0"/>
                   </a:srgbClr>
                 </a:highlight>
               </a:rPr>
-              <a:t>, das Programm schnell an veränderte Realitäten und neue Regierungsprioritäten anzupassen.</a:t>
+              <a:t>Kontinuierliche Unterstützung bei Krisenreaktion, Vorsorge und Prävention, wie der frühere CPF-Schwerpunkt auf Erholung und Resilienz zeigt – wobei die WBG ihre technische Expertise und ihre Fähigkeit zur Ressourcenmobilisierung nutzte, um die Reaktionskapazitäten zu erhöhen und in Prävention zu investieren. </a:t>
             </a:r>
-            <a:endParaRPr lang="pt" dirty="0">
-              <a:highlight>
-                <a:srgbClr val="000000">
-                  <a:alpha val="0"/>
-                </a:srgbClr>
-              </a:highlight>
-            </a:endParaRPr>
-          </a:p>
-          <a:p>
-            <a:pPr marL="365760" lvl="3" indent="-342900" algn="just">
-              <a:spcBef>
-                <a:spcPts val="1200"/>
-              </a:spcBef>
-              <a:buFont typeface="+mj-lt"/>
-              <a:buAutoNum type="arabicPeriod" startAt="2"/>
-            </a:pPr>
+          </a:p>
+          <a:p>
             <a:r>
-              <a:rPr lang="en-US" b="1" i="0" u="none" strike="noStrike" dirty="0">
+              <a:rPr lang="en-US" b="1" dirty="0">
                 <a:highlight>
                   <a:srgbClr val="000000">
                     <a:alpha val="0"/>
                   </a:srgbClr>
                 </a:highlight>
-                <a:latin typeface="Arial"/>
               </a:rPr>
-              <a:t>Fortgesetzte Unterstützung für die Krisenreaktion, </a:t>
+              <a:t>Armut und Landwirtschaft. Obwohl die Unterstützung der landwirtschaftlichen Produktivität und der ländlichen Entwicklung bis zu 30 Prozent der gesamten Mittelzuweisung der Weltbank ausmacht, scheint sie nur geringfügig zur Steigerung der aggregierten landwirtschaftlichen Produktivität und damit zur Armutsbekämpfung beigetragen zu haben.</a:t>
             </a:r>
+          </a:p>
+          <a:p>
             <a:r>
-              <a:rPr lang="en-US" i="0" u="none" strike="noStrike" dirty="0">
+              <a:rPr lang="en-US" b="1" dirty="0">
                 <a:highlight>
                   <a:srgbClr val="000000">
                     <a:alpha val="0"/>
                   </a:srgbClr>
                 </a:highlight>
-                <a:latin typeface="Arial"/>
               </a:rPr>
-              <a:t>Vorsorge und Prävention, wie durch den Schwerpunkt des vorigen CPF auf Erholung und Resilienz belegt – bei dem die WBG ihr technisches Fachwissen und ihre Ressourcenmobilisierungskapazität nutzte, um die Reaktionskapazitäten zu stärken und in die Prävention zu investieren .</a:t>
+              <a:t>Ein erneuter Fokus auf institutionelle Stärkung und Wirtschaftsreformen könnte die Wirkung des künftigen CPF erhöhen; dies würde die Rückkehr zu Haushaltsunterstützungsoperationen in Kombination mit technischer Hilfe und Studien beinhalten – bei Bedarf ergänzt durch weitere Finanzierungsinstrumente.</a:t>
             </a:r>
-            <a:r>
-              <a:rPr lang="pt" i="0" u="none" strike="noStrike" dirty="0">
-                <a:highlight>
-                  <a:srgbClr val="000000">
-                    <a:alpha val="0"/>
-                  </a:srgbClr>
-                </a:highlight>
-                <a:latin typeface="Arial"/>
-              </a:rPr>
-              <a:t> </a:t>
-            </a:r>
-          </a:p>
-          <a:p>
-            <a:pPr marL="365760" lvl="3" indent="-342900" algn="just">
-              <a:spcBef>
-                <a:spcPts val="1200"/>
-              </a:spcBef>
-              <a:buFont typeface="+mj-lt"/>
-              <a:buAutoNum type="arabicPeriod" startAt="2"/>
-            </a:pPr>
-            <a:r>
-              <a:rPr lang="en-US" b="1" i="0" u="none" strike="noStrike" dirty="0">
-                <a:highlight>
-                  <a:srgbClr val="000000">
-                    <a:alpha val="0"/>
-                  </a:srgbClr>
-                </a:highlight>
-                <a:latin typeface="Arial"/>
-              </a:rPr>
-              <a:t>Armut und Landwirtschaft. </a:t>
-            </a:r>
-            <a:r>
-              <a:rPr lang="en-US" i="0" u="none" strike="noStrike" dirty="0">
-                <a:highlight>
-                  <a:srgbClr val="000000">
-                    <a:alpha val="0"/>
-                  </a:srgbClr>
-                </a:highlight>
-                <a:latin typeface="Arial"/>
-              </a:rPr>
-              <a:t>Obwohl die Unterstützung für landwirtschaftliche Produktivität und ländliche Entwicklung bis zu 30 Prozent der gesamten finanziellen Mittelzuweisung der Weltbank ausmacht, scheint diese Unterstützung nur geringfügig zur Steigerung der gesamten landwirtschaftlichen Produktivität und damit</a:t>
-            </a:r>
-            <a:r>
-              <a:rPr lang="en-US" i="0" u="none" strike="noStrike">
-                <a:highlight>
-                  <a:srgbClr val="000000">
-                    <a:alpha val="0"/>
-                  </a:srgbClr>
-                </a:highlight>
-                <a:latin typeface="Arial"/>
-              </a:rPr>
-              <a:t>, </a:t>
-            </a:r>
-            <a:r>
-              <a:rPr lang="en-US">
-                <a:highlight>
-                  <a:srgbClr val="000000">
-                    <a:alpha val="0"/>
-                  </a:srgbClr>
-                </a:highlight>
-                <a:latin typeface="Arial"/>
-              </a:rPr>
-              <a:t>zur</a:t>
-            </a:r>
-            <a:r>
-              <a:rPr lang="en-US" i="0" u="none" strike="noStrike">
-                <a:highlight>
-                  <a:srgbClr val="000000">
-                    <a:alpha val="0"/>
-                  </a:srgbClr>
-                </a:highlight>
-                <a:latin typeface="Arial"/>
-              </a:rPr>
-              <a:t> </a:t>
-            </a:r>
-            <a:r>
-              <a:rPr lang="en-US" i="0" u="none" strike="noStrike" dirty="0">
-                <a:highlight>
-                  <a:srgbClr val="000000">
-                    <a:alpha val="0"/>
-                  </a:srgbClr>
-                </a:highlight>
-                <a:latin typeface="Arial"/>
-              </a:rPr>
-              <a:t>Armutsminderung beigetragen zu haben.</a:t>
-            </a:r>
-          </a:p>
-          <a:p>
-            <a:pPr marL="365760" lvl="3" indent="-342900" algn="just">
-              <a:spcBef>
-                <a:spcPts val="1200"/>
-              </a:spcBef>
-              <a:buFont typeface="+mj-lt"/>
-              <a:buAutoNum type="arabicPeriod" startAt="2"/>
-            </a:pPr>
-            <a:r>
-              <a:rPr lang="en-US" b="1" dirty="0"/>
-              <a:t>Ein erneuerter Fokus auf institutionelle Stärkung und Wirtschaftsreformen </a:t>
-            </a:r>
-            <a:r>
-              <a:rPr lang="en-US" dirty="0"/>
-              <a:t>könnte die Wirkung des künftigen CPF erhöhen, was die Wiederaufnahme von Budgethilfeoperationen in Verbindung mit technischer Hilfe und Studien beinhalten würde – ergänzt durch andere Finanzierungsinstrumente, wenn nötig.</a:t>
-            </a:r>
-            <a:endParaRPr lang="en-US" sz="1700" dirty="0"/>
           </a:p>
         </p:txBody>
       </p:sp>
@@ -30476,9 +29887,8 @@
           <a:p>
             <a:r>
               <a:rPr lang="en-US"/>
-              <a:t>CPF 2023-2027. Öffentliche Version. Maputo, Mai 2022.</a:t>
+              <a:t>CPF 2023-2027. Öffentliche Fassung. Maputo, Mai 2022.</a:t>
             </a:r>
-            <a:endParaRPr lang="en-US" dirty="0"/>
           </a:p>
         </p:txBody>
       </p:sp>
@@ -30600,29 +30010,17 @@
           </a:bodyPr>
           <a:lstStyle/>
           <a:p>
-            <a:pPr algn="ctr"/>
             <a:r>
               <a:rPr lang="en-US" sz="4000" dirty="0"/>
-              <a:t>Präsentationsstruktur</a:t>
+              <a:t>Aufbau der Präsentation
+</a:t>
             </a:r>
-            <a:br/>
+          </a:p>
+          <a:p>
             <a:r>
               <a:rPr lang="en-US" sz="4000" dirty="0"/>
               <a:t/>
             </a:r>
-            <a:br/>
-            <a:r>
-              <a:rPr lang="en-US" sz="4000" dirty="0"/>
-              <a:t/>
-            </a:r>
-            <a:endParaRPr lang="pt" sz="4000" b="0" i="1" u="none" strike="noStrike" dirty="0">
-              <a:highlight>
-                <a:srgbClr val="000000">
-                  <a:alpha val="0"/>
-                </a:srgbClr>
-              </a:highlight>
-              <a:latin typeface="Arial"/>
-            </a:endParaRPr>
           </a:p>
         </p:txBody>
       </p:sp>
@@ -30654,19 +30052,6 @@
           </a:bodyPr>
           <a:lstStyle/>
           <a:p>
-            <a:pPr marL="1371600" lvl="3" indent="-571500">
-              <a:lnSpc>
-                <a:spcPct val="100000"/>
-              </a:lnSpc>
-              <a:spcBef>
-                <a:spcPts val="1200"/>
-              </a:spcBef>
-              <a:spcAft>
-                <a:spcPts val="1200"/>
-              </a:spcAft>
-              <a:buFont typeface="+mj-lt"/>
-              <a:buAutoNum type="romanUcPeriod"/>
-            </a:pPr>
             <a:r>
               <a:rPr lang="en-US" sz="3200" b="1" dirty="0">
                 <a:solidFill>
@@ -30675,9 +30060,11 @@
                   </a:schemeClr>
                 </a:solidFill>
               </a:rPr>
-              <a:t>Sichtweise der Weltbankgruppe auf die wichtigsten strategischen Herausforderungen des Landes   </a:t>
+              <a:t>Sicht der Weltbankgruppe auf die wichtigsten strategischen Herausforderungen des Landes   
+</a:t>
             </a:r>
-            <a:br/>
+          </a:p>
+          <a:p>
             <a:r>
               <a:rPr lang="en-US" sz="3200" b="1" dirty="0">
                 <a:solidFill>
@@ -30686,9 +30073,10 @@
                   </a:schemeClr>
                 </a:solidFill>
               </a:rPr>
-              <a:t>Wichtigste Lehren aus dem vorigen CPF (2017-2021</a:t>
+              <a:t>Wichtigste Lehren aus dem vorherigen CPF (2017-2021)</a:t>
             </a:r>
-            <a:br/>
+          </a:p>
+          <a:p>
             <a:r>
               <a:rPr lang="en-US" sz="3200" b="1" dirty="0">
                 <a:solidFill>
@@ -30697,51 +30085,8 @@
                   </a:schemeClr>
                 </a:solidFill>
               </a:rPr>
-              <a:t/>
-            </a:r>
-            <a:r>
-              <a:rPr lang="pt-BR" sz="3200" b="1" i="0" u="none" strike="noStrike" dirty="0">
-                <a:solidFill>
-                  <a:schemeClr val="bg2">
-                    <a:lumMod val="90000"/>
-                  </a:schemeClr>
-                </a:solidFill>
-                <a:highlight>
-                  <a:srgbClr val="000000">
-                    <a:alpha val="0"/>
-                  </a:srgbClr>
-                </a:highlight>
-                <a:latin typeface="Arial"/>
-              </a:rPr>
-              <a:t>)</a:t>
-            </a:r>
-          </a:p>
-          <a:p>
-            <a:pPr marL="1371600" lvl="3" indent="-571500">
-              <a:lnSpc>
-                <a:spcPct val="100000"/>
-              </a:lnSpc>
-              <a:spcBef>
-                <a:spcPts val="1200"/>
-              </a:spcBef>
-              <a:spcAft>
-                <a:spcPts val="1200"/>
-              </a:spcAft>
-              <a:buFont typeface="+mj-lt"/>
-              <a:buAutoNum type="romanUcPeriod"/>
-            </a:pPr>
-            <a:r>
-              <a:rPr lang="en-US" sz="3200" b="1" dirty="0"/>
               <a:t>Erster Vorschlag für den CPF 2023-2027</a:t>
             </a:r>
-            <a:endParaRPr lang="pt" sz="3200" b="1" i="0" u="none" strike="noStrike" dirty="0">
-              <a:highlight>
-                <a:srgbClr val="000000">
-                  <a:alpha val="0"/>
-                </a:srgbClr>
-              </a:highlight>
-              <a:latin typeface="Arial"/>
-            </a:endParaRPr>
           </a:p>
         </p:txBody>
       </p:sp>
@@ -30768,9 +30113,8 @@
           <a:p>
             <a:r>
               <a:rPr lang="en-US"/>
-              <a:t>CPF 2023-2027. Öffentliche Version. Maputo, Mai 2022.</a:t>
+              <a:t>CPF 2023-2027. Öffentliche Fassung. Maputo, Mai 2022.</a:t>
             </a:r>
-            <a:endParaRPr lang="en-US" dirty="0"/>
           </a:p>
         </p:txBody>
       </p:sp>
@@ -30892,7 +30236,6 @@
           </a:bodyPr>
           <a:lstStyle/>
           <a:p>
-            <a:pPr algn="r" rtl="0"/>
             <a:r>
               <a:rPr lang="en-US" sz="2400" b="1" i="0" u="none" strike="noStrike" dirty="0">
                 <a:highlight>
@@ -30904,14 +30247,6 @@
               </a:rPr>
               <a:t>Regierungsprogramm und mittelfristige Strategie (1-2)</a:t>
             </a:r>
-            <a:endParaRPr lang="pt" sz="2400" b="1" i="0" u="none" strike="noStrike" dirty="0">
-              <a:highlight>
-                <a:srgbClr val="000000">
-                  <a:alpha val="0"/>
-                </a:srgbClr>
-              </a:highlight>
-              <a:latin typeface="Arial"/>
-            </a:endParaRPr>
           </a:p>
         </p:txBody>
       </p:sp>
@@ -30943,11 +30278,6 @@
           </a:bodyPr>
           <a:lstStyle/>
           <a:p>
-            <a:pPr algn="just" rtl="0">
-              <a:lnSpc>
-                <a:spcPct val="100000"/>
-              </a:lnSpc>
-            </a:pPr>
             <a:r>
               <a:rPr lang="en-US" sz="1400" b="1" i="0" u="none" strike="noStrike" dirty="0">
                 <a:highlight>
@@ -30957,26 +30287,10 @@
                 </a:highlight>
                 <a:latin typeface="Arial"/>
               </a:rPr>
-              <a:t>Die Regierung Mosambiks hat eine nationale Entwicklungsstrategie (ENDE) für 2015-2030 erarbeitet. </a:t>
+              <a:t>Die Regierung Mosambiks erarbeitet eine Nationale Entwicklungsstrategie (ENDE) für 2015-2030. Auf Grundlage des in dieser Strategie festgelegten Rahmens legt die Regierung anschließend sektorale und territoriale Entwicklungspläne fest; die entsprechenden Fünfjahrespläne; das mittelfristige Haushaltsszenario sowie den Sozial-, Wirtschafts- und Staatshaushaltsplan.</a:t>
             </a:r>
-            <a:r>
-              <a:rPr lang="en-US" sz="1400" i="0" u="none" strike="noStrike" dirty="0">
-                <a:highlight>
-                  <a:srgbClr val="000000">
-                    <a:alpha val="0"/>
-                  </a:srgbClr>
-                </a:highlight>
-                <a:latin typeface="Arial"/>
-              </a:rPr>
-              <a:t>Im Rahmen dieser Strategie legt die Regierung anschließend sektorale und territoriale Entwicklungspläne fest; die entsprechenden Fünfjahrespläne; das mittelfristige Finanzszenario sowie den Sozial-, Wirtschafts- und Staatshaushaltsplan.</a:t>
-            </a:r>
-          </a:p>
-          <a:p>
-            <a:pPr algn="just" rtl="0">
-              <a:lnSpc>
-                <a:spcPct val="100000"/>
-              </a:lnSpc>
-            </a:pPr>
+          </a:p>
+          <a:p>
             <a:r>
               <a:rPr lang="en-US" sz="1400" b="1" i="0" u="none" strike="noStrike" dirty="0">
                 <a:highlight>
@@ -30986,26 +30300,10 @@
                 </a:highlight>
                 <a:latin typeface="Arial"/>
               </a:rPr>
-              <a:t>ENDE: 2022-2042. Vision: </a:t>
+              <a:t>ENDE: 2022-2042. Vision: „Anhebung des Lebensstandards der Bevölkerung durch den strukturellen Wandel der Wirtschaft von einer Primärwirtschaft zu einer industrialisierten und dienstleistungsorientierten Wirtschaft“. Neue vorgeschlagene Schwerpunktbereiche: (i) wirtschaftlicher Wandel, (ii) sozialer Wandel, (iii) Regierungsführung und (iv) Umwelt und Kreislaufwirtschaft.</a:t>
             </a:r>
-            <a:r>
-              <a:rPr lang="en-US" sz="1400" i="0" u="none" strike="noStrike" dirty="0">
-                <a:highlight>
-                  <a:srgbClr val="000000">
-                    <a:alpha val="0"/>
-                  </a:srgbClr>
-                </a:highlight>
-                <a:latin typeface="Arial"/>
-              </a:rPr>
-              <a:t>„Verbesserung des Lebensstandards der Bevölkerung durch strukturelle Transformation der Wirtschaft von einer Primärwirtschaft zu einer industrialisierten Dienstleistungswirtschaft.“ Neu vorgeschlagene Schwerpunktbereiche: (i) wirtschaftliche Transformation, (ii) soziale Transformation, (iii) Staatsführung sowie (iv) Umwelt und Kreislaufwirtschaft.</a:t>
-            </a:r>
-          </a:p>
-          <a:p>
-            <a:pPr algn="just" rtl="0">
-              <a:lnSpc>
-                <a:spcPct val="100000"/>
-              </a:lnSpc>
-            </a:pPr>
+          </a:p>
+          <a:p>
             <a:r>
               <a:rPr lang="en-US" sz="1400" b="1" i="0" u="none" strike="noStrike" dirty="0">
                 <a:highlight>
@@ -31015,10 +30313,12 @@
                 </a:highlight>
                 <a:latin typeface="Arial"/>
               </a:rPr>
-              <a:t>Das Fünfjahresprogramm der Regierung (PQG) 2020-2024  </a:t>
+              <a:t>Das Fünfjahresprogramm der Regierung (PQG) 2020-2024 wird auch 2023-24 der wichtigste Leitfaden für staatliche Interventionen und Strategien bleiben. Ein neues PQG soll nach den nationalen Wahlen 2024 ausgearbeitet werden. Die Regierung hat im Rahmen des Prozesses zur Sicherstellung der Berechtigung für die Prevention and Resilience Allocation (PRA) im Rahmen von IDA19 eine Strategie zur Prävention von Konflikten und Gewalt entwickelt.</a:t>
             </a:r>
+          </a:p>
+          <a:p>
             <a:r>
-              <a:rPr lang="en-US" sz="1400" i="0" u="none" strike="noStrike" dirty="0">
+              <a:rPr lang="en-US" sz="1400" b="1" i="0" u="none" strike="noStrike" dirty="0">
                 <a:highlight>
                   <a:srgbClr val="000000">
                     <a:alpha val="0"/>
@@ -31026,69 +30326,47 @@
                 </a:highlight>
                 <a:latin typeface="Arial"/>
               </a:rPr>
-              <a:t>wird weiterhin der wichtigste Leitfaden für staatliche Maßnahmen und Strategien in den Jahren 2023-24 sein. Nach den Nationalwahlen 2024 wird ein neues PQG erwartet. Die Regierung hat eine Strategie zur Konflikt- und Gewaltprävention als Teil des Prozesses entwickelt, um die Förderfähigkeit für die Prävention- und Resilienz-Zuweisung (PRA, Prevention and Resilience Allocation) im Rahmen der IDA19 sicherzustellen.</a:t>
+              <a:t>Die Regierung verfügt zudem über eine solide Strategie für den Energiesektor. Die Energiestrategie für den Zeitraum 2015-2024 zielt darauf ab: (i) die Infrastruktur und die Energieerzeugung für lokale Märkte sowie die Energieexporte (Gas und Strom) zu steigern; (ii) den lokalen Zugang zu Strom von 25 Prozent im Jahr 2015 auf 62 Prozent bis Ende 2024 auszuweiten, was der wirtschaftlichen und sozialen Entwicklung des Landes einen erheblichen Schub verleihen dürfte.</a:t>
             </a:r>
           </a:p>
           <a:p>
-            <a:pPr marR="0" algn="just">
-              <a:lnSpc>
-                <a:spcPct val="100000"/>
-              </a:lnSpc>
-              <a:spcAft>
-                <a:spcPct val="0"/>
-              </a:spcAft>
-            </a:pPr>
             <a:r>
-              <a:rPr lang="en-US" b="1" dirty="0"/>
-              <a:t>Die Regierung verfügt auch über eine robuste Strategie für den Energiesektor</a:t>
+              <a:rPr lang="en-US" sz="1400" b="1" i="0" u="none" strike="noStrike" dirty="0">
+                <a:highlight>
+                  <a:srgbClr val="000000">
+                    <a:alpha val="0"/>
+                  </a:srgbClr>
+                </a:highlight>
+                <a:latin typeface="Arial"/>
+              </a:rPr>
+              <a:t>Die Regierung verabschiedete die Nationale Strategie zur Anpassung an den Klimawandel und zu dessen Eindämmung, die den gesamtpolitischen Rahmen für eine klimaresiliente Planung und Entwicklung vorgibt. Die laufende Überarbeitung der ENDE bietet die Gelegenheit, den Klimawandel in die Entwicklungsstrategie zu integrieren.</a:t>
             </a:r>
+          </a:p>
+          <a:p>
             <a:r>
-              <a:rPr lang="en-US" dirty="0"/>
-              <a:t>. Die Energiestrategie für den Zeitraum 2015-2024 zielt darauf ab: (i) Infrastruktur und Energieerzeugung für lokale Märkte und Energieexporte (Gas und Strom) auszubauen. (ii) Den lokalen Zugang zu Elektrizität von 25 Prozent im Jahr 2015 auf 62 Prozent bis Ende 2024 zu erweitern, was der wirtschaftlichen und sozialen Entwicklung des Landes erheblichen Auftrieb verleihen soll.</a:t>
+              <a:rPr lang="en-US" sz="1400" b="1" i="0" u="none" strike="noStrike" dirty="0">
+                <a:highlight>
+                  <a:srgbClr val="000000">
+                    <a:alpha val="0"/>
+                  </a:srgbClr>
+                </a:highlight>
+                <a:latin typeface="Arial"/>
+              </a:rPr>
+              <a:t/>
             </a:r>
           </a:p>
           <a:p>
-            <a:pPr marR="0" algn="just">
-              <a:lnSpc>
-                <a:spcPct val="100000"/>
-              </a:lnSpc>
-              <a:spcAft>
-                <a:spcPct val="0"/>
-              </a:spcAft>
-            </a:pPr>
             <a:r>
-              <a:rPr lang="en-US" b="1" dirty="0"/>
-              <a:t>Die Regierung hat die Nationale Strategie zur Anpassung an den Klimawandel und zur Minderung seiner Folgen verabschiedet</a:t>
+              <a:rPr lang="en-US" sz="1400" b="1" i="0" u="none" strike="noStrike" dirty="0">
+                <a:highlight>
+                  <a:srgbClr val="000000">
+                    <a:alpha val="0"/>
+                  </a:srgbClr>
+                </a:highlight>
+                <a:latin typeface="Arial"/>
+              </a:rPr>
+              <a:t/>
             </a:r>
-            <a:r>
-              <a:rPr lang="en-US" dirty="0"/>
-              <a:t>, die den übergeordneten politischen Rahmen für klimaresistente Planung und Entwicklung vorgibt. Die laufende Überarbeitung der ENDE bietet eine Gelegenheit, den Klimawandel in die Entwicklungsstrategie zu integrieren.</a:t>
-            </a:r>
-          </a:p>
-          <a:p>
-            <a:pPr marL="0" marR="0" algn="just">
-              <a:lnSpc>
-                <a:spcPct val="100000"/>
-              </a:lnSpc>
-              <a:spcBef>
-                <a:spcPct val="0"/>
-              </a:spcBef>
-              <a:spcAft>
-                <a:spcPct val="0"/>
-              </a:spcAft>
-            </a:pPr>
-            <a:endParaRPr lang="en-US" dirty="0">
-              <a:effectLst/>
-              <a:ea typeface="Times New Roman" panose="02020603050405020304" pitchFamily="18" charset="0"/>
-            </a:endParaRPr>
-          </a:p>
-          <a:p>
-            <a:pPr>
-              <a:lnSpc>
-                <a:spcPct val="100000"/>
-              </a:lnSpc>
-            </a:pPr>
-            <a:endParaRPr lang="en-US" dirty="0"/>
           </a:p>
         </p:txBody>
       </p:sp>
@@ -31120,7 +30398,6 @@
           </a:bodyPr>
           <a:lstStyle/>
           <a:p>
-            <a:pPr algn="ctr" rtl="0"/>
             <a:r>
               <a:rPr lang="en-US" sz="1600" b="1" i="0" u="none" strike="noStrike">
                 <a:highlight>
@@ -31133,7 +30410,6 @@
               </a:rPr>
               <a:t>Strategischer Planungsrahmen Mosambiks</a:t>
             </a:r>
-            <a:endParaRPr lang="en-US" sz="1600" b="1" dirty="0"/>
           </a:p>
         </p:txBody>
       </p:sp>
@@ -31160,9 +30436,8 @@
           <a:p>
             <a:r>
               <a:rPr lang="en-US"/>
-              <a:t>CPF 2023-2027. Öffentliche Version. Maputo, Mai 2022.</a:t>
+              <a:t>CPF 2023-2027. Öffentliche Fassung. Maputo, Mai 2022.</a:t>
             </a:r>
-            <a:endParaRPr lang="en-US" dirty="0"/>
           </a:p>
         </p:txBody>
       </p:sp>
@@ -31596,15 +30871,6 @@
             </a:lvl9pPr>
           </a:lstStyle>
           <a:p>
-            <a:pPr marL="0" indent="0" algn="just" rtl="0">
-              <a:lnSpc>
-                <a:spcPct val="100000"/>
-              </a:lnSpc>
-              <a:spcAft>
-                <a:spcPts val="800"/>
-              </a:spcAft>
-              <a:buNone/>
-            </a:pPr>
             <a:r>
               <a:rPr lang="en-US" sz="1400" b="1" i="0" u="none" strike="noStrike" dirty="0">
                 <a:highlight>
@@ -31614,20 +30880,12 @@
                 </a:highlight>
                 <a:latin typeface="Arial"/>
               </a:rPr>
-              <a:t>Die Regierung hat auch einen ehrgeizigen Plan zur Verbesserung der Governance auf der Grundlage des Diagnoseberichts zu Transparenz, Governance und Korruption im Nachgang der Krise der versteckten Schulden von 2016 verabschiedet.</a:t>
+              <a:t>Die Regierung hat zudem im Zuge der Krise um die versteckten Schulden von 2016 einen ehrgeizigen Plan zur Verbesserung der Regierungsführung angenommen, der auf dem Diagnosebericht zu Transparenz, Regierungsführung und Korruption beruht.</a:t>
             </a:r>
           </a:p>
           <a:p>
-            <a:pPr algn="just">
-              <a:lnSpc>
-                <a:spcPct val="100000"/>
-              </a:lnSpc>
-              <a:spcAft>
-                <a:spcPts val="800"/>
-              </a:spcAft>
-            </a:pPr>
             <a:r>
-              <a:rPr lang="en-US" sz="1400" i="0" u="none" strike="noStrike" dirty="0">
+              <a:rPr lang="en-US" sz="1400" b="1" i="0" u="none" strike="noStrike" dirty="0">
                 <a:highlight>
                   <a:srgbClr val="000000">
                     <a:alpha val="0"/>
@@ -31635,20 +30893,12 @@
                 </a:highlight>
                 <a:latin typeface="Arial"/>
               </a:rPr>
-              <a:t>Die Behörden ergriffen mehrere Maßnahmen zur Eindämmung der Staatsausgaben. Ein solides Haushaltskonsolidierungsprogramm reduzierte das Primärdefizit zwischen 2015 und 2018 von 6% auf 2% des BIP und hatte die Staatsverschuldung auf einen rückläufigen Pfad gebracht.</a:t>
+              <a:t>Die Behörden ergriffen mehrere Maßnahmen zur Begrenzung der öffentlichen Ausgaben. Ein solides Programm zur Haushaltskonsolidierung verringerte das Primärdefizit zwischen 2015 und 2018 von 6 % auf 2 % des BIP und hatte die öffentliche Verschuldung auf einen abnehmenden Pfad gebracht.</a:t>
             </a:r>
           </a:p>
           <a:p>
-            <a:pPr algn="just">
-              <a:lnSpc>
-                <a:spcPct val="100000"/>
-              </a:lnSpc>
-              <a:spcAft>
-                <a:spcPts val="800"/>
-              </a:spcAft>
-            </a:pPr>
             <a:r>
-              <a:rPr lang="en-US" sz="1400" i="0" u="none" strike="noStrike" dirty="0">
+              <a:rPr lang="en-US" sz="1400" b="1" i="0" u="none" strike="noStrike" dirty="0">
                 <a:highlight>
                   <a:srgbClr val="000000">
                     <a:alpha val="0"/>
@@ -31656,20 +30906,12 @@
                 </a:highlight>
                 <a:latin typeface="Arial"/>
               </a:rPr>
-              <a:t>Die Aufsicht über Staatsunternehmen wurde gestärkt. Nur das Ministerium für Wirtschaft und Finanzen kann Garantien im Namen der Regierung unterzeichnen, sofern dies die vom Parlament im jährlichen Haushaltsgesetz genehmigte Obergrenze unterschreitet. Im Jahr 2018 wurde die Governance von Staatsunternehmen ebenfalls durch ein neues Gesetz für öffentliche Unternehmen gestärkt.</a:t>
+              <a:t>Die Aufsicht über die öffentlichen Unternehmen wurde gestärkt. Nur das Ministerium für Wirtschaft und Finanzen darf im Namen der Regierung Garantien unterzeichnen, sofern diese unterhalb der vom Parlament im jährlichen Haushaltsgesetz genehmigten Obergrenze liegen. 2018 wurde auch die Governance öffentlicher Unternehmen durch ein neues Gesetz für öffentliche Unternehmen gestärkt.</a:t>
             </a:r>
           </a:p>
           <a:p>
-            <a:pPr algn="just">
-              <a:lnSpc>
-                <a:spcPct val="100000"/>
-              </a:lnSpc>
-              <a:spcAft>
-                <a:spcPts val="800"/>
-              </a:spcAft>
-            </a:pPr>
             <a:r>
-              <a:rPr lang="en-US" sz="1400" i="0" u="none" strike="noStrike" dirty="0">
+              <a:rPr lang="en-US" sz="1400" b="1" i="0" u="none" strike="noStrike" dirty="0">
                 <a:highlight>
                   <a:srgbClr val="000000">
                     <a:alpha val="0"/>
@@ -31677,20 +30919,12 @@
                 </a:highlight>
                 <a:latin typeface="Arial"/>
               </a:rPr>
-              <a:t>Es wurden erhebliche Fortschritte bei der fiskalischen Transparenz erzielt, mit der regelmäßigen Veröffentlichung von Fiskalrisikoberichten und umfassenden Berichten über schuldbezogene Staatsunternehmen und LNG.</a:t>
+              <a:t>Bei der haushaltspolitischen Transparenz wurden erhebliche Fortschritte erzielt, mit der regelmäßigen Veröffentlichung von Erklärungen zu Haushaltsrisiken und umfassenden Berichten über die Schulden im Zusammenhang mit öffentlichen Unternehmen und LNG.</a:t>
             </a:r>
           </a:p>
           <a:p>
-            <a:pPr algn="just">
-              <a:lnSpc>
-                <a:spcPct val="100000"/>
-              </a:lnSpc>
-              <a:spcAft>
-                <a:spcPts val="800"/>
-              </a:spcAft>
-            </a:pPr>
             <a:r>
-              <a:rPr lang="en-US" sz="1400" i="0" u="none" strike="noStrike" dirty="0">
+              <a:rPr lang="en-US" sz="1400" b="1" i="0" u="none" strike="noStrike" dirty="0">
                 <a:highlight>
                   <a:srgbClr val="000000">
                     <a:alpha val="0"/>
@@ -31698,65 +30932,86 @@
                 </a:highlight>
                 <a:latin typeface="Arial"/>
               </a:rPr>
-              <a:t>Im Jahr 2020 wurde ein neues globales Öffentliches-Finanzmanagement-Gesetz verabschiedet, das Staatsunternehmen und subnationale Regierungen in das Haushaltssystem integriert.</a:t>
+              <a:t>2020 wurde ein neues umfassendes Gesetz über die öffentlichen Finanzen verabschiedet, das öffentliche Unternehmen und subnationale Regierungen in das Haushaltssystem integriert.</a:t>
             </a:r>
           </a:p>
           <a:p>
-            <a:pPr marL="0" indent="0" algn="just">
-              <a:lnSpc>
-                <a:spcPct val="110000"/>
-              </a:lnSpc>
-              <a:buNone/>
-            </a:pPr>
             <a:r>
-              <a:rPr lang="en-US" sz="1400" b="1" dirty="0"/>
-              <a:t>Klima- und katastrophenbezogene politische Maßnahmen wurden seit 2010 umgesetzt</a:t>
+              <a:rPr lang="en-US" sz="1400" b="1" i="0" u="none" strike="noStrike" dirty="0">
+                <a:highlight>
+                  <a:srgbClr val="000000">
+                    <a:alpha val="0"/>
+                  </a:srgbClr>
+                </a:highlight>
+                <a:latin typeface="Arial"/>
+              </a:rPr>
+              <a:t>Seit 2010 wurden klima- und katastrophenbezogene politische Maßnahmen umgesetzt.</a:t>
             </a:r>
           </a:p>
           <a:p>
-            <a:pPr algn="just">
-              <a:lnSpc>
-                <a:spcPct val="110000"/>
-              </a:lnSpc>
-            </a:pPr>
             <a:r>
-              <a:rPr lang="en-US" sz="1400" dirty="0"/>
-              <a:t>Die Regierung hat die Nationale Strategie zur Anpassung an den Klimawandel und zur Klimawandelmitigation verabschiedet, die den übergeordneten politischen Rahmen zur Steuerung einer klimaresilienten Planung und Entwicklung bietet.</a:t>
+              <a:rPr lang="en-US" sz="1400" b="1" i="0" u="none" strike="noStrike" dirty="0">
+                <a:highlight>
+                  <a:srgbClr val="000000">
+                    <a:alpha val="0"/>
+                  </a:srgbClr>
+                </a:highlight>
+                <a:latin typeface="Arial"/>
+              </a:rPr>
+              <a:t>Die Regierung verabschiedete die Nationale Strategie zur Anpassung an den Klimawandel und zu dessen Eindämmung, die den gesamtpolitischen Rahmen für eine klimaresiliente Planung und Entwicklung vorgibt.</a:t>
             </a:r>
           </a:p>
           <a:p>
-            <a:pPr algn="just">
-              <a:lnSpc>
-                <a:spcPct val="110000"/>
-              </a:lnSpc>
-            </a:pPr>
             <a:r>
-              <a:rPr lang="en-US" sz="1400" dirty="0"/>
-              <a:t>Ein umfassendes Nationales Katastrophenrisikomanagementprogramm wurde verabschiedet, um Mosambiks resiliente Entwicklung durch Katastrophenprävention, -vorsorge, -reaktion und -wiederherstellung sowie durch die Integration von Katastrophenrisikomanagement (DRM) in öffentliche Finanzpolitiken, Investitionen und Entwicklungsplanung in allen Sektoren zu fördern.</a:t>
+              <a:rPr lang="en-US" sz="1400" b="1" i="0" u="none" strike="noStrike" dirty="0">
+                <a:highlight>
+                  <a:srgbClr val="000000">
+                    <a:alpha val="0"/>
+                  </a:srgbClr>
+                </a:highlight>
+                <a:latin typeface="Arial"/>
+              </a:rPr>
+              <a:t>Es wurde ein umfassendes Nationales Programm für das Katastrophenrisikomanagement verabschiedet, um die resiliente Entwicklung Mosambiks durch Katastrophenprävention, -vorsorge, -reaktion und -erholung zu fördern sowie das Katastrophenrisikomanagement (DRM) in die öffentlichen Finanzen, Investitionen und Entwicklungsplanung in allen Sektoren zu integrieren.</a:t>
             </a:r>
           </a:p>
           <a:p>
-            <a:pPr algn="just">
-              <a:lnSpc>
-                <a:spcPct val="110000"/>
-              </a:lnSpc>
-            </a:pPr>
             <a:r>
-              <a:rPr lang="en-US" sz="1400" dirty="0"/>
-              <a:t>Ein wesentlicher Meilenstein dieses Programms war die Einrichtung, Kapitalisierung und Operationalisierung eines Nationalen Katastrophenschutzfonds sowie die Einführung und Anwendung neuer Normen im Hinblick auf Klimaresilienz in Schlüsselsektoren (Bildung, Verkehr).</a:t>
+              <a:rPr lang="en-US" sz="1400" b="1" i="0" u="none" strike="noStrike" dirty="0">
+                <a:highlight>
+                  <a:srgbClr val="000000">
+                    <a:alpha val="0"/>
+                  </a:srgbClr>
+                </a:highlight>
+                <a:latin typeface="Arial"/>
+              </a:rPr>
+              <a:t>Ein wichtiger Meilenstein dieses Programms war die Einrichtung, Kapitalisierung und Operationalisierung eines Nationalen Fonds für das Katastrophenmanagement sowie die Verabschiedung und Anwendung neuer Normen im Hinblick auf die Klimaresilienz in Schlüsselsektoren (Bildung, Verkehr).</a:t>
             </a:r>
           </a:p>
           <a:p>
-            <a:pPr marL="0" indent="0" algn="just">
-              <a:lnSpc>
-                <a:spcPct val="110000"/>
-              </a:lnSpc>
-              <a:buNone/>
-            </a:pPr>
-            <a:endParaRPr lang="en-US" sz="1400" dirty="0"/>
-          </a:p>
-          <a:p>
-            <a:endParaRPr lang="en-US" sz="1400" dirty="0"/>
+            <a:r>
+              <a:rPr lang="en-US" sz="1400" b="1" i="0" u="none" strike="noStrike" dirty="0">
+                <a:highlight>
+                  <a:srgbClr val="000000">
+                    <a:alpha val="0"/>
+                  </a:srgbClr>
+                </a:highlight>
+                <a:latin typeface="Arial"/>
+              </a:rPr>
+              <a:t/>
+            </a:r>
+          </a:p>
+          <a:p>
+            <a:r>
+              <a:rPr lang="en-US" sz="1400" b="1" i="0" u="none" strike="noStrike" dirty="0">
+                <a:highlight>
+                  <a:srgbClr val="000000">
+                    <a:alpha val="0"/>
+                  </a:srgbClr>
+                </a:highlight>
+                <a:latin typeface="Arial"/>
+              </a:rPr>
+              <a:t/>
+            </a:r>
           </a:p>
         </p:txBody>
       </p:sp>
@@ -31805,16 +31060,17 @@
             </a:lvl1pPr>
           </a:lstStyle>
           <a:p>
-            <a:pPr algn="ctr"/>
             <a:r>
               <a:rPr lang="en-US" sz="2400" b="1" dirty="0">
                 <a:solidFill>
                   <a:srgbClr val="2F5597"/>
                 </a:solidFill>
               </a:rPr>
-              <a:t>Regierungsprogramm und mittelfristige Strategie (1-2)</a:t>
+              <a:t>Regierungsprogramm und mittelfristige Strategie (1-2)
+</a:t>
             </a:r>
-            <a:br/>
+          </a:p>
+          <a:p>
             <a:r>
               <a:rPr lang="en-US" sz="2400" b="1" dirty="0">
                 <a:solidFill>
@@ -31823,27 +31079,6 @@
               </a:rPr>
               <a:t/>
             </a:r>
-            <a:br/>
-            <a:r>
-              <a:rPr lang="en-US" sz="2400" b="1" dirty="0">
-                <a:solidFill>
-                  <a:srgbClr val="2F5597"/>
-                </a:solidFill>
-              </a:rPr>
-              <a:t/>
-            </a:r>
-            <a:endParaRPr lang="pt" sz="2400" b="1" i="0" u="none" strike="noStrike" dirty="0">
-              <a:solidFill>
-                <a:srgbClr val="2F5597"/>
-              </a:solidFill>
-              <a:highlight>
-                <a:srgbClr val="000000">
-                  <a:alpha val="0"/>
-                </a:srgbClr>
-              </a:highlight>
-              <a:latin typeface="Arial"/>
-              <a:cs typeface="Arial"/>
-            </a:endParaRPr>
           </a:p>
         </p:txBody>
       </p:sp>
@@ -31875,9 +31110,8 @@
           <a:p>
             <a:r>
               <a:rPr lang="en-US"/>
-              <a:t>CPF 2023-2027. Öffentliche Version. Maputo, Mai 2022.</a:t>
+              <a:t>CPF 2023-2027. Öffentliche Fassung. Maputo, Mai 2022.</a:t>
             </a:r>
-            <a:endParaRPr lang="en-US" dirty="0"/>
           </a:p>
         </p:txBody>
       </p:sp>
@@ -32021,9 +31255,6 @@
             </a:bodyPr>
             <a:lstStyle/>
             <a:p>
-              <a:pPr lvl="0" algn="ctr">
-                <a:defRPr/>
-              </a:pPr>
               <a:r>
                 <a:rPr kumimoji="0" lang="en-US" sz="1600" b="1" i="0" u="none" strike="noStrike" kern="1200" cap="none" spc="0" normalizeH="0" baseline="0" noProof="0" dirty="0">
                   <a:ln>
@@ -32039,40 +31270,46 @@
                   <a:ea typeface="Times New Roman" panose="02020603050405020304" pitchFamily="18" charset="0"/>
                   <a:cs typeface="Times New Roman" panose="02020603050405020304" pitchFamily="18" charset="0"/>
                 </a:rPr>
-                <a:t>HLO3. Verbesserung des Humankapitals und Stärkung der Stellung der Frau</a:t>
+                <a:t>HLO3. Verbesserung des Humankapitals und Stärkung der Frauen</a:t>
               </a:r>
             </a:p>
             <a:p>
-              <a:pPr lvl="0" algn="ctr">
-                <a:defRPr/>
-              </a:pPr>
-              <a:endParaRPr lang="en-US" sz="1600" b="1" dirty="0">
-                <a:solidFill>
-                  <a:prstClr val="white"/>
-                </a:solidFill>
-                <a:latin typeface="Calibri" panose="020F0502020204030204" pitchFamily="34" charset="0"/>
-                <a:ea typeface="Times New Roman" panose="02020603050405020304" pitchFamily="18" charset="0"/>
-                <a:cs typeface="Times New Roman" panose="02020603050405020304" pitchFamily="18" charset="0"/>
-              </a:endParaRPr>
+              <a:r>
+                <a:rPr kumimoji="0" lang="en-US" sz="1600" b="1" i="0" u="none" strike="noStrike" kern="1200" cap="none" spc="0" normalizeH="0" baseline="0" noProof="0" dirty="0">
+                  <a:ln>
+                    <a:noFill/>
+                  </a:ln>
+                  <a:solidFill>
+                    <a:prstClr val="white"/>
+                  </a:solidFill>
+                  <a:effectLst/>
+                  <a:uLnTx/>
+                  <a:uFillTx/>
+                  <a:latin typeface="Calibri" panose="020F0502020204030204" pitchFamily="34" charset="0"/>
+                  <a:ea typeface="Times New Roman" panose="02020603050405020304" pitchFamily="18" charset="0"/>
+                  <a:cs typeface="Times New Roman" panose="02020603050405020304" pitchFamily="18" charset="0"/>
+                </a:rPr>
+                <a:t/>
+              </a:r>
             </a:p>
             <a:p>
-              <a:pPr lvl="0" algn="ctr">
-                <a:defRPr/>
-              </a:pPr>
-              <a:endParaRPr kumimoji="0" lang="en-US" sz="1800" b="1" i="0" u="none" strike="noStrike" kern="1200" cap="none" spc="0" normalizeH="0" baseline="0" noProof="0" dirty="0">
-                <a:ln>
-                  <a:noFill/>
-                </a:ln>
-                <a:solidFill>
-                  <a:prstClr val="white"/>
-                </a:solidFill>
-                <a:effectLst/>
-                <a:uLnTx/>
-                <a:uFillTx/>
-                <a:latin typeface="Calibri" panose="020F0502020204030204" pitchFamily="34" charset="0"/>
-                <a:ea typeface="Times New Roman" panose="02020603050405020304" pitchFamily="18" charset="0"/>
-                <a:cs typeface="Times New Roman" panose="02020603050405020304" pitchFamily="18" charset="0"/>
-              </a:endParaRPr>
+              <a:r>
+                <a:rPr kumimoji="0" lang="en-US" sz="1600" b="1" i="0" u="none" strike="noStrike" kern="1200" cap="none" spc="0" normalizeH="0" baseline="0" noProof="0" dirty="0">
+                  <a:ln>
+                    <a:noFill/>
+                  </a:ln>
+                  <a:solidFill>
+                    <a:prstClr val="white"/>
+                  </a:solidFill>
+                  <a:effectLst/>
+                  <a:uLnTx/>
+                  <a:uFillTx/>
+                  <a:latin typeface="Calibri" panose="020F0502020204030204" pitchFamily="34" charset="0"/>
+                  <a:ea typeface="Times New Roman" panose="02020603050405020304" pitchFamily="18" charset="0"/>
+                  <a:cs typeface="Times New Roman" panose="02020603050405020304" pitchFamily="18" charset="0"/>
+                </a:rPr>
+                <a:t/>
+              </a:r>
             </a:p>
           </p:txBody>
         </p:sp>
@@ -32106,9 +31343,6 @@
             </a:bodyPr>
             <a:lstStyle/>
             <a:p>
-              <a:pPr lvl="0" algn="ctr">
-                <a:defRPr/>
-              </a:pPr>
               <a:r>
                 <a:rPr lang="en-US" sz="1400" b="1" dirty="0">
                   <a:solidFill>
@@ -32122,9 +31356,6 @@
               </a:r>
             </a:p>
             <a:p>
-              <a:pPr lvl="0" algn="ctr">
-                <a:defRPr/>
-              </a:pPr>
               <a:r>
                 <a:rPr lang="en-US" sz="1400" b="1" dirty="0">
                   <a:solidFill>
@@ -32134,27 +31365,21 @@
                   <a:ea typeface="Times New Roman" panose="02020603050405020304" pitchFamily="18" charset="0"/>
                   <a:cs typeface="Times New Roman" panose="02020603050405020304" pitchFamily="18" charset="0"/>
                 </a:rPr>
-                <a:t>Verbesserter Zugang zu Dienstleistungen zur Verhütung von Teenagerschwangerschaften und Förderung der wirtschaftlichen Teilhabe von Frauen</a:t>
+                <a:t>Verbesserter Zugang zu Diensten zur Vermeidung von Teenagerschwangerschaften und zur Förderung der wirtschaftlichen Teilhabe von Frauen</a:t>
               </a:r>
             </a:p>
             <a:p>
-              <a:pPr lvl="0" algn="ctr">
-                <a:defRPr/>
-              </a:pPr>
-              <a:endParaRPr kumimoji="0" lang="en-US" sz="1400" b="1" i="0" u="none" strike="noStrike" kern="1200" cap="none" spc="0" normalizeH="0" baseline="0" noProof="0" dirty="0">
-                <a:ln>
-                  <a:noFill/>
-                </a:ln>
-                <a:solidFill>
-                  <a:srgbClr val="FFFFFF"/>
-                </a:solidFill>
-                <a:effectLst/>
-                <a:uLnTx/>
-                <a:uFillTx/>
-                <a:latin typeface="Calibri" panose="020F0502020204030204" pitchFamily="34" charset="0"/>
-                <a:ea typeface="Times New Roman" panose="02020603050405020304" pitchFamily="18" charset="0"/>
-                <a:cs typeface="Times New Roman" panose="02020603050405020304" pitchFamily="18" charset="0"/>
-              </a:endParaRPr>
+              <a:r>
+                <a:rPr lang="en-US" sz="1400" b="1" dirty="0">
+                  <a:solidFill>
+                    <a:srgbClr val="FFFFFF"/>
+                  </a:solidFill>
+                  <a:latin typeface="Calibri" panose="020F0502020204030204" pitchFamily="34" charset="0"/>
+                  <a:ea typeface="Times New Roman" panose="02020603050405020304" pitchFamily="18" charset="0"/>
+                  <a:cs typeface="Times New Roman" panose="02020603050405020304" pitchFamily="18" charset="0"/>
+                </a:rPr>
+                <a:t/>
+              </a:r>
             </a:p>
           </p:txBody>
         </p:sp>
@@ -32188,9 +31413,6 @@
             </a:bodyPr>
             <a:lstStyle/>
             <a:p>
-              <a:pPr lvl="0" algn="ctr">
-                <a:defRPr/>
-              </a:pPr>
               <a:r>
                 <a:rPr lang="en-US" sz="1400" b="1" dirty="0">
                   <a:solidFill>
@@ -32204,22 +31426,6 @@
               </a:r>
             </a:p>
             <a:p>
-              <a:pPr lvl="0" algn="ctr">
-                <a:defRPr/>
-              </a:pPr>
-              <a:endParaRPr lang="en-US" sz="1400" b="1" dirty="0">
-                <a:solidFill>
-                  <a:srgbClr val="FFFFFF"/>
-                </a:solidFill>
-                <a:latin typeface="Calibri" panose="020F0502020204030204" pitchFamily="34" charset="0"/>
-                <a:ea typeface="Times New Roman" panose="02020603050405020304" pitchFamily="18" charset="0"/>
-                <a:cs typeface="Times New Roman" panose="02020603050405020304" pitchFamily="18" charset="0"/>
-              </a:endParaRPr>
-            </a:p>
-            <a:p>
-              <a:pPr lvl="0" algn="ctr">
-                <a:defRPr/>
-              </a:pPr>
               <a:r>
                 <a:rPr lang="en-US" sz="1400" b="1" dirty="0">
                   <a:solidFill>
@@ -32229,88 +31435,47 @@
                   <a:ea typeface="Times New Roman" panose="02020603050405020304" pitchFamily="18" charset="0"/>
                   <a:cs typeface="Times New Roman" panose="02020603050405020304" pitchFamily="18" charset="0"/>
                 </a:rPr>
-                <a:t>Steigerung der Effizienz und effektiven Abdeckung integrierter und nachhaltiger sozialer Dienstleistungen</a:t>
+                <a:t/>
               </a:r>
-              <a:endParaRPr kumimoji="0" lang="en-US" sz="1400" b="1" i="0" u="none" strike="noStrike" kern="1200" cap="none" spc="0" normalizeH="0" baseline="0" noProof="0" dirty="0">
-                <a:ln>
-                  <a:noFill/>
-                </a:ln>
-                <a:solidFill>
-                  <a:srgbClr val="FFFFFF"/>
-                </a:solidFill>
-                <a:effectLst/>
-                <a:uLnTx/>
-                <a:uFillTx/>
-                <a:latin typeface="Calibri" panose="020F0502020204030204" pitchFamily="34" charset="0"/>
-                <a:ea typeface="Times New Roman" panose="02020603050405020304" pitchFamily="18" charset="0"/>
-                <a:cs typeface="Times New Roman" panose="02020603050405020304" pitchFamily="18" charset="0"/>
-              </a:endParaRPr>
             </a:p>
             <a:p>
-              <a:pPr marL="0" marR="0" lvl="0" indent="0" algn="ctr" defTabSz="914400" rtl="0" eaLnBrk="1" fontAlgn="auto" latinLnBrk="0" hangingPunct="1">
-                <a:lnSpc>
-                  <a:spcPct val="100000"/>
-                </a:lnSpc>
-                <a:spcBef>
-                  <a:spcPts val="0"/>
-                </a:spcBef>
-                <a:spcAft>
-                  <a:spcPts val="0"/>
-                </a:spcAft>
-                <a:buClrTx/>
-                <a:buSzTx/>
-                <a:buFontTx/>
-                <a:buNone/>
-                <a:tabLst/>
-                <a:defRPr/>
-              </a:pPr>
-              <a:endParaRPr kumimoji="0" lang="en-US" sz="1400" b="1" i="0" u="none" strike="noStrike" kern="1200" cap="none" spc="0" normalizeH="0" baseline="0" noProof="0" dirty="0">
-                <a:ln>
-                  <a:noFill/>
-                </a:ln>
-                <a:solidFill>
-                  <a:srgbClr val="FFFFFF"/>
-                </a:solidFill>
-                <a:effectLst/>
-                <a:uLnTx/>
-                <a:uFillTx/>
-                <a:latin typeface="Calibri" panose="020F0502020204030204" pitchFamily="34" charset="0"/>
-                <a:ea typeface="Times New Roman" panose="02020603050405020304" pitchFamily="18" charset="0"/>
-                <a:cs typeface="Times New Roman" panose="02020603050405020304" pitchFamily="18" charset="0"/>
-              </a:endParaRPr>
+              <a:r>
+                <a:rPr lang="en-US" sz="1400" b="1" dirty="0">
+                  <a:solidFill>
+                    <a:srgbClr val="FFFFFF"/>
+                  </a:solidFill>
+                  <a:latin typeface="Calibri" panose="020F0502020204030204" pitchFamily="34" charset="0"/>
+                  <a:ea typeface="Times New Roman" panose="02020603050405020304" pitchFamily="18" charset="0"/>
+                  <a:cs typeface="Times New Roman" panose="02020603050405020304" pitchFamily="18" charset="0"/>
+                </a:rPr>
+                <a:t>Steigerung der Effizienz und der wirksamen Abdeckung integrierter und nachhaltiger Sozialdienste</a:t>
+              </a:r>
             </a:p>
             <a:p>
-              <a:pPr marL="0" marR="0" lvl="0" indent="0" algn="ctr" defTabSz="914400" rtl="0" eaLnBrk="1" fontAlgn="auto" latinLnBrk="0" hangingPunct="1">
-                <a:lnSpc>
-                  <a:spcPct val="100000"/>
-                </a:lnSpc>
-                <a:spcBef>
-                  <a:spcPts val="0"/>
-                </a:spcBef>
-                <a:spcAft>
-                  <a:spcPts val="0"/>
-                </a:spcAft>
-                <a:buClrTx/>
-                <a:buSzTx/>
-                <a:buFontTx/>
-                <a:buNone/>
-                <a:tabLst/>
-                <a:defRPr/>
-              </a:pPr>
-              <a:endParaRPr kumimoji="0" lang="en-US" sz="1400" b="1" i="0" u="none" strike="noStrike" kern="1200" cap="none" spc="0" normalizeH="0" baseline="0" noProof="0" dirty="0">
-                <a:ln>
-                  <a:noFill/>
-                </a:ln>
-                <a:solidFill>
-                  <a:srgbClr val="FFFFFF"/>
-                </a:solidFill>
-                <a:effectLst/>
-                <a:uLnTx/>
-                <a:uFillTx/>
-                <a:latin typeface="Calibri" panose="020F0502020204030204" pitchFamily="34" charset="0"/>
-                <a:ea typeface="Times New Roman" panose="02020603050405020304" pitchFamily="18" charset="0"/>
-                <a:cs typeface="Times New Roman" panose="02020603050405020304" pitchFamily="18" charset="0"/>
-              </a:endParaRPr>
+              <a:r>
+                <a:rPr lang="en-US" sz="1400" b="1" dirty="0">
+                  <a:solidFill>
+                    <a:srgbClr val="FFFFFF"/>
+                  </a:solidFill>
+                  <a:latin typeface="Calibri" panose="020F0502020204030204" pitchFamily="34" charset="0"/>
+                  <a:ea typeface="Times New Roman" panose="02020603050405020304" pitchFamily="18" charset="0"/>
+                  <a:cs typeface="Times New Roman" panose="02020603050405020304" pitchFamily="18" charset="0"/>
+                </a:rPr>
+                <a:t/>
+              </a:r>
+            </a:p>
+            <a:p>
+              <a:r>
+                <a:rPr lang="en-US" sz="1400" b="1" dirty="0">
+                  <a:solidFill>
+                    <a:srgbClr val="FFFFFF"/>
+                  </a:solidFill>
+                  <a:latin typeface="Calibri" panose="020F0502020204030204" pitchFamily="34" charset="0"/>
+                  <a:ea typeface="Times New Roman" panose="02020603050405020304" pitchFamily="18" charset="0"/>
+                  <a:cs typeface="Times New Roman" panose="02020603050405020304" pitchFamily="18" charset="0"/>
+                </a:rPr>
+                <a:t/>
+              </a:r>
             </a:p>
           </p:txBody>
         </p:sp>
@@ -32344,9 +31509,6 @@
             </a:bodyPr>
             <a:lstStyle/>
             <a:p>
-              <a:pPr lvl="0" algn="ctr">
-                <a:defRPr/>
-              </a:pPr>
               <a:r>
                 <a:rPr lang="en-US" sz="1400" b="1" dirty="0">
                   <a:solidFill>
@@ -32360,22 +31522,6 @@
               </a:r>
             </a:p>
             <a:p>
-              <a:pPr lvl="0" algn="ctr">
-                <a:defRPr/>
-              </a:pPr>
-              <a:endParaRPr lang="en-US" sz="1400" b="1" dirty="0">
-                <a:solidFill>
-                  <a:srgbClr val="FFFFFF"/>
-                </a:solidFill>
-                <a:latin typeface="Calibri" panose="020F0502020204030204" pitchFamily="34" charset="0"/>
-                <a:ea typeface="Times New Roman" panose="02020603050405020304" pitchFamily="18" charset="0"/>
-                <a:cs typeface="Times New Roman" panose="02020603050405020304" pitchFamily="18" charset="0"/>
-              </a:endParaRPr>
-            </a:p>
-            <a:p>
-              <a:pPr lvl="0" algn="ctr">
-                <a:defRPr/>
-              </a:pPr>
               <a:r>
                 <a:rPr lang="en-US" sz="1400" b="1" dirty="0">
                   <a:solidFill>
@@ -32385,118 +31531,54 @@
                   <a:ea typeface="Times New Roman" panose="02020603050405020304" pitchFamily="18" charset="0"/>
                   <a:cs typeface="Times New Roman" panose="02020603050405020304" pitchFamily="18" charset="0"/>
                 </a:rPr>
-                <a:t>Verbesserung wichtiger Gesundheits- und Bildungsergebnisse</a:t>
+                <a:t/>
               </a:r>
-              <a:endParaRPr kumimoji="0" lang="en-US" sz="1400" b="0" i="0" u="none" strike="noStrike" kern="1200" cap="none" spc="0" normalizeH="0" baseline="0" noProof="0" dirty="0">
-                <a:ln>
-                  <a:noFill/>
-                </a:ln>
-                <a:solidFill>
-                  <a:srgbClr val="FFFFFF"/>
-                </a:solidFill>
-                <a:effectLst/>
-                <a:uLnTx/>
-                <a:uFillTx/>
-                <a:latin typeface="Calibri" panose="020F0502020204030204" pitchFamily="34" charset="0"/>
-                <a:ea typeface="Times New Roman" panose="02020603050405020304" pitchFamily="18" charset="0"/>
-                <a:cs typeface="Times New Roman" panose="02020603050405020304" pitchFamily="18" charset="0"/>
-              </a:endParaRPr>
             </a:p>
             <a:p>
-              <a:pPr marL="0" marR="0" lvl="0" indent="0" algn="ctr" defTabSz="914400" rtl="0" eaLnBrk="1" fontAlgn="auto" latinLnBrk="0" hangingPunct="1">
-                <a:lnSpc>
-                  <a:spcPct val="100000"/>
-                </a:lnSpc>
-                <a:spcBef>
-                  <a:spcPts val="0"/>
-                </a:spcBef>
-                <a:spcAft>
-                  <a:spcPts val="0"/>
-                </a:spcAft>
-                <a:buClrTx/>
-                <a:buSzTx/>
-                <a:buFontTx/>
-                <a:buNone/>
-                <a:tabLst/>
-                <a:defRPr/>
-              </a:pPr>
-              <a:endParaRPr kumimoji="0" lang="en-US" sz="1400" b="0" i="0" u="none" strike="noStrike" kern="1200" cap="none" spc="0" normalizeH="0" baseline="0" noProof="0" dirty="0">
-                <a:ln>
-                  <a:noFill/>
-                </a:ln>
-                <a:solidFill>
-                  <a:srgbClr val="FFFFFF"/>
-                </a:solidFill>
-                <a:effectLst/>
-                <a:uLnTx/>
-                <a:uFillTx/>
-                <a:latin typeface="Calibri" panose="020F0502020204030204" pitchFamily="34" charset="0"/>
-                <a:ea typeface="Times New Roman" panose="02020603050405020304" pitchFamily="18" charset="0"/>
-                <a:cs typeface="Times New Roman" panose="02020603050405020304" pitchFamily="18" charset="0"/>
-              </a:endParaRPr>
-            </a:p>
-            <a:p>
-              <a:pPr marL="0" marR="0" lvl="0" indent="0" algn="ctr" defTabSz="914400" rtl="0" eaLnBrk="1" fontAlgn="auto" latinLnBrk="0" hangingPunct="1">
-                <a:lnSpc>
-                  <a:spcPct val="100000"/>
-                </a:lnSpc>
-                <a:spcBef>
-                  <a:spcPts val="0"/>
-                </a:spcBef>
-                <a:spcAft>
-                  <a:spcPts val="0"/>
-                </a:spcAft>
-                <a:buClrTx/>
-                <a:buSzTx/>
-                <a:buFontTx/>
-                <a:buNone/>
-                <a:tabLst/>
-                <a:defRPr/>
-              </a:pPr>
-              <a:endParaRPr kumimoji="0" lang="en-US" sz="1400" b="0" i="0" u="none" strike="noStrike" kern="1200" cap="none" spc="0" normalizeH="0" baseline="0" noProof="0" dirty="0">
-                <a:ln>
-                  <a:noFill/>
-                </a:ln>
-                <a:solidFill>
-                  <a:srgbClr val="FFFFFF"/>
-                </a:solidFill>
-                <a:effectLst/>
-                <a:uLnTx/>
-                <a:uFillTx/>
-                <a:latin typeface="Calibri" panose="020F0502020204030204" pitchFamily="34" charset="0"/>
-                <a:ea typeface="Times New Roman" panose="02020603050405020304" pitchFamily="18" charset="0"/>
-                <a:cs typeface="Times New Roman" panose="02020603050405020304" pitchFamily="18" charset="0"/>
-              </a:endParaRPr>
-            </a:p>
-            <a:p>
-              <a:pPr marL="0" marR="0" lvl="0" indent="0" algn="ctr" defTabSz="914400" rtl="0" eaLnBrk="1" fontAlgn="auto" latinLnBrk="0" hangingPunct="1">
-                <a:lnSpc>
-                  <a:spcPct val="100000"/>
-                </a:lnSpc>
-                <a:spcBef>
-                  <a:spcPts val="0"/>
-                </a:spcBef>
-                <a:spcAft>
-                  <a:spcPts val="0"/>
-                </a:spcAft>
-                <a:buClrTx/>
-                <a:buSzTx/>
-                <a:buFontTx/>
-                <a:buNone/>
-                <a:tabLst/>
-                <a:defRPr/>
-              </a:pPr>
               <a:r>
-                <a:rPr kumimoji="0" lang="en-US" sz="1400" b="0" i="0" u="none" strike="noStrike" kern="1200" cap="none" spc="0" normalizeH="0" baseline="0" noProof="0" dirty="0">
-                  <a:ln>
-                    <a:noFill/>
-                  </a:ln>
+                <a:rPr lang="en-US" sz="1400" b="1" dirty="0">
                   <a:solidFill>
                     <a:srgbClr val="FFFFFF"/>
                   </a:solidFill>
-                  <a:effectLst/>
-                  <a:uLnTx/>
-                  <a:uFillTx/>
+                  <a:latin typeface="Calibri" panose="020F0502020204030204" pitchFamily="34" charset="0"/>
+                  <a:ea typeface="Times New Roman" panose="02020603050405020304" pitchFamily="18" charset="0"/>
+                  <a:cs typeface="Times New Roman" panose="02020603050405020304" pitchFamily="18" charset="0"/>
+                </a:rPr>
+                <a:t>Verbesserung zentraler Ergebnisse in den Bereichen Gesundheit und Bildung</a:t>
+              </a:r>
+            </a:p>
+            <a:p>
+              <a:r>
+                <a:rPr lang="en-US" sz="1400" b="1" dirty="0">
+                  <a:solidFill>
+                    <a:srgbClr val="FFFFFF"/>
+                  </a:solidFill>
+                  <a:latin typeface="Calibri" panose="020F0502020204030204" pitchFamily="34" charset="0"/>
+                  <a:ea typeface="Times New Roman" panose="02020603050405020304" pitchFamily="18" charset="0"/>
+                  <a:cs typeface="Times New Roman" panose="02020603050405020304" pitchFamily="18" charset="0"/>
+                </a:rPr>
+                <a:t/>
+              </a:r>
+            </a:p>
+            <a:p>
+              <a:r>
+                <a:rPr lang="en-US" sz="1400" b="1" dirty="0">
+                  <a:solidFill>
+                    <a:srgbClr val="FFFFFF"/>
+                  </a:solidFill>
+                  <a:latin typeface="Calibri" panose="020F0502020204030204" pitchFamily="34" charset="0"/>
+                  <a:ea typeface="Times New Roman" panose="02020603050405020304" pitchFamily="18" charset="0"/>
+                  <a:cs typeface="Times New Roman" panose="02020603050405020304" pitchFamily="18" charset="0"/>
+                </a:rPr>
+                <a:t/>
+              </a:r>
+            </a:p>
+            <a:p>
+              <a:r>
+                <a:rPr lang="en-US" sz="1400" b="1" dirty="0">
+                  <a:solidFill>
+                    <a:srgbClr val="FFFFFF"/>
+                  </a:solidFill>
                   <a:latin typeface="Calibri" panose="020F0502020204030204" pitchFamily="34" charset="0"/>
                   <a:ea typeface="Times New Roman" panose="02020603050405020304" pitchFamily="18" charset="0"/>
                   <a:cs typeface="Times New Roman" panose="02020603050405020304" pitchFamily="18" charset="0"/>
@@ -32505,37 +31587,17 @@
               </a:r>
             </a:p>
             <a:p>
-              <a:pPr marL="0" marR="0" lvl="0" indent="0" algn="ctr" defTabSz="914400" rtl="0" eaLnBrk="1" fontAlgn="auto" latinLnBrk="0" hangingPunct="1">
-                <a:lnSpc>
-                  <a:spcPct val="100000"/>
-                </a:lnSpc>
-                <a:spcBef>
-                  <a:spcPts val="0"/>
-                </a:spcBef>
-                <a:spcAft>
-                  <a:spcPts val="0"/>
-                </a:spcAft>
-                <a:buClrTx/>
-                <a:buSzTx/>
-                <a:buFontTx/>
-                <a:buNone/>
-                <a:tabLst/>
-                <a:defRPr/>
-              </a:pPr>
-              <a:endParaRPr kumimoji="0" lang="en-US" sz="1400" b="0" i="0" u="none" strike="noStrike" kern="1200" cap="none" spc="0" normalizeH="0" baseline="0" noProof="0" dirty="0">
-                <a:ln>
-                  <a:noFill/>
-                </a:ln>
-                <a:solidFill>
-                  <a:prstClr val="black"/>
-                </a:solidFill>
-                <a:effectLst/>
-                <a:uLnTx/>
-                <a:uFillTx/>
-                <a:latin typeface="Times New Roman" panose="02020603050405020304" pitchFamily="18" charset="0"/>
-                <a:ea typeface="Times New Roman" panose="02020603050405020304" pitchFamily="18" charset="0"/>
-                <a:cs typeface="+mn-cs"/>
-              </a:endParaRPr>
+              <a:r>
+                <a:rPr lang="en-US" sz="1400" b="1" dirty="0">
+                  <a:solidFill>
+                    <a:srgbClr val="FFFFFF"/>
+                  </a:solidFill>
+                  <a:latin typeface="Calibri" panose="020F0502020204030204" pitchFamily="34" charset="0"/>
+                  <a:ea typeface="Times New Roman" panose="02020603050405020304" pitchFamily="18" charset="0"/>
+                  <a:cs typeface="Times New Roman" panose="02020603050405020304" pitchFamily="18" charset="0"/>
+                </a:rPr>
+                <a:t/>
+              </a:r>
             </a:p>
           </p:txBody>
         </p:sp>
@@ -32570,9 +31632,6 @@
           </a:bodyPr>
           <a:lstStyle/>
           <a:p>
-            <a:pPr lvl="0" algn="ctr">
-              <a:defRPr/>
-            </a:pPr>
             <a:r>
               <a:rPr lang="en-US" b="1" dirty="0">
                 <a:solidFill>
@@ -32582,9 +31641,11 @@
                 <a:ea typeface="Times New Roman" panose="02020603050405020304" pitchFamily="18" charset="0"/>
                 <a:cs typeface="Times New Roman" panose="02020603050405020304" pitchFamily="18" charset="0"/>
               </a:rPr>
-              <a:t>HLO 1: Inklusivere Institutionen</a:t>
+              <a:t>HLO 1: Inklusivere Institutionen
+</a:t>
             </a:r>
-            <a:br/>
+          </a:p>
+          <a:p>
             <a:r>
               <a:rPr lang="en-US" b="1" dirty="0">
                 <a:solidFill>
@@ -32596,32 +31657,6 @@
               </a:rPr>
               <a:t/>
             </a:r>
-            <a:r>
-              <a:rPr lang="pt-BR" b="1" dirty="0">
-                <a:solidFill>
-                  <a:srgbClr val="FFFFFF"/>
-                </a:solidFill>
-                <a:latin typeface="Calibri" panose="020F0502020204030204" pitchFamily="34" charset="0"/>
-                <a:ea typeface="Times New Roman" panose="02020603050405020304" pitchFamily="18" charset="0"/>
-                <a:cs typeface="Times New Roman" panose="02020603050405020304" pitchFamily="18" charset="0"/>
-              </a:rPr>
-              <a:t>
-</a:t>
-            </a:r>
-            <a:endParaRPr kumimoji="0" lang="en-US" sz="1200" b="0" i="0" u="none" strike="noStrike" kern="1200" cap="none" spc="0" normalizeH="0" baseline="0" noProof="0" dirty="0">
-              <a:ln>
-                <a:noFill/>
-              </a:ln>
-              <a:solidFill>
-                <a:prstClr val="white"/>
-              </a:solidFill>
-              <a:effectLst/>
-              <a:uLnTx/>
-              <a:uFillTx/>
-              <a:latin typeface="Calibri" panose="020F0502020204030204" pitchFamily="34" charset="0"/>
-              <a:ea typeface="Times New Roman" panose="02020603050405020304" pitchFamily="18" charset="0"/>
-              <a:cs typeface="Calibri" panose="020F0502020204030204" pitchFamily="34" charset="0"/>
-            </a:endParaRPr>
           </a:p>
         </p:txBody>
       </p:sp>
@@ -32655,9 +31690,6 @@
           </a:bodyPr>
           <a:lstStyle/>
           <a:p>
-            <a:pPr lvl="0" algn="ctr">
-              <a:defRPr/>
-            </a:pPr>
             <a:r>
               <a:rPr lang="en-US" sz="1400" b="1" dirty="0">
                 <a:solidFill>
@@ -32671,9 +31703,6 @@
             </a:r>
           </a:p>
           <a:p>
-            <a:pPr lvl="0" algn="ctr">
-              <a:defRPr/>
-            </a:pPr>
             <a:r>
               <a:rPr lang="en-US" sz="1400" b="1" dirty="0">
                 <a:solidFill>
@@ -32683,13 +31712,10 @@
                 <a:ea typeface="Times New Roman" panose="02020603050405020304" pitchFamily="18" charset="0"/>
                 <a:cs typeface="Times New Roman" panose="02020603050405020304" pitchFamily="18" charset="0"/>
               </a:rPr>
-              <a:t>Steigerung der Effektivität des öffentlichen Sektors für eine bessere und nachhaltigere Leistungserbringung</a:t>
+              <a:t>Steigerung der Wirksamkeit des öffentlichen Sektors für eine bessere und nachhaltigere Leistungserbringung</a:t>
             </a:r>
           </a:p>
           <a:p>
-            <a:pPr lvl="0" algn="ctr">
-              <a:defRPr/>
-            </a:pPr>
             <a:r>
               <a:rPr lang="en-US" sz="1400" b="1" dirty="0">
                 <a:solidFill>
@@ -32699,27 +31725,21 @@
                 <a:ea typeface="Times New Roman" panose="02020603050405020304" pitchFamily="18" charset="0"/>
                 <a:cs typeface="Times New Roman" panose="02020603050405020304" pitchFamily="18" charset="0"/>
               </a:rPr>
-              <a:t>und gerechtere Politiken</a:t>
+              <a:t>und gerechtere politische Maßnahmen</a:t>
             </a:r>
           </a:p>
           <a:p>
-            <a:pPr lvl="0" algn="ctr">
-              <a:defRPr/>
-            </a:pPr>
-            <a:endParaRPr kumimoji="0" lang="en-US" sz="1400" b="0" i="0" u="none" strike="noStrike" kern="1200" cap="none" spc="0" normalizeH="0" baseline="0" noProof="0" dirty="0">
-              <a:ln>
-                <a:noFill/>
-              </a:ln>
-              <a:solidFill>
-                <a:srgbClr val="FFFFFF"/>
-              </a:solidFill>
-              <a:effectLst/>
-              <a:uLnTx/>
-              <a:uFillTx/>
-              <a:latin typeface="Calibri" panose="020F0502020204030204" pitchFamily="34" charset="0"/>
-              <a:ea typeface="Times New Roman" panose="02020603050405020304" pitchFamily="18" charset="0"/>
-              <a:cs typeface="Times New Roman" panose="02020603050405020304" pitchFamily="18" charset="0"/>
-            </a:endParaRPr>
+            <a:r>
+              <a:rPr lang="en-US" sz="1400" b="1" dirty="0">
+                <a:solidFill>
+                  <a:srgbClr val="FFFFFF"/>
+                </a:solidFill>
+                <a:latin typeface="Calibri" panose="020F0502020204030204" pitchFamily="34" charset="0"/>
+                <a:ea typeface="Times New Roman" panose="02020603050405020304" pitchFamily="18" charset="0"/>
+                <a:cs typeface="Times New Roman" panose="02020603050405020304" pitchFamily="18" charset="0"/>
+              </a:rPr>
+              <a:t/>
+            </a:r>
           </a:p>
         </p:txBody>
       </p:sp>
@@ -32753,9 +31773,6 @@
           </a:bodyPr>
           <a:lstStyle/>
           <a:p>
-            <a:pPr lvl="0" algn="ctr">
-              <a:defRPr/>
-            </a:pPr>
             <a:r>
               <a:rPr lang="en-US" sz="1400" b="1" dirty="0">
                 <a:solidFill>
@@ -32769,9 +31786,6 @@
             </a:r>
           </a:p>
           <a:p>
-            <a:pPr lvl="0" algn="ctr">
-              <a:defRPr/>
-            </a:pPr>
             <a:r>
               <a:rPr lang="en-US" sz="1400" b="1" dirty="0">
                 <a:solidFill>
@@ -32781,9 +31795,11 @@
                 <a:ea typeface="Times New Roman" panose="02020603050405020304" pitchFamily="18" charset="0"/>
                 <a:cs typeface="Times New Roman" panose="02020603050405020304" pitchFamily="18" charset="0"/>
               </a:rPr>
-              <a:t>Verbesserung des Wirtschaftsmanagements für eine nachhaltige und resiliente Beschäftigungsschaffung, bessere Ausgabekapazität und geringeres Länderrisiko</a:t>
+              <a:t>Verbesserung des Wirtschaftsmanagements zur nachhaltigen und resilienten Schaffung von Arbeitsplätzen, für bessere Ausgabenfähigkeit und geringeres Staatsrisiko
+</a:t>
             </a:r>
-            <a:br/>
+          </a:p>
+          <a:p>
             <a:r>
               <a:rPr lang="en-US" sz="1400" b="1" dirty="0">
                 <a:solidFill>
@@ -32795,32 +31811,6 @@
               </a:rPr>
               <a:t/>
             </a:r>
-            <a:r>
-              <a:rPr lang="pt-BR" sz="1400" b="1" dirty="0">
-                <a:solidFill>
-                  <a:srgbClr val="FFFFFF"/>
-                </a:solidFill>
-                <a:latin typeface="Calibri" panose="020F0502020204030204" pitchFamily="34" charset="0"/>
-                <a:ea typeface="Times New Roman" panose="02020603050405020304" pitchFamily="18" charset="0"/>
-                <a:cs typeface="Times New Roman" panose="02020603050405020304" pitchFamily="18" charset="0"/>
-              </a:rPr>
-              <a:t>
-</a:t>
-            </a:r>
-            <a:endParaRPr kumimoji="0" lang="en-US" sz="1400" b="0" i="0" u="none" strike="noStrike" kern="1200" cap="none" spc="0" normalizeH="0" baseline="0" noProof="0" dirty="0">
-              <a:ln>
-                <a:noFill/>
-              </a:ln>
-              <a:solidFill>
-                <a:prstClr val="black"/>
-              </a:solidFill>
-              <a:effectLst/>
-              <a:uLnTx/>
-              <a:uFillTx/>
-              <a:latin typeface="Times New Roman" panose="02020603050405020304" pitchFamily="18" charset="0"/>
-              <a:ea typeface="Times New Roman" panose="02020603050405020304" pitchFamily="18" charset="0"/>
-              <a:cs typeface="+mn-cs"/>
-            </a:endParaRPr>
           </a:p>
         </p:txBody>
       </p:sp>
@@ -32874,9 +31864,6 @@
             </a:bodyPr>
             <a:lstStyle/>
             <a:p>
-              <a:pPr lvl="0" algn="ctr">
-                <a:defRPr/>
-              </a:pPr>
               <a:r>
                 <a:rPr lang="en-US" sz="1400" b="1" dirty="0">
                   <a:solidFill>
@@ -32890,34 +31877,6 @@
               </a:r>
             </a:p>
             <a:p>
-              <a:pPr lvl="0" algn="ctr">
-                <a:defRPr/>
-              </a:pPr>
-              <a:endParaRPr lang="en-US" sz="1400" b="1" dirty="0">
-                <a:solidFill>
-                  <a:srgbClr val="FFFFFF"/>
-                </a:solidFill>
-                <a:latin typeface="Calibri" panose="020F0502020204030204" pitchFamily="34" charset="0"/>
-                <a:ea typeface="Times New Roman" panose="02020603050405020304" pitchFamily="18" charset="0"/>
-                <a:cs typeface="Times New Roman" panose="02020603050405020304" pitchFamily="18" charset="0"/>
-              </a:endParaRPr>
-            </a:p>
-            <a:p>
-              <a:pPr lvl="0" algn="ctr">
-                <a:defRPr/>
-              </a:pPr>
-              <a:r>
-                <a:rPr lang="en-US" sz="1400" b="1" dirty="0">
-                  <a:solidFill>
-                    <a:srgbClr val="FFFFFF"/>
-                  </a:solidFill>
-                  <a:latin typeface="Calibri" panose="020F0502020204030204" pitchFamily="34" charset="0"/>
-                  <a:ea typeface="Times New Roman" panose="02020603050405020304" pitchFamily="18" charset="0"/>
-                  <a:cs typeface="Times New Roman" panose="02020603050405020304" pitchFamily="18" charset="0"/>
-                </a:rPr>
-                <a:t>Förderung des Produktivitätswachstums in ausgewählten arbeitsintensiven Branchen</a:t>
-              </a:r>
-              <a:br/>
               <a:r>
                 <a:rPr lang="en-US" sz="1400" b="1" dirty="0">
                   <a:solidFill>
@@ -32929,8 +31888,10 @@
                 </a:rPr>
                 <a:t/>
               </a:r>
+            </a:p>
+            <a:p>
               <a:r>
-                <a:rPr lang="pt-BR" sz="1400" dirty="0">
+                <a:rPr lang="en-US" sz="1400" b="1" dirty="0">
                   <a:solidFill>
                     <a:srgbClr val="FFFFFF"/>
                   </a:solidFill>
@@ -32938,80 +31899,61 @@
                   <a:ea typeface="Times New Roman" panose="02020603050405020304" pitchFamily="18" charset="0"/>
                   <a:cs typeface="Times New Roman" panose="02020603050405020304" pitchFamily="18" charset="0"/>
                 </a:rPr>
-                <a:t>
+                <a:t>Förderung des Produktivitätswachstums in ausgewählten arbeitsintensiven Branchen
 </a:t>
               </a:r>
             </a:p>
             <a:p>
-              <a:pPr lvl="0" algn="ctr">
-                <a:defRPr/>
-              </a:pPr>
-              <a:endParaRPr kumimoji="0" lang="pt-BR" sz="1400" i="0" u="none" strike="noStrike" kern="1200" cap="none" spc="0" normalizeH="0" baseline="0" noProof="0" dirty="0">
-                <a:ln>
-                  <a:noFill/>
-                </a:ln>
-                <a:solidFill>
-                  <a:srgbClr val="FFFFFF"/>
-                </a:solidFill>
-                <a:effectLst/>
-                <a:uLnTx/>
-                <a:uFillTx/>
-                <a:latin typeface="Calibri" panose="020F0502020204030204" pitchFamily="34" charset="0"/>
-                <a:ea typeface="Times New Roman" panose="02020603050405020304" pitchFamily="18" charset="0"/>
-                <a:cs typeface="Times New Roman" panose="02020603050405020304" pitchFamily="18" charset="0"/>
-              </a:endParaRPr>
+              <a:r>
+                <a:rPr lang="en-US" sz="1400" b="1" dirty="0">
+                  <a:solidFill>
+                    <a:srgbClr val="FFFFFF"/>
+                  </a:solidFill>
+                  <a:latin typeface="Calibri" panose="020F0502020204030204" pitchFamily="34" charset="0"/>
+                  <a:ea typeface="Times New Roman" panose="02020603050405020304" pitchFamily="18" charset="0"/>
+                  <a:cs typeface="Times New Roman" panose="02020603050405020304" pitchFamily="18" charset="0"/>
+                </a:rPr>
+                <a:t/>
+              </a:r>
             </a:p>
             <a:p>
-              <a:pPr lvl="0" algn="ctr">
-                <a:defRPr/>
-              </a:pPr>
-              <a:endParaRPr kumimoji="0" lang="en-US" sz="1400" i="0" u="none" strike="noStrike" kern="1200" cap="none" spc="0" normalizeH="0" baseline="0" noProof="0" dirty="0">
-                <a:ln>
-                  <a:noFill/>
-                </a:ln>
-                <a:solidFill>
-                  <a:srgbClr val="FFFFFF"/>
-                </a:solidFill>
-                <a:effectLst/>
-                <a:uLnTx/>
-                <a:uFillTx/>
-                <a:latin typeface="Calibri" panose="020F0502020204030204" pitchFamily="34" charset="0"/>
-                <a:ea typeface="Times New Roman" panose="02020603050405020304" pitchFamily="18" charset="0"/>
-                <a:cs typeface="Times New Roman" panose="02020603050405020304" pitchFamily="18" charset="0"/>
-              </a:endParaRPr>
+              <a:r>
+                <a:rPr lang="en-US" sz="1400" b="1" dirty="0">
+                  <a:solidFill>
+                    <a:srgbClr val="FFFFFF"/>
+                  </a:solidFill>
+                  <a:latin typeface="Calibri" panose="020F0502020204030204" pitchFamily="34" charset="0"/>
+                  <a:ea typeface="Times New Roman" panose="02020603050405020304" pitchFamily="18" charset="0"/>
+                  <a:cs typeface="Times New Roman" panose="02020603050405020304" pitchFamily="18" charset="0"/>
+                </a:rPr>
+                <a:t/>
+              </a:r>
             </a:p>
             <a:p>
-              <a:pPr marL="0" marR="0" lvl="0" indent="0" algn="ctr" defTabSz="914400" rtl="0" eaLnBrk="1" fontAlgn="auto" latinLnBrk="0" hangingPunct="1">
-                <a:lnSpc>
-                  <a:spcPct val="100000"/>
-                </a:lnSpc>
-                <a:spcBef>
-                  <a:spcPts val="0"/>
-                </a:spcBef>
-                <a:spcAft>
-                  <a:spcPts val="0"/>
-                </a:spcAft>
-                <a:buClrTx/>
-                <a:buSzTx/>
-                <a:buFontTx/>
-                <a:buNone/>
-                <a:tabLst/>
-                <a:defRPr/>
-              </a:pPr>
-              <a:endParaRPr kumimoji="0" lang="en-US" sz="1400" b="0" i="0" u="none" strike="noStrike" kern="1200" cap="none" spc="0" normalizeH="0" baseline="0" noProof="0" dirty="0">
-                <a:ln>
-                  <a:noFill/>
-                </a:ln>
-                <a:solidFill>
-                  <a:srgbClr val="FFFFFF"/>
-                </a:solidFill>
-                <a:effectLst/>
-                <a:uLnTx/>
-                <a:uFillTx/>
-                <a:latin typeface="Calibri" panose="020F0502020204030204" pitchFamily="34" charset="0"/>
-                <a:ea typeface="Times New Roman" panose="02020603050405020304" pitchFamily="18" charset="0"/>
-                <a:cs typeface="Times New Roman" panose="02020603050405020304" pitchFamily="18" charset="0"/>
-              </a:endParaRPr>
+              <a:r>
+                <a:rPr lang="en-US" sz="1400" b="1" dirty="0">
+                  <a:solidFill>
+                    <a:srgbClr val="FFFFFF"/>
+                  </a:solidFill>
+                  <a:latin typeface="Calibri" panose="020F0502020204030204" pitchFamily="34" charset="0"/>
+                  <a:ea typeface="Times New Roman" panose="02020603050405020304" pitchFamily="18" charset="0"/>
+                  <a:cs typeface="Times New Roman" panose="02020603050405020304" pitchFamily="18" charset="0"/>
+                </a:rPr>
+                <a:t/>
+              </a:r>
+            </a:p>
+            <a:p>
+              <a:r>
+                <a:rPr lang="en-US" sz="1400" b="1" dirty="0">
+                  <a:solidFill>
+                    <a:srgbClr val="FFFFFF"/>
+                  </a:solidFill>
+                  <a:latin typeface="Calibri" panose="020F0502020204030204" pitchFamily="34" charset="0"/>
+                  <a:ea typeface="Times New Roman" panose="02020603050405020304" pitchFamily="18" charset="0"/>
+                  <a:cs typeface="Times New Roman" panose="02020603050405020304" pitchFamily="18" charset="0"/>
+                </a:rPr>
+                <a:t/>
+              </a:r>
             </a:p>
           </p:txBody>
         </p:sp>
@@ -33045,9 +31987,6 @@
             </a:bodyPr>
             <a:lstStyle/>
             <a:p>
-              <a:pPr lvl="0" algn="ctr">
-                <a:defRPr/>
-              </a:pPr>
               <a:r>
                 <a:rPr lang="en-US" sz="1400" b="1" dirty="0">
                   <a:solidFill>
@@ -33061,9 +32000,6 @@
               </a:r>
             </a:p>
             <a:p>
-              <a:pPr lvl="0" algn="ctr">
-                <a:defRPr/>
-              </a:pPr>
               <a:r>
                 <a:rPr lang="en-US" sz="1400" b="1" dirty="0">
                   <a:solidFill>
@@ -33073,9 +32009,11 @@
                   <a:ea typeface="Times New Roman" panose="02020603050405020304" pitchFamily="18" charset="0"/>
                   <a:cs typeface="Times New Roman" panose="02020603050405020304" pitchFamily="18" charset="0"/>
                 </a:rPr>
-                <a:t>Ermöglichung eines nachhaltigen Wachstums ausgewählter Naturrohstoffsektoren, die regionale und globale komparative Vorteile ausschöpfen</a:t>
+                <a:t>Nachhaltiges Wachstum ausgewählter Sektoren natürlicher Ressourcen ermöglichen, die regionale und globale komparative Vorteile nutzen
+</a:t>
               </a:r>
-              <a:br/>
+            </a:p>
+            <a:p>
               <a:r>
                 <a:rPr lang="en-US" sz="1400" b="1" dirty="0">
                   <a:solidFill>
@@ -33087,32 +32025,6 @@
                 </a:rPr>
                 <a:t/>
               </a:r>
-              <a:r>
-                <a:rPr lang="pt-BR" sz="1400" dirty="0">
-                  <a:solidFill>
-                    <a:srgbClr val="FFFFFF"/>
-                  </a:solidFill>
-                  <a:latin typeface="Calibri" panose="020F0502020204030204" pitchFamily="34" charset="0"/>
-                  <a:ea typeface="Times New Roman" panose="02020603050405020304" pitchFamily="18" charset="0"/>
-                  <a:cs typeface="Times New Roman" panose="02020603050405020304" pitchFamily="18" charset="0"/>
-                </a:rPr>
-                <a:t>
-</a:t>
-              </a:r>
-              <a:endParaRPr kumimoji="0" lang="en-US" sz="1400" i="0" u="none" strike="noStrike" kern="1200" cap="none" spc="0" normalizeH="0" baseline="0" noProof="0" dirty="0">
-                <a:ln>
-                  <a:noFill/>
-                </a:ln>
-                <a:solidFill>
-                  <a:prstClr val="white"/>
-                </a:solidFill>
-                <a:effectLst/>
-                <a:uLnTx/>
-                <a:uFillTx/>
-                <a:latin typeface="Calibri" panose="020F0502020204030204"/>
-                <a:ea typeface="Times New Roman" panose="02020603050405020304" pitchFamily="18" charset="0"/>
-                <a:cs typeface="+mn-cs"/>
-              </a:endParaRPr>
             </a:p>
           </p:txBody>
         </p:sp>
@@ -33147,9 +32059,6 @@
           </a:bodyPr>
           <a:lstStyle/>
           <a:p>
-            <a:pPr lvl="0" algn="ctr">
-              <a:defRPr/>
-            </a:pPr>
             <a:r>
               <a:rPr lang="en-US" b="1" dirty="0">
                 <a:solidFill>
@@ -33159,23 +32068,12 @@
                 <a:ea typeface="Times New Roman" panose="02020603050405020304" pitchFamily="18" charset="0"/>
                 <a:cs typeface="Times New Roman" panose="02020603050405020304" pitchFamily="18" charset="0"/>
               </a:rPr>
-              <a:t>HLO2: Zunahme inklusiver Beschäftigungsschaffung</a:t>
+              <a:t>HLO2: Steigerung der inklusiven Schaffung von Arbeitsplätzen</a:t>
             </a:r>
-            <a:endParaRPr lang="pt-BR" b="1" dirty="0">
-              <a:solidFill>
-                <a:srgbClr val="FFFFFF"/>
-              </a:solidFill>
-              <a:latin typeface="Calibri" panose="020F0502020204030204" pitchFamily="34" charset="0"/>
-              <a:ea typeface="Times New Roman" panose="02020603050405020304" pitchFamily="18" charset="0"/>
-              <a:cs typeface="Times New Roman" panose="02020603050405020304" pitchFamily="18" charset="0"/>
-            </a:endParaRPr>
-          </a:p>
-          <a:p>
-            <a:pPr lvl="0" algn="ctr">
-              <a:defRPr/>
-            </a:pPr>
+          </a:p>
+          <a:p>
             <a:r>
-              <a:rPr lang="pt-BR" b="1" dirty="0">
+              <a:rPr lang="en-US" b="1" dirty="0">
                 <a:solidFill>
                   <a:srgbClr val="FFFFFF"/>
                 </a:solidFill>
@@ -33185,39 +32083,19 @@
               </a:rPr>
               <a:t> </a:t>
             </a:r>
-            <a:endParaRPr kumimoji="0" lang="en-US" sz="1200" b="0" i="0" u="none" strike="noStrike" kern="1200" cap="none" spc="0" normalizeH="0" baseline="0" noProof="0" dirty="0">
-              <a:ln>
-                <a:noFill/>
-              </a:ln>
-              <a:solidFill>
-                <a:prstClr val="white"/>
-              </a:solidFill>
-              <a:effectLst/>
-              <a:uLnTx/>
-              <a:uFillTx/>
-              <a:latin typeface="Calibri" panose="020F0502020204030204" pitchFamily="34" charset="0"/>
-              <a:ea typeface="Times New Roman" panose="02020603050405020304" pitchFamily="18" charset="0"/>
-              <a:cs typeface="Times New Roman" panose="02020603050405020304" pitchFamily="18" charset="0"/>
-            </a:endParaRPr>
-          </a:p>
-          <a:p>
-            <a:pPr lvl="0">
-              <a:defRPr/>
-            </a:pPr>
-            <a:endParaRPr kumimoji="0" lang="en-US" sz="1200" b="0" i="0" u="none" strike="noStrike" kern="1200" cap="none" spc="0" normalizeH="0" baseline="0" noProof="0" dirty="0">
-              <a:ln>
-                <a:noFill/>
-              </a:ln>
-              <a:solidFill>
-                <a:prstClr val="white"/>
-              </a:solidFill>
-              <a:effectLst/>
-              <a:uLnTx/>
-              <a:uFillTx/>
-              <a:latin typeface="Calibri" panose="020F0502020204030204" pitchFamily="34" charset="0"/>
-              <a:ea typeface="Times New Roman" panose="02020603050405020304" pitchFamily="18" charset="0"/>
-              <a:cs typeface="Times New Roman" panose="02020603050405020304" pitchFamily="18" charset="0"/>
-            </a:endParaRPr>
+          </a:p>
+          <a:p>
+            <a:r>
+              <a:rPr lang="en-US" b="1" dirty="0">
+                <a:solidFill>
+                  <a:srgbClr val="FFFFFF"/>
+                </a:solidFill>
+                <a:latin typeface="Calibri" panose="020F0502020204030204" pitchFamily="34" charset="0"/>
+                <a:ea typeface="Times New Roman" panose="02020603050405020304" pitchFamily="18" charset="0"/>
+                <a:cs typeface="Times New Roman" panose="02020603050405020304" pitchFamily="18" charset="0"/>
+              </a:rPr>
+              <a:t/>
+            </a:r>
           </a:p>
         </p:txBody>
       </p:sp>
@@ -33251,9 +32129,6 @@
           </a:bodyPr>
           <a:lstStyle/>
           <a:p>
-            <a:pPr lvl="0" algn="ctr">
-              <a:defRPr/>
-            </a:pPr>
             <a:r>
               <a:rPr lang="en-US" sz="1400" b="1" dirty="0">
                 <a:solidFill>
@@ -33267,9 +32142,6 @@
             </a:r>
           </a:p>
           <a:p>
-            <a:pPr lvl="0" algn="ctr">
-              <a:defRPr/>
-            </a:pPr>
             <a:r>
               <a:rPr lang="en-US" sz="1400" b="1" dirty="0">
                 <a:solidFill>
@@ -33279,22 +32151,8 @@
                 <a:ea typeface="Times New Roman" panose="02020603050405020304" pitchFamily="18" charset="0"/>
                 <a:cs typeface="Times New Roman" panose="02020603050405020304" pitchFamily="18" charset="0"/>
               </a:rPr>
-              <a:t>Stärkung der Koordination, der Politiken und der Kapazitäten für eine bessere Vorbereitung und Reaktion auf Naturkatastrophen, Pandemien und andere multidimensionale Schocks</a:t>
+              <a:t>Stärkung der Koordination, der Politik und der Kapazitäten für eine bessere Vorsorge und Reaktion auf Naturkatastrophen, Pandemien und andere mehrdimensionale Schocks</a:t>
             </a:r>
-            <a:endParaRPr kumimoji="0" lang="en-US" sz="1400" b="0" i="0" u="none" strike="noStrike" kern="1200" cap="none" spc="0" normalizeH="0" baseline="0" noProof="0" dirty="0">
-              <a:ln>
-                <a:noFill/>
-              </a:ln>
-              <a:solidFill>
-                <a:srgbClr val="FFFFFF"/>
-              </a:solidFill>
-              <a:effectLst/>
-              <a:uLnTx/>
-              <a:uFillTx/>
-              <a:latin typeface="Calibri" panose="020F0502020204030204" pitchFamily="34" charset="0"/>
-              <a:ea typeface="Times New Roman" panose="02020603050405020304" pitchFamily="18" charset="0"/>
-              <a:cs typeface="Times New Roman" panose="02020603050405020304" pitchFamily="18" charset="0"/>
-            </a:endParaRPr>
           </a:p>
         </p:txBody>
       </p:sp>
@@ -33328,9 +32186,6 @@
           </a:bodyPr>
           <a:lstStyle/>
           <a:p>
-            <a:pPr lvl="0" algn="ctr">
-              <a:defRPr/>
-            </a:pPr>
             <a:r>
               <a:rPr lang="en-US" sz="1400" b="1" dirty="0">
                 <a:solidFill>
@@ -33344,9 +32199,6 @@
             </a:r>
           </a:p>
           <a:p>
-            <a:pPr lvl="0" algn="ctr">
-              <a:defRPr/>
-            </a:pPr>
             <a:r>
               <a:rPr lang="en-US" sz="1400" b="1" dirty="0">
                 <a:solidFill>
@@ -33356,22 +32208,8 @@
                 <a:ea typeface="Times New Roman" panose="02020603050405020304" pitchFamily="18" charset="0"/>
                 <a:cs typeface="Times New Roman" panose="02020603050405020304" pitchFamily="18" charset="0"/>
               </a:rPr>
-              <a:t>Ausweitung erschwinglicher, zuverlässiger und klimaresilienter Dienstleistungen für den Zugang der am stärksten benachteiligten Bevölkerung sowie Beschleunigung nachhaltiger Urbanisierung und wirtschaftlicher Agglomeration</a:t>
+              <a:t>Ausweitung erschwinglicher, zuverlässiger und klimaresilienter Dienste für den Zugang der am stärksten Benachteiligten und Beschleunigung einer nachhaltigen Urbanisierung und wirtschaftlichen Agglomeration</a:t>
             </a:r>
-            <a:endParaRPr kumimoji="0" lang="en-US" sz="1200" i="0" u="none" strike="noStrike" kern="1200" cap="none" spc="0" normalizeH="0" baseline="0" noProof="0" dirty="0">
-              <a:ln>
-                <a:noFill/>
-              </a:ln>
-              <a:solidFill>
-                <a:prstClr val="black"/>
-              </a:solidFill>
-              <a:effectLst/>
-              <a:uLnTx/>
-              <a:uFillTx/>
-              <a:latin typeface="Times New Roman" panose="02020603050405020304" pitchFamily="18" charset="0"/>
-              <a:ea typeface="Times New Roman" panose="02020603050405020304" pitchFamily="18" charset="0"/>
-              <a:cs typeface="+mn-cs"/>
-            </a:endParaRPr>
           </a:p>
         </p:txBody>
       </p:sp>
@@ -33424,22 +32262,6 @@
             </a:lvl1pPr>
           </a:lstStyle>
           <a:p>
-            <a:pPr algn="ctr"/>
-            <a:endParaRPr lang="en-US" b="1" dirty="0">
-              <a:latin typeface="Arial"/>
-              <a:cs typeface="Times New Roman"/>
-            </a:endParaRPr>
-          </a:p>
-          <a:p>
-            <a:pPr algn="ctr"/>
-            <a:r>
-              <a:rPr lang="en-US" b="1" dirty="0">
-                <a:latin typeface="Arial"/>
-                <a:cs typeface="Times New Roman"/>
-              </a:rPr>
-              <a:t>CPF 2023-2027: Bestrebungen und Ziele</a:t>
-            </a:r>
-            <a:br/>
             <a:r>
               <a:rPr lang="en-US" b="1" dirty="0">
                 <a:latin typeface="Arial"/>
@@ -33447,7 +32269,18 @@
               </a:rPr>
               <a:t/>
             </a:r>
-            <a:br/>
+          </a:p>
+          <a:p>
+            <a:r>
+              <a:rPr lang="en-US" b="1" dirty="0">
+                <a:latin typeface="Arial"/>
+                <a:cs typeface="Times New Roman"/>
+              </a:rPr>
+              <a:t>CPF 2023-2027: Bestrebungen und Ziele
+</a:t>
+            </a:r>
+          </a:p>
+          <a:p>
             <a:r>
               <a:rPr lang="en-US" b="1" dirty="0">
                 <a:latin typeface="Arial"/>
@@ -33455,14 +32288,6 @@
               </a:rPr>
               <a:t/>
             </a:r>
-            <a:endParaRPr lang="pt" i="1" dirty="0">
-              <a:highlight>
-                <a:srgbClr val="000000">
-                  <a:alpha val="0"/>
-                </a:srgbClr>
-              </a:highlight>
-              <a:latin typeface="Arial"/>
-            </a:endParaRPr>
           </a:p>
         </p:txBody>
       </p:sp>
@@ -33494,9 +32319,8 @@
           <a:p>
             <a:r>
               <a:rPr lang="en-US"/>
-              <a:t>CPF 2023-2027. Öffentliche Version. Maputo, Mai 2022.</a:t>
+              <a:t>CPF 2023-2027. Öffentliche Fassung. Maputo, Mai 2022.</a:t>
             </a:r>
-            <a:endParaRPr lang="en-US" dirty="0"/>
           </a:p>
         </p:txBody>
       </p:sp>
@@ -33618,241 +32442,58 @@
           </a:bodyPr>
           <a:lstStyle/>
           <a:p>
-            <a:pPr marL="342900" indent="-342900" algn="just" rtl="0">
-              <a:lnSpc>
-                <a:spcPct val="100000"/>
-              </a:lnSpc>
-              <a:spcBef>
-                <a:spcPct val="0"/>
-              </a:spcBef>
-              <a:spcAft>
-                <a:spcPts val="600"/>
-              </a:spcAft>
-              <a:buFont typeface="+mj-lt"/>
-              <a:buAutoNum type="arabicPeriod"/>
-            </a:pPr>
             <a:r>
               <a:rPr lang="en-US" sz="1600" b="0" i="0" u="none" strike="noStrike" dirty="0">
                 <a:latin typeface="Arial"/>
                 <a:cs typeface="Times New Roman"/>
               </a:rPr>
-              <a:t>Im Einklang mit den Lehren aus dem CLR, den Empfehlungen der aktualisierten SCD und den Regierungszielen aus dem Fünfjahresplan 2020-24 sowie der laufenden Überarbeitung der nationalen Entwicklungsstrategie zielt der vorgeschlagene CPF für GJ2023-2027 darauf ab, Mosambiks Übergang zu einem </a:t>
+              <a:t>Im Einklang mit den Erkenntnissen des CLR, den Empfehlungen der SCD-Aktualisierung und den Regierungszielen, wie sie im Fünfjahresplan 2020-24 und in der laufenden Überarbeitung der nationalen Entwicklungsstrategie dargelegt sind, soll der vorgeschlagene CPF für HJ2023-2027 dazu beitragen, Mosambiks Übergang zu einem grüneren, resilienteren und inklusiveren Wachstumspfad zu fördern.</a:t>
             </a:r>
-            <a:r>
-              <a:rPr lang="en-US" sz="1600" b="1" i="0" u="none" strike="noStrike" dirty="0">
-                <a:latin typeface="Arial"/>
-                <a:cs typeface="Times New Roman"/>
-              </a:rPr>
-              <a:t>grüneren,</a:t>
-            </a:r>
+          </a:p>
+          <a:p>
             <a:r>
               <a:rPr lang="en-US" sz="1600" b="0" i="0" u="none" strike="noStrike" dirty="0">
                 <a:latin typeface="Arial"/>
                 <a:cs typeface="Times New Roman"/>
               </a:rPr>
-              <a:t> </a:t>
+              <a:t/>
             </a:r>
+          </a:p>
+          <a:p>
             <a:r>
-              <a:rPr lang="en-US" sz="1600" b="1" i="0" u="none" strike="noStrike" dirty="0">
+              <a:rPr lang="en-US" sz="1600" b="0" i="0" u="none" strike="noStrike" dirty="0">
                 <a:latin typeface="Arial"/>
                 <a:cs typeface="Times New Roman"/>
               </a:rPr>
-              <a:t>resilienteren und inklusiveren Wachstumspfad zu fördern.</a:t>
+              <a:t>Zu diesem Zweck wird der CPF staatliche Reformen und Investitionen unterstützen, die zu folgenden übergeordneten Ergebnissen beitragen können:</a:t>
             </a:r>
           </a:p>
           <a:p>
-            <a:pPr marL="342900" indent="-342900" algn="just" rtl="0">
-              <a:lnSpc>
-                <a:spcPct val="100000"/>
-              </a:lnSpc>
-              <a:spcBef>
-                <a:spcPct val="0"/>
-              </a:spcBef>
-              <a:spcAft>
-                <a:spcPts val="600"/>
-              </a:spcAft>
-              <a:buFont typeface="+mj-lt"/>
-              <a:buAutoNum type="arabicPeriod"/>
-            </a:pPr>
-            <a:endParaRPr lang="en-US" sz="1600" b="1" dirty="0">
-              <a:latin typeface="+mn-lt"/>
-              <a:ea typeface="Calibri" panose="020F0502020204030204" pitchFamily="34" charset="0"/>
-              <a:cs typeface="Times New Roman"/>
-            </a:endParaRPr>
-          </a:p>
-          <a:p>
-            <a:pPr marL="342900" indent="-342900" algn="just" rtl="0">
-              <a:lnSpc>
-                <a:spcPct val="100000"/>
-              </a:lnSpc>
-              <a:spcBef>
-                <a:spcPct val="0"/>
-              </a:spcBef>
-              <a:spcAft>
-                <a:spcPts val="600"/>
-              </a:spcAft>
-              <a:buFont typeface="+mj-lt"/>
-              <a:buAutoNum type="arabicPeriod"/>
-            </a:pPr>
             <a:r>
               <a:rPr lang="en-US" sz="1600" b="0" i="0" u="none" strike="noStrike" dirty="0">
-                <a:highlight>
-                  <a:srgbClr val="000000">
-                    <a:alpha val="0"/>
-                  </a:srgbClr>
-                </a:highlight>
                 <a:latin typeface="Arial"/>
-                <a:ea typeface="Calibri"/>
                 <a:cs typeface="Times New Roman"/>
               </a:rPr>
-              <a:t>Zu diesem Zweck wird der CPF Regierungsreformen und -investitionen unterstützen, die zu folgenden übergeordneten Ergebnissen beitragen können:</a:t>
+              <a:t>Ergebnis 1: Inklusivere Institutionen durch (i) ein verbessertes makroökonomisches Wirtschaftsmanagement für bessere Ausgabenfähigkeit und geringeres Staatsrisiko; (ii) Steigerung der Wirksamkeit des öffentlichen Sektors; und (iii) Stärkung der Vorsorge und Reaktion auf mehrdimensionale Schocks.</a:t>
             </a:r>
           </a:p>
           <a:p>
-            <a:pPr lvl="3" algn="just">
-              <a:lnSpc>
-                <a:spcPct val="100000"/>
-              </a:lnSpc>
-              <a:spcBef>
-                <a:spcPct val="0"/>
-              </a:spcBef>
-              <a:spcAft>
-                <a:spcPts val="600"/>
-              </a:spcAft>
-            </a:pPr>
             <a:r>
-              <a:rPr lang="en-US" sz="1600" b="1" i="0" u="none" strike="noStrike" dirty="0">
-                <a:highlight>
-                  <a:srgbClr val="000000">
-                    <a:alpha val="0"/>
-                  </a:srgbClr>
-                </a:highlight>
+              <a:rPr lang="en-US" sz="1600" b="0" i="0" u="none" strike="noStrike" dirty="0">
                 <a:latin typeface="Arial"/>
-                <a:ea typeface="Calibri"/>
                 <a:cs typeface="Times New Roman"/>
               </a:rPr>
-              <a:t>Ergebnis 1: Inklusivere Institutionen durch </a:t>
+              <a:t>Ergebnis 2: Verstärkte inklusive Schaffung von Arbeitsplätzen (Beschleunigung des Strukturwandels), was wiederum (i) die Ermöglichung nachhaltigen Wachstums in ausgewählten Sektoren natürlicher Ressourcen; (ii) die Förderung des Produktivitätswachstums in ausgewählten intensiven Branchen; und (iii) den Ausbau von Infrastruktur- und Urbanisierungsdiensten erfordert.</a:t>
             </a:r>
+          </a:p>
+          <a:p>
             <a:r>
               <a:rPr lang="en-US" sz="1600" b="0" i="0" u="none" strike="noStrike" dirty="0">
-                <a:highlight>
-                  <a:srgbClr val="000000">
-                    <a:alpha val="0"/>
-                  </a:srgbClr>
-                </a:highlight>
                 <a:latin typeface="Arial"/>
-                <a:ea typeface="Calibri"/>
                 <a:cs typeface="Times New Roman"/>
               </a:rPr>
-              <a:t>(i) verbessertes makroökonomisches Management für eine bessere Ausgabenkapazität und ein geringeres Staatsrisiko; (ii) Steigerung der Effizienz des öffentlichen Sektors; und (iii) Stärkung der Vorsorge und Reaktionsfähigkeit gegenüber mehrdimensionalen Schocks.</a:t>
+              <a:t>Ergebnis 3: Verbesserung der Humankapitalbildung und Stärkung der Frauen durch (i) bessere Ergebnisse in Gesundheit und Bildung; (ii) eine effizientere und wirksamere Abdeckung integrierter und nachhaltiger Sozialdienste; und (iii) einen besseren Zugang zu Diensten zur Vermeidung von Teenagerschwangerschaften und zur Förderung der wirtschaftlichen Teilhabe von Frauen.</a:t>
             </a:r>
-          </a:p>
-          <a:p>
-            <a:pPr lvl="3" algn="just">
-              <a:lnSpc>
-                <a:spcPct val="100000"/>
-              </a:lnSpc>
-              <a:spcBef>
-                <a:spcPct val="0"/>
-              </a:spcBef>
-              <a:spcAft>
-                <a:spcPts val="600"/>
-              </a:spcAft>
-            </a:pPr>
-            <a:r>
-              <a:rPr lang="en-US" sz="1600" b="1" i="0" u="none" strike="noStrike" dirty="0">
-                <a:highlight>
-                  <a:srgbClr val="000000">
-                    <a:alpha val="0"/>
-                  </a:srgbClr>
-                </a:highlight>
-                <a:latin typeface="Arial"/>
-                <a:ea typeface="Calibri"/>
-                <a:cs typeface="Times New Roman"/>
-              </a:rPr>
-              <a:t>Ergebnis 2: Verstärkte inklusive Beschäftigungsschaffung </a:t>
-            </a:r>
-            <a:r>
-              <a:rPr lang="en-US" sz="1600" b="0" i="0" u="none" strike="noStrike" dirty="0">
-                <a:highlight>
-                  <a:srgbClr val="000000">
-                    <a:alpha val="0"/>
-                  </a:srgbClr>
-                </a:highlight>
-                <a:latin typeface="Arial"/>
-                <a:ea typeface="Calibri"/>
-                <a:cs typeface="Times New Roman"/>
-              </a:rPr>
-              <a:t>(Beschleunigung des strukturellen Transformationsprozesses), was wiederum erfordert: (i) nachhaltiges Wachstum in ausgewählten Sektoren natürlicher Ressourcen zu ermöglichen; (ii) Produktivitätswachstum in ausgewählten arbeitsintensiven Industrien zu fördern; und (iii) Ausbau von Infrastruktur- und Urbanisierungsdienstleistungen.</a:t>
-            </a:r>
-          </a:p>
-          <a:p>
-            <a:pPr lvl="3" algn="just">
-              <a:lnSpc>
-                <a:spcPct val="100000"/>
-              </a:lnSpc>
-              <a:spcBef>
-                <a:spcPct val="0"/>
-              </a:spcBef>
-              <a:spcAft>
-                <a:spcPts val="600"/>
-              </a:spcAft>
-            </a:pPr>
-            <a:r>
-              <a:rPr lang="en-US" sz="1600" b="1" i="0" u="none" strike="noStrike" dirty="0">
-                <a:highlight>
-                  <a:srgbClr val="000000">
-                    <a:alpha val="0"/>
-                  </a:srgbClr>
-                </a:highlight>
-                <a:latin typeface="Arial"/>
-                <a:ea typeface="Calibri"/>
-                <a:cs typeface="Times New Roman"/>
-              </a:rPr>
-              <a:t>Ergebnis 3: Verbesserung der Humankapitalakkumulation</a:t>
-            </a:r>
-            <a:r>
-              <a:rPr lang="en-US" sz="1600" b="0" i="0" u="none" strike="noStrike" dirty="0">
-                <a:highlight>
-                  <a:srgbClr val="000000">
-                    <a:alpha val="0"/>
-                  </a:srgbClr>
-                </a:highlight>
-                <a:latin typeface="Arial"/>
-                <a:ea typeface="Calibri"/>
-                <a:cs typeface="Times New Roman"/>
-              </a:rPr>
-              <a:t> </a:t>
-            </a:r>
-            <a:r>
-              <a:rPr lang="en-US" sz="1600" b="1" i="0" u="none" strike="noStrike" dirty="0">
-                <a:highlight>
-                  <a:srgbClr val="000000">
-                    <a:alpha val="0"/>
-                  </a:srgbClr>
-                </a:highlight>
-                <a:latin typeface="Arial"/>
-                <a:ea typeface="Calibri"/>
-                <a:cs typeface="Times New Roman"/>
-              </a:rPr>
-              <a:t>und der wirtschaftlichen Teilhabe von Frauen durch </a:t>
-            </a:r>
-            <a:r>
-              <a:rPr lang="en-US" sz="1600" b="0" i="0" u="none" strike="noStrike" dirty="0">
-                <a:highlight>
-                  <a:srgbClr val="000000">
-                    <a:alpha val="0"/>
-                  </a:srgbClr>
-                </a:highlight>
-                <a:latin typeface="Arial"/>
-                <a:ea typeface="Calibri"/>
-                <a:cs typeface="Times New Roman"/>
-              </a:rPr>
-              <a:t>(i) bessere Gesundheits- und Bildungsergebnisse; (ii) eine effizientere und wirksamere Abdeckung integrierter und nachhaltiger Sozialdienste; und (iii) besseren Zugang zu Dienstleistungen zur Prävention von Teenagerschwangerschaften und zur Förderung der wirtschaftlichen Beteiligung von Frauen.</a:t>
-            </a:r>
-            <a:endParaRPr lang="en-US" sz="1600" dirty="0">
-              <a:latin typeface="+mn-lt"/>
-            </a:endParaRPr>
           </a:p>
         </p:txBody>
       </p:sp>
@@ -33905,22 +32546,6 @@
             </a:lvl1pPr>
           </a:lstStyle>
           <a:p>
-            <a:pPr algn="ctr"/>
-            <a:endParaRPr lang="en-US" b="1" dirty="0">
-              <a:latin typeface="Arial"/>
-              <a:cs typeface="Times New Roman"/>
-            </a:endParaRPr>
-          </a:p>
-          <a:p>
-            <a:pPr algn="ctr"/>
-            <a:r>
-              <a:rPr lang="en-US" b="1" dirty="0">
-                <a:latin typeface="Arial"/>
-                <a:cs typeface="Times New Roman"/>
-              </a:rPr>
-              <a:t>CPF-Vorschlag 2023-2027: Ziele und Bestrebungen  </a:t>
-            </a:r>
-            <a:br/>
             <a:r>
               <a:rPr lang="en-US" b="1" dirty="0">
                 <a:latin typeface="Arial"/>
@@ -33928,7 +32553,18 @@
               </a:rPr>
               <a:t/>
             </a:r>
-            <a:br/>
+          </a:p>
+          <a:p>
+            <a:r>
+              <a:rPr lang="en-US" b="1" dirty="0">
+                <a:latin typeface="Arial"/>
+                <a:cs typeface="Times New Roman"/>
+              </a:rPr>
+              <a:t>CPF-Vorschlag 2023-2027: Ziele und Bestrebungen  
+</a:t>
+            </a:r>
+          </a:p>
+          <a:p>
             <a:r>
               <a:rPr lang="en-US" b="1" dirty="0">
                 <a:latin typeface="Arial"/>
@@ -33936,14 +32572,6 @@
               </a:rPr>
               <a:t/>
             </a:r>
-            <a:endParaRPr lang="pt" sz="2000" i="1" dirty="0">
-              <a:highlight>
-                <a:srgbClr val="000000">
-                  <a:alpha val="0"/>
-                </a:srgbClr>
-              </a:highlight>
-              <a:latin typeface="Arial"/>
-            </a:endParaRPr>
           </a:p>
         </p:txBody>
       </p:sp>
@@ -33970,9 +32598,8 @@
           <a:p>
             <a:r>
               <a:rPr lang="en-US"/>
-              <a:t>CPF 2023-2027. Öffentliche Version. Maputo, Mai 2022.</a:t>
+              <a:t>CPF 2023-2027. Öffentliche Fassung. Maputo, Mai 2022.</a:t>
             </a:r>
-            <a:endParaRPr lang="en-US" dirty="0"/>
           </a:p>
         </p:txBody>
       </p:sp>
@@ -34172,14 +32799,6 @@
           </a:bodyPr>
           <a:lstStyle/>
           <a:p>
-            <a:pPr lvl="0" algn="ctr" eaLnBrk="0" fontAlgn="base" hangingPunct="0">
-              <a:spcBef>
-                <a:spcPct val="0"/>
-              </a:spcBef>
-              <a:spcAft>
-                <a:spcPct val="0"/>
-              </a:spcAft>
-            </a:pPr>
             <a:r>
               <a:rPr lang="en-US" sz="1000" b="1">
                 <a:solidFill>
@@ -34189,9 +32808,11 @@
                 <a:ea typeface="Times New Roman"/>
                 <a:cs typeface="Times New Roman"/>
               </a:rPr>
-              <a:t>REGIERUNGSPROGRAMME</a:t>
+              <a:t>REGIERUNGsprogramme
+</a:t>
             </a:r>
-            <a:br/>
+          </a:p>
+          <a:p>
             <a:r>
               <a:rPr lang="en-US" sz="1000" b="1">
                 <a:solidFill>
@@ -34201,9 +32822,11 @@
                 <a:ea typeface="Times New Roman"/>
                 <a:cs typeface="Times New Roman"/>
               </a:rPr>
-              <a:t>(ENDE-Pfeiler)</a:t>
+              <a:t>(ENDE-Säulen)
+</a:t>
             </a:r>
-            <a:br/>
+          </a:p>
+          <a:p>
             <a:r>
               <a:rPr lang="en-US" sz="1000" b="1">
                 <a:solidFill>
@@ -34215,40 +32838,6 @@
               </a:rPr>
               <a:t/>
             </a:r>
-            <a:br/>
-            <a:r>
-              <a:rPr lang="en-US" sz="1000" b="1">
-                <a:solidFill>
-                  <a:srgbClr val="000000"/>
-                </a:solidFill>
-                <a:latin typeface="Calibri"/>
-                <a:ea typeface="Times New Roman"/>
-                <a:cs typeface="Times New Roman"/>
-              </a:rPr>
-              <a:t/>
-            </a:r>
-            <a:br/>
-            <a:r>
-              <a:rPr lang="en-US" sz="1000" b="1">
-                <a:solidFill>
-                  <a:srgbClr val="000000"/>
-                </a:solidFill>
-                <a:latin typeface="Calibri"/>
-                <a:ea typeface="Times New Roman"/>
-                <a:cs typeface="Times New Roman"/>
-              </a:rPr>
-              <a:t/>
-            </a:r>
-            <a:endParaRPr kumimoji="0" lang="en-US" altLang="zh-CN" sz="1800" b="0" i="0" u="none" strike="noStrike" cap="none" normalizeH="0" baseline="0" dirty="0">
-              <a:ln>
-                <a:noFill/>
-              </a:ln>
-              <a:solidFill>
-                <a:schemeClr val="tx1"/>
-              </a:solidFill>
-              <a:effectLst/>
-              <a:latin typeface="Arial" panose="020B0604020202020204" pitchFamily="34" charset="0"/>
-            </a:endParaRPr>
           </a:p>
         </p:txBody>
       </p:sp>
@@ -34293,32 +32882,28 @@
           </a:bodyPr>
           <a:lstStyle/>
           <a:p>
-            <a:pPr lvl="0" algn="ctr" eaLnBrk="0" fontAlgn="base" hangingPunct="0">
-              <a:spcBef>
-                <a:spcPct val="0"/>
-              </a:spcBef>
-              <a:spcAft>
-                <a:spcPct val="0"/>
-              </a:spcAft>
-            </a:pPr>
             <a:r>
               <a:rPr lang="en-US" altLang="zh-CN" sz="900" b="1" dirty="0">
                 <a:latin typeface="Calibri" panose="020F0502020204030204" pitchFamily="34" charset="0"/>
                 <a:ea typeface="Times New Roman" panose="02020603050405020304" pitchFamily="18" charset="0"/>
                 <a:cs typeface="Times New Roman" panose="02020603050405020304" pitchFamily="18" charset="0"/>
               </a:rPr>
-              <a:t> </a:t>
+              <a:t> 
+</a:t>
             </a:r>
-            <a:br/>
+          </a:p>
+          <a:p>
             <a:r>
               <a:rPr lang="en-US" altLang="zh-CN" sz="900" b="1" dirty="0">
                 <a:latin typeface="Calibri" panose="020F0502020204030204" pitchFamily="34" charset="0"/>
                 <a:ea typeface="Times New Roman" panose="02020603050405020304" pitchFamily="18" charset="0"/>
                 <a:cs typeface="Times New Roman" panose="02020603050405020304" pitchFamily="18" charset="0"/>
               </a:rPr>
-              <a:t>Soziale Transformation</a:t>
+              <a:t>Sozialer Wandel
+</a:t>
             </a:r>
-            <a:br/>
+          </a:p>
+          <a:p>
             <a:r>
               <a:rPr lang="en-US" altLang="zh-CN" sz="900" b="1" dirty="0">
                 <a:latin typeface="Calibri" panose="020F0502020204030204" pitchFamily="34" charset="0"/>
@@ -34327,34 +32912,6 @@
               </a:rPr>
               <a:t/>
             </a:r>
-            <a:br/>
-            <a:r>
-              <a:rPr lang="en-US" altLang="zh-CN" sz="900" b="1" dirty="0">
-                <a:latin typeface="Calibri" panose="020F0502020204030204" pitchFamily="34" charset="0"/>
-                <a:ea typeface="Times New Roman" panose="02020603050405020304" pitchFamily="18" charset="0"/>
-                <a:cs typeface="Times New Roman" panose="02020603050405020304" pitchFamily="18" charset="0"/>
-              </a:rPr>
-              <a:t/>
-            </a:r>
-            <a:br/>
-            <a:r>
-              <a:rPr lang="en-US" altLang="zh-CN" sz="900" b="1" dirty="0">
-                <a:latin typeface="Calibri" panose="020F0502020204030204" pitchFamily="34" charset="0"/>
-                <a:ea typeface="Times New Roman" panose="02020603050405020304" pitchFamily="18" charset="0"/>
-                <a:cs typeface="Times New Roman" panose="02020603050405020304" pitchFamily="18" charset="0"/>
-              </a:rPr>
-              <a:t/>
-            </a:r>
-            <a:endParaRPr kumimoji="0" lang="en-US" altLang="zh-CN" sz="1800" b="0" i="0" u="none" strike="noStrike" cap="none" normalizeH="0" baseline="0" dirty="0">
-              <a:ln>
-                <a:noFill/>
-              </a:ln>
-              <a:solidFill>
-                <a:schemeClr val="tx1"/>
-              </a:solidFill>
-              <a:effectLst/>
-              <a:latin typeface="Arial" panose="020B0604020202020204" pitchFamily="34" charset="0"/>
-            </a:endParaRPr>
           </a:p>
         </p:txBody>
       </p:sp>
@@ -34399,14 +32956,28 @@
           </a:bodyPr>
           <a:lstStyle/>
           <a:p>
-            <a:pPr lvl="0" algn="ctr" eaLnBrk="0" fontAlgn="base" hangingPunct="0">
-              <a:spcBef>
-                <a:spcPct val="0"/>
-              </a:spcBef>
-              <a:spcAft>
-                <a:spcPct val="0"/>
-              </a:spcAft>
-            </a:pPr>
+            <a:r>
+              <a:rPr lang="en-US" altLang="zh-CN" sz="900" b="1" dirty="0">
+                <a:latin typeface="Calibri" pitchFamily="34" charset="0"/>
+                <a:ea typeface="Times New Roman" panose="02020603050405020304" pitchFamily="18" charset="0"/>
+                <a:cs typeface="Times New Roman" panose="02020603050405020304" pitchFamily="18" charset="0"/>
+              </a:rPr>
+              <a:t>
+</a:t>
+            </a:r>
+          </a:p>
+          <a:p>
+            <a:r>
+              <a:rPr lang="en-US" altLang="zh-CN" sz="900" b="1" dirty="0">
+                <a:latin typeface="Calibri" pitchFamily="34" charset="0"/>
+                <a:ea typeface="Times New Roman" panose="02020603050405020304" pitchFamily="18" charset="0"/>
+                <a:cs typeface="Times New Roman" panose="02020603050405020304" pitchFamily="18" charset="0"/>
+              </a:rPr>
+              <a:t>Wirtschaftlicher Wandel
+</a:t>
+            </a:r>
+          </a:p>
+          <a:p>
             <a:r>
               <a:rPr lang="en-US" altLang="zh-CN" sz="900" b="1" dirty="0">
                 <a:latin typeface="Calibri" pitchFamily="34" charset="0"/>
@@ -34415,52 +32986,6 @@
               </a:rPr>
               <a:t/>
             </a:r>
-            <a:br/>
-            <a:r>
-              <a:rPr lang="en-US" altLang="zh-CN" sz="900" b="1" dirty="0">
-                <a:latin typeface="Calibri" pitchFamily="34" charset="0"/>
-                <a:ea typeface="Times New Roman" panose="02020603050405020304" pitchFamily="18" charset="0"/>
-                <a:cs typeface="Times New Roman" panose="02020603050405020304" pitchFamily="18" charset="0"/>
-              </a:rPr>
-              <a:t>Wirtschaftliche Transformation</a:t>
-            </a:r>
-            <a:br/>
-            <a:r>
-              <a:rPr lang="en-US" altLang="zh-CN" sz="900" b="1" dirty="0">
-                <a:latin typeface="Calibri" pitchFamily="34" charset="0"/>
-                <a:ea typeface="Times New Roman" panose="02020603050405020304" pitchFamily="18" charset="0"/>
-                <a:cs typeface="Times New Roman" panose="02020603050405020304" pitchFamily="18" charset="0"/>
-              </a:rPr>
-              <a:t/>
-            </a:r>
-            <a:br/>
-            <a:r>
-              <a:rPr lang="en-US" altLang="zh-CN" sz="900" b="1" dirty="0">
-                <a:latin typeface="Calibri" pitchFamily="34" charset="0"/>
-                <a:ea typeface="Times New Roman" panose="02020603050405020304" pitchFamily="18" charset="0"/>
-                <a:cs typeface="Times New Roman" panose="02020603050405020304" pitchFamily="18" charset="0"/>
-              </a:rPr>
-              <a:t/>
-            </a:r>
-            <a:br/>
-            <a:r>
-              <a:rPr lang="en-US" altLang="zh-CN" sz="900" b="1" dirty="0">
-                <a:latin typeface="Calibri" pitchFamily="34" charset="0"/>
-                <a:ea typeface="Times New Roman" panose="02020603050405020304" pitchFamily="18" charset="0"/>
-                <a:cs typeface="Times New Roman" panose="02020603050405020304" pitchFamily="18" charset="0"/>
-              </a:rPr>
-              <a:t/>
-            </a:r>
-            <a:endParaRPr kumimoji="0" lang="en-US" altLang="zh-CN" sz="1800" b="0" i="0" u="none" strike="noStrike" cap="none" normalizeH="0" baseline="0" dirty="0">
-              <a:ln>
-                <a:noFill/>
-              </a:ln>
-              <a:solidFill>
-                <a:schemeClr val="tx1"/>
-              </a:solidFill>
-              <a:effectLst/>
-              <a:latin typeface="Arial" panose="020B0604020202020204" pitchFamily="34" charset="0"/>
-            </a:endParaRPr>
           </a:p>
         </p:txBody>
       </p:sp>
@@ -34505,14 +33030,28 @@
           </a:bodyPr>
           <a:lstStyle/>
           <a:p>
-            <a:pPr lvl="0" algn="ctr" eaLnBrk="0" fontAlgn="base" hangingPunct="0">
-              <a:spcBef>
-                <a:spcPct val="0"/>
-              </a:spcBef>
-              <a:spcAft>
-                <a:spcPct val="0"/>
-              </a:spcAft>
-            </a:pPr>
+            <a:r>
+              <a:rPr lang="en-US" altLang="zh-CN" sz="900" b="1" dirty="0">
+                <a:latin typeface="Calibri" panose="020F0502020204030204" pitchFamily="34" charset="0"/>
+                <a:ea typeface="Times New Roman" panose="02020603050405020304" pitchFamily="18" charset="0"/>
+                <a:cs typeface="Times New Roman" panose="02020603050405020304" pitchFamily="18" charset="0"/>
+              </a:rPr>
+              <a:t>
+</a:t>
+            </a:r>
+          </a:p>
+          <a:p>
+            <a:r>
+              <a:rPr lang="en-US" altLang="zh-CN" sz="900" b="1" dirty="0">
+                <a:latin typeface="Calibri" panose="020F0502020204030204" pitchFamily="34" charset="0"/>
+                <a:ea typeface="Times New Roman" panose="02020603050405020304" pitchFamily="18" charset="0"/>
+                <a:cs typeface="Times New Roman" panose="02020603050405020304" pitchFamily="18" charset="0"/>
+              </a:rPr>
+              <a:t>Regierungsführung
+</a:t>
+            </a:r>
+          </a:p>
+          <a:p>
             <a:r>
               <a:rPr lang="en-US" altLang="zh-CN" sz="900" b="1" dirty="0">
                 <a:latin typeface="Calibri" panose="020F0502020204030204" pitchFamily="34" charset="0"/>
@@ -34521,52 +33060,6 @@
               </a:rPr>
               <a:t/>
             </a:r>
-            <a:br/>
-            <a:r>
-              <a:rPr lang="en-US" altLang="zh-CN" sz="900" b="1" dirty="0">
-                <a:latin typeface="Calibri" panose="020F0502020204030204" pitchFamily="34" charset="0"/>
-                <a:ea typeface="Times New Roman" panose="02020603050405020304" pitchFamily="18" charset="0"/>
-                <a:cs typeface="Times New Roman" panose="02020603050405020304" pitchFamily="18" charset="0"/>
-              </a:rPr>
-              <a:t>Governance</a:t>
-            </a:r>
-            <a:br/>
-            <a:r>
-              <a:rPr lang="en-US" altLang="zh-CN" sz="900" b="1" dirty="0">
-                <a:latin typeface="Calibri" panose="020F0502020204030204" pitchFamily="34" charset="0"/>
-                <a:ea typeface="Times New Roman" panose="02020603050405020304" pitchFamily="18" charset="0"/>
-                <a:cs typeface="Times New Roman" panose="02020603050405020304" pitchFamily="18" charset="0"/>
-              </a:rPr>
-              <a:t/>
-            </a:r>
-            <a:br/>
-            <a:r>
-              <a:rPr lang="en-US" altLang="zh-CN" sz="900" b="1" dirty="0">
-                <a:latin typeface="Calibri" panose="020F0502020204030204" pitchFamily="34" charset="0"/>
-                <a:ea typeface="Times New Roman" panose="02020603050405020304" pitchFamily="18" charset="0"/>
-                <a:cs typeface="Times New Roman" panose="02020603050405020304" pitchFamily="18" charset="0"/>
-              </a:rPr>
-              <a:t/>
-            </a:r>
-            <a:br/>
-            <a:r>
-              <a:rPr lang="en-US" altLang="zh-CN" sz="900" b="1" dirty="0">
-                <a:latin typeface="Calibri" panose="020F0502020204030204" pitchFamily="34" charset="0"/>
-                <a:ea typeface="Times New Roman" panose="02020603050405020304" pitchFamily="18" charset="0"/>
-                <a:cs typeface="Times New Roman" panose="02020603050405020304" pitchFamily="18" charset="0"/>
-              </a:rPr>
-              <a:t/>
-            </a:r>
-            <a:endParaRPr kumimoji="0" lang="en-US" altLang="zh-CN" sz="1800" b="0" i="0" u="none" strike="noStrike" cap="none" normalizeH="0" baseline="0" dirty="0">
-              <a:ln>
-                <a:noFill/>
-              </a:ln>
-              <a:solidFill>
-                <a:schemeClr val="tx1"/>
-              </a:solidFill>
-              <a:effectLst/>
-              <a:latin typeface="Arial" panose="020B0604020202020204" pitchFamily="34" charset="0"/>
-            </a:endParaRPr>
           </a:p>
         </p:txBody>
       </p:sp>
@@ -34611,14 +33104,6 @@
           </a:bodyPr>
           <a:lstStyle/>
           <a:p>
-            <a:pPr lvl="0" algn="ctr" eaLnBrk="0" fontAlgn="base" hangingPunct="0">
-              <a:spcBef>
-                <a:spcPct val="0"/>
-              </a:spcBef>
-              <a:spcAft>
-                <a:spcPct val="0"/>
-              </a:spcAft>
-            </a:pPr>
             <a:r>
               <a:rPr lang="en-US" sz="900" b="1" dirty="0">
                 <a:solidFill>
@@ -34628,9 +33113,11 @@
                 <a:ea typeface="Times New Roman"/>
                 <a:cs typeface="Times New Roman"/>
               </a:rPr>
-              <a:t> Umwelt/Natürliche Ressourcen (Kreislaufwirtschaft)</a:t>
+              <a:t> Umwelt/Natürliche Ressourcen (Kreislaufwirtschaft)
+</a:t>
             </a:r>
-            <a:br/>
+          </a:p>
+          <a:p>
             <a:r>
               <a:rPr lang="en-US" sz="900" b="1" dirty="0">
                 <a:solidFill>
@@ -34642,28 +33129,6 @@
               </a:rPr>
               <a:t/>
             </a:r>
-            <a:br/>
-            <a:r>
-              <a:rPr lang="en-US" sz="900" b="1" dirty="0">
-                <a:solidFill>
-                  <a:srgbClr val="000000"/>
-                </a:solidFill>
-                <a:latin typeface="Calibri"/>
-                <a:ea typeface="Times New Roman"/>
-                <a:cs typeface="Times New Roman"/>
-              </a:rPr>
-              <a:t/>
-            </a:r>
-            <a:endParaRPr kumimoji="0" lang="en-US" altLang="zh-CN" sz="1800" b="0" i="0" u="none" strike="noStrike" cap="none" normalizeH="0" baseline="0" dirty="0">
-              <a:ln>
-                <a:noFill/>
-              </a:ln>
-              <a:solidFill>
-                <a:schemeClr val="tx1"/>
-              </a:solidFill>
-              <a:effectLst/>
-              <a:latin typeface="Arial" panose="020B0604020202020204" pitchFamily="34" charset="0"/>
-            </a:endParaRPr>
           </a:p>
         </p:txBody>
       </p:sp>
@@ -34708,21 +33173,6 @@
           </a:bodyPr>
           <a:lstStyle/>
           <a:p>
-            <a:pPr marL="0" marR="0" lvl="0" indent="0" algn="ctr" defTabSz="914400" rtl="0" eaLnBrk="0" fontAlgn="base" latinLnBrk="0" hangingPunct="0">
-              <a:lnSpc>
-                <a:spcPct val="100000"/>
-              </a:lnSpc>
-              <a:spcBef>
-                <a:spcPct val="0"/>
-              </a:spcBef>
-              <a:spcAft>
-                <a:spcPct val="0"/>
-              </a:spcAft>
-              <a:buClrTx/>
-              <a:buSzTx/>
-              <a:buFontTx/>
-              <a:buNone/>
-            </a:pPr>
             <a:r>
               <a:rPr kumimoji="0" lang="pt" sz="900" b="1" i="0" u="none" strike="noStrike" cap="none" normalizeH="0" baseline="0" dirty="0">
                 <a:solidFill>
@@ -34737,18 +33187,8 @@
                 <a:ea typeface="Times New Roman"/>
                 <a:cs typeface="Times New Roman"/>
               </a:rPr>
-              <a:t>PRIORIDADES DA ACTUALIZAÇÃO DO SCB do BM </a:t>
+              <a:t>PRIORITÄTEN DER AKTUALISIERUNG DES SCD DER WELTBANK </a:t>
             </a:r>
-            <a:endParaRPr kumimoji="0" lang="en-US" altLang="zh-CN" sz="1600" b="0" i="0" u="none" strike="noStrike" cap="none" normalizeH="0" baseline="0" dirty="0">
-              <a:ln>
-                <a:noFill/>
-              </a:ln>
-              <a:solidFill>
-                <a:schemeClr val="tx1"/>
-              </a:solidFill>
-              <a:effectLst/>
-              <a:latin typeface="Arial" panose="020B0604020202020204" pitchFamily="34" charset="0"/>
-            </a:endParaRPr>
           </a:p>
         </p:txBody>
       </p:sp>
@@ -34793,21 +33233,6 @@
           </a:bodyPr>
           <a:lstStyle/>
           <a:p>
-            <a:pPr marL="0" marR="0" lvl="0" indent="0" algn="ctr" defTabSz="914400" rtl="0" eaLnBrk="0" fontAlgn="base" latinLnBrk="0" hangingPunct="0">
-              <a:lnSpc>
-                <a:spcPct val="100000"/>
-              </a:lnSpc>
-              <a:spcBef>
-                <a:spcPct val="0"/>
-              </a:spcBef>
-              <a:spcAft>
-                <a:spcPct val="0"/>
-              </a:spcAft>
-              <a:buClrTx/>
-              <a:buSzTx/>
-              <a:buFontTx/>
-              <a:buNone/>
-            </a:pPr>
             <a:r>
               <a:rPr kumimoji="0" lang="pt" sz="1000" b="1" i="0" u="none" strike="noStrike" cap="none" normalizeH="0" baseline="0" dirty="0">
                 <a:solidFill>
@@ -34822,18 +33247,8 @@
                 <a:ea typeface="Times New Roman"/>
                 <a:cs typeface="Times New Roman"/>
               </a:rPr>
-              <a:t>OBJECTIVOS DO CPF DO GBM</a:t>
+              <a:t>ZIELE DES CPF DER WBG</a:t>
             </a:r>
-            <a:endParaRPr kumimoji="0" lang="en-US" altLang="zh-CN" sz="1800" b="0" i="0" u="none" strike="noStrike" cap="none" normalizeH="0" baseline="0" dirty="0">
-              <a:ln>
-                <a:noFill/>
-              </a:ln>
-              <a:solidFill>
-                <a:schemeClr val="tx1"/>
-              </a:solidFill>
-              <a:effectLst/>
-              <a:latin typeface="Arial" panose="020B0604020202020204" pitchFamily="34" charset="0"/>
-            </a:endParaRPr>
           </a:p>
         </p:txBody>
       </p:sp>
@@ -34878,14 +33293,6 @@
           </a:bodyPr>
           <a:lstStyle/>
           <a:p>
-            <a:pPr lvl="0" algn="ctr" eaLnBrk="0" fontAlgn="base" hangingPunct="0">
-              <a:spcBef>
-                <a:spcPct val="0"/>
-              </a:spcBef>
-              <a:spcAft>
-                <a:spcPct val="0"/>
-              </a:spcAft>
-            </a:pPr>
             <a:r>
               <a:rPr lang="en-US" sz="1000" b="1" dirty="0">
                 <a:solidFill>
@@ -34895,9 +33302,11 @@
                 <a:ea typeface="Times New Roman"/>
                 <a:cs typeface="Times New Roman"/>
               </a:rPr>
-              <a:t>ÜBERGEORDNETE ZIELE (HLO)</a:t>
+              <a:t>ÜBERGEORDNETE ZIELE (HLO)
+</a:t>
             </a:r>
-            <a:br/>
+          </a:p>
+          <a:p>
             <a:r>
               <a:rPr lang="en-US" sz="1000" b="1" dirty="0">
                 <a:solidFill>
@@ -34909,28 +33318,6 @@
               </a:rPr>
               <a:t/>
             </a:r>
-            <a:br/>
-            <a:r>
-              <a:rPr lang="en-US" sz="1000" b="1" dirty="0">
-                <a:solidFill>
-                  <a:srgbClr val="000000"/>
-                </a:solidFill>
-                <a:latin typeface="Calibri"/>
-                <a:ea typeface="Times New Roman"/>
-                <a:cs typeface="Times New Roman"/>
-              </a:rPr>
-              <a:t/>
-            </a:r>
-            <a:endParaRPr kumimoji="0" lang="en-US" altLang="zh-CN" sz="1800" b="0" i="0" u="none" strike="noStrike" cap="none" normalizeH="0" baseline="0" dirty="0">
-              <a:ln>
-                <a:noFill/>
-              </a:ln>
-              <a:solidFill>
-                <a:schemeClr val="tx1"/>
-              </a:solidFill>
-              <a:effectLst/>
-              <a:latin typeface="Arial" panose="020B0604020202020204" pitchFamily="34" charset="0"/>
-            </a:endParaRPr>
           </a:p>
         </p:txBody>
       </p:sp>
@@ -34975,55 +33362,6 @@
           </a:bodyPr>
           <a:lstStyle/>
           <a:p>
-            <a:pPr marL="0" marR="0" lvl="0" indent="0" algn="ctr" defTabSz="914400" rtl="0" eaLnBrk="0" fontAlgn="base" latinLnBrk="0" hangingPunct="0">
-              <a:lnSpc>
-                <a:spcPct val="100000"/>
-              </a:lnSpc>
-              <a:spcBef>
-                <a:spcPct val="0"/>
-              </a:spcBef>
-              <a:spcAft>
-                <a:spcPct val="0"/>
-              </a:spcAft>
-              <a:buClrTx/>
-              <a:buSzTx/>
-              <a:buFontTx/>
-              <a:buNone/>
-            </a:pPr>
-            <a:endParaRPr kumimoji="0" lang="en-US" altLang="zh-CN" sz="900" b="0" i="0" u="none" strike="noStrike" cap="none" normalizeH="0" baseline="0" dirty="0">
-              <a:ln>
-                <a:noFill/>
-              </a:ln>
-              <a:solidFill>
-                <a:schemeClr val="tx1"/>
-              </a:solidFill>
-              <a:effectLst/>
-              <a:latin typeface="Calibri" pitchFamily="34" charset="0"/>
-              <a:ea typeface="Times New Roman" panose="02020603050405020304" pitchFamily="18" charset="0"/>
-              <a:cs typeface="Times New Roman" panose="02020603050405020304" pitchFamily="18" charset="0"/>
-            </a:endParaRPr>
-          </a:p>
-          <a:p>
-            <a:pPr lvl="0" algn="ctr" eaLnBrk="0" fontAlgn="base" hangingPunct="0">
-              <a:spcBef>
-                <a:spcPct val="0"/>
-              </a:spcBef>
-              <a:spcAft>
-                <a:spcPct val="0"/>
-              </a:spcAft>
-            </a:pPr>
-            <a:r>
-              <a:rPr lang="en-US" sz="900" dirty="0">
-                <a:solidFill>
-                  <a:srgbClr val="000000"/>
-                </a:solidFill>
-                <a:latin typeface="Calibri"/>
-                <a:ea typeface="Times New Roman"/>
-                <a:cs typeface="Times New Roman"/>
-              </a:rPr>
-              <a:t>HLO 2: Zunahme inklusiver Beschäftigungsschaffung</a:t>
-            </a:r>
-            <a:br/>
             <a:r>
               <a:rPr lang="en-US" sz="900" dirty="0">
                 <a:solidFill>
@@ -35035,7 +33373,22 @@
               </a:rPr>
               <a:t/>
             </a:r>
-            <a:br/>
+          </a:p>
+          <a:p>
+            <a:r>
+              <a:rPr lang="en-US" sz="900" dirty="0">
+                <a:solidFill>
+                  <a:srgbClr val="000000"/>
+                </a:solidFill>
+                <a:latin typeface="Calibri"/>
+                <a:ea typeface="Times New Roman"/>
+                <a:cs typeface="Times New Roman"/>
+              </a:rPr>
+              <a:t>HLO 2: Steigerung der inklusiven Schaffung von Arbeitsplätzen
+</a:t>
+            </a:r>
+          </a:p>
+          <a:p>
             <a:r>
               <a:rPr lang="en-US" sz="900" dirty="0">
                 <a:solidFill>
@@ -35047,45 +33400,19 @@
               </a:rPr>
               <a:t/>
             </a:r>
-            <a:endParaRPr kumimoji="0" lang="en-US" altLang="zh-CN" sz="900" b="0" i="1" u="none" strike="noStrike" cap="none" normalizeH="0" baseline="0" dirty="0">
-              <a:ln>
-                <a:noFill/>
-              </a:ln>
-              <a:solidFill>
-                <a:schemeClr val="tx1"/>
-              </a:solidFill>
-              <a:effectLst/>
-              <a:latin typeface="Calibri" pitchFamily="34" charset="0"/>
-              <a:ea typeface="Times New Roman" panose="02020603050405020304" pitchFamily="18" charset="0"/>
-              <a:cs typeface="Times New Roman" panose="02020603050405020304" pitchFamily="18" charset="0"/>
-            </a:endParaRPr>
-          </a:p>
-          <a:p>
-            <a:pPr marL="0" marR="0" lvl="0" indent="0" algn="ctr" defTabSz="914400" rtl="0" eaLnBrk="0" fontAlgn="base" latinLnBrk="0" hangingPunct="0">
-              <a:lnSpc>
-                <a:spcPct val="100000"/>
-              </a:lnSpc>
-              <a:spcBef>
-                <a:spcPct val="0"/>
-              </a:spcBef>
-              <a:spcAft>
-                <a:spcPct val="0"/>
-              </a:spcAft>
-              <a:buClrTx/>
-              <a:buSzTx/>
-              <a:buFontTx/>
-              <a:buNone/>
-            </a:pPr>
-            <a:endParaRPr kumimoji="0" lang="en-US" altLang="zh-CN" sz="1800" b="0" i="0" u="none" strike="noStrike" cap="none" normalizeH="0" baseline="0" dirty="0">
-              <a:ln>
-                <a:noFill/>
-              </a:ln>
-              <a:solidFill>
-                <a:schemeClr val="tx1"/>
-              </a:solidFill>
-              <a:effectLst/>
-              <a:latin typeface="Arial" panose="020B0604020202020204" pitchFamily="34" charset="0"/>
-            </a:endParaRPr>
+          </a:p>
+          <a:p>
+            <a:r>
+              <a:rPr lang="en-US" sz="900" dirty="0">
+                <a:solidFill>
+                  <a:srgbClr val="000000"/>
+                </a:solidFill>
+                <a:latin typeface="Calibri"/>
+                <a:ea typeface="Times New Roman"/>
+                <a:cs typeface="Times New Roman"/>
+              </a:rPr>
+              <a:t/>
+            </a:r>
           </a:p>
         </p:txBody>
       </p:sp>
@@ -35130,14 +33457,6 @@
           </a:bodyPr>
           <a:lstStyle/>
           <a:p>
-            <a:pPr lvl="0" algn="ctr" eaLnBrk="0" fontAlgn="base" hangingPunct="0">
-              <a:spcBef>
-                <a:spcPct val="0"/>
-              </a:spcBef>
-              <a:spcAft>
-                <a:spcPct val="0"/>
-              </a:spcAft>
-            </a:pPr>
             <a:r>
               <a:rPr lang="en-US" sz="900" dirty="0">
                 <a:solidFill>
@@ -35147,9 +33466,11 @@
                 <a:ea typeface="Times New Roman"/>
                 <a:cs typeface="Times New Roman"/>
               </a:rPr>
-              <a:t>HLO3: Verbesserung des Humankapitals und Stärkung der Stellung der Frau</a:t>
+              <a:t>HLO3: Verbesserung des Humankapitals und Stärkung der Frauen
+</a:t>
             </a:r>
-            <a:br/>
+          </a:p>
+          <a:p>
             <a:r>
               <a:rPr lang="en-US" sz="900" dirty="0">
                 <a:solidFill>
@@ -35161,7 +33482,8 @@
               </a:rPr>
               <a:t/>
             </a:r>
-            <a:br/>
+          </a:p>
+          <a:p>
             <a:r>
               <a:rPr lang="en-US" sz="900" dirty="0">
                 <a:solidFill>
@@ -35173,69 +33495,19 @@
               </a:rPr>
               <a:t/>
             </a:r>
-            <a:endParaRPr kumimoji="0" lang="en-US" altLang="zh-CN" sz="900" b="0" i="1" u="none" strike="noStrike" cap="none" normalizeH="0" baseline="0" dirty="0">
-              <a:ln>
-                <a:noFill/>
-              </a:ln>
-              <a:solidFill>
-                <a:schemeClr val="tx1"/>
-              </a:solidFill>
-              <a:effectLst/>
-              <a:latin typeface="Calibri" panose="020F0502020204030204" pitchFamily="34" charset="0"/>
-              <a:ea typeface="Times New Roman" panose="02020603050405020304" pitchFamily="18" charset="0"/>
-              <a:cs typeface="Times New Roman" panose="02020603050405020304" pitchFamily="18" charset="0"/>
-            </a:endParaRPr>
-          </a:p>
-          <a:p>
-            <a:pPr marL="0" marR="0" lvl="0" indent="0" algn="ctr" defTabSz="914400" rtl="0" eaLnBrk="0" fontAlgn="base" latinLnBrk="0" hangingPunct="0">
-              <a:lnSpc>
-                <a:spcPct val="100000"/>
-              </a:lnSpc>
-              <a:spcBef>
-                <a:spcPct val="0"/>
-              </a:spcBef>
-              <a:spcAft>
-                <a:spcPct val="0"/>
-              </a:spcAft>
-              <a:buClrTx/>
-              <a:buSzTx/>
-              <a:buFontTx/>
-              <a:buNone/>
-            </a:pPr>
-            <a:endParaRPr kumimoji="0" lang="en-US" altLang="zh-CN" sz="900" b="0" i="1" u="none" strike="noStrike" cap="none" normalizeH="0" baseline="0" dirty="0">
-              <a:ln>
-                <a:noFill/>
-              </a:ln>
-              <a:solidFill>
-                <a:schemeClr val="tx1"/>
-              </a:solidFill>
-              <a:effectLst/>
-              <a:latin typeface="Calibri" panose="020F0502020204030204" pitchFamily="34" charset="0"/>
-              <a:ea typeface="Times New Roman" panose="02020603050405020304" pitchFamily="18" charset="0"/>
-              <a:cs typeface="Times New Roman" panose="02020603050405020304" pitchFamily="18" charset="0"/>
-            </a:endParaRPr>
-          </a:p>
-          <a:p>
-            <a:pPr marL="0" marR="0" lvl="0" indent="0" algn="ctr" defTabSz="914400" rtl="0" eaLnBrk="0" fontAlgn="base" latinLnBrk="0" hangingPunct="0">
-              <a:lnSpc>
-                <a:spcPct val="100000"/>
-              </a:lnSpc>
-              <a:spcBef>
-                <a:spcPct val="0"/>
-              </a:spcBef>
-              <a:spcAft>
-                <a:spcPct val="0"/>
-              </a:spcAft>
-              <a:buClrTx/>
-              <a:buSzTx/>
-              <a:buFontTx/>
-              <a:buNone/>
-            </a:pPr>
-            <a:endParaRPr lang="en-US" altLang="zh-CN" sz="900" i="1" dirty="0">
-              <a:latin typeface="Calibri" pitchFamily="34" charset="0"/>
-              <a:ea typeface="Times New Roman" panose="02020603050405020304" pitchFamily="18" charset="0"/>
-              <a:cs typeface="Times New Roman" panose="02020603050405020304" pitchFamily="18" charset="0"/>
-            </a:endParaRPr>
+          </a:p>
+          <a:p>
+            <a:r>
+              <a:rPr lang="en-US" sz="900" dirty="0">
+                <a:solidFill>
+                  <a:srgbClr val="000000"/>
+                </a:solidFill>
+                <a:latin typeface="Calibri"/>
+                <a:ea typeface="Times New Roman"/>
+                <a:cs typeface="Times New Roman"/>
+              </a:rPr>
+              <a:t/>
+            </a:r>
           </a:p>
         </p:txBody>
       </p:sp>
@@ -35280,55 +33552,6 @@
           </a:bodyPr>
           <a:lstStyle/>
           <a:p>
-            <a:pPr marL="0" marR="0" lvl="0" indent="0" algn="ctr" defTabSz="914400" rtl="0" eaLnBrk="0" fontAlgn="base" latinLnBrk="0" hangingPunct="0">
-              <a:lnSpc>
-                <a:spcPct val="100000"/>
-              </a:lnSpc>
-              <a:spcBef>
-                <a:spcPct val="0"/>
-              </a:spcBef>
-              <a:spcAft>
-                <a:spcPct val="0"/>
-              </a:spcAft>
-              <a:buClrTx/>
-              <a:buSzTx/>
-              <a:buFontTx/>
-              <a:buNone/>
-            </a:pPr>
-            <a:endParaRPr kumimoji="0" lang="en-US" altLang="zh-CN" sz="900" b="0" i="0" u="none" strike="noStrike" cap="none" normalizeH="0" baseline="0" dirty="0">
-              <a:ln>
-                <a:noFill/>
-              </a:ln>
-              <a:solidFill>
-                <a:schemeClr val="tx1"/>
-              </a:solidFill>
-              <a:effectLst/>
-              <a:latin typeface="Calibri" panose="020F0502020204030204" pitchFamily="34" charset="0"/>
-              <a:ea typeface="Times New Roman" panose="02020603050405020304" pitchFamily="18" charset="0"/>
-              <a:cs typeface="Times New Roman" panose="02020603050405020304" pitchFamily="18" charset="0"/>
-            </a:endParaRPr>
-          </a:p>
-          <a:p>
-            <a:pPr lvl="0" algn="ctr" eaLnBrk="0" fontAlgn="base" hangingPunct="0">
-              <a:spcBef>
-                <a:spcPct val="0"/>
-              </a:spcBef>
-              <a:spcAft>
-                <a:spcPct val="0"/>
-              </a:spcAft>
-            </a:pPr>
-            <a:r>
-              <a:rPr lang="en-US" sz="900" dirty="0">
-                <a:solidFill>
-                  <a:srgbClr val="000000"/>
-                </a:solidFill>
-                <a:latin typeface="Calibri"/>
-                <a:ea typeface="Times New Roman"/>
-                <a:cs typeface="Times New Roman"/>
-              </a:rPr>
-              <a:t>HLO 1: Inklusive Institutionen</a:t>
-            </a:r>
-            <a:br/>
             <a:r>
               <a:rPr lang="en-US" sz="900" dirty="0">
                 <a:solidFill>
@@ -35340,7 +33563,22 @@
               </a:rPr>
               <a:t/>
             </a:r>
-            <a:br/>
+          </a:p>
+          <a:p>
+            <a:r>
+              <a:rPr lang="en-US" sz="900" dirty="0">
+                <a:solidFill>
+                  <a:srgbClr val="000000"/>
+                </a:solidFill>
+                <a:latin typeface="Calibri"/>
+                <a:ea typeface="Times New Roman"/>
+                <a:cs typeface="Times New Roman"/>
+              </a:rPr>
+              <a:t>HLO 1: Inklusive Institutionen
+</a:t>
+            </a:r>
+          </a:p>
+          <a:p>
             <a:r>
               <a:rPr lang="en-US" sz="900" dirty="0">
                 <a:solidFill>
@@ -35352,38 +33590,19 @@
               </a:rPr>
               <a:t/>
             </a:r>
-            <a:endParaRPr kumimoji="0" lang="en-US" altLang="zh-CN" sz="900" b="0" i="1" u="none" strike="noStrike" cap="none" normalizeH="0" baseline="0" dirty="0">
-              <a:ln>
-                <a:noFill/>
-              </a:ln>
-              <a:solidFill>
-                <a:schemeClr val="tx1"/>
-              </a:solidFill>
-              <a:effectLst/>
-              <a:latin typeface="Calibri" panose="020F0502020204030204" pitchFamily="34" charset="0"/>
-              <a:ea typeface="Times New Roman" panose="02020603050405020304" pitchFamily="18" charset="0"/>
-              <a:cs typeface="Times New Roman" panose="02020603050405020304" pitchFamily="18" charset="0"/>
-            </a:endParaRPr>
-          </a:p>
-          <a:p>
-            <a:pPr algn="ctr" eaLnBrk="0" fontAlgn="base" hangingPunct="0">
-              <a:spcBef>
-                <a:spcPct val="0"/>
-              </a:spcBef>
-              <a:spcAft>
-                <a:spcPct val="0"/>
-              </a:spcAft>
-            </a:pPr>
-            <a:endParaRPr kumimoji="0" lang="en-US" altLang="zh-CN" sz="1800" b="0" i="0" u="none" strike="noStrike" cap="none" normalizeH="0" baseline="0" dirty="0">
-              <a:ln>
-                <a:noFill/>
-              </a:ln>
-              <a:solidFill>
-                <a:schemeClr val="tx1"/>
-              </a:solidFill>
-              <a:effectLst/>
-              <a:latin typeface="Arial" panose="020B0604020202020204" pitchFamily="34" charset="0"/>
-            </a:endParaRPr>
+          </a:p>
+          <a:p>
+            <a:r>
+              <a:rPr lang="en-US" sz="900" dirty="0">
+                <a:solidFill>
+                  <a:srgbClr val="000000"/>
+                </a:solidFill>
+                <a:latin typeface="Calibri"/>
+                <a:ea typeface="Times New Roman"/>
+                <a:cs typeface="Times New Roman"/>
+              </a:rPr>
+              <a:t/>
+            </a:r>
           </a:p>
         </p:txBody>
       </p:sp>
@@ -35428,14 +33647,6 @@
           </a:bodyPr>
           <a:lstStyle/>
           <a:p>
-            <a:pPr lvl="0" algn="ctr" eaLnBrk="0" fontAlgn="base" hangingPunct="0">
-              <a:spcBef>
-                <a:spcPct val="0"/>
-              </a:spcBef>
-              <a:spcAft>
-                <a:spcPct val="0"/>
-              </a:spcAft>
-            </a:pPr>
             <a:r>
               <a:rPr lang="en-US" sz="900" dirty="0">
                 <a:solidFill>
@@ -35445,60 +33656,21 @@
                 <a:ea typeface="Times New Roman"/>
                 <a:cs typeface="Times New Roman"/>
               </a:rPr>
-              <a:t>Eine hohe Schuldenlast, ein fragiler makrofiskalischer Rahmen und andere ungünstige Risiken setzen die Wirtschaft makroökonomischer Instabilität aus und untergraben das Investorenvertrauen</a:t>
+              <a:t>Eine hohe Schuldenlast, ein fragiler makrofiskalischer Rahmen und weitere ungünstige Risiken setzen die Wirtschaft makroökonomischer Instabilität aus und untergraben das Vertrauen der Investoren.</a:t>
             </a:r>
+          </a:p>
+          <a:p>
             <a:r>
-              <a:rPr kumimoji="0" lang="pt" sz="900" b="0" i="0" u="none" strike="noStrike" cap="none" normalizeH="0" baseline="0" dirty="0">
+              <a:rPr lang="en-US" sz="900" dirty="0">
                 <a:solidFill>
                   <a:srgbClr val="000000"/>
                 </a:solidFill>
-                <a:highlight>
-                  <a:srgbClr val="000000">
-                    <a:alpha val="0"/>
-                  </a:srgbClr>
-                </a:highlight>
                 <a:latin typeface="Calibri"/>
                 <a:ea typeface="Times New Roman"/>
                 <a:cs typeface="Times New Roman"/>
               </a:rPr>
-              <a:t>.</a:t>
+              <a:t/>
             </a:r>
-            <a:endParaRPr kumimoji="0" lang="en-US" altLang="zh-CN" sz="800" b="0" i="0" u="none" strike="noStrike" cap="none" normalizeH="0" baseline="0" dirty="0">
-              <a:ln>
-                <a:noFill/>
-              </a:ln>
-              <a:solidFill>
-                <a:schemeClr val="tx1"/>
-              </a:solidFill>
-              <a:effectLst/>
-            </a:endParaRPr>
-          </a:p>
-          <a:p>
-            <a:pPr marL="0" marR="0" lvl="0" indent="0" algn="ctr" defTabSz="914400" rtl="0" eaLnBrk="0" fontAlgn="base" latinLnBrk="0" hangingPunct="0">
-              <a:lnSpc>
-                <a:spcPct val="100000"/>
-              </a:lnSpc>
-              <a:spcBef>
-                <a:spcPct val="0"/>
-              </a:spcBef>
-              <a:spcAft>
-                <a:spcPct val="0"/>
-              </a:spcAft>
-              <a:buClrTx/>
-              <a:buSzTx/>
-              <a:buFontTx/>
-              <a:buNone/>
-            </a:pPr>
-            <a:endParaRPr kumimoji="0" lang="en-US" altLang="zh-CN" sz="1800" b="0" i="0" u="none" strike="noStrike" cap="none" normalizeH="0" baseline="0" dirty="0">
-              <a:ln>
-                <a:noFill/>
-              </a:ln>
-              <a:solidFill>
-                <a:schemeClr val="tx1"/>
-              </a:solidFill>
-              <a:effectLst/>
-              <a:latin typeface="Arial" panose="020B0604020202020204" pitchFamily="34" charset="0"/>
-            </a:endParaRPr>
           </a:p>
         </p:txBody>
       </p:sp>
@@ -35543,14 +33715,6 @@
           </a:bodyPr>
           <a:lstStyle/>
           <a:p>
-            <a:pPr lvl="0" algn="ctr" eaLnBrk="0" fontAlgn="base" hangingPunct="0">
-              <a:spcBef>
-                <a:spcPct val="0"/>
-              </a:spcBef>
-              <a:spcAft>
-                <a:spcPct val="0"/>
-              </a:spcAft>
-            </a:pPr>
             <a:r>
               <a:rPr lang="en-US" sz="900" dirty="0">
                 <a:solidFill>
@@ -35560,9 +33724,11 @@
                 <a:ea typeface="Times New Roman"/>
                 <a:cs typeface="Times New Roman"/>
               </a:rPr>
-              <a:t>Ein langsamer, unausgewogener und unfinanzierter Dezentralisierungsprozess erschwert die Übertragung von Befugnissen auf lokale Regierungen.</a:t>
+              <a:t>Ein langsamer, unausgewogener und unzureichend finanzierter Dezentralisierungsprozess erschwert die Übertragung von Befugnissen an die lokalen Regierungen.
+</a:t>
             </a:r>
-            <a:br/>
+          </a:p>
+          <a:p>
             <a:r>
               <a:rPr lang="en-US" sz="900" dirty="0">
                 <a:solidFill>
@@ -35574,28 +33740,6 @@
               </a:rPr>
               <a:t/>
             </a:r>
-            <a:br/>
-            <a:r>
-              <a:rPr lang="en-US" sz="900" dirty="0">
-                <a:solidFill>
-                  <a:srgbClr val="000000"/>
-                </a:solidFill>
-                <a:latin typeface="Calibri"/>
-                <a:ea typeface="Times New Roman"/>
-                <a:cs typeface="Times New Roman"/>
-              </a:rPr>
-              <a:t/>
-            </a:r>
-            <a:endParaRPr kumimoji="0" lang="en-US" altLang="zh-CN" sz="1800" b="0" i="0" u="none" strike="noStrike" cap="none" normalizeH="0" baseline="0" dirty="0">
-              <a:ln>
-                <a:noFill/>
-              </a:ln>
-              <a:solidFill>
-                <a:schemeClr val="tx1"/>
-              </a:solidFill>
-              <a:effectLst/>
-              <a:latin typeface="Arial" panose="020B0604020202020204" pitchFamily="34" charset="0"/>
-            </a:endParaRPr>
           </a:p>
         </p:txBody>
       </p:sp>
@@ -35640,14 +33784,6 @@
           </a:bodyPr>
           <a:lstStyle/>
           <a:p>
-            <a:pPr lvl="0" algn="ctr" eaLnBrk="0" fontAlgn="base" hangingPunct="0">
-              <a:spcBef>
-                <a:spcPct val="0"/>
-              </a:spcBef>
-              <a:spcAft>
-                <a:spcPct val="0"/>
-              </a:spcAft>
-            </a:pPr>
             <a:r>
               <a:rPr lang="en-US" sz="900" dirty="0">
                 <a:solidFill>
@@ -35657,9 +33793,11 @@
                 <a:ea typeface="Times New Roman"/>
                 <a:cs typeface="Times New Roman"/>
               </a:rPr>
-              <a:t>1. Verbesserung des Wirtschaftsmanagements für die Schaffung nachhaltiger und resilienter Arbeitsplätze, bessere Umsetzungskapazität und geringeres Länderrisiko</a:t>
+              <a:t>1. Verbesserung des Wirtschaftsmanagements zur Schaffung nachhaltiger und resilienter Arbeitsplätze, für eine bessere Ausführungsfähigkeit und ein geringeres Staatsrisiko
+</a:t>
             </a:r>
-            <a:br/>
+          </a:p>
+          <a:p>
             <a:r>
               <a:rPr lang="en-US" sz="900" dirty="0">
                 <a:solidFill>
@@ -35669,9 +33807,11 @@
                 <a:ea typeface="Times New Roman"/>
                 <a:cs typeface="Times New Roman"/>
               </a:rPr>
-              <a:t>2. Steigerung der Effektivität des öffentlichen Sektors für eine inklusive und transparente Leistungserbringung sowie nachhaltigere, resilientere und gerechtere Politiken </a:t>
+              <a:t>2. Steigerung der Wirksamkeit des öffentlichen Sektors für eine inklusive und transparente Leistungserbringung und nachhaltigere, resilientere und gerechtere politische Maßnahmen 
+</a:t>
             </a:r>
-            <a:br/>
+          </a:p>
+          <a:p>
             <a:r>
               <a:rPr lang="en-US" sz="900" dirty="0">
                 <a:solidFill>
@@ -35681,9 +33821,11 @@
                 <a:ea typeface="Times New Roman"/>
                 <a:cs typeface="Times New Roman"/>
               </a:rPr>
-              <a:t>3. Stärkung der Koordination, der Politiken und der Kapazitäten für eine bessere Vorbereitung und Reaktion auf Naturkatastrophen, Katastrophen und andere multidimensionale Schocks</a:t>
+              <a:t>3. Stärkung der Koordination, der Politik und der Kapazitäten für eine bessere Vorsorge und Reaktion auf Naturkatastrophen, Katastrophen und andere mehrdimensionale Schocks
+</a:t>
             </a:r>
-            <a:br/>
+          </a:p>
+          <a:p>
             <a:r>
               <a:rPr lang="en-US" sz="900" dirty="0">
                 <a:solidFill>
@@ -35695,52 +33837,6 @@
               </a:rPr>
               <a:t/>
             </a:r>
-            <a:br/>
-            <a:r>
-              <a:rPr lang="en-US" sz="900" dirty="0">
-                <a:solidFill>
-                  <a:srgbClr val="000000"/>
-                </a:solidFill>
-                <a:latin typeface="Calibri"/>
-                <a:ea typeface="Times New Roman"/>
-                <a:cs typeface="Times New Roman"/>
-              </a:rPr>
-              <a:t/>
-            </a:r>
-            <a:br/>
-            <a:r>
-              <a:rPr lang="en-US" sz="900" dirty="0">
-                <a:solidFill>
-                  <a:srgbClr val="000000"/>
-                </a:solidFill>
-                <a:latin typeface="Calibri"/>
-                <a:ea typeface="Times New Roman"/>
-                <a:cs typeface="Times New Roman"/>
-              </a:rPr>
-              <a:t/>
-            </a:r>
-            <a:br/>
-            <a:r>
-              <a:rPr lang="en-US" sz="900" dirty="0">
-                <a:solidFill>
-                  <a:srgbClr val="000000"/>
-                </a:solidFill>
-                <a:latin typeface="Calibri"/>
-                <a:ea typeface="Times New Roman"/>
-                <a:cs typeface="Times New Roman"/>
-              </a:rPr>
-              <a:t/>
-            </a:r>
-            <a:endParaRPr kumimoji="0" lang="en-US" altLang="zh-CN" sz="1800" b="0" i="0" u="none" strike="noStrike" cap="none" normalizeH="0" baseline="0" dirty="0">
-              <a:ln>
-                <a:noFill/>
-              </a:ln>
-              <a:solidFill>
-                <a:schemeClr val="tx1"/>
-              </a:solidFill>
-              <a:effectLst/>
-              <a:latin typeface="Arial" panose="020B0604020202020204" pitchFamily="34" charset="0"/>
-            </a:endParaRPr>
           </a:p>
         </p:txBody>
       </p:sp>
@@ -35785,14 +33881,6 @@
           </a:bodyPr>
           <a:lstStyle/>
           <a:p>
-            <a:pPr lvl="0" algn="ctr" eaLnBrk="0" fontAlgn="base" hangingPunct="0">
-              <a:spcBef>
-                <a:spcPct val="0"/>
-              </a:spcBef>
-              <a:spcAft>
-                <a:spcPct val="0"/>
-              </a:spcAft>
-            </a:pPr>
             <a:r>
               <a:rPr lang="en-US" sz="900" dirty="0">
                 <a:solidFill>
@@ -35802,9 +33890,11 @@
                 <a:ea typeface="Times New Roman"/>
                 <a:cs typeface="Times New Roman"/>
               </a:rPr>
-              <a:t>7. Nachhaltige Verbesserung wichtiger Gesundheits- und Bildungsergebnisse</a:t>
+              <a:t>7. Nachhaltige Verbesserung zentraler Ergebnisse in den Bereichen Gesundheit und Bildung
+</a:t>
             </a:r>
-            <a:br/>
+          </a:p>
+          <a:p>
             <a:r>
               <a:rPr lang="en-US" sz="900" dirty="0">
                 <a:solidFill>
@@ -35814,9 +33904,11 @@
                 <a:ea typeface="Times New Roman"/>
                 <a:cs typeface="Times New Roman"/>
               </a:rPr>
-              <a:t>8. Steigerung der Effizienz und effektiven Abdeckung integrierter und nachhaltiger sozialer Dienstleistungen</a:t>
+              <a:t>8. Steigerung der Effizienz und der wirksamen Abdeckung integrierter und nachhaltiger Sozialdienste
+</a:t>
             </a:r>
-            <a:br/>
+          </a:p>
+          <a:p>
             <a:r>
               <a:rPr lang="en-US" sz="900" dirty="0">
                 <a:solidFill>
@@ -35826,9 +33918,11 @@
                 <a:ea typeface="Times New Roman"/>
                 <a:cs typeface="Times New Roman"/>
               </a:rPr>
-              <a:t>9. Verbesserung des Zugangs zu Dienstleistungen zur Verhütung von Teenagerschwangerschaften und zur Förderung der Teilhabe von Frauen </a:t>
+              <a:t>9. Verbesserung des Zugangs zu Diensten zur Vermeidung von Teenagerschwangerschaften und zur Förderung der Teilhabe von Frauen 
+</a:t>
             </a:r>
-            <a:br/>
+          </a:p>
+          <a:p>
             <a:r>
               <a:rPr lang="en-US" sz="900" dirty="0">
                 <a:solidFill>
@@ -35840,52 +33934,6 @@
               </a:rPr>
               <a:t/>
             </a:r>
-            <a:br/>
-            <a:r>
-              <a:rPr lang="en-US" sz="900" dirty="0">
-                <a:solidFill>
-                  <a:srgbClr val="000000"/>
-                </a:solidFill>
-                <a:latin typeface="Calibri"/>
-                <a:ea typeface="Times New Roman"/>
-                <a:cs typeface="Times New Roman"/>
-              </a:rPr>
-              <a:t/>
-            </a:r>
-            <a:br/>
-            <a:r>
-              <a:rPr lang="en-US" sz="900" dirty="0">
-                <a:solidFill>
-                  <a:srgbClr val="000000"/>
-                </a:solidFill>
-                <a:latin typeface="Calibri"/>
-                <a:ea typeface="Times New Roman"/>
-                <a:cs typeface="Times New Roman"/>
-              </a:rPr>
-              <a:t/>
-            </a:r>
-            <a:br/>
-            <a:r>
-              <a:rPr lang="en-US" sz="900" dirty="0">
-                <a:solidFill>
-                  <a:srgbClr val="000000"/>
-                </a:solidFill>
-                <a:latin typeface="Calibri"/>
-                <a:ea typeface="Times New Roman"/>
-                <a:cs typeface="Times New Roman"/>
-              </a:rPr>
-              <a:t/>
-            </a:r>
-            <a:endParaRPr kumimoji="0" lang="en-US" altLang="zh-CN" sz="1800" b="0" i="0" u="none" strike="noStrike" cap="none" normalizeH="0" baseline="0" dirty="0">
-              <a:ln>
-                <a:noFill/>
-              </a:ln>
-              <a:solidFill>
-                <a:schemeClr val="tx1"/>
-              </a:solidFill>
-              <a:effectLst/>
-              <a:latin typeface="Arial" panose="020B0604020202020204" pitchFamily="34" charset="0"/>
-            </a:endParaRPr>
           </a:p>
         </p:txBody>
       </p:sp>
@@ -35930,14 +33978,6 @@
           </a:bodyPr>
           <a:lstStyle/>
           <a:p>
-            <a:pPr lvl="0" algn="ctr" eaLnBrk="0" fontAlgn="base" hangingPunct="0">
-              <a:spcBef>
-                <a:spcPct val="0"/>
-              </a:spcBef>
-              <a:spcAft>
-                <a:spcPct val="0"/>
-              </a:spcAft>
-            </a:pPr>
             <a:r>
               <a:rPr lang="en-US" sz="1000" b="1" dirty="0">
                 <a:solidFill>
@@ -35947,29 +33987,8 @@
                 <a:ea typeface="Times New Roman"/>
                 <a:cs typeface="Times New Roman"/>
               </a:rPr>
-              <a:t>Die Doppelziele der Weltbank (im Kontext von </a:t>
+              <a:t>Die zwei Kernziele der Weltbank (im Kontext von Fragilität, Konflikt und Gewalt)</a:t>
             </a:r>
-            <a:r>
-              <a:rPr lang="en-US" sz="1000" i="1" dirty="0">
-                <a:solidFill>
-                  <a:srgbClr val="000000"/>
-                </a:solidFill>
-                <a:latin typeface="Calibri"/>
-                <a:ea typeface="Times New Roman"/>
-                <a:cs typeface="Times New Roman"/>
-              </a:rPr>
-              <a:t>Fragilität, Konflikt und Gewalt)</a:t>
-            </a:r>
-            <a:endParaRPr kumimoji="0" lang="en-US" altLang="zh-CN" sz="1800" b="0" i="0" u="none" strike="noStrike" cap="none" normalizeH="0" baseline="0" dirty="0">
-              <a:ln>
-                <a:noFill/>
-              </a:ln>
-              <a:solidFill>
-                <a:schemeClr val="tx1"/>
-              </a:solidFill>
-              <a:effectLst/>
-              <a:latin typeface="Arial" panose="020B0604020202020204" pitchFamily="34" charset="0"/>
-            </a:endParaRPr>
           </a:p>
         </p:txBody>
       </p:sp>
@@ -36014,14 +34033,6 @@
           </a:bodyPr>
           <a:lstStyle/>
           <a:p>
-            <a:pPr lvl="0" algn="ctr" eaLnBrk="0" fontAlgn="base" hangingPunct="0">
-              <a:spcBef>
-                <a:spcPct val="0"/>
-              </a:spcBef>
-              <a:spcAft>
-                <a:spcPct val="0"/>
-              </a:spcAft>
-            </a:pPr>
             <a:r>
               <a:rPr lang="en-US" sz="900" dirty="0">
                 <a:solidFill>
@@ -36031,9 +34042,11 @@
                 <a:ea typeface="Times New Roman"/>
                 <a:cs typeface="Times New Roman"/>
               </a:rPr>
-              <a:t>4. Ermöglichung eines nachhaltigen Wachstums ausgewählter Naturrohstoffsektoren durch Ausschöpfung regionaler und globaler komparativer Vorteile</a:t>
+              <a:t>4. Nachhaltiges Wachstum ausgewählter Sektoren natürlicher Ressourcen durch Nutzung regionaler und globaler komparativer Vorteile ermöglichen
+</a:t>
             </a:r>
-            <a:br/>
+          </a:p>
+          <a:p>
             <a:r>
               <a:rPr lang="en-US" sz="900" dirty="0">
                 <a:solidFill>
@@ -36043,9 +34056,11 @@
                 <a:ea typeface="Times New Roman"/>
                 <a:cs typeface="Times New Roman"/>
               </a:rPr>
-              <a:t>5. Förderung des Produktivitätswachstums in ausgewählten arbeitsintensiven Branchen </a:t>
+              <a:t>5. Förderung des Produktivitätswachstums in ausgewählten arbeitsintensiven Branchen 
+</a:t>
             </a:r>
-            <a:br/>
+          </a:p>
+          <a:p>
             <a:r>
               <a:rPr lang="en-US" sz="900" dirty="0">
                 <a:solidFill>
@@ -36055,9 +34070,11 @@
                 <a:ea typeface="Times New Roman"/>
                 <a:cs typeface="Times New Roman"/>
               </a:rPr>
-              <a:t>6. Ausweitung zugänglicher, zuverlässiger und klimaresilienter Dienstleistungen zur Verbesserung des Zugangs für die am stärksten benachteiligten Bevölkerungsgruppen, Stärkung der nachhaltigen Urbanisierung und wirtschaftlichen Agglomeration</a:t>
+              <a:t>6. Ausweitung erschwinglicher, zuverlässiger und klimaresilienter Dienste, um den Zugang der am stärksten Benachteiligten zu verbessern sowie eine nachhaltige Urbanisierung und wirtschaftliche Agglomeration zu stärken
+</a:t>
             </a:r>
-            <a:br/>
+          </a:p>
+          <a:p>
             <a:r>
               <a:rPr lang="en-US" sz="900" dirty="0">
                 <a:solidFill>
@@ -36069,52 +34086,6 @@
               </a:rPr>
               <a:t/>
             </a:r>
-            <a:br/>
-            <a:r>
-              <a:rPr lang="en-US" sz="900" dirty="0">
-                <a:solidFill>
-                  <a:srgbClr val="000000"/>
-                </a:solidFill>
-                <a:latin typeface="Calibri"/>
-                <a:ea typeface="Times New Roman"/>
-                <a:cs typeface="Times New Roman"/>
-              </a:rPr>
-              <a:t/>
-            </a:r>
-            <a:br/>
-            <a:r>
-              <a:rPr lang="en-US" sz="900" dirty="0">
-                <a:solidFill>
-                  <a:srgbClr val="000000"/>
-                </a:solidFill>
-                <a:latin typeface="Calibri"/>
-                <a:ea typeface="Times New Roman"/>
-                <a:cs typeface="Times New Roman"/>
-              </a:rPr>
-              <a:t/>
-            </a:r>
-            <a:br/>
-            <a:r>
-              <a:rPr lang="en-US" sz="900" dirty="0">
-                <a:solidFill>
-                  <a:srgbClr val="000000"/>
-                </a:solidFill>
-                <a:latin typeface="Calibri"/>
-                <a:ea typeface="Times New Roman"/>
-                <a:cs typeface="Times New Roman"/>
-              </a:rPr>
-              <a:t/>
-            </a:r>
-            <a:endParaRPr kumimoji="0" lang="en-US" altLang="zh-CN" sz="1800" b="0" i="0" u="none" strike="noStrike" cap="none" normalizeH="0" baseline="0" dirty="0">
-              <a:ln>
-                <a:noFill/>
-              </a:ln>
-              <a:solidFill>
-                <a:schemeClr val="tx1"/>
-              </a:solidFill>
-              <a:effectLst/>
-              <a:latin typeface="Arial" panose="020B0604020202020204" pitchFamily="34" charset="0"/>
-            </a:endParaRPr>
           </a:p>
         </p:txBody>
       </p:sp>
@@ -36159,14 +34130,6 @@
           </a:bodyPr>
           <a:lstStyle/>
           <a:p>
-            <a:pPr lvl="0" algn="ctr" eaLnBrk="0" fontAlgn="base" hangingPunct="0">
-              <a:spcBef>
-                <a:spcPct val="0"/>
-              </a:spcBef>
-              <a:spcAft>
-                <a:spcPct val="0"/>
-              </a:spcAft>
-            </a:pPr>
             <a:r>
               <a:rPr lang="en-US" sz="900" dirty="0">
                 <a:solidFill>
@@ -36176,60 +34139,21 @@
                 <a:ea typeface="Times New Roman"/>
                 <a:cs typeface="Times New Roman"/>
               </a:rPr>
-              <a:t>Mangelnde Transparenz, ein schwaches Datenumfeld sowie unzureichende Aufsicht und Rechenschaftspflicht im öffentlichen Finanzmanagement und bei staatseigenen Unternehmen untergraben die Effizienz und Wirksamkeit öffentlicher Ressourcen </a:t>
+              <a:t>Mangelnde Transparenz, ein schwaches Datenumfeld sowie unzureichende Aufsicht und Rechenschaftspflicht im öffentlichen Finanzmanagement und bei staatseigenen Unternehmen untergraben die Effizienz und Wirksamkeit der öffentlichen Mittel.</a:t>
             </a:r>
+          </a:p>
+          <a:p>
             <a:r>
-              <a:rPr kumimoji="0" lang="pt" sz="900" b="0" i="0" u="none" strike="noStrike" cap="none" normalizeH="0" baseline="0" dirty="0">
+              <a:rPr lang="en-US" sz="900" dirty="0">
                 <a:solidFill>
                   <a:srgbClr val="000000"/>
                 </a:solidFill>
-                <a:highlight>
-                  <a:srgbClr val="000000">
-                    <a:alpha val="0"/>
-                  </a:srgbClr>
-                </a:highlight>
                 <a:latin typeface="Calibri"/>
                 <a:ea typeface="Times New Roman"/>
                 <a:cs typeface="Times New Roman"/>
               </a:rPr>
-              <a:t>.</a:t>
+              <a:t/>
             </a:r>
-            <a:endParaRPr kumimoji="0" lang="en-US" altLang="zh-CN" sz="800" b="0" i="0" u="none" strike="noStrike" cap="none" normalizeH="0" baseline="0" dirty="0">
-              <a:ln>
-                <a:noFill/>
-              </a:ln>
-              <a:solidFill>
-                <a:schemeClr val="tx1"/>
-              </a:solidFill>
-              <a:effectLst/>
-            </a:endParaRPr>
-          </a:p>
-          <a:p>
-            <a:pPr marL="0" marR="0" lvl="0" indent="0" algn="ctr" defTabSz="914400" rtl="0" eaLnBrk="0" fontAlgn="base" latinLnBrk="0" hangingPunct="0">
-              <a:lnSpc>
-                <a:spcPct val="100000"/>
-              </a:lnSpc>
-              <a:spcBef>
-                <a:spcPct val="0"/>
-              </a:spcBef>
-              <a:spcAft>
-                <a:spcPct val="0"/>
-              </a:spcAft>
-              <a:buClrTx/>
-              <a:buSzTx/>
-              <a:buFontTx/>
-              <a:buNone/>
-            </a:pPr>
-            <a:endParaRPr kumimoji="0" lang="en-US" altLang="zh-CN" sz="1800" b="0" i="0" u="none" strike="noStrike" cap="none" normalizeH="0" baseline="0" dirty="0">
-              <a:ln>
-                <a:noFill/>
-              </a:ln>
-              <a:solidFill>
-                <a:schemeClr val="tx1"/>
-              </a:solidFill>
-              <a:effectLst/>
-              <a:latin typeface="Arial" panose="020B0604020202020204" pitchFamily="34" charset="0"/>
-            </a:endParaRPr>
           </a:p>
         </p:txBody>
       </p:sp>
@@ -36274,14 +34198,6 @@
           </a:bodyPr>
           <a:lstStyle/>
           <a:p>
-            <a:pPr lvl="0" algn="ctr" eaLnBrk="0" fontAlgn="base" hangingPunct="0">
-              <a:spcBef>
-                <a:spcPct val="0"/>
-              </a:spcBef>
-              <a:spcAft>
-                <a:spcPct val="0"/>
-              </a:spcAft>
-            </a:pPr>
             <a:r>
               <a:rPr lang="en-US" sz="900" dirty="0">
                 <a:solidFill>
@@ -36291,9 +34207,11 @@
                 <a:ea typeface="Times New Roman"/>
                 <a:cs typeface="Times New Roman"/>
               </a:rPr>
-              <a:t>Die Bedingungen für Ausbildung, Regulierung und Märkte, die für das Wachstum, die Diversifizierung und die Beschäftigungsschaffung im Privatsektor entscheidend sind, sind unterentwickelt.</a:t>
+              <a:t>Die für das Wachstum des Privatsektors, die Diversifizierung und die Schaffung von Arbeitsplätzen entscheidenden Rahmenbedingungen bei Ausbildung, Regulierung und Märkten sind unterentwickelt.
+</a:t>
             </a:r>
-            <a:br/>
+          </a:p>
+          <a:p>
             <a:r>
               <a:rPr lang="en-US" sz="900" dirty="0">
                 <a:solidFill>
@@ -36305,28 +34223,6 @@
               </a:rPr>
               <a:t/>
             </a:r>
-            <a:br/>
-            <a:r>
-              <a:rPr lang="en-US" sz="900" dirty="0">
-                <a:solidFill>
-                  <a:srgbClr val="000000"/>
-                </a:solidFill>
-                <a:latin typeface="Calibri"/>
-                <a:ea typeface="Times New Roman"/>
-                <a:cs typeface="Times New Roman"/>
-              </a:rPr>
-              <a:t/>
-            </a:r>
-            <a:endParaRPr kumimoji="0" lang="en-US" altLang="zh-CN" sz="1800" b="0" i="0" u="none" strike="noStrike" cap="none" normalizeH="0" baseline="0" dirty="0">
-              <a:ln>
-                <a:noFill/>
-              </a:ln>
-              <a:solidFill>
-                <a:schemeClr val="tx1"/>
-              </a:solidFill>
-              <a:effectLst/>
-              <a:latin typeface="Arial" panose="020B0604020202020204" pitchFamily="34" charset="0"/>
-            </a:endParaRPr>
           </a:p>
         </p:txBody>
       </p:sp>
@@ -36371,14 +34267,6 @@
           </a:bodyPr>
           <a:lstStyle/>
           <a:p>
-            <a:pPr lvl="0" algn="ctr" eaLnBrk="0" fontAlgn="base" hangingPunct="0">
-              <a:spcBef>
-                <a:spcPct val="0"/>
-              </a:spcBef>
-              <a:spcAft>
-                <a:spcPct val="0"/>
-              </a:spcAft>
-            </a:pPr>
             <a:r>
               <a:rPr lang="en-US" sz="900" dirty="0">
                 <a:solidFill>
@@ -36388,60 +34276,21 @@
                 <a:ea typeface="Times New Roman"/>
                 <a:cs typeface="Times New Roman"/>
               </a:rPr>
-              <a:t>Versagen auf wichtigen Märkten, teilweise durch politische Rahmenbedingungen bedingt, beeinträchtigt Produktivität, Vermarktung und Risikomanagement</a:t>
+              <a:t>Versagen in zentralen Märkten, teils politisch bedingt, beeinträchtigt Produktivität, Vermarktung und Risikomanagement.</a:t>
             </a:r>
+          </a:p>
+          <a:p>
             <a:r>
-              <a:rPr kumimoji="0" lang="pt" sz="900" b="0" i="0" u="none" strike="noStrike" cap="none" normalizeH="0" baseline="0" dirty="0">
+              <a:rPr lang="en-US" sz="900" dirty="0">
                 <a:solidFill>
                   <a:srgbClr val="000000"/>
                 </a:solidFill>
-                <a:highlight>
-                  <a:srgbClr val="000000">
-                    <a:alpha val="0"/>
-                  </a:srgbClr>
-                </a:highlight>
                 <a:latin typeface="Calibri"/>
                 <a:ea typeface="Times New Roman"/>
                 <a:cs typeface="Times New Roman"/>
               </a:rPr>
-              <a:t>.</a:t>
+              <a:t/>
             </a:r>
-            <a:endParaRPr kumimoji="0" lang="en-US" altLang="zh-CN" sz="800" b="0" i="0" u="none" strike="noStrike" cap="none" normalizeH="0" baseline="0" dirty="0">
-              <a:ln>
-                <a:noFill/>
-              </a:ln>
-              <a:solidFill>
-                <a:schemeClr val="tx1"/>
-              </a:solidFill>
-              <a:effectLst/>
-            </a:endParaRPr>
-          </a:p>
-          <a:p>
-            <a:pPr marL="0" marR="0" lvl="0" indent="0" algn="ctr" defTabSz="914400" rtl="0" eaLnBrk="0" fontAlgn="base" latinLnBrk="0" hangingPunct="0">
-              <a:lnSpc>
-                <a:spcPct val="100000"/>
-              </a:lnSpc>
-              <a:spcBef>
-                <a:spcPct val="0"/>
-              </a:spcBef>
-              <a:spcAft>
-                <a:spcPct val="0"/>
-              </a:spcAft>
-              <a:buClrTx/>
-              <a:buSzTx/>
-              <a:buFontTx/>
-              <a:buNone/>
-            </a:pPr>
-            <a:endParaRPr kumimoji="0" lang="en-US" altLang="zh-CN" sz="1800" b="0" i="0" u="none" strike="noStrike" cap="none" normalizeH="0" baseline="0" dirty="0">
-              <a:ln>
-                <a:noFill/>
-              </a:ln>
-              <a:solidFill>
-                <a:schemeClr val="tx1"/>
-              </a:solidFill>
-              <a:effectLst/>
-              <a:latin typeface="Arial" panose="020B0604020202020204" pitchFamily="34" charset="0"/>
-            </a:endParaRPr>
           </a:p>
         </p:txBody>
       </p:sp>
@@ -36486,14 +34335,6 @@
           </a:bodyPr>
           <a:lstStyle/>
           <a:p>
-            <a:pPr lvl="0" algn="ctr" eaLnBrk="0" fontAlgn="base" hangingPunct="0">
-              <a:spcBef>
-                <a:spcPct val="0"/>
-              </a:spcBef>
-              <a:spcAft>
-                <a:spcPct val="0"/>
-              </a:spcAft>
-            </a:pPr>
             <a:r>
               <a:rPr lang="en-US" sz="900" dirty="0">
                 <a:solidFill>
@@ -36503,60 +34344,21 @@
                 <a:ea typeface="Times New Roman"/>
                 <a:cs typeface="Times New Roman"/>
               </a:rPr>
-              <a:t>Begrenzte Haftung und leistungsbasierte Anreize sowie mangelnde institutionelle Koordination schränken die Wirksamkeit und Effizienz der Leistungserbringung und die Humankapitalbildung ein</a:t>
+              <a:t>Beschränkte Haftung und leistungsbezogene Anreize sowie mangelhafte institutionelle Koordination begrenzen die Wirksamkeit und Effizienz der Leistungserbringung und der Bildung von Humankapital.</a:t>
             </a:r>
+          </a:p>
+          <a:p>
             <a:r>
-              <a:rPr kumimoji="0" lang="pt" sz="900" b="0" i="0" u="none" strike="noStrike" cap="none" normalizeH="0" baseline="0" dirty="0">
+              <a:rPr lang="en-US" sz="900" dirty="0">
                 <a:solidFill>
                   <a:srgbClr val="000000"/>
                 </a:solidFill>
-                <a:highlight>
-                  <a:srgbClr val="000000">
-                    <a:alpha val="0"/>
-                  </a:srgbClr>
-                </a:highlight>
                 <a:latin typeface="Calibri"/>
                 <a:ea typeface="Times New Roman"/>
                 <a:cs typeface="Times New Roman"/>
               </a:rPr>
-              <a:t>.</a:t>
+              <a:t/>
             </a:r>
-            <a:endParaRPr kumimoji="0" lang="en-US" altLang="zh-CN" sz="800" b="0" i="0" u="none" strike="noStrike" cap="none" normalizeH="0" baseline="0" dirty="0">
-              <a:ln>
-                <a:noFill/>
-              </a:ln>
-              <a:solidFill>
-                <a:schemeClr val="tx1"/>
-              </a:solidFill>
-              <a:effectLst/>
-            </a:endParaRPr>
-          </a:p>
-          <a:p>
-            <a:pPr marL="0" marR="0" lvl="0" indent="0" algn="ctr" defTabSz="914400" rtl="0" eaLnBrk="0" fontAlgn="base" latinLnBrk="0" hangingPunct="0">
-              <a:lnSpc>
-                <a:spcPct val="100000"/>
-              </a:lnSpc>
-              <a:spcBef>
-                <a:spcPct val="0"/>
-              </a:spcBef>
-              <a:spcAft>
-                <a:spcPct val="0"/>
-              </a:spcAft>
-              <a:buClrTx/>
-              <a:buSzTx/>
-              <a:buFontTx/>
-              <a:buNone/>
-            </a:pPr>
-            <a:endParaRPr kumimoji="0" lang="en-US" altLang="zh-CN" sz="1800" b="0" i="0" u="none" strike="noStrike" cap="none" normalizeH="0" baseline="0" dirty="0">
-              <a:ln>
-                <a:noFill/>
-              </a:ln>
-              <a:solidFill>
-                <a:schemeClr val="tx1"/>
-              </a:solidFill>
-              <a:effectLst/>
-              <a:latin typeface="Arial" panose="020B0604020202020204" pitchFamily="34" charset="0"/>
-            </a:endParaRPr>
           </a:p>
         </p:txBody>
       </p:sp>
@@ -36987,14 +34789,6 @@
           </a:bodyPr>
           <a:lstStyle/>
           <a:p>
-            <a:pPr lvl="0" algn="r" eaLnBrk="0" fontAlgn="base" hangingPunct="0">
-              <a:spcBef>
-                <a:spcPct val="0"/>
-              </a:spcBef>
-              <a:spcAft>
-                <a:spcPct val="0"/>
-              </a:spcAft>
-            </a:pPr>
             <a:r>
               <a:rPr lang="en-US" sz="2300" b="1" dirty="0">
                 <a:solidFill>
@@ -37004,19 +34798,6 @@
               </a:rPr>
               <a:t>Regierungsprogramm, SCD-Prioritäten und CPF 2023-2027</a:t>
             </a:r>
-            <a:endParaRPr lang="pt" sz="2300" b="1" i="0" u="none" strike="noStrike" dirty="0">
-              <a:solidFill>
-                <a:srgbClr val="2F5597"/>
-              </a:solidFill>
-              <a:highlight>
-                <a:srgbClr val="000000">
-                  <a:alpha val="0"/>
-                </a:srgbClr>
-              </a:highlight>
-              <a:latin typeface="Arial"/>
-              <a:ea typeface="+mj-ea"/>
-              <a:cs typeface="Arial"/>
-            </a:endParaRPr>
           </a:p>
         </p:txBody>
       </p:sp>
@@ -37061,21 +34842,6 @@
           </a:bodyPr>
           <a:lstStyle/>
           <a:p>
-            <a:pPr marL="0" marR="0" lvl="0" indent="0" algn="ctr" defTabSz="914400" rtl="0" eaLnBrk="0" fontAlgn="base" latinLnBrk="0" hangingPunct="0">
-              <a:lnSpc>
-                <a:spcPct val="100000"/>
-              </a:lnSpc>
-              <a:spcBef>
-                <a:spcPct val="0"/>
-              </a:spcBef>
-              <a:spcAft>
-                <a:spcPct val="0"/>
-              </a:spcAft>
-              <a:buClrTx/>
-              <a:buSzTx/>
-              <a:buFontTx/>
-              <a:buNone/>
-            </a:pPr>
             <a:r>
               <a:rPr kumimoji="0" lang="pt" sz="1200" b="1" i="0" u="none" strike="noStrike" cap="none" normalizeH="0" baseline="0" dirty="0">
                 <a:solidFill>
@@ -37092,32 +34858,6 @@
               </a:rPr>
               <a:t>WIRKUNG </a:t>
             </a:r>
-            <a:r>
-              <a:rPr kumimoji="0" lang="pt" sz="1000" b="1" i="0" u="none" strike="noStrike" cap="none" normalizeH="0" baseline="0" dirty="0">
-                <a:solidFill>
-                  <a:srgbClr val="000000"/>
-                </a:solidFill>
-                <a:highlight>
-                  <a:srgbClr val="000000">
-                    <a:alpha val="0"/>
-                  </a:srgbClr>
-                </a:highlight>
-                <a:latin typeface="Calibri"/>
-                <a:ea typeface="Times New Roman"/>
-                <a:cs typeface="Times New Roman"/>
-              </a:rPr>
-              <a:t> </a:t>
-            </a:r>
-            <a:endParaRPr kumimoji="0" lang="en-US" altLang="zh-CN" sz="1800" b="0" i="0" u="none" strike="noStrike" cap="none" normalizeH="0" baseline="0" dirty="0">
-              <a:ln>
-                <a:noFill/>
-              </a:ln>
-              <a:solidFill>
-                <a:schemeClr val="tx1"/>
-              </a:solidFill>
-              <a:effectLst/>
-              <a:latin typeface="Arial" panose="020B0604020202020204" pitchFamily="34" charset="0"/>
-            </a:endParaRPr>
           </a:p>
         </p:txBody>
       </p:sp>
@@ -37149,9 +34889,8 @@
           <a:p>
             <a:r>
               <a:rPr lang="en-US"/>
-              <a:t>CPF 2023-2027. Öffentliche Version. Maputo, Mai 2022.</a:t>
+              <a:t>CPF 2023-2027. Öffentliche Fassung. Maputo, Mai 2022.</a:t>
             </a:r>
-            <a:endParaRPr lang="en-US" dirty="0"/>
           </a:p>
         </p:txBody>
       </p:sp>
@@ -37232,7 +34971,7 @@
                       <a:pPr algn="ctr"/>
                       <a:r>
                         <a:rPr lang="en-US" sz="900" dirty="0"/>
-                        <a:t>WBG CPF Objectives </a:t>
+                        <a:t>WBG CPF-Ziele </a:t>
                       </a:r>
                     </a:p>
                   </a:txBody>
@@ -37296,7 +35035,7 @@
                       <a:pPr algn="ctr"/>
                       <a:r>
                         <a:rPr lang="en-US" sz="900" dirty="0"/>
-                        <a:t>WBG SCD Priorities </a:t>
+                        <a:t>WBG SCD-Prioritäten </a:t>
                       </a:r>
                     </a:p>
                   </a:txBody>
@@ -37398,7 +35137,7 @@
           <a:p>
             <a:r>
               <a:rPr lang="en-US" dirty="0"/>
-              <a:t>Einleitung: Was ist der CPF, warum die Konsultationen und was sind die Erwartungen</a:t>
+              <a:t>Einleitung: Was ist der CPF, warum die Konsultationen und welche Erwartungen bestehen</a:t>
             </a:r>
           </a:p>
         </p:txBody>
@@ -37433,114 +35172,61 @@
           <a:p>
             <a:r>
               <a:rPr lang="en-US" dirty="0"/>
-              <a:t>Der Länder-Mosambik-Partnerschaftsrahmen (CPF) ist das Leitinstrument der Unterstützung der Weltbankgruppe (WBG), einschließlich IFC und MIGA, für Mosambik bei der Verfolgung seiner Entwicklungsziele.</a:t>
+              <a:t>Der Country Partnership Framework (CPF) für Mosambik ist das Leitinstrument der Unterstützung der Weltbankgruppe (WBG), einschließlich IFC und MIGA, für Mosambik bei der Verfolgung seiner Entwicklungsziele.</a:t>
             </a:r>
           </a:p>
           <a:p>
             <a:r>
               <a:rPr lang="en-US" dirty="0"/>
-              <a:t>Der CPF legt die Ziele und erwarteten Ergebnisse der Partnerschaft zwischen der WBG und der Regierung Mosambiks über einen bestimmten Zeitraum (4-5 Jahre) fest.</a:t>
+              <a:t>Der CPF legt die Ziele und erwarteten Ergebnisse der Partnerschaft zwischen der WBG und der Regierung Mosambiks über einen Zeitraum (4-5 Jahre) hinweg fest.</a:t>
             </a:r>
           </a:p>
           <a:p>
             <a:r>
               <a:rPr lang="en-US" dirty="0"/>
-              <a:t>Der CPF basiert auf folgenden Elementen: (i) Den Prioritäten der nationalen Entwicklungspläne (PQG, ENDE, </a:t>
+              <a:t>Der CPF beruht auf folgenden Elementen: (i) den durch die Entwicklungspläne des Landes festgelegten Prioritäten (PQG, ENDE usw.); (ii) einem Systematic Country Diagnostic (SCD) der Weltbank sowie weiteren erstellten Analysen und Erkenntnissen; (iii) den Lehren aus der Umsetzung früherer Strategien (CLR) und den komparativen Vorteilen der Weltbank.</a:t>
             </a:r>
-            <a:r>
-              <a:rPr lang="en-US" dirty="0" err="1"/>
-              <a:t>usw</a:t>
-            </a:r>
+          </a:p>
+          <a:p>
             <a:r>
               <a:rPr lang="en-US" dirty="0"/>
-              <a:t>.); (ii) einer Systematischen Länderdiagnose (SCD) der Weltbank sowie weiteren Analysen und erarbeitetem Wissen; (iii) den Lehren aus der Umsetzung früherer Strategien (CLR) und den komparativen Vorteilen der Weltbank.</a:t>
+              <a:t>Der Schwerpunkt der Arbeit der WBG liegt auf der Beseitigung extremer Armut und der Verringerung von Ungleichheit.</a:t>
             </a:r>
           </a:p>
           <a:p>
             <a:r>
               <a:rPr lang="en-US" dirty="0"/>
-              <a:t>Der Schwerpunkt der Arbeit der WBG ist die Beseitigung extremer Armut und die Verringerung von Ungleichheit.</a:t>
+              <a:t>Derzeit erarbeitet die WBG einen aktualisierten CPF für den Zeitraum der Haushaltsjahre 23-27. </a:t>
             </a:r>
           </a:p>
           <a:p>
             <a:r>
               <a:rPr lang="en-US" dirty="0"/>
-              <a:t>Derzeit bereitet die WBG einen aktualisierten CPF für den Zeitraum Geschäftsjahr 23-27 vor. </a:t>
+              <a:t>Der neue CPF legt die vorläufigen Bestrebungen und Ziele für die Partnerschaft mit Mosambik für die nächsten 5 Jahre dar. </a:t>
             </a:r>
           </a:p>
           <a:p>
             <a:r>
               <a:rPr lang="en-US" dirty="0"/>
-              <a:t>Der neue CPF legt die vorläufigen Bestrebungen und Ziele für die Partnerschaft mit Mosambik in den nächsten 5 Jahren fest. </a:t>
+              <a:t>Dieses Dokument enthält eine Zusammenfassung des Konzeptpapiers zum CPF mit dem Ziel, Beiträge zu folgenden Fragen einzuholen:</a:t>
             </a:r>
           </a:p>
           <a:p>
             <a:r>
               <a:rPr lang="en-US" dirty="0"/>
-              <a:t>Dieses Dokument präsentiert eine Zusammenfassung des Konzeptpapiers des CPF mit dem Ziel, Beiträge zu folgenden Themen zu erhalten:</a:t>
+              <a:t>Vertiefung der Diskussion zu jeder Säule der Strategie und ihren Zielen.</a:t>
             </a:r>
           </a:p>
           <a:p>
-            <a:pPr lvl="3">
-              <a:lnSpc>
-                <a:spcPct val="100000"/>
-              </a:lnSpc>
-              <a:spcBef>
-                <a:spcPts val="1200"/>
-              </a:spcBef>
-            </a:pPr>
             <a:r>
-              <a:rPr lang="en-US" sz="1400" b="1" dirty="0">
-                <a:highlight>
-                  <a:srgbClr val="000000">
-                    <a:alpha val="0"/>
-                  </a:srgbClr>
-                </a:highlight>
-                <a:latin typeface="Arial"/>
-              </a:rPr>
-              <a:t>Vertiefung der Diskussion über jeden Pfeiler der Strategie und seine Ziele.</a:t>
+              <a:rPr lang="en-US" dirty="0"/>
+              <a:t>Festlegung von Prioritäten und Instrumenten (einschließlich Finanzierung) unter Berücksichtigung des spezifischen Entwicklungskontexts und der Herausforderungen.</a:t>
             </a:r>
           </a:p>
           <a:p>
-            <a:pPr lvl="3">
-              <a:lnSpc>
-                <a:spcPct val="100000"/>
-              </a:lnSpc>
-              <a:spcBef>
-                <a:spcPts val="1200"/>
-              </a:spcBef>
-            </a:pPr>
             <a:r>
-              <a:rPr lang="en-US" sz="1400" b="1" dirty="0">
-                <a:highlight>
-                  <a:srgbClr val="000000">
-                    <a:alpha val="0"/>
-                  </a:srgbClr>
-                </a:highlight>
-                <a:latin typeface="Arial"/>
-              </a:rPr>
-              <a:t>Definition von Prioritäten und Instrumenten (einschließlich Finanzierung) unter Berücksichtigung des spezifischen Entwicklungskontexts und der Herausforderungen.</a:t>
-            </a:r>
-          </a:p>
-          <a:p>
-            <a:pPr lvl="3">
-              <a:lnSpc>
-                <a:spcPct val="100000"/>
-              </a:lnSpc>
-              <a:spcBef>
-                <a:spcPts val="1200"/>
-              </a:spcBef>
-            </a:pPr>
-            <a:r>
-              <a:rPr lang="en-US" sz="1400" b="1" dirty="0">
-                <a:highlight>
-                  <a:srgbClr val="000000">
-                    <a:alpha val="0"/>
-                  </a:srgbClr>
-                </a:highlight>
-                <a:latin typeface="Arial"/>
-              </a:rPr>
-              <a:t>Definition von CPF-Überwachungsmechanismen (Indikatoren)</a:t>
+              <a:rPr lang="en-US" dirty="0"/>
+              <a:t>Festlegung von Mechanismen zur Überwachung des CPF (Indikatoren)</a:t>
             </a:r>
           </a:p>
         </p:txBody>
@@ -37568,9 +35254,8 @@
           <a:p>
             <a:r>
               <a:rPr lang="en-US"/>
-              <a:t>CPF 2023-2027. Öffentliche Version. Maputo, Mai 2022.</a:t>
+              <a:t>CPF 2023-2027. Öffentliche Fassung. Maputo, Mai 2022.</a:t>
             </a:r>
-            <a:endParaRPr lang="en-US" dirty="0"/>
           </a:p>
         </p:txBody>
       </p:sp>
@@ -37662,38 +35347,17 @@
           </a:bodyPr>
           <a:lstStyle/>
           <a:p>
-            <a:pPr algn="ctr"/>
-            <a:br>
-              <a:rPr lang="en-US" sz="2400" dirty="0"/>
-            </a:br>
-            <a:br>
-              <a:rPr lang="en-US" sz="2400" dirty="0"/>
-            </a:br>
-            <a:br>
-              <a:rPr lang="en-US" sz="2400" dirty="0"/>
-            </a:br>
             <a:r>
               <a:rPr lang="en-US" sz="2400" dirty="0"/>
-              <a:t>Umsetzung des CPF 2023-2027: Priorisierung</a:t>
+              <a:t>Umsetzung des CPF 2023-2027: Priorisierung
+</a:t>
             </a:r>
-            <a:br/>
+          </a:p>
+          <a:p>
             <a:r>
               <a:rPr lang="en-US" sz="2400" dirty="0"/>
               <a:t/>
             </a:r>
-            <a:br/>
-            <a:r>
-              <a:rPr lang="en-US" sz="2400" dirty="0"/>
-              <a:t/>
-            </a:r>
-            <a:endParaRPr lang="pt" sz="2400" b="0" i="1" u="none" strike="noStrike" dirty="0">
-              <a:highlight>
-                <a:srgbClr val="000000">
-                  <a:alpha val="0"/>
-                </a:srgbClr>
-              </a:highlight>
-              <a:latin typeface="Arial"/>
-            </a:endParaRPr>
           </a:p>
         </p:txBody>
       </p:sp>
@@ -37725,7 +35389,6 @@
           </a:bodyPr>
           <a:lstStyle/>
           <a:p>
-            <a:pPr algn="just" rtl="0"/>
             <a:r>
               <a:rPr lang="en-US" sz="1600" b="1" i="0" u="none" strike="noStrike" dirty="0">
                 <a:highlight>
@@ -37735,30 +35398,10 @@
                 </a:highlight>
                 <a:latin typeface="Arial"/>
               </a:rPr>
-              <a:t>In den nächsten 12 bis 24 Monaten wird der CPF Reformen und Investitionen priorisieren, die die Wachstumsaussichten des Landes schützen können.</a:t>
+              <a:t>In den nächsten 12 bis 24 Monaten wird der CPF Reformen und Investitionen priorisieren, die die Wachstumsaussichten des Landes schützen können. Mittelfristig wird der CPF einige transformative Reformen und Investitionen priorisieren, die ein grüneres und inklusiveres Wachstum anstoßen könnten.</a:t>
             </a:r>
-            <a:r>
-              <a:rPr lang="en-US" sz="1600" i="0" u="none" strike="noStrike" dirty="0">
-                <a:highlight>
-                  <a:srgbClr val="000000">
-                    <a:alpha val="0"/>
-                  </a:srgbClr>
-                </a:highlight>
-                <a:latin typeface="Arial"/>
-              </a:rPr>
-              <a:t> Mittelfristig wird der CPF einige transformative Reformen und Investitionen priorisieren, die ein grüneres und inklusiveres Wachstum auslösen könnten.</a:t>
-            </a:r>
-            <a:endParaRPr lang="en-US" sz="1600" b="1" i="0" u="none" strike="noStrike" dirty="0">
-              <a:highlight>
-                <a:srgbClr val="000000">
-                  <a:alpha val="0"/>
-                </a:srgbClr>
-              </a:highlight>
-              <a:latin typeface="Arial"/>
-            </a:endParaRPr>
-          </a:p>
-          <a:p>
-            <a:pPr algn="just" rtl="0"/>
+          </a:p>
+          <a:p>
             <a:r>
               <a:rPr lang="en-US" sz="1600" b="1" i="0" u="none" strike="noStrike" dirty="0">
                 <a:highlight>
@@ -37768,30 +35411,10 @@
                 </a:highlight>
                 <a:latin typeface="Arial"/>
               </a:rPr>
-              <a:t>Um den Gegenwind der schwierigen globalen Wirtschaft abzufedern, wird der CPF Maßnahmen priorisieren, die die makroökonomische Stabilität weiter sichern, die Vorsorge für Klimaschocks verbessern </a:t>
+              <a:t>Um dem Gegenwind einer herausfordernden Weltwirtschaft zu begegnen, wird der CPF Aktivitäten priorisieren, die die makroökonomische Stabilität weiter sichern, die Vorsorge gegen Klimaschocks verbessern und Stabilität und Sicherheit im Norden gewährleisten, wobei der Fokus auf Krisenprävention, -reaktion und Resilienz auf Grundlage der Prevention and Resilience Allocation erhalten bleibt.</a:t>
             </a:r>
-            <a:r>
-              <a:rPr lang="en-US" sz="1600" i="0" u="none" strike="noStrike" dirty="0">
-                <a:highlight>
-                  <a:srgbClr val="000000">
-                    <a:alpha val="0"/>
-                  </a:srgbClr>
-                </a:highlight>
-                <a:latin typeface="Arial"/>
-              </a:rPr>
-              <a:t>und Stabilität und Sicherheit im Norden gewährleisten, während der Fokus auf Krisenprävention, -reaktion und Resilienz auf Basis der Prävention- und Resilienz-Zuweisung aufrechterhalten wird.</a:t>
-            </a:r>
-            <a:endParaRPr lang="en-US" sz="1600" b="1" i="0" u="none" strike="noStrike" dirty="0">
-              <a:highlight>
-                <a:srgbClr val="000000">
-                  <a:alpha val="0"/>
-                </a:srgbClr>
-              </a:highlight>
-              <a:latin typeface="Arial"/>
-            </a:endParaRPr>
-          </a:p>
-          <a:p>
-            <a:pPr algn="just" rtl="0"/>
+          </a:p>
+          <a:p>
             <a:r>
               <a:rPr lang="en-US" sz="1600" b="1" i="0" u="none" strike="noStrike" dirty="0">
                 <a:highlight>
@@ -37801,30 +35424,10 @@
                 </a:highlight>
                 <a:latin typeface="Arial"/>
               </a:rPr>
-              <a:t>Der CPF wird der Regierung auch dabei helfen, zusätzliche private Investitionen zu erschließen </a:t>
+              <a:t>Der CPF wird der Regierung außerdem helfen, zusätzliche private Investitionen und potenzielle Produktivitätsgewinne freizusetzen, die das Wirtschaftswachstum und die Inklusion kurzfristig beschleunigen können.</a:t>
             </a:r>
-            <a:r>
-              <a:rPr lang="en-US" sz="1600" i="0" u="none" strike="noStrike" dirty="0">
-                <a:highlight>
-                  <a:srgbClr val="000000">
-                    <a:alpha val="0"/>
-                  </a:srgbClr>
-                </a:highlight>
-                <a:latin typeface="Arial"/>
-              </a:rPr>
-              <a:t>und potenzielle Produktivitätsgewinne zu realisieren, die das Wirtschaftswachstum und die Inklusion kurzfristig beschleunigen können.</a:t>
-            </a:r>
-            <a:endParaRPr lang="en-US" sz="1600" b="1" i="0" u="none" strike="noStrike" dirty="0">
-              <a:highlight>
-                <a:srgbClr val="000000">
-                  <a:alpha val="0"/>
-                </a:srgbClr>
-              </a:highlight>
-              <a:latin typeface="Arial"/>
-            </a:endParaRPr>
-          </a:p>
-          <a:p>
-            <a:pPr algn="just" rtl="0"/>
+          </a:p>
+          <a:p>
             <a:r>
               <a:rPr lang="en-US" sz="1600" b="1" i="0" u="none" strike="noStrike" dirty="0">
                 <a:highlight>
@@ -37834,20 +35437,8 @@
                 </a:highlight>
                 <a:latin typeface="Arial"/>
               </a:rPr>
-              <a:t>Um ein grüneres und inklusiveres Wachstum freizusetzen</a:t>
+              <a:t>Um ein grüneres und inklusiveres Wachstum zu entfalten, wird der CPF Aktivitäten priorisieren, die (i) die Nutzung einer natürlichen Ressource bei gleichzeitiger Stärkung des Ressourcenmanagements ermöglichen – wodurch das Land schrittweise auf einen kohlenstoffarmen Pfad geführt wird (Einbeziehung der Empfehlung des in Kürze erscheinenden Berichts über Klimawandel und Entwicklung) – und (ii) den Prozess des strukturellen (wirtschaftlichen und räumlichen) Wandels beschleunigen, namentlich durch die Modernisierung der Landwirtschaft und ein besseres Management des Urbanisierungsprozesses.</a:t>
             </a:r>
-            <a:r>
-              <a:rPr lang="en-US" sz="1600" i="0" u="none" strike="noStrike" dirty="0">
-                <a:highlight>
-                  <a:srgbClr val="000000">
-                    <a:alpha val="0"/>
-                  </a:srgbClr>
-                </a:highlight>
-                <a:latin typeface="Arial"/>
-              </a:rPr>
-              <a:t>, wird der CPF Maßnahmen priorisieren, die (i) die Nutzung natürlicher Ressourcen ermöglichen und gleichzeitig das natürliche Ressourcenmanagement stärken – das Land schrittweise auf einen kohlenstoffarmen Entwicklungspfad lenken (unter Einbeziehung der Empfehlungen des Berichts zu Klimawandel und Entwicklung (demnächst zu veröffentlichen)) – und (ii) den Prozess der strukturellen (wirtschaftlichen und räumlichen) Transformation beschleunigen, insbesondere durch die Modernisierung der Landwirtschaft und ein besseres Management des Urbanisierungsprozesses.</a:t>
-            </a:r>
-            <a:endParaRPr lang="en-US" sz="1600" dirty="0"/>
           </a:p>
         </p:txBody>
       </p:sp>
@@ -37874,9 +35465,8 @@
           <a:p>
             <a:r>
               <a:rPr lang="en-US"/>
-              <a:t>CPF 2023-2027. Öffentliche Version. Maputo, Mai 2022.</a:t>
+              <a:t>CPF 2023-2027. Öffentliche Fassung. Maputo, Mai 2022.</a:t>
             </a:r>
-            <a:endParaRPr lang="en-US" dirty="0"/>
           </a:p>
         </p:txBody>
       </p:sp>
@@ -37998,29 +35588,17 @@
           </a:bodyPr>
           <a:lstStyle/>
           <a:p>
-            <a:pPr algn="ctr"/>
             <a:r>
               <a:rPr lang="en-US" sz="2400" dirty="0"/>
-              <a:t>CPF-Umsetzung 2023-2027: Priorisierung</a:t>
+              <a:t>Umsetzung des CPF 2023-2027: Priorisierung
+</a:t>
             </a:r>
-            <a:br/>
+          </a:p>
+          <a:p>
             <a:r>
               <a:rPr lang="en-US" sz="2400" dirty="0"/>
               <a:t/>
             </a:r>
-            <a:br/>
-            <a:r>
-              <a:rPr lang="en-US" sz="2400" dirty="0"/>
-              <a:t/>
-            </a:r>
-            <a:endParaRPr lang="pt" sz="2400" b="1" i="0" u="none" strike="noStrike" dirty="0">
-              <a:highlight>
-                <a:srgbClr val="000000">
-                  <a:alpha val="0"/>
-                </a:srgbClr>
-              </a:highlight>
-              <a:latin typeface="Arial"/>
-            </a:endParaRPr>
           </a:p>
         </p:txBody>
       </p:sp>
@@ -38052,7 +35630,6 @@
           </a:bodyPr>
           <a:lstStyle/>
           <a:p>
-            <a:pPr algn="just" rtl="0"/>
             <a:r>
               <a:rPr lang="en-US" sz="1600" b="0" i="0" u="none" strike="noStrike" dirty="0">
                 <a:highlight>
@@ -38062,19 +35639,10 @@
                 </a:highlight>
                 <a:latin typeface="Arial"/>
               </a:rPr>
-              <a:t>Die Reformen werden die von der IFC im Rahmen ihrer Strategie </a:t>
+              <a:t>Die Reformen werden die Branchen priorisieren, die die IFC im Rahmen ihrer Strategie HJ22-26 ermittelt hat, um die Mobilisierung von privatem Kapital zu maximieren. Die endgültigen Prioritäten werden jedoch auf Grundlage weiterer Konsultationen mit der Regierung gewählt.</a:t>
             </a:r>
-            <a:r>
-              <a:rPr lang="en-US" sz="1600" dirty="0">
-                <a:highlight>
-                  <a:srgbClr val="000000">
-                    <a:alpha val="0"/>
-                  </a:srgbClr>
-                </a:highlight>
-                <a:latin typeface="Arial"/>
-              </a:rPr>
-              <a:t>GJ</a:t>
-            </a:r>
+          </a:p>
+          <a:p>
             <a:r>
               <a:rPr lang="en-US" sz="1600" b="0" i="0" u="none" strike="noStrike" dirty="0">
                 <a:highlight>
@@ -38084,11 +35652,10 @@
                 </a:highlight>
                 <a:latin typeface="Arial"/>
               </a:rPr>
-              <a:t>22-26 identifizierten Branchen priorisieren, um die Mobilisierung von Privatkapital zu maximieren. Die endgültigen Prioritäten werden jedoch auf der Grundlage weiterer Konsultationen mit der Regierung festgelegt.</a:t>
+              <a:t>Die Verpflichtungen des Landes zu Zielen und Reformen für die Prävention von Konflikten und Gewalt (PRA) bilden eine der Grundlagen des nächsten CPF.</a:t>
             </a:r>
           </a:p>
           <a:p>
-            <a:pPr algn="just" rtl="0"/>
             <a:r>
               <a:rPr lang="en-US" sz="1600" b="0" i="0" u="none" strike="noStrike" dirty="0">
                 <a:highlight>
@@ -38098,19 +35665,10 @@
                 </a:highlight>
                 <a:latin typeface="Arial"/>
               </a:rPr>
-              <a:t>Die Verpflichtungen des Landes zu Zielen und Reformen für die </a:t>
+              <a:t>Ergänzend zum derzeitigen, nicht ausgezahlten Portfolio wird die vorgeschlagene Projektpipeline die Haushaltsunterstützung erneut betonen – mit einer möglichen Reihe von drei Development Policy Operations (DPO), die geprüft werden.</a:t>
             </a:r>
-            <a:r>
-              <a:rPr lang="en-US" sz="1600" b="1" i="0" u="none" strike="noStrike" dirty="0">
-                <a:highlight>
-                  <a:srgbClr val="000000">
-                    <a:alpha val="0"/>
-                  </a:srgbClr>
-                </a:highlight>
-                <a:latin typeface="Arial"/>
-              </a:rPr>
-              <a:t>Prävention von Konflikten und Gewalt </a:t>
-            </a:r>
+          </a:p>
+          <a:p>
             <a:r>
               <a:rPr lang="en-US" sz="1600" b="0" i="0" u="none" strike="noStrike" dirty="0">
                 <a:highlight>
@@ -38120,11 +35678,10 @@
                 </a:highlight>
                 <a:latin typeface="Arial"/>
               </a:rPr>
-              <a:t>(PRA) bilden eine der Grundlagen des nächsten CPF.</a:t>
+              <a:t>Dieser Schwerpunkt baut auf (i) dem erneuten Interesse an Regierungsreformen und (ii) der jüngsten Vereinbarung zwischen dem IWF und der Regierung im Rahmen der Extended Credit Facility (ECF) für 2022-2025 auf.</a:t>
             </a:r>
           </a:p>
           <a:p>
-            <a:pPr algn="just" rtl="0"/>
             <a:r>
               <a:rPr lang="en-US" sz="1600" b="0" i="0" u="none" strike="noStrike" dirty="0">
                 <a:highlight>
@@ -38134,11 +35691,10 @@
                 </a:highlight>
                 <a:latin typeface="Arial"/>
               </a:rPr>
-              <a:t>Als Ergänzung zum aktuellen nicht ausgezahlten Portfolio wird die vorgeschlagene Pipeline den Budgetsupport erneut betonen – mit einer möglichen Serie von drei Development Policy Operations (DPO) in Erwägung.</a:t>
+              <a:t>Der neue CPF wird zudem räumlich definierte Operationen verstärken.</a:t>
             </a:r>
           </a:p>
           <a:p>
-            <a:pPr algn="just" rtl="0"/>
             <a:r>
               <a:rPr lang="en-US" sz="1600" b="0" i="0" u="none" strike="noStrike" dirty="0">
                 <a:highlight>
@@ -38148,11 +35704,10 @@
                 </a:highlight>
                 <a:latin typeface="Arial"/>
               </a:rPr>
-              <a:t>Diese Betonung baut auf (i) dem erneuerten Interesse der Regierung an Reformen und (ii) der jüngsten Vereinbarung zwischen dem IWF und der Regierung im Rahmen der Extended Credit Facility (ECF) für 2022-2025 auf.</a:t>
+              <a:t>Während der Umsetzung des CPF werden Anstrengungen unternommen, das Portfolio der Weltbank effizient umzusetzen.</a:t>
             </a:r>
           </a:p>
           <a:p>
-            <a:pPr algn="just" rtl="0"/>
             <a:r>
               <a:rPr lang="en-US" sz="1600" b="0" i="0" u="none" strike="noStrike" dirty="0">
                 <a:highlight>
@@ -38162,11 +35717,10 @@
                 </a:highlight>
                 <a:latin typeface="Arial"/>
               </a:rPr>
-              <a:t>Der neue CPF wird auch räumlich definierte Operationen stärken.</a:t>
+              <a:t>Der neue CPF wird darauf hinwirken, eine geringere Anzahl von Projekten mit höherem Wert und sektorübergreifenden Zielen zu priorisieren.</a:t>
             </a:r>
           </a:p>
           <a:p>
-            <a:pPr algn="just" rtl="0"/>
             <a:r>
               <a:rPr lang="en-US" sz="1600" b="0" i="0" u="none" strike="noStrike" dirty="0">
                 <a:highlight>
@@ -38176,11 +35730,10 @@
                 </a:highlight>
                 <a:latin typeface="Arial"/>
               </a:rPr>
-              <a:t>Während der Umsetzung des CPF werden Anstrengungen unternommen, um das Weltbankportfolio effizient umzusetzen</a:t>
+              <a:t>Relevante (querschnittliche) Themen werden unter anderem Klima, Geschlechtergerechtigkeit, Bürgerbeteiligung und öffentlich-private Zusammenarbeit sein.</a:t>
             </a:r>
           </a:p>
           <a:p>
-            <a:pPr algn="just" rtl="0"/>
             <a:r>
               <a:rPr lang="en-US" sz="1600" b="0" i="0" u="none" strike="noStrike" dirty="0">
                 <a:highlight>
@@ -38190,55 +35743,8 @@
                 </a:highlight>
                 <a:latin typeface="Arial"/>
               </a:rPr>
-              <a:t>Der neue CPF wird darauf abzielen, eine geringere Anzahl von Projekten mit größerem Volumen und multisektoralen Zielen zu priorisieren.</a:t>
+              <a:t> Der CPF wird zudem die Chancen berücksichtigen, die sich durch regionale Handelsabkommen eröffnen, insbesondere das Afrikanische Kontinentale Freihandelsabkommen.</a:t>
             </a:r>
-          </a:p>
-          <a:p>
-            <a:pPr algn="just" rtl="0"/>
-            <a:r>
-              <a:rPr lang="en-US" sz="1600" b="0" i="0" u="none" strike="noStrike" dirty="0">
-                <a:highlight>
-                  <a:srgbClr val="000000">
-                    <a:alpha val="0"/>
-                  </a:srgbClr>
-                </a:highlight>
-                <a:latin typeface="Arial"/>
-              </a:rPr>
-              <a:t>Relevante (querschnittliche) Themen werden unter anderem Klima, Gender, Bürgerbeteiligung und öffentlich-private Zusammenarbeit sein.</a:t>
-            </a:r>
-          </a:p>
-          <a:p>
-            <a:pPr algn="just" rtl="0"/>
-            <a:r>
-              <a:rPr lang="en-US" sz="1600" b="0" i="0" u="none" strike="noStrike" dirty="0">
-                <a:highlight>
-                  <a:srgbClr val="000000">
-                    <a:alpha val="0"/>
-                  </a:srgbClr>
-                </a:highlight>
-                <a:latin typeface="Arial"/>
-              </a:rPr>
-              <a:t> Der CPF wird auch Chancen berücksichtigen, die durch regionale Handelsabkommen entstehen, insbesondere das </a:t>
-            </a:r>
-            <a:r>
-              <a:rPr lang="pt" sz="1600" i="1" dirty="0">
-                <a:highlight>
-                  <a:srgbClr val="000000">
-                    <a:alpha val="0"/>
-                  </a:srgbClr>
-                </a:highlight>
-                <a:latin typeface="Arial"/>
-              </a:rPr>
-              <a:t>Afrikanische Kontinentale Freihandelsabkommen.</a:t>
-            </a:r>
-            <a:endParaRPr lang="pt" sz="1600" b="0" i="0" u="none" strike="noStrike" dirty="0">
-              <a:highlight>
-                <a:srgbClr val="000000">
-                  <a:alpha val="0"/>
-                </a:srgbClr>
-              </a:highlight>
-              <a:latin typeface="Arial"/>
-            </a:endParaRPr>
           </a:p>
         </p:txBody>
       </p:sp>
@@ -38265,9 +35771,8 @@
           <a:p>
             <a:r>
               <a:rPr lang="en-US"/>
-              <a:t>CPF 2023-2027. Öffentliche Version. Maputo, Mai 2022.</a:t>
+              <a:t>CPF 2023-2027. Öffentliche Fassung. Maputo, Mai 2022.</a:t>
             </a:r>
-            <a:endParaRPr lang="en-US" dirty="0"/>
           </a:p>
         </p:txBody>
       </p:sp>
@@ -38394,9 +35899,6 @@
           </a:bodyPr>
           <a:lstStyle/>
           <a:p>
-            <a:pPr lvl="0">
-              <a:defRPr/>
-            </a:pPr>
             <a:r>
               <a:rPr kumimoji="0" lang="en-US" sz="1100" b="0" i="1" u="none" strike="noStrike" kern="1200" cap="none" spc="0" normalizeH="0" baseline="0" noProof="0" dirty="0">
                 <a:ln>
@@ -38412,31 +35914,8 @@
                 <a:ea typeface="+mn-ea"/>
                 <a:cs typeface="+mn-cs"/>
               </a:rPr>
-              <a:t>(*) </a:t>
+              <a:t>(*) Unter der Annahme der Ausführung der HJ22-Pipeline. Näherungswerte </a:t>
             </a:r>
-            <a:r>
-              <a:rPr lang="en-US" sz="1100" i="1" dirty="0">
-                <a:solidFill>
-                  <a:prstClr val="black"/>
-                </a:solidFill>
-                <a:latin typeface="Calibri" panose="020F0502020204030204"/>
-              </a:rPr>
-              <a:t>Unter der Annahme der AF22-Pipeline-Ausführung. Ungefähre Werte </a:t>
-            </a:r>
-            <a:endParaRPr kumimoji="0" lang="en-US" sz="1100" b="0" i="1" u="none" strike="noStrike" kern="1200" cap="none" spc="0" normalizeH="0" baseline="0" noProof="0" dirty="0">
-              <a:ln>
-                <a:noFill/>
-              </a:ln>
-              <a:solidFill>
-                <a:prstClr val="black"/>
-              </a:solidFill>
-              <a:effectLst/>
-              <a:uLnTx/>
-              <a:uFillTx/>
-              <a:latin typeface="Calibri" panose="020F0502020204030204"/>
-              <a:ea typeface="+mn-ea"/>
-              <a:cs typeface="+mn-cs"/>
-            </a:endParaRPr>
           </a:p>
         </p:txBody>
       </p:sp>
@@ -38632,9 +36111,6 @@
             </a:lvl9pPr>
           </a:lstStyle>
           <a:p>
-            <a:pPr lvl="0" algn="just">
-              <a:defRPr/>
-            </a:pPr>
             <a:r>
               <a:rPr lang="en-US" sz="1600" dirty="0">
                 <a:solidFill>
@@ -38643,20 +36119,10 @@
                 <a:latin typeface="Arial" panose="020B0604020202020204" pitchFamily="34" charset="0"/>
                 <a:cs typeface="Arial" panose="020B0604020202020204" pitchFamily="34" charset="0"/>
               </a:rPr>
-              <a:t>Der neue CPF wird ein Portfolio von 34 Projekten übernehmen (Stand 22. Februar), mit einem Gesamtvolumen von rund 4,1 Mrd. USD, von denen </a:t>
+              <a:t>Der neue CPF wird ein Portfolio von 34 Projekten übernehmen (Stand 22. Februar) mit einem Gesamtvolumen von rund 4,1 Mrd. US$, von denen 74 % noch nicht ausgezahlt waren (Stand 22. Februar).</a:t>
             </a:r>
-            <a:r>
-              <a:rPr lang="en-US" sz="1600" dirty="0">
-                <a:latin typeface="Arial" panose="020B0604020202020204" pitchFamily="34" charset="0"/>
-                <a:cs typeface="Arial" panose="020B0604020202020204" pitchFamily="34" charset="0"/>
-              </a:rPr>
-              <a:t>74 % noch nicht ausgezahlt worden waren (Stand 22. Februar).</a:t>
-            </a:r>
-          </a:p>
-          <a:p>
-            <a:pPr lvl="0" algn="just">
-              <a:defRPr/>
-            </a:pPr>
+          </a:p>
+          <a:p>
             <a:r>
               <a:rPr lang="en-US" sz="1600" dirty="0">
                 <a:solidFill>
@@ -38665,13 +36131,10 @@
                 <a:latin typeface="Arial" panose="020B0604020202020204" pitchFamily="34" charset="0"/>
                 <a:cs typeface="Arial" panose="020B0604020202020204" pitchFamily="34" charset="0"/>
               </a:rPr>
-              <a:t>15 Projekte (etwa 30% des aktuellen Portfolios, entsprechend US$ 1,4 Mrd.) haben ein Enddatum vor Januar 2025 (Hälfte des CPF-Zyklus).</a:t>
+              <a:t>15 Projekte (rund 30 % des derzeitigen Portfolios, entsprechend 1,4 Mrd. US$) haben ein Enddatum vor Januar 2025 (Hälfte des CPF-Zyklus).</a:t>
             </a:r>
           </a:p>
           <a:p>
-            <a:pPr lvl="0" algn="just">
-              <a:defRPr/>
-            </a:pPr>
             <a:r>
               <a:rPr lang="en-US" sz="1600" dirty="0">
                 <a:solidFill>
@@ -38680,13 +36143,10 @@
                 <a:latin typeface="Arial" panose="020B0604020202020204" pitchFamily="34" charset="0"/>
                 <a:cs typeface="Arial" panose="020B0604020202020204" pitchFamily="34" charset="0"/>
               </a:rPr>
-              <a:t>Etwa 66 Prozent der gesamten nicht ausgezahlten Mittel entfallen auf die Sektoren Nachhaltige Entwicklung (SD) und Infrastruktur (INFRA)</a:t>
+              <a:t>Rund 66 Prozent der gesamten nicht ausgezahlten Mittel entfallen auf die Sektoren Nachhaltige Entwicklung (SD) und Infrastruktur (INFRA).</a:t>
             </a:r>
           </a:p>
           <a:p>
-            <a:pPr lvl="0" algn="just">
-              <a:defRPr/>
-            </a:pPr>
             <a:r>
               <a:rPr lang="en-US" sz="1600" dirty="0">
                 <a:solidFill>
@@ -38695,13 +36155,10 @@
                 <a:latin typeface="Arial" panose="020B0604020202020204" pitchFamily="34" charset="0"/>
                 <a:cs typeface="Arial" panose="020B0604020202020204" pitchFamily="34" charset="0"/>
               </a:rPr>
-              <a:t>Neue IDA-PBA (geschätzt): US$ 1,7 Mrd.</a:t>
+              <a:t>Neue IDA PBA (geschätzt): 1,7 Mrd. US$</a:t>
             </a:r>
           </a:p>
           <a:p>
-            <a:pPr lvl="0" algn="just">
-              <a:defRPr/>
-            </a:pPr>
             <a:r>
               <a:rPr lang="en-US" sz="1600" dirty="0">
                 <a:solidFill>
@@ -38710,13 +36167,10 @@
                 <a:latin typeface="Arial" panose="020B0604020202020204" pitchFamily="34" charset="0"/>
                 <a:cs typeface="Arial" panose="020B0604020202020204" pitchFamily="34" charset="0"/>
               </a:rPr>
-              <a:t>IDA – PRA-Fenster (potenziell): US$ 700 Mio. (IDA-20)</a:t>
+              <a:t>IDA – PRA-Fenster (potenziell): 700 Mio. US$ (IDA-20)</a:t>
             </a:r>
           </a:p>
           <a:p>
-            <a:pPr lvl="0" algn="just">
-              <a:defRPr/>
-            </a:pPr>
             <a:r>
               <a:rPr lang="en-US" sz="1600" dirty="0">
                 <a:solidFill>
@@ -38725,59 +36179,32 @@
                 <a:latin typeface="Arial" panose="020B0604020202020204" pitchFamily="34" charset="0"/>
                 <a:cs typeface="Arial" panose="020B0604020202020204" pitchFamily="34" charset="0"/>
               </a:rPr>
-              <a:t>IFC-Investitionen: Die IFC-Strategie plant Investitionen von bis zu US$ 923 Mrd. (optimistischeres Szenario) </a:t>
+              <a:t>IFC-Investitionen: Die IFC-Strategie sieht Investitionen von bis zu 923 Mrd. US$ (optimistischeres Szenario) vor. </a:t>
             </a:r>
           </a:p>
           <a:p>
-            <a:pPr marL="0" lvl="0" indent="0" algn="just">
-              <a:buNone/>
-              <a:defRPr/>
-            </a:pPr>
-            <a:endParaRPr kumimoji="0" lang="en-US" sz="1600" b="0" i="0" u="none" strike="noStrike" kern="1200" cap="none" spc="0" normalizeH="0" baseline="0" noProof="0" dirty="0">
-              <a:ln>
-                <a:noFill/>
-              </a:ln>
-              <a:solidFill>
-                <a:prstClr val="black"/>
-              </a:solidFill>
-              <a:effectLst/>
-              <a:uLnTx/>
-              <a:uFillTx/>
-              <a:latin typeface="Arial" panose="020B0604020202020204" pitchFamily="34" charset="0"/>
-              <a:cs typeface="Arial" panose="020B0604020202020204" pitchFamily="34" charset="0"/>
-            </a:endParaRPr>
-          </a:p>
-          <a:p>
-            <a:pPr marL="228600" marR="0" lvl="0" indent="-228600" algn="just" defTabSz="914400" rtl="0" eaLnBrk="1" fontAlgn="auto" latinLnBrk="0" hangingPunct="1">
-              <a:lnSpc>
-                <a:spcPct val="90000"/>
-              </a:lnSpc>
-              <a:spcBef>
-                <a:spcPts val="1000"/>
-              </a:spcBef>
-              <a:spcAft>
-                <a:spcPts val="0"/>
-              </a:spcAft>
-              <a:buClrTx/>
-              <a:buSzTx/>
-              <a:buFont typeface="Arial" panose="020B0604020202020204" pitchFamily="34" charset="0"/>
-              <a:buChar char="•"/>
-              <a:tabLst/>
-              <a:defRPr/>
-            </a:pPr>
-            <a:endParaRPr kumimoji="0" lang="en-US" sz="1600" b="0" i="0" u="none" strike="noStrike" kern="1200" cap="none" spc="0" normalizeH="0" baseline="0" noProof="0" dirty="0">
-              <a:ln>
-                <a:noFill/>
-              </a:ln>
-              <a:solidFill>
-                <a:prstClr val="black"/>
-              </a:solidFill>
-              <a:effectLst/>
-              <a:uLnTx/>
-              <a:uFillTx/>
-              <a:latin typeface="Arial" panose="020B0604020202020204" pitchFamily="34" charset="0"/>
-              <a:cs typeface="Arial" panose="020B0604020202020204" pitchFamily="34" charset="0"/>
-            </a:endParaRPr>
+            <a:r>
+              <a:rPr lang="en-US" sz="1600" dirty="0">
+                <a:solidFill>
+                  <a:prstClr val="black"/>
+                </a:solidFill>
+                <a:latin typeface="Arial" panose="020B0604020202020204" pitchFamily="34" charset="0"/>
+                <a:cs typeface="Arial" panose="020B0604020202020204" pitchFamily="34" charset="0"/>
+              </a:rPr>
+              <a:t/>
+            </a:r>
+          </a:p>
+          <a:p>
+            <a:r>
+              <a:rPr lang="en-US" sz="1600" dirty="0">
+                <a:solidFill>
+                  <a:prstClr val="black"/>
+                </a:solidFill>
+                <a:latin typeface="Arial" panose="020B0604020202020204" pitchFamily="34" charset="0"/>
+                <a:cs typeface="Arial" panose="020B0604020202020204" pitchFamily="34" charset="0"/>
+              </a:rPr>
+              <a:t/>
+            </a:r>
           </a:p>
         </p:txBody>
       </p:sp>
@@ -38809,17 +36236,13 @@
           </a:bodyPr>
           <a:lstStyle/>
           <a:p>
-            <a:pPr algn="ctr"/>
             <a:r>
               <a:rPr lang="en-US" sz="2400" dirty="0"/>
-              <a:t>Potenziell verfügbare Ressourcen </a:t>
+              <a:t>Potenziell verfügbare Mittel 
+</a:t>
             </a:r>
-            <a:br/>
-            <a:r>
-              <a:rPr lang="en-US" sz="2400" dirty="0"/>
-              <a:t/>
-            </a:r>
-            <a:br/>
+          </a:p>
+          <a:p>
             <a:r>
               <a:rPr lang="en-US" sz="2400" dirty="0"/>
               <a:t/>
@@ -38885,9 +36308,8 @@
           <a:p>
             <a:r>
               <a:rPr lang="en-US"/>
-              <a:t>CPF 2023-2027. Öffentliche Version. Maputo, Mai 2022.</a:t>
+              <a:t>CPF 2023-2027. Öffentliche Fassung. Maputo, Mai 2022.</a:t>
             </a:r>
-            <a:endParaRPr lang="en-US" dirty="0"/>
           </a:p>
         </p:txBody>
       </p:sp>
@@ -39002,22 +36424,17 @@
           <a:bodyPr/>
           <a:lstStyle/>
           <a:p>
-            <a:pPr algn="ctr"/>
             <a:r>
               <a:rPr lang="en-US" dirty="0"/>
-              <a:t>HLO 1: Inklusivere Institutionen</a:t>
+              <a:t>HLO 1: Inklusivere Institutionen
+</a:t>
             </a:r>
-            <a:br/>
+          </a:p>
+          <a:p>
             <a:r>
               <a:rPr lang="en-US" dirty="0"/>
               <a:t/>
             </a:r>
-            <a:br/>
-            <a:r>
-              <a:rPr lang="en-US" dirty="0"/>
-              <a:t/>
-            </a:r>
-            <a:endParaRPr lang="pt-BR" dirty="0"/>
           </a:p>
         </p:txBody>
       </p:sp>
@@ -39049,18 +36466,6 @@
           </a:bodyPr>
           <a:lstStyle/>
           <a:p>
-            <a:pPr marL="0" marR="0" indent="0" algn="just">
-              <a:lnSpc>
-                <a:spcPct val="107000"/>
-              </a:lnSpc>
-              <a:spcBef>
-                <a:spcPts val="600"/>
-              </a:spcBef>
-              <a:spcAft>
-                <a:spcPts val="0"/>
-              </a:spcAft>
-              <a:buNone/>
-            </a:pPr>
             <a:r>
               <a:rPr lang="en-US" sz="1600" b="1" kern="1200" dirty="0">
                 <a:solidFill>
@@ -39071,53 +36476,10 @@
                 <a:effectLst/>
                 <a:ea typeface="Times New Roman" panose="02020603050405020304" pitchFamily="18" charset="0"/>
               </a:rPr>
-              <a:t>Ziel 1: Verbesserung des makroökonomischen Managements </a:t>
+              <a:t>Ziel 1: Verbesserung des makroökonomischen Managements, um eine resiliente und nachhaltige Schaffung von Arbeitsplätzen zu erleichtern, die Kapazität für produktive Investitionen (öffentlich und privat) zu erhöhen und das Staatsrisiko zu verringern.</a:t>
             </a:r>
-            <a:r>
-              <a:rPr lang="en-US" sz="1600" kern="1200" dirty="0">
-                <a:solidFill>
-                  <a:srgbClr val="000000"/>
-                </a:solidFill>
-                <a:effectLst/>
-                <a:ea typeface="Times New Roman" panose="02020603050405020304" pitchFamily="18" charset="0"/>
-              </a:rPr>
-              <a:t>zur Förderung einer resilienten und nachhaltigen Beschäftigungsschaffung, zur Erhöhung der produktiven Investitionskapazität (öffentlich und privat) und zur Senkung des Staatsrisikos.</a:t>
-            </a:r>
-          </a:p>
-          <a:p>
-            <a:pPr marL="0" marR="0" indent="0" algn="just">
-              <a:lnSpc>
-                <a:spcPct val="107000"/>
-              </a:lnSpc>
-              <a:spcBef>
-                <a:spcPts val="600"/>
-              </a:spcBef>
-              <a:spcAft>
-                <a:spcPts val="0"/>
-              </a:spcAft>
-              <a:buNone/>
-            </a:pPr>
-            <a:endParaRPr lang="en-US" sz="1600" kern="1200" dirty="0">
-              <a:solidFill>
-                <a:srgbClr val="000000"/>
-              </a:solidFill>
-              <a:effectLst/>
-              <a:ea typeface="Times New Roman" panose="02020603050405020304" pitchFamily="18" charset="0"/>
-            </a:endParaRPr>
-          </a:p>
-          <a:p>
-            <a:pPr marL="0" marR="0" indent="0" algn="just">
-              <a:lnSpc>
-                <a:spcPct val="107000"/>
-              </a:lnSpc>
-              <a:spcBef>
-                <a:spcPts val="600"/>
-              </a:spcBef>
-              <a:spcAft>
-                <a:spcPts val="0"/>
-              </a:spcAft>
-              <a:buNone/>
-            </a:pPr>
+          </a:p>
+          <a:p>
             <a:r>
               <a:rPr lang="en-US" sz="1600" b="1" kern="1200" dirty="0">
                 <a:solidFill>
@@ -39128,145 +36490,10 @@
                 <a:effectLst/>
                 <a:ea typeface="Times New Roman" panose="02020603050405020304" pitchFamily="18" charset="0"/>
               </a:rPr>
-              <a:t>Ziel 2: Steigerung der Effizienz des öffentlichen Sektors zur Verbesserung der Qualität, Nachhaltigkeit und Gerechtigkeit öffentlicher Politik. </a:t>
+              <a:t/>
             </a:r>
-            <a:r>
-              <a:rPr lang="en-US" sz="1600" b="1" kern="1200" dirty="0">
-                <a:solidFill>
-                  <a:srgbClr val="000000"/>
-                </a:solidFill>
-                <a:effectLst/>
-                <a:ea typeface="Times New Roman" panose="02020603050405020304" pitchFamily="18" charset="0"/>
-              </a:rPr>
-              <a:t>Schwerpunkt auf:</a:t>
-            </a:r>
-          </a:p>
-          <a:p>
-            <a:pPr algn="just">
-              <a:lnSpc>
-                <a:spcPct val="107000"/>
-              </a:lnSpc>
-              <a:spcBef>
-                <a:spcPts val="600"/>
-              </a:spcBef>
-            </a:pPr>
-            <a:r>
-              <a:rPr lang="en-US" sz="1600" kern="1200" dirty="0">
-                <a:solidFill>
-                  <a:srgbClr val="000000"/>
-                </a:solidFill>
-                <a:effectLst/>
-                <a:ea typeface="Times New Roman" panose="02020603050405020304" pitchFamily="18" charset="0"/>
-              </a:rPr>
-              <a:t>Grundfunktionen des Staates – wie Verbesserung des Finanzmanagements (PFM) und des öffentlichen Beschaffungswesens;</a:t>
-            </a:r>
-          </a:p>
-          <a:p>
-            <a:pPr algn="just">
-              <a:lnSpc>
-                <a:spcPct val="107000"/>
-              </a:lnSpc>
-              <a:spcBef>
-                <a:spcPts val="600"/>
-              </a:spcBef>
-            </a:pPr>
-            <a:r>
-              <a:rPr lang="en-US" sz="1600" kern="1200" dirty="0">
-                <a:solidFill>
-                  <a:srgbClr val="000000"/>
-                </a:solidFill>
-                <a:effectLst/>
-                <a:ea typeface="Times New Roman" panose="02020603050405020304" pitchFamily="18" charset="0"/>
-              </a:rPr>
-              <a:t>Stärkung der Bürgerbeteiligung und externen Kontrolle;</a:t>
-            </a:r>
-          </a:p>
-          <a:p>
-            <a:pPr algn="just">
-              <a:lnSpc>
-                <a:spcPct val="107000"/>
-              </a:lnSpc>
-              <a:spcBef>
-                <a:spcPts val="600"/>
-              </a:spcBef>
-            </a:pPr>
-            <a:r>
-              <a:rPr lang="en-US" sz="1600" kern="1200" dirty="0">
-                <a:solidFill>
-                  <a:srgbClr val="000000"/>
-                </a:solidFill>
-                <a:effectLst/>
-                <a:ea typeface="Times New Roman" panose="02020603050405020304" pitchFamily="18" charset="0"/>
-              </a:rPr>
-              <a:t>Operative Dezentralisierung der Ausgaben für Gesundheit und Bildung.</a:t>
-            </a:r>
-          </a:p>
-          <a:p>
-            <a:pPr algn="just">
-              <a:lnSpc>
-                <a:spcPct val="107000"/>
-              </a:lnSpc>
-              <a:spcBef>
-                <a:spcPts val="600"/>
-              </a:spcBef>
-            </a:pPr>
-            <a:r>
-              <a:rPr lang="en-US" sz="1600" kern="1200" dirty="0">
-                <a:solidFill>
-                  <a:srgbClr val="000000"/>
-                </a:solidFill>
-                <a:effectLst/>
-                <a:ea typeface="Times New Roman" panose="02020603050405020304" pitchFamily="18" charset="0"/>
-              </a:rPr>
-              <a:t>Es wird auch Wert auf die Erhöhung der Transparenz und des Zugangs zu Informationen gelegt.</a:t>
-            </a:r>
-          </a:p>
-          <a:p>
-            <a:pPr marL="0" marR="0" indent="0" algn="just">
-              <a:lnSpc>
-                <a:spcPct val="107000"/>
-              </a:lnSpc>
-              <a:spcBef>
-                <a:spcPts val="600"/>
-              </a:spcBef>
-              <a:spcAft>
-                <a:spcPts val="0"/>
-              </a:spcAft>
-              <a:buNone/>
-            </a:pPr>
-            <a:endParaRPr lang="en-US" sz="1600" b="1" dirty="0">
-              <a:solidFill>
-                <a:schemeClr val="accent1">
-                  <a:lumMod val="50000"/>
-                </a:schemeClr>
-              </a:solidFill>
-              <a:ea typeface="Times New Roman" panose="02020603050405020304" pitchFamily="18" charset="0"/>
-            </a:endParaRPr>
-          </a:p>
-          <a:p>
-            <a:pPr marL="0" marR="0" indent="0" algn="just">
-              <a:lnSpc>
-                <a:spcPct val="107000"/>
-              </a:lnSpc>
-              <a:spcBef>
-                <a:spcPts val="600"/>
-              </a:spcBef>
-              <a:spcAft>
-                <a:spcPts val="0"/>
-              </a:spcAft>
-              <a:buNone/>
-            </a:pPr>
-            <a:r>
-              <a:rPr lang="en-US" sz="1600" b="1" dirty="0">
-                <a:solidFill>
-                  <a:schemeClr val="accent1">
-                    <a:lumMod val="50000"/>
-                  </a:schemeClr>
-                </a:solidFill>
-                <a:ea typeface="Times New Roman" panose="02020603050405020304" pitchFamily="18" charset="0"/>
-              </a:rPr>
-              <a:t>Ziel 3</a:t>
-            </a:r>
+          </a:p>
+          <a:p>
             <a:r>
               <a:rPr lang="en-US" sz="1600" b="1" kern="1200" dirty="0">
                 <a:solidFill>
@@ -39277,96 +36504,162 @@
                 <a:effectLst/>
                 <a:ea typeface="Times New Roman" panose="02020603050405020304" pitchFamily="18" charset="0"/>
               </a:rPr>
-              <a:t>: Stärkung der Politikkoordinierung sowie der staatlichen Vorsorge- und Reaktionskapazität bei Naturkatastrophen und anderen mehrdimensionalen Schocks. </a:t>
+              <a:t>Ziel 2: Steigerung der Wirksamkeit des öffentlichen Sektors zur Verbesserung der Qualität, Nachhaltigkeit und Gerechtigkeit der öffentlichen Politik. Schwerpunkt auf:</a:t>
             </a:r>
+          </a:p>
+          <a:p>
             <a:r>
-              <a:rPr lang="en-US" sz="1600" kern="1200" dirty="0">
+              <a:rPr lang="en-US" sz="1600" b="1" kern="1200" dirty="0">
                 <a:solidFill>
-                  <a:srgbClr val="000000"/>
+                  <a:schemeClr val="accent1">
+                    <a:lumMod val="50000"/>
+                  </a:schemeClr>
                 </a:solidFill>
                 <a:effectLst/>
                 <a:ea typeface="Times New Roman" panose="02020603050405020304" pitchFamily="18" charset="0"/>
               </a:rPr>
-              <a:t>Das Katastrophenrisikomanagement (DRM) war im vorigen CPF ein Bereich mit vorbildlichen Ergebnissen. Eine stärkere Betonung von Prävention/Vorsorge wird vorgeschlagen, insbesondere im Hinblick auf die Risiken von Konflikten und Gewalt.</a:t>
+              <a:t>Kernfunktionen des Staates – etwa der Verbesserung des Finanzmanagements (PFM) und des öffentlichen Beschaffungswesens;</a:t>
             </a:r>
-            <a:endParaRPr lang="pt-BR" sz="1600" kern="1200" dirty="0">
-              <a:solidFill>
-                <a:srgbClr val="000000"/>
-              </a:solidFill>
-              <a:effectLst/>
-              <a:ea typeface="Times New Roman" panose="02020603050405020304" pitchFamily="18" charset="0"/>
-            </a:endParaRPr>
-          </a:p>
-          <a:p>
-            <a:pPr marL="0" marR="0" indent="0">
-              <a:lnSpc>
-                <a:spcPct val="107000"/>
-              </a:lnSpc>
-              <a:spcBef>
-                <a:spcPts val="0"/>
-              </a:spcBef>
-              <a:spcAft>
-                <a:spcPts val="800"/>
-              </a:spcAft>
-              <a:buNone/>
-            </a:pPr>
-            <a:endParaRPr lang="pt-BR" sz="1600" kern="1200" dirty="0">
-              <a:solidFill>
-                <a:srgbClr val="000000"/>
-              </a:solidFill>
-              <a:effectLst/>
-              <a:ea typeface="Times New Roman" panose="02020603050405020304" pitchFamily="18" charset="0"/>
-            </a:endParaRPr>
-          </a:p>
-          <a:p>
-            <a:pPr marL="0" marR="0" indent="0">
-              <a:lnSpc>
-                <a:spcPct val="107000"/>
-              </a:lnSpc>
-              <a:spcBef>
-                <a:spcPts val="0"/>
-              </a:spcBef>
-              <a:spcAft>
-                <a:spcPts val="800"/>
-              </a:spcAft>
-              <a:buNone/>
-            </a:pPr>
-            <a:endParaRPr lang="pt-BR" sz="1600" dirty="0">
-              <a:solidFill>
-                <a:srgbClr val="000000"/>
-              </a:solidFill>
-              <a:ea typeface="Calibri" panose="020F0502020204030204" pitchFamily="34" charset="0"/>
-            </a:endParaRPr>
-          </a:p>
-          <a:p>
-            <a:pPr marL="0" marR="0" indent="0">
-              <a:lnSpc>
-                <a:spcPct val="107000"/>
-              </a:lnSpc>
-              <a:spcBef>
-                <a:spcPts val="0"/>
-              </a:spcBef>
-              <a:spcAft>
-                <a:spcPts val="800"/>
-              </a:spcAft>
-              <a:buNone/>
-            </a:pPr>
-            <a:endParaRPr lang="en-US" sz="1600" dirty="0">
-              <a:effectLst/>
-              <a:ea typeface="Calibri" panose="020F0502020204030204" pitchFamily="34" charset="0"/>
-            </a:endParaRPr>
-          </a:p>
-          <a:p>
-            <a:pPr marL="0" indent="0" algn="just">
-              <a:lnSpc>
-                <a:spcPct val="100000"/>
-              </a:lnSpc>
-              <a:buNone/>
-            </a:pPr>
-            <a:endParaRPr lang="en-US" sz="1600" dirty="0"/>
-          </a:p>
-          <a:p>
-            <a:endParaRPr lang="pt-BR" sz="1600" dirty="0"/>
+          </a:p>
+          <a:p>
+            <a:r>
+              <a:rPr lang="en-US" sz="1600" b="1" kern="1200" dirty="0">
+                <a:solidFill>
+                  <a:schemeClr val="accent1">
+                    <a:lumMod val="50000"/>
+                  </a:schemeClr>
+                </a:solidFill>
+                <a:effectLst/>
+                <a:ea typeface="Times New Roman" panose="02020603050405020304" pitchFamily="18" charset="0"/>
+              </a:rPr>
+              <a:t>Stärkung der Bürgerbeteiligung und der externen Kontrolle;</a:t>
+            </a:r>
+          </a:p>
+          <a:p>
+            <a:r>
+              <a:rPr lang="en-US" sz="1600" b="1" kern="1200" dirty="0">
+                <a:solidFill>
+                  <a:schemeClr val="accent1">
+                    <a:lumMod val="50000"/>
+                  </a:schemeClr>
+                </a:solidFill>
+                <a:effectLst/>
+                <a:ea typeface="Times New Roman" panose="02020603050405020304" pitchFamily="18" charset="0"/>
+              </a:rPr>
+              <a:t>operative Dezentralisierung der Ausgaben für Gesundheit und Bildung.</a:t>
+            </a:r>
+          </a:p>
+          <a:p>
+            <a:r>
+              <a:rPr lang="en-US" sz="1600" b="1" kern="1200" dirty="0">
+                <a:solidFill>
+                  <a:schemeClr val="accent1">
+                    <a:lumMod val="50000"/>
+                  </a:schemeClr>
+                </a:solidFill>
+                <a:effectLst/>
+                <a:ea typeface="Times New Roman" panose="02020603050405020304" pitchFamily="18" charset="0"/>
+              </a:rPr>
+              <a:t>Ein Schwerpunkt wird zudem auf der Erhöhung der Transparenz und des Zugangs zu Informationen liegen.</a:t>
+            </a:r>
+          </a:p>
+          <a:p>
+            <a:r>
+              <a:rPr lang="en-US" sz="1600" b="1" kern="1200" dirty="0">
+                <a:solidFill>
+                  <a:schemeClr val="accent1">
+                    <a:lumMod val="50000"/>
+                  </a:schemeClr>
+                </a:solidFill>
+                <a:effectLst/>
+                <a:ea typeface="Times New Roman" panose="02020603050405020304" pitchFamily="18" charset="0"/>
+              </a:rPr>
+              <a:t/>
+            </a:r>
+          </a:p>
+          <a:p>
+            <a:r>
+              <a:rPr lang="en-US" sz="1600" b="1" kern="1200" dirty="0">
+                <a:solidFill>
+                  <a:schemeClr val="accent1">
+                    <a:lumMod val="50000"/>
+                  </a:schemeClr>
+                </a:solidFill>
+                <a:effectLst/>
+                <a:ea typeface="Times New Roman" panose="02020603050405020304" pitchFamily="18" charset="0"/>
+              </a:rPr>
+              <a:t>Ziel 3: Stärkung der politischen Koordination sowie der Vorsorge- und Reaktionsfähigkeit der Regierung gegenüber Naturkatastrophen und anderen mehrdimensionalen Schocks. Das Katastrophenrisikomanagement (DRM) war ein Bereich mit beispielhaften Ergebnissen im vergangenen CPF. Ein stärkerer Schwerpunkt auf Prävention/Vorsorge wird vorgeschlagen, insbesondere im Hinblick auf die Risiken von Konflikten und Gewalt.</a:t>
+            </a:r>
+          </a:p>
+          <a:p>
+            <a:r>
+              <a:rPr lang="en-US" sz="1600" b="1" kern="1200" dirty="0">
+                <a:solidFill>
+                  <a:schemeClr val="accent1">
+                    <a:lumMod val="50000"/>
+                  </a:schemeClr>
+                </a:solidFill>
+                <a:effectLst/>
+                <a:ea typeface="Times New Roman" panose="02020603050405020304" pitchFamily="18" charset="0"/>
+              </a:rPr>
+              <a:t/>
+            </a:r>
+          </a:p>
+          <a:p>
+            <a:r>
+              <a:rPr lang="en-US" sz="1600" b="1" kern="1200" dirty="0">
+                <a:solidFill>
+                  <a:schemeClr val="accent1">
+                    <a:lumMod val="50000"/>
+                  </a:schemeClr>
+                </a:solidFill>
+                <a:effectLst/>
+                <a:ea typeface="Times New Roman" panose="02020603050405020304" pitchFamily="18" charset="0"/>
+              </a:rPr>
+              <a:t/>
+            </a:r>
+          </a:p>
+          <a:p>
+            <a:r>
+              <a:rPr lang="en-US" sz="1600" b="1" kern="1200" dirty="0">
+                <a:solidFill>
+                  <a:schemeClr val="accent1">
+                    <a:lumMod val="50000"/>
+                  </a:schemeClr>
+                </a:solidFill>
+                <a:effectLst/>
+                <a:ea typeface="Times New Roman" panose="02020603050405020304" pitchFamily="18" charset="0"/>
+              </a:rPr>
+              <a:t/>
+            </a:r>
+          </a:p>
+          <a:p>
+            <a:r>
+              <a:rPr lang="en-US" sz="1600" b="1" kern="1200" dirty="0">
+                <a:solidFill>
+                  <a:schemeClr val="accent1">
+                    <a:lumMod val="50000"/>
+                  </a:schemeClr>
+                </a:solidFill>
+                <a:effectLst/>
+                <a:ea typeface="Times New Roman" panose="02020603050405020304" pitchFamily="18" charset="0"/>
+              </a:rPr>
+              <a:t/>
+            </a:r>
+          </a:p>
+          <a:p>
+            <a:r>
+              <a:rPr lang="en-US" sz="1600" b="1" kern="1200" dirty="0">
+                <a:solidFill>
+                  <a:schemeClr val="accent1">
+                    <a:lumMod val="50000"/>
+                  </a:schemeClr>
+                </a:solidFill>
+                <a:effectLst/>
+                <a:ea typeface="Times New Roman" panose="02020603050405020304" pitchFamily="18" charset="0"/>
+              </a:rPr>
+              <a:t/>
+            </a:r>
           </a:p>
         </p:txBody>
       </p:sp>
@@ -39393,9 +36686,8 @@
           <a:p>
             <a:r>
               <a:rPr lang="en-US"/>
-              <a:t>CPF 2023-2027. Öffentliche Version. Maputo, Mai 2022.</a:t>
+              <a:t>CPF 2023-2027. Öffentliche Fassung. Maputo, Mai 2022.</a:t>
             </a:r>
-            <a:endParaRPr lang="en-US" dirty="0"/>
           </a:p>
         </p:txBody>
       </p:sp>
@@ -39515,15 +36807,10 @@
           <a:bodyPr/>
           <a:lstStyle/>
           <a:p>
-            <a:pPr algn="ctr"/>
             <a:r>
               <a:rPr lang="en-US" dirty="0"/>
-              <a:t>HLO 2: Zunahme inklusiver Beschäftigungsschaffung</a:t>
+              <a:t>HLO 2: Steigerung der inklusiven Schaffung von Arbeitsplätzen</a:t>
             </a:r>
-            <a:br>
-              <a:rPr lang="pt-BR" dirty="0"/>
-            </a:br>
-            <a:endParaRPr lang="pt-BR" dirty="0"/>
           </a:p>
         </p:txBody>
       </p:sp>
@@ -39555,32 +36842,6 @@
           </a:bodyPr>
           <a:lstStyle/>
           <a:p>
-            <a:pPr>
-              <a:lnSpc>
-                <a:spcPct val="100000"/>
-              </a:lnSpc>
-              <a:spcBef>
-                <a:spcPts val="0"/>
-              </a:spcBef>
-              <a:tabLst>
-                <a:tab pos="581660" algn="l"/>
-                <a:tab pos="1163320" algn="l"/>
-                <a:tab pos="1744980" algn="l"/>
-                <a:tab pos="2326640" algn="l"/>
-                <a:tab pos="2908300" algn="l"/>
-                <a:tab pos="3489960" algn="l"/>
-                <a:tab pos="4071620" algn="l"/>
-                <a:tab pos="4653280" algn="l"/>
-                <a:tab pos="5234940" algn="l"/>
-                <a:tab pos="5816600" algn="l"/>
-                <a:tab pos="6398260" algn="l"/>
-                <a:tab pos="6979920" algn="l"/>
-                <a:tab pos="7561580" algn="l"/>
-                <a:tab pos="8143240" algn="l"/>
-                <a:tab pos="8724900" algn="l"/>
-                <a:tab pos="9306560" algn="l"/>
-              </a:tabLst>
-            </a:pPr>
             <a:r>
               <a:rPr lang="en-US" sz="1600" b="1" dirty="0">
                 <a:solidFill>
@@ -39591,134 +36852,11 @@
                 <a:latin typeface="+mn-lt"/>
                 <a:cs typeface="Calibri" panose="020F0502020204030204" pitchFamily="34" charset="0"/>
               </a:rPr>
-              <a:t>Ziel 4: Nachhaltiges Wachstum ausgewählter Sektoren natürlicher Ressourcen ermöglichen und regionale sowie globale komparative Vorteile nutzen. Drei Zwischenziele: </a:t>
-            </a:r>
-            <a:r>
-              <a:rPr lang="en-US" sz="1600" dirty="0">
-                <a:solidFill>
-                  <a:schemeClr val="accent1">
-                    <a:lumMod val="75000"/>
-                  </a:schemeClr>
-                </a:solidFill>
-                <a:latin typeface="+mn-lt"/>
-                <a:cs typeface="Calibri" panose="020F0502020204030204" pitchFamily="34" charset="0"/>
-              </a:rPr>
-              <a:t>
+              <a:t>Ziel 4: Nachhaltiges Wachstum ausgewählter Sektoren natürlicher Ressourcen ermöglichen und dabei regionale und globale komparative Vorteile nutzen. Drei Zwischenziele: 
 </a:t>
             </a:r>
-            <a:r>
-              <a:rPr lang="en-US" sz="1600" dirty="0">
-                <a:latin typeface="+mn-lt"/>
-                <a:cs typeface="Calibri" panose="020F0502020204030204" pitchFamily="34" charset="0"/>
-              </a:rPr>
-              <a:t>Stärkung der Nachhaltigkeit von Investitionen in den Erdgas- und Bergbausektor durch Bewältigung negativer externer Effekte des Sektors und Nutzung positiver Rückwirkungen</a:t>
-            </a:r>
-            <a:br/>
-            <a:r>
-              <a:rPr lang="en-US" sz="1600" dirty="0">
-                <a:latin typeface="+mn-lt"/>
-                <a:cs typeface="Calibri" panose="020F0502020204030204" pitchFamily="34" charset="0"/>
-              </a:rPr>
-              <a:t>Steigerung der landwirtschaftlichen Produktivität </a:t>
-            </a:r>
-            <a:br/>
-            <a:r>
-              <a:rPr lang="en-US" sz="1600" dirty="0">
-                <a:latin typeface="+mn-lt"/>
-                <a:cs typeface="Calibri" panose="020F0502020204030204" pitchFamily="34" charset="0"/>
-              </a:rPr>
-              <a:t>Stärkung des Managements natürlicher Ressourcen und Freisetzung privater Investitionen im Grünsektor, einschließlich Ökotourismus, Fischerei und Forstwirtschaft</a:t>
-            </a:r>
-            <a:br/>
-            <a:r>
-              <a:rPr lang="en-US" sz="1600" dirty="0">
-                <a:latin typeface="+mn-lt"/>
-                <a:cs typeface="Calibri" panose="020F0502020204030204" pitchFamily="34" charset="0"/>
-              </a:rPr>
-              <a:t/>
-            </a:r>
-            <a:br/>
-            <a:r>
-              <a:rPr lang="en-US" sz="1600" dirty="0">
-                <a:latin typeface="+mn-lt"/>
-                <a:cs typeface="Calibri" panose="020F0502020204030204" pitchFamily="34" charset="0"/>
-              </a:rPr>
-              <a:t/>
-            </a:r>
-            <a:endParaRPr lang="en-US" sz="1600" b="1" dirty="0">
-              <a:solidFill>
-                <a:schemeClr val="accent1">
-                  <a:lumMod val="75000"/>
-                </a:schemeClr>
-              </a:solidFill>
-              <a:latin typeface="+mn-lt"/>
-              <a:cs typeface="Calibri" panose="020F0502020204030204" pitchFamily="34" charset="0"/>
-            </a:endParaRPr>
-          </a:p>
-          <a:p>
-            <a:pPr marL="0" indent="0">
-              <a:lnSpc>
-                <a:spcPct val="100000"/>
-              </a:lnSpc>
-              <a:spcBef>
-                <a:spcPts val="0"/>
-              </a:spcBef>
-              <a:buNone/>
-              <a:tabLst>
-                <a:tab pos="581660" algn="l"/>
-                <a:tab pos="1163320" algn="l"/>
-                <a:tab pos="1744980" algn="l"/>
-                <a:tab pos="2326640" algn="l"/>
-                <a:tab pos="2908300" algn="l"/>
-                <a:tab pos="3489960" algn="l"/>
-                <a:tab pos="4071620" algn="l"/>
-                <a:tab pos="4653280" algn="l"/>
-                <a:tab pos="5234940" algn="l"/>
-                <a:tab pos="5816600" algn="l"/>
-                <a:tab pos="6398260" algn="l"/>
-                <a:tab pos="6979920" algn="l"/>
-                <a:tab pos="7561580" algn="l"/>
-                <a:tab pos="8143240" algn="l"/>
-                <a:tab pos="8724900" algn="l"/>
-                <a:tab pos="9306560" algn="l"/>
-              </a:tabLst>
-            </a:pPr>
-            <a:endParaRPr lang="en-US" sz="1600" dirty="0">
-              <a:solidFill>
-                <a:srgbClr val="202124"/>
-              </a:solidFill>
-              <a:latin typeface="+mn-lt"/>
-              <a:cs typeface="Calibri" panose="020F0502020204030204" pitchFamily="34" charset="0"/>
-            </a:endParaRPr>
-          </a:p>
-          <a:p>
-            <a:pPr marL="0" indent="0">
-              <a:lnSpc>
-                <a:spcPct val="100000"/>
-              </a:lnSpc>
-              <a:spcBef>
-                <a:spcPts val="0"/>
-              </a:spcBef>
-              <a:buNone/>
-              <a:tabLst>
-                <a:tab pos="581660" algn="l"/>
-                <a:tab pos="1163320" algn="l"/>
-                <a:tab pos="1744980" algn="l"/>
-                <a:tab pos="2326640" algn="l"/>
-                <a:tab pos="2908300" algn="l"/>
-                <a:tab pos="3489960" algn="l"/>
-                <a:tab pos="4071620" algn="l"/>
-                <a:tab pos="4653280" algn="l"/>
-                <a:tab pos="5234940" algn="l"/>
-                <a:tab pos="5816600" algn="l"/>
-                <a:tab pos="6398260" algn="l"/>
-                <a:tab pos="6979920" algn="l"/>
-                <a:tab pos="7561580" algn="l"/>
-                <a:tab pos="8143240" algn="l"/>
-                <a:tab pos="8724900" algn="l"/>
-                <a:tab pos="9306560" algn="l"/>
-              </a:tabLst>
-            </a:pPr>
+          </a:p>
+          <a:p>
             <a:r>
               <a:rPr lang="en-US" sz="1600" b="1" dirty="0">
                 <a:solidFill>
@@ -39729,44 +36867,40 @@
                 <a:latin typeface="+mn-lt"/>
                 <a:cs typeface="Calibri" panose="020F0502020204030204" pitchFamily="34" charset="0"/>
               </a:rPr>
-              <a:t>Ziel 5: Förderung des Produktivitätswachstums in ausgewählten arbeitsintensiven Branchen. </a:t>
+              <a:t>Stärkung der Nachhaltigkeit von Investitionen in den Erdgas- und Bergbausektoren, indem die negativen externen Effekte des Sektors angegangen und die positiven Folgewirkungen genutzt werden
+</a:t>
             </a:r>
+          </a:p>
+          <a:p>
             <a:r>
-              <a:rPr lang="en-US" sz="1600" dirty="0">
+              <a:rPr lang="en-US" sz="1600" b="1" dirty="0">
+                <a:solidFill>
+                  <a:schemeClr val="accent1">
+                    <a:lumMod val="75000"/>
+                  </a:schemeClr>
+                </a:solidFill>
                 <a:latin typeface="+mn-lt"/>
                 <a:cs typeface="Calibri" panose="020F0502020204030204" pitchFamily="34" charset="0"/>
               </a:rPr>
-              <a:t>Wie? Dienstleistungen, KMU, grüne und blaue Wirtschaft; sektoraler und territorialer Fokus; Maximierung der Rückwirkungen großer Projekte, auch entlang von Transportkorridoren, sowie Informalität (Politikexperimentierung und Wirkungsmessung).</a:t>
+              <a:t>Steigerung der landwirtschaftlichen Produktivität 
+</a:t>
             </a:r>
           </a:p>
           <a:p>
-            <a:pPr marL="0" indent="0">
-              <a:lnSpc>
-                <a:spcPct val="100000"/>
-              </a:lnSpc>
-              <a:spcBef>
-                <a:spcPts val="0"/>
-              </a:spcBef>
-              <a:buNone/>
-              <a:tabLst>
-                <a:tab pos="581660" algn="l"/>
-                <a:tab pos="1163320" algn="l"/>
-                <a:tab pos="1744980" algn="l"/>
-                <a:tab pos="2326640" algn="l"/>
-                <a:tab pos="2908300" algn="l"/>
-                <a:tab pos="3489960" algn="l"/>
-                <a:tab pos="4071620" algn="l"/>
-                <a:tab pos="4653280" algn="l"/>
-                <a:tab pos="5234940" algn="l"/>
-                <a:tab pos="5816600" algn="l"/>
-                <a:tab pos="6398260" algn="l"/>
-                <a:tab pos="6979920" algn="l"/>
-                <a:tab pos="7561580" algn="l"/>
-                <a:tab pos="8143240" algn="l"/>
-                <a:tab pos="8724900" algn="l"/>
-                <a:tab pos="9306560" algn="l"/>
-              </a:tabLst>
-            </a:pPr>
+            <a:r>
+              <a:rPr lang="en-US" sz="1600" b="1" dirty="0">
+                <a:solidFill>
+                  <a:schemeClr val="accent1">
+                    <a:lumMod val="75000"/>
+                  </a:schemeClr>
+                </a:solidFill>
+                <a:latin typeface="+mn-lt"/>
+                <a:cs typeface="Calibri" panose="020F0502020204030204" pitchFamily="34" charset="0"/>
+              </a:rPr>
+              <a:t>Stärkung des Managements natürlicher Ressourcen und Freisetzung privater Investitionen im grünen Sektor, einschließlich Ökotourismus, Fischerei und Forstwirtschaft</a:t>
+            </a:r>
+          </a:p>
+          <a:p>
             <a:r>
               <a:rPr lang="en-US" sz="1600" b="1" dirty="0">
                 <a:solidFill>
@@ -39779,7 +36913,8 @@
               </a:rPr>
               <a:t/>
             </a:r>
-            <a:br/>
+          </a:p>
+          <a:p>
             <a:r>
               <a:rPr lang="en-US" sz="1600" b="1" dirty="0">
                 <a:solidFill>
@@ -39790,9 +36925,55 @@
                 <a:latin typeface="+mn-lt"/>
                 <a:cs typeface="Calibri" panose="020F0502020204030204" pitchFamily="34" charset="0"/>
               </a:rPr>
-              <a:t>Während das bestehende Portfolio weiterhin Infrastrukturinvestitionen in ländlichen Gebieten finanziert, werden neue Maßnahmen auf Infrastrukturinvestitionen setzen, die Wachstum unterstützen können, unter anderem in den Bereichen Digitalwirtschaft und Straßen. </a:t>
+              <a:t>Ziel 5: Förderung des Produktivitätswachstums in ausgewählten arbeitsintensiven Branchen. Wie? Dienstleistungen, KMU, grüne und blaue Wirtschaft; sektoraler und territorialer Fokus; Maximierung der Folgewirkungen von Großprojekten, unter anderem rund um Verkehrskorridore, und Informalität (politische Erprobung und Wirkungsbewertung).</a:t>
             </a:r>
-            <a:br/>
+          </a:p>
+          <a:p>
+            <a:r>
+              <a:rPr lang="en-US" sz="1600" b="1" dirty="0">
+                <a:solidFill>
+                  <a:schemeClr val="accent1">
+                    <a:lumMod val="75000"/>
+                  </a:schemeClr>
+                </a:solidFill>
+                <a:latin typeface="+mn-lt"/>
+                <a:cs typeface="Calibri" panose="020F0502020204030204" pitchFamily="34" charset="0"/>
+              </a:rPr>
+              <a:t>
+</a:t>
+            </a:r>
+          </a:p>
+          <a:p>
+            <a:r>
+              <a:rPr lang="en-US" sz="1600" b="1" dirty="0">
+                <a:solidFill>
+                  <a:schemeClr val="accent1">
+                    <a:lumMod val="75000"/>
+                  </a:schemeClr>
+                </a:solidFill>
+                <a:latin typeface="+mn-lt"/>
+                <a:cs typeface="Calibri" panose="020F0502020204030204" pitchFamily="34" charset="0"/>
+              </a:rPr>
+              <a:t>Ziel 6: Ausweitung erschwinglicher, zuverlässiger und klimaresilienter Dienste, um den Zugang der Armen zu verbessern sowie eine nachhaltige Urbanisierung und wirtschaftliche Agglomeration zu fördern. 
+</a:t>
+            </a:r>
+          </a:p>
+          <a:p>
+            <a:r>
+              <a:rPr lang="en-US" sz="1600" b="1" dirty="0">
+                <a:solidFill>
+                  <a:schemeClr val="accent1">
+                    <a:lumMod val="75000"/>
+                  </a:schemeClr>
+                </a:solidFill>
+                <a:latin typeface="+mn-lt"/>
+                <a:cs typeface="Calibri" panose="020F0502020204030204" pitchFamily="34" charset="0"/>
+              </a:rPr>
+              <a:t>Während das bestehende Portfolio weiterhin Infrastrukturinvestitionen in ländlichen Gebieten finanziert, werden neue Aktivitäten Infrastrukturinvestitionen betonen, die das Wachstum unterstützen können, unter anderem in den Bereichen digitale Wirtschaft und Straßen. 
+</a:t>
+            </a:r>
+          </a:p>
+          <a:p>
             <a:r>
               <a:rPr lang="en-US" sz="1600" b="1" dirty="0">
                 <a:solidFill>
@@ -39805,7 +36986,8 @@
               </a:rPr>
               <a:t/>
             </a:r>
-            <a:br/>
+          </a:p>
+          <a:p>
             <a:r>
               <a:rPr lang="en-US" sz="1600" b="1" dirty="0">
                 <a:solidFill>
@@ -39816,123 +36998,8 @@
                 <a:latin typeface="+mn-lt"/>
                 <a:cs typeface="Calibri" panose="020F0502020204030204" pitchFamily="34" charset="0"/>
               </a:rPr>
-              <a:t/>
+              <a:t>Der nächste CPF wird der Fähigkeit der Regierung Vorrang einräumen, den Urbanisierungsprozess so zu steuern, dass eine Land-Stadt-Migration ermöglicht wird. Trotz einiger positiver Erfolge im vorherigen CPF-Zyklus beurteilte der SCD den Prozess des Urbanisierungsmanagements als stagnierend. </a:t>
             </a:r>
-            <a:br/>
-            <a:r>
-              <a:rPr lang="en-US" sz="1600" b="1" dirty="0">
-                <a:solidFill>
-                  <a:schemeClr val="accent1">
-                    <a:lumMod val="75000"/>
-                  </a:schemeClr>
-                </a:solidFill>
-                <a:latin typeface="+mn-lt"/>
-                <a:cs typeface="Calibri" panose="020F0502020204030204" pitchFamily="34" charset="0"/>
-              </a:rPr>
-              <a:t/>
-            </a:r>
-            <a:br/>
-            <a:r>
-              <a:rPr lang="en-US" sz="1600" b="1" dirty="0">
-                <a:solidFill>
-                  <a:schemeClr val="accent1">
-                    <a:lumMod val="75000"/>
-                  </a:schemeClr>
-                </a:solidFill>
-                <a:latin typeface="+mn-lt"/>
-                <a:cs typeface="Calibri" panose="020F0502020204030204" pitchFamily="34" charset="0"/>
-              </a:rPr>
-              <a:t/>
-            </a:r>
-            <a:br/>
-            <a:r>
-              <a:rPr lang="en-US" sz="1600" b="1" dirty="0">
-                <a:solidFill>
-                  <a:schemeClr val="accent1">
-                    <a:lumMod val="75000"/>
-                  </a:schemeClr>
-                </a:solidFill>
-                <a:latin typeface="+mn-lt"/>
-                <a:cs typeface="Calibri" panose="020F0502020204030204" pitchFamily="34" charset="0"/>
-              </a:rPr>
-              <a:t/>
-            </a:r>
-            <a:r>
-              <a:rPr lang="en-US" sz="1600" dirty="0">
-                <a:solidFill>
-                  <a:srgbClr val="202124"/>
-                </a:solidFill>
-                <a:latin typeface="+mn-lt"/>
-                <a:cs typeface="Calibri" panose="020F0502020204030204" pitchFamily="34" charset="0"/>
-              </a:rPr>
-              <a:t>While the existing portfolio continues to finance infrastructure investments in rural areas, new activities will emphasize infrastructure investments that can support growth, including in the areas of the digital economy and roads. 
-</a:t>
-            </a:r>
-          </a:p>
-          <a:p>
-            <a:pPr>
-              <a:lnSpc>
-                <a:spcPct val="100000"/>
-              </a:lnSpc>
-              <a:spcBef>
-                <a:spcPts val="0"/>
-              </a:spcBef>
-              <a:tabLst>
-                <a:tab pos="581660" algn="l"/>
-                <a:tab pos="1163320" algn="l"/>
-                <a:tab pos="1744980" algn="l"/>
-                <a:tab pos="2326640" algn="l"/>
-                <a:tab pos="2908300" algn="l"/>
-                <a:tab pos="3489960" algn="l"/>
-                <a:tab pos="4071620" algn="l"/>
-                <a:tab pos="4653280" algn="l"/>
-                <a:tab pos="5234940" algn="l"/>
-                <a:tab pos="5816600" algn="l"/>
-                <a:tab pos="6398260" algn="l"/>
-                <a:tab pos="6979920" algn="l"/>
-                <a:tab pos="7561580" algn="l"/>
-                <a:tab pos="8143240" algn="l"/>
-                <a:tab pos="8724900" algn="l"/>
-                <a:tab pos="9306560" algn="l"/>
-              </a:tabLst>
-            </a:pPr>
-            <a:r>
-              <a:rPr lang="en-US" sz="1600" dirty="0">
-                <a:solidFill>
-                  <a:srgbClr val="202124"/>
-                </a:solidFill>
-                <a:latin typeface="+mn-lt"/>
-                <a:cs typeface="Calibri" panose="020F0502020204030204" pitchFamily="34" charset="0"/>
-              </a:rPr>
-              <a:t>Der nächste CPF wird der Fähigkeit der Regierung Vorrang einräumen, den Urbanisierungsprozess so zu steuern, dass gleichzeitig Land-Stadt-Migration ermöglicht wird. Trotz einiger positiver Ergebnisse im vorigen </a:t>
-            </a:r>
-            <a:r>
-              <a:rPr lang="en-US" sz="1600" dirty="0" err="1">
-                <a:solidFill>
-                  <a:srgbClr val="202124"/>
-                </a:solidFill>
-                <a:latin typeface="+mn-lt"/>
-                <a:cs typeface="Calibri" panose="020F0502020204030204" pitchFamily="34" charset="0"/>
-              </a:rPr>
-              <a:t>CPF</a:t>
-            </a:r>
-            <a:r>
-              <a:rPr lang="en-US" sz="1600" dirty="0">
-                <a:solidFill>
-                  <a:srgbClr val="202124"/>
-                </a:solidFill>
-                <a:latin typeface="+mn-lt"/>
-                <a:cs typeface="Calibri" panose="020F0502020204030204" pitchFamily="34" charset="0"/>
-              </a:rPr>
-              <a:t>-Zyklus hat die SCD bewertet, dass der Prozess der Urbanisierungssteuerung stagniert. </a:t>
-            </a:r>
-            <a:endParaRPr lang="pt-BR" sz="1600" dirty="0">
-              <a:solidFill>
-                <a:srgbClr val="202124"/>
-              </a:solidFill>
-              <a:latin typeface="+mn-lt"/>
-              <a:cs typeface="Calibri" panose="020F0502020204030204" pitchFamily="34" charset="0"/>
-            </a:endParaRPr>
           </a:p>
         </p:txBody>
       </p:sp>
@@ -39959,9 +37026,8 @@
           <a:p>
             <a:r>
               <a:rPr lang="en-US"/>
-              <a:t>CPF 2023-2027. Öffentliche Version. Maputo, Mai 2022.</a:t>
+              <a:t>CPF 2023-2027. Öffentliche Fassung. Maputo, Mai 2022.</a:t>
             </a:r>
-            <a:endParaRPr lang="en-US" dirty="0"/>
           </a:p>
         </p:txBody>
       </p:sp>
@@ -40076,15 +37142,10 @@
           <a:bodyPr/>
           <a:lstStyle/>
           <a:p>
-            <a:pPr algn="ctr"/>
             <a:r>
               <a:rPr lang="en-US" dirty="0"/>
-              <a:t>HLO 3: Verbesserung des Humankapitals und Stärkung der Stellung der Frau </a:t>
+              <a:t>HLO 3: Verbesserung des Humankapitals und Stärkung der Frauen </a:t>
             </a:r>
-            <a:br>
-              <a:rPr lang="pt-BR" dirty="0"/>
-            </a:br>
-            <a:endParaRPr lang="pt-BR" dirty="0"/>
           </a:p>
         </p:txBody>
       </p:sp>
@@ -40116,7 +37177,6 @@
           </a:bodyPr>
           <a:lstStyle/>
           <a:p>
-            <a:pPr algn="just"/>
             <a:r>
               <a:rPr lang="en-US" sz="1600" b="1" dirty="0">
                 <a:solidFill>
@@ -40127,18 +37187,10 @@
                 <a:latin typeface="+mn-lt"/>
                 <a:cs typeface="Calibri" panose="020F0502020204030204" pitchFamily="34" charset="0"/>
               </a:rPr>
-              <a:t>Ziel 7: Verbesserung der wichtigsten Ergebnisse in Bildung und Gesundheit. </a:t>
+              <a:t>Ziel 7: Verbesserung der wichtigsten Ergebnisse in Bildung und Gesundheit. Förderung fiskalisch nachhaltiger Investitionen in Humankapital, mit Schwerpunkt auf der Erhöhung des Kosten-Nutzen-Verhältnisses der öffentlichen Ausgaben zur Verbesserung der wichtigsten Ergebnisse in Gesundheit und Bildung. Ein begrenzter Dezentralisierungsprozess beeinträchtigt die Wirksamkeit der Erbringung von Gesundheits- und Bildungsdiensten.</a:t>
             </a:r>
-            <a:r>
-              <a:rPr lang="en-US" sz="1600" dirty="0">
-                <a:latin typeface="+mn-lt"/>
-                <a:cs typeface="Calibri" panose="020F0502020204030204" pitchFamily="34" charset="0"/>
-              </a:rPr>
-              <a:t>Förderung fiskalisch nachhaltiger Investitionen in Humankapital, mit Schwerpunkt auf der Verbesserung des Kosten-Nutzen-Verhältnisses öffentlicher Ausgaben zur Verbesserung der wichtigsten Gesundheits- und Bildungsergebnisse. Ein begrenzter Dezentralisierungsprozess beeinträchtigt die Wirksamkeit der Bereitstellung von Gesundheits- und Bildungsdienstleistungen.</a:t>
-            </a:r>
-          </a:p>
-          <a:p>
-            <a:pPr algn="just"/>
+          </a:p>
+          <a:p>
             <a:r>
               <a:rPr lang="en-US" sz="1600" b="1" dirty="0">
                 <a:solidFill>
@@ -40149,9 +37201,11 @@
                 <a:latin typeface="+mn-lt"/>
                 <a:cs typeface="Calibri" panose="020F0502020204030204" pitchFamily="34" charset="0"/>
               </a:rPr>
-              <a:t>Ziel 8: Steigerung der Ausgabeneffizienz und effektiven Abdeckung integrierter Sozialdienste. </a:t>
+              <a:t>Ziel 8: Steigerung der Ausgabeneffizienz und der wirksamen Abdeckung integrierter Sozialdienste. 
+</a:t>
             </a:r>
-            <a:br/>
+          </a:p>
+          <a:p>
             <a:r>
               <a:rPr lang="en-US" sz="1600" b="1" dirty="0">
                 <a:solidFill>
@@ -40162,9 +37216,11 @@
                 <a:latin typeface="+mn-lt"/>
                 <a:cs typeface="Calibri" panose="020F0502020204030204" pitchFamily="34" charset="0"/>
               </a:rPr>
-              <a:t>Die nächste Sozialschutzkommission wird den Fokus der Sozialen Sicherungsprogramme stärken, um das Kosten-Nutzen-Verhältnis zu verbessern, einschließlich der Förderung der Konsolidierung der Sozialpolitik, der Sicherstellung von Grundversorgungsmechanismen sowie von Beschäftigungsverbindungen und Arbeitskräftebeteiligung und der Unterstützung einer nationalen schocksensitiven Sozialschutzstrategie. </a:t>
+              <a:t>Die nächste Sozialschutzkommission wird den Fokus der Programme des sozialen Schutzes verstärken, um das Kosten-Nutzen-Verhältnis zu verbessern, unter anderem durch die Förderung der Konsolidierung der Sozialpolitik, die Sicherstellung von Mechanismen und Verbindungen zu Beschäftigung und Teilhabe am Arbeitsmarkt sowie die Unterstützung einer nationalen, schockempfindlichen Strategie für den sozialen Schutz. 
+</a:t>
             </a:r>
-            <a:br/>
+          </a:p>
+          <a:p>
             <a:r>
               <a:rPr lang="en-US" sz="1600" b="1" dirty="0">
                 <a:solidFill>
@@ -40175,9 +37231,11 @@
                 <a:latin typeface="+mn-lt"/>
                 <a:cs typeface="Calibri" panose="020F0502020204030204" pitchFamily="34" charset="0"/>
               </a:rPr>
-              <a:t/>
+              <a:t>Das Hauptziel besteht darin, eine fiskalisch nachhaltige Struktur für die Integration der Sozialpolitik zur Bildung von Humankapital und zur Verringerung extremer Armut zu schaffen und zugleich Frauen zu stärken und die Resilienz gegenüber Schocks zu gewährleisten.
+</a:t>
             </a:r>
-            <a:br/>
+          </a:p>
+          <a:p>
             <a:r>
               <a:rPr lang="en-US" sz="1600" b="1" dirty="0">
                 <a:solidFill>
@@ -40188,9 +37246,11 @@
                 <a:latin typeface="+mn-lt"/>
                 <a:cs typeface="Calibri" panose="020F0502020204030204" pitchFamily="34" charset="0"/>
               </a:rPr>
-              <a:t>Mosambik hat die vierthöchste Geburtenrate bei Jugendlichen und die zehnthohe Rate von Kinderehen weltweit, und diese Raten steigen statt zu sinken, was zu geringen Qualifikationen und geringer Produktivität von Frauen auf dem </a:t>
+              <a:t>Ziel 9: Verbesserung des Zugangs zu Diensten zur Vermeidung von Teenagerschwangerschaften und zur Förderung der wirtschaftlichen Teilhabe von Frauen.
+</a:t>
             </a:r>
-            <a:br/>
+          </a:p>
+          <a:p>
             <a:r>
               <a:rPr lang="en-US" sz="1600" b="1" dirty="0">
                 <a:solidFill>
@@ -40201,126 +37261,8 @@
                 <a:latin typeface="+mn-lt"/>
                 <a:cs typeface="Calibri" panose="020F0502020204030204" pitchFamily="34" charset="0"/>
               </a:rPr>
-              <a:t>Arbeits</a:t>
+              <a:t>Mosambik weist die vierthöchste Fruchtbarkeitsrate bei Jugendlichen und die zehnthöchste Rate an Kinderheirat weltweit auf, und diese Raten steigen, statt zu sinken, was zu den geringen Qualifikationen und der niedrigen Produktivität von Frauen in </a:t>
             </a:r>
-            <a:br/>
-            <a:r>
-              <a:rPr lang="en-US" sz="1600" b="1" dirty="0">
-                <a:solidFill>
-                  <a:schemeClr val="accent1">
-                    <a:lumMod val="75000"/>
-                  </a:schemeClr>
-                </a:solidFill>
-                <a:latin typeface="+mn-lt"/>
-                <a:cs typeface="Calibri" panose="020F0502020204030204" pitchFamily="34" charset="0"/>
-              </a:rPr>
-              <a:t>markt beiträgt.</a:t>
-            </a:r>
-            <a:br/>
-            <a:r>
-              <a:rPr lang="en-US" sz="1600" b="1" dirty="0">
-                <a:solidFill>
-                  <a:schemeClr val="accent1">
-                    <a:lumMod val="75000"/>
-                  </a:schemeClr>
-                </a:solidFill>
-                <a:latin typeface="+mn-lt"/>
-                <a:cs typeface="Calibri" panose="020F0502020204030204" pitchFamily="34" charset="0"/>
-              </a:rPr>
-              <a:t/>
-            </a:r>
-            <a:br/>
-            <a:r>
-              <a:rPr lang="en-US" sz="1600" b="1" dirty="0">
-                <a:solidFill>
-                  <a:schemeClr val="accent1">
-                    <a:lumMod val="75000"/>
-                  </a:schemeClr>
-                </a:solidFill>
-                <a:latin typeface="+mn-lt"/>
-                <a:cs typeface="Calibri" panose="020F0502020204030204" pitchFamily="34" charset="0"/>
-              </a:rPr>
-              <a:t>Der CPF wird sich auf Fragen der Kinderehe, Teenagerschwangerschaft und die Deckung des ungedeckten Bedarfs an Familienplanung, den Gymnasialbesuch von Mädchen und den Übergang in den Arbeitsmarkt konzentrieren – unter anderem. </a:t>
-            </a:r>
-            <a:br/>
-            <a:r>
-              <a:rPr lang="en-US" sz="1600" b="1" dirty="0">
-                <a:solidFill>
-                  <a:schemeClr val="accent1">
-                    <a:lumMod val="75000"/>
-                  </a:schemeClr>
-                </a:solidFill>
-                <a:latin typeface="+mn-lt"/>
-                <a:cs typeface="Calibri" panose="020F0502020204030204" pitchFamily="34" charset="0"/>
-              </a:rPr>
-              <a:t/>
-            </a:r>
-            <a:r>
-              <a:rPr lang="en-US" sz="1600" dirty="0">
-                <a:latin typeface="+mn-lt"/>
-                <a:cs typeface="Calibri" panose="020F0502020204030204" pitchFamily="34" charset="0"/>
-              </a:rPr>
-              <a:t>The next Social Security Commission will increase the focus of Social Protection programs to improve cost-benefit ratio, including encouraging the consolidation of social policies, ensuring undergraduate mechanisms and employment ties and participation in the workforce, and supporting a national shock-sensitive social protection strategy. 
-The main objective is to create a fiscally sustainable structure for the integration of social policies for the accumulation of human capital and reduction of extreme poverty, while empowering women and ensuring resilience to shocks</a:t>
-            </a:r>
-            <a:r>
-              <a:rPr lang="en-US" sz="1600" b="1" dirty="0">
-                <a:solidFill>
-                  <a:schemeClr val="accent1">
-                    <a:lumMod val="75000"/>
-                  </a:schemeClr>
-                </a:solidFill>
-                <a:latin typeface="+mn-lt"/>
-                <a:cs typeface="Calibri" panose="020F0502020204030204" pitchFamily="34" charset="0"/>
-              </a:rPr>
-              <a:t>
-Objective 9: To improve access to services to prevent teenage pregnancy and promote women's economic participation.
-</a:t>
-            </a:r>
-            <a:r>
-              <a:rPr lang="en-US" sz="1600" dirty="0">
-                <a:latin typeface="+mn-lt"/>
-                <a:cs typeface="Calibri" panose="020F0502020204030204" pitchFamily="34" charset="0"/>
-              </a:rPr>
-              <a:t>Mozambique has the fourth highest fertility rate in adolescence and the tenth highest rate of child marriage in the world and these rates are increasing and not decreasing, contributing to women's low skills and low productivity in the </a:t>
-            </a:r>
-            <a:r>
-              <a:rPr lang="en-US" sz="1600" dirty="0" err="1">
-                <a:latin typeface="+mn-lt"/>
-                <a:cs typeface="Calibri" panose="020F0502020204030204" pitchFamily="34" charset="0"/>
-              </a:rPr>
-              <a:t>labour</a:t>
-            </a:r>
-            <a:r>
-              <a:rPr lang="en-US" sz="1600" dirty="0">
-                <a:latin typeface="+mn-lt"/>
-                <a:cs typeface="Calibri" panose="020F0502020204030204" pitchFamily="34" charset="0"/>
-              </a:rPr>
-              <a:t> market.</a:t>
-            </a:r>
-            <a:r>
-              <a:rPr lang="en-US" sz="1600" b="1" dirty="0">
-                <a:solidFill>
-                  <a:schemeClr val="accent1">
-                    <a:lumMod val="75000"/>
-                  </a:schemeClr>
-                </a:solidFill>
-                <a:latin typeface="+mn-lt"/>
-                <a:cs typeface="Calibri" panose="020F0502020204030204" pitchFamily="34" charset="0"/>
-              </a:rPr>
-              <a:t>
-</a:t>
-            </a:r>
-            <a:r>
-              <a:rPr lang="en-US" sz="1600" dirty="0">
-                <a:latin typeface="+mn-lt"/>
-                <a:cs typeface="Calibri" panose="020F0502020204030204" pitchFamily="34" charset="0"/>
-              </a:rPr>
-              <a:t>The CPF will focus on issues of child marriage, teenage pregnancy and meeting unmet needs of family planning, girls' high school and the transition from the labor market – among others. </a:t>
-            </a:r>
-            <a:endParaRPr lang="pt-BR" sz="1600" dirty="0">
-              <a:latin typeface="+mn-lt"/>
-            </a:endParaRPr>
           </a:p>
         </p:txBody>
       </p:sp>
@@ -40352,9 +37294,8 @@
           <a:p>
             <a:r>
               <a:rPr lang="en-US"/>
-              <a:t>CPF 2023-2027. Öffentliche Version. Maputo, Mai 2022.</a:t>
+              <a:t>CPF 2023-2027. Öffentliche Fassung. Maputo, Mai 2022.</a:t>
             </a:r>
-            <a:endParaRPr lang="en-US" dirty="0"/>
           </a:p>
         </p:txBody>
       </p:sp>
@@ -40480,28 +37421,6 @@
               </a:rPr>
               <a:t>Vielen Dank!</a:t>
             </a:r>
-            <a:br>
-              <a:rPr lang="pt" sz="3200" b="1" i="0" u="none" strike="noStrike" dirty="0">
-                <a:solidFill>
-                  <a:srgbClr val="203864"/>
-                </a:solidFill>
-                <a:highlight>
-                  <a:srgbClr val="000000">
-                    <a:alpha val="0"/>
-                  </a:srgbClr>
-                </a:highlight>
-                <a:latin typeface="Arial"/>
-              </a:rPr>
-            </a:br>
-            <a:endParaRPr lang="en-US" sz="3600" b="1" dirty="0">
-              <a:solidFill>
-                <a:schemeClr val="accent1">
-                  <a:lumMod val="50000"/>
-                </a:schemeClr>
-              </a:solidFill>
-              <a:latin typeface="Arial" panose="020B0604020202020204" pitchFamily="34" charset="0"/>
-              <a:cs typeface="Arial" panose="020B0604020202020204" pitchFamily="34" charset="0"/>
-            </a:endParaRPr>
           </a:p>
         </p:txBody>
       </p:sp>
@@ -40528,9 +37447,8 @@
           <a:p>
             <a:r>
               <a:rPr lang="en-US"/>
-              <a:t>CPF 2023-2027. Öffentliche Version. Maputo, Mai 2022.</a:t>
+              <a:t>CPF 2023-2027. Öffentliche Fassung. Maputo, Mai 2022.</a:t>
             </a:r>
-            <a:endParaRPr lang="en-US" dirty="0"/>
           </a:p>
         </p:txBody>
       </p:sp>
@@ -40622,29 +37540,17 @@
           </a:bodyPr>
           <a:lstStyle/>
           <a:p>
-            <a:pPr algn="ctr"/>
             <a:r>
               <a:rPr lang="en-US" sz="4000" dirty="0"/>
-              <a:t>Präsentationsstruktur</a:t>
+              <a:t>Aufbau der Präsentation
+</a:t>
             </a:r>
-            <a:br/>
+          </a:p>
+          <a:p>
             <a:r>
               <a:rPr lang="en-US" sz="4000" dirty="0"/>
               <a:t/>
             </a:r>
-            <a:br/>
-            <a:r>
-              <a:rPr lang="en-US" sz="4000" dirty="0"/>
-              <a:t/>
-            </a:r>
-            <a:endParaRPr lang="pt" sz="4000" b="0" i="1" u="none" strike="noStrike" dirty="0">
-              <a:highlight>
-                <a:srgbClr val="000000">
-                  <a:alpha val="0"/>
-                </a:srgbClr>
-              </a:highlight>
-              <a:latin typeface="Arial"/>
-            </a:endParaRPr>
           </a:p>
         </p:txBody>
       </p:sp>
@@ -40676,51 +37582,24 @@
           </a:bodyPr>
           <a:lstStyle/>
           <a:p>
-            <a:pPr marL="1371600" lvl="3" indent="-571500">
-              <a:lnSpc>
-                <a:spcPct val="100000"/>
-              </a:lnSpc>
-              <a:spcBef>
-                <a:spcPts val="1200"/>
-              </a:spcBef>
-              <a:spcAft>
-                <a:spcPts val="1200"/>
-              </a:spcAft>
-              <a:buFont typeface="+mj-lt"/>
-              <a:buAutoNum type="romanUcPeriod"/>
-            </a:pPr>
             <a:r>
               <a:rPr lang="en-US" sz="3200" b="1" dirty="0"/>
-              <a:t>Einschätzung der Weltbankgruppe zu den wichtigsten strategischen Herausforderungen des Landes   </a:t>
+              <a:t>Sicht der Weltbankgruppe auf die wichtigsten strategischen Herausforderungen des Landes   
+</a:t>
             </a:r>
-            <a:br/>
+          </a:p>
+          <a:p>
             <a:r>
               <a:rPr lang="en-US" sz="3200" b="1" dirty="0"/>
-              <a:t>Hauptlehren aus dem vorherigen CPF (2017-2021)</a:t>
+              <a:t>Wichtigste Lehren aus dem vorherigen CPF (2017-2021)
+</a:t>
             </a:r>
-            <a:br/>
+          </a:p>
+          <a:p>
             <a:r>
               <a:rPr lang="en-US" sz="3200" b="1" dirty="0"/>
               <a:t>Erster Vorschlag für den CPF 2023-2027</a:t>
             </a:r>
-            <a:br/>
-            <a:r>
-              <a:rPr lang="en-US" sz="3200" b="1" dirty="0"/>
-              <a:t/>
-            </a:r>
-            <a:br/>
-            <a:r>
-              <a:rPr lang="en-US" sz="3200" b="1" dirty="0"/>
-              <a:t/>
-            </a:r>
-            <a:endParaRPr lang="pt" sz="3200" b="1" i="0" u="none" strike="noStrike" dirty="0">
-              <a:highlight>
-                <a:srgbClr val="000000">
-                  <a:alpha val="0"/>
-                </a:srgbClr>
-              </a:highlight>
-              <a:latin typeface="Arial"/>
-            </a:endParaRPr>
           </a:p>
         </p:txBody>
       </p:sp>
@@ -40747,9 +37626,8 @@
           <a:p>
             <a:r>
               <a:rPr lang="en-US"/>
-              <a:t>CPF 2023-2027. Öffentliche Version. Maputo, Mai 2022.</a:t>
+              <a:t>CPF 2023-2027. Öffentliche Fassung. Maputo, Mai 2022.</a:t>
             </a:r>
-            <a:endParaRPr lang="en-US" dirty="0"/>
           </a:p>
         </p:txBody>
       </p:sp>
@@ -40871,29 +37749,17 @@
           </a:bodyPr>
           <a:lstStyle/>
           <a:p>
-            <a:pPr algn="ctr"/>
             <a:r>
               <a:rPr lang="en-US" sz="4000" dirty="0"/>
-              <a:t>Präsentationsstruktur</a:t>
+              <a:t>Aufbau der Präsentation
+</a:t>
             </a:r>
-            <a:br/>
+          </a:p>
+          <a:p>
             <a:r>
               <a:rPr lang="en-US" sz="4000" dirty="0"/>
               <a:t/>
             </a:r>
-            <a:br/>
-            <a:r>
-              <a:rPr lang="en-US" sz="4000" dirty="0"/>
-              <a:t/>
-            </a:r>
-            <a:endParaRPr lang="pt" sz="4000" b="0" i="1" u="none" strike="noStrike" dirty="0">
-              <a:highlight>
-                <a:srgbClr val="000000">
-                  <a:alpha val="0"/>
-                </a:srgbClr>
-              </a:highlight>
-              <a:latin typeface="Arial"/>
-            </a:endParaRPr>
           </a:p>
         </p:txBody>
       </p:sp>
@@ -40925,67 +37791,24 @@
           </a:bodyPr>
           <a:lstStyle/>
           <a:p>
-            <a:pPr marL="1371600" lvl="3" indent="-571500">
-              <a:lnSpc>
-                <a:spcPct val="100000"/>
-              </a:lnSpc>
-              <a:spcBef>
-                <a:spcPts val="1200"/>
-              </a:spcBef>
-              <a:spcAft>
-                <a:spcPts val="1200"/>
-              </a:spcAft>
-              <a:buFont typeface="+mj-lt"/>
-              <a:buAutoNum type="romanUcPeriod"/>
-            </a:pPr>
             <a:r>
               <a:rPr lang="en-US" sz="3200" b="1" dirty="0"/>
-              <a:t>Sichtweise der Weltbankgruppe auf die wichtigsten strategischen Herausforderungen des Landes   </a:t>
+              <a:t>Sicht der Weltbankgruppe auf die wichtigsten strategischen Herausforderungen des Landes   
+</a:t>
             </a:r>
-            <a:br/>
+          </a:p>
+          <a:p>
             <a:r>
               <a:rPr lang="en-US" sz="3200" b="1" dirty="0"/>
-              <a:t>Wichtigste Lehren aus dem vorigen CPF (2017-2021) </a:t>
+              <a:t>Wichtigste Lehren aus dem vorherigen CPF (2017-2021) 
+</a:t>
             </a:r>
-            <a:br/>
+          </a:p>
+          <a:p>
             <a:r>
               <a:rPr lang="en-US" sz="3200" b="1" dirty="0"/>
               <a:t>Erster Vorschlag für den CPF 2023-2027</a:t>
             </a:r>
-            <a:br/>
-            <a:r>
-              <a:rPr lang="en-US" sz="3200" b="1" dirty="0"/>
-              <a:t/>
-            </a:r>
-            <a:br/>
-            <a:r>
-              <a:rPr lang="en-US" sz="3200" b="1" dirty="0"/>
-              <a:t/>
-            </a:r>
-            <a:r>
-              <a:rPr lang="en-US" sz="3200" b="1" dirty="0">
-                <a:solidFill>
-                  <a:schemeClr val="bg2">
-                    <a:lumMod val="75000"/>
-                  </a:schemeClr>
-                </a:solidFill>
-              </a:rPr>
-              <a:t>Main lessons from the previous CPF (2017-2021) 
-Initial Proposal for CPF 2023-2027</a:t>
-            </a:r>
-            <a:endParaRPr lang="pt" sz="3200" b="1" i="0" u="none" strike="noStrike" dirty="0">
-              <a:solidFill>
-                <a:schemeClr val="bg2">
-                  <a:lumMod val="75000"/>
-                </a:schemeClr>
-              </a:solidFill>
-              <a:highlight>
-                <a:srgbClr val="000000">
-                  <a:alpha val="0"/>
-                </a:srgbClr>
-              </a:highlight>
-              <a:latin typeface="Arial"/>
-            </a:endParaRPr>
           </a:p>
         </p:txBody>
       </p:sp>
@@ -41012,9 +37835,8 @@
           <a:p>
             <a:r>
               <a:rPr lang="en-US"/>
-              <a:t>CPF 2023-2027. Öffentliche Version. Maputo, Mai 2022.</a:t>
+              <a:t>CPF 2023-2027. Öffentliche Fassung. Maputo, Mai 2022.</a:t>
             </a:r>
-            <a:endParaRPr lang="en-US" dirty="0"/>
           </a:p>
         </p:txBody>
       </p:sp>
@@ -41136,17 +37958,6 @@
           </a:bodyPr>
           <a:lstStyle/>
           <a:p>
-            <a:pPr rtl="0"/>
-            <a:br>
-              <a:rPr lang="pt" sz="2400" b="1" i="0" u="none" strike="noStrike" dirty="0">
-                <a:highlight>
-                  <a:srgbClr val="000000">
-                    <a:alpha val="0"/>
-                  </a:srgbClr>
-                </a:highlight>
-                <a:latin typeface="Arial"/>
-              </a:rPr>
-            </a:br>
             <a:r>
               <a:rPr lang="pt" sz="2400" b="1" i="0" u="none" strike="noStrike" dirty="0">
                 <a:highlight>
@@ -41156,20 +37967,8 @@
                 </a:highlight>
                 <a:latin typeface="Arial"/>
               </a:rPr>
-              <a:t>Länderkontext: </a:t>
+              <a:t>Länderkontext: Entwicklungsherausforderungen und -chancen</a:t>
             </a:r>
-            <a:r>
-              <a:rPr lang="pt" sz="2400" b="0" i="1" u="none" strike="noStrike" dirty="0">
-                <a:highlight>
-                  <a:srgbClr val="000000">
-                    <a:alpha val="0"/>
-                  </a:srgbClr>
-                </a:highlight>
-                <a:latin typeface="Arial"/>
-              </a:rPr>
-              <a:t>Entwicklungsherausforderungen und -chancen</a:t>
-            </a:r>
-            <a:endParaRPr lang="en-US" sz="2400" b="0" i="1" dirty="0"/>
           </a:p>
         </p:txBody>
       </p:sp>
@@ -41201,44 +38000,6 @@
           </a:bodyPr>
           <a:lstStyle/>
           <a:p>
-            <a:pPr marL="342900" indent="-342900" algn="just" rtl="0">
-              <a:lnSpc>
-                <a:spcPct val="100000"/>
-              </a:lnSpc>
-              <a:spcBef>
-                <a:spcPct val="0"/>
-              </a:spcBef>
-              <a:spcAft>
-                <a:spcPts val="600"/>
-              </a:spcAft>
-              <a:buFont typeface="+mj-lt"/>
-              <a:buAutoNum type="arabicPeriod"/>
-            </a:pPr>
-            <a:endParaRPr lang="en-US" sz="1600" b="1" i="0" u="none" strike="noStrike" dirty="0">
-              <a:highlight>
-                <a:srgbClr val="000000">
-                  <a:alpha val="0"/>
-                </a:srgbClr>
-              </a:highlight>
-              <a:latin typeface="Arial"/>
-              <a:ea typeface="Calibri"/>
-              <a:cs typeface="Times New Roman"/>
-            </a:endParaRPr>
-          </a:p>
-          <a:p>
-            <a:pPr marL="342900" indent="-342900" algn="just" rtl="0">
-              <a:lnSpc>
-                <a:spcPct val="100000"/>
-              </a:lnSpc>
-              <a:spcBef>
-                <a:spcPct val="0"/>
-              </a:spcBef>
-              <a:spcAft>
-                <a:spcPts val="600"/>
-              </a:spcAft>
-              <a:buFont typeface="+mj-lt"/>
-              <a:buAutoNum type="arabicPeriod"/>
-            </a:pPr>
             <a:r>
               <a:rPr lang="en-US" sz="1600" b="1" i="0" u="none" strike="noStrike" dirty="0">
                 <a:highlight>
@@ -41250,21 +38011,10 @@
                 <a:ea typeface="Calibri"/>
                 <a:cs typeface="Times New Roman"/>
               </a:rPr>
-              <a:t>Entwicklungskontext</a:t>
+              <a:t/>
             </a:r>
-            <a:r>
-              <a:rPr lang="en-US" sz="1600" b="0" i="0" u="none" strike="noStrike" dirty="0">
-                <a:highlight>
-                  <a:srgbClr val="000000">
-                    <a:alpha val="0"/>
-                  </a:srgbClr>
-                </a:highlight>
-                <a:latin typeface="Arial"/>
-                <a:ea typeface="Calibri"/>
-                <a:cs typeface="Times New Roman"/>
-              </a:rPr>
-              <a:t>. Mosambik ist trotz seiner umfangreichen natürlichen Ressourcen und günstigen Lage nach wie vor ein Niedrigeinkommensland (LIC). </a:t>
-            </a:r>
+          </a:p>
+          <a:p>
             <a:r>
               <a:rPr lang="en-US" sz="1600" b="1" i="0" u="none" strike="noStrike" dirty="0">
                 <a:highlight>
@@ -41276,61 +38026,10 @@
                 <a:ea typeface="Calibri"/>
                 <a:cs typeface="Times New Roman"/>
               </a:rPr>
-              <a:t>Der Großteil der Bevölkerung lebt in extremer Armut, die Ungleichheit ist hoch</a:t>
+              <a:t>Entwicklungskontext. Mosambik ist trotz seiner umfangreichen natürlichen Ressourcen und seiner günstigen Lage nach wie vor ein Land mit niedrigem Einkommen (LIC). Der Großteil der Bevölkerung lebt in extremer Armut, die Ungleichheit ist hoch, der Index des Humankapitals gehört zu den niedrigsten der Welt und die Fruchtbarkeitsraten sind vergleichsweise hoch. </a:t>
             </a:r>
-            <a:r>
-              <a:rPr lang="en-US" sz="1600" b="0" i="0" u="none" strike="noStrike" dirty="0">
-                <a:highlight>
-                  <a:srgbClr val="000000">
-                    <a:alpha val="0"/>
-                  </a:srgbClr>
-                </a:highlight>
-                <a:latin typeface="Arial"/>
-                <a:ea typeface="Calibri"/>
-                <a:cs typeface="Times New Roman"/>
-              </a:rPr>
-              <a:t>, der Index des Humankapitals gehört zu den niedrigsten weltweit und die Geburtenraten sind vergleichsweise hoch. </a:t>
-            </a:r>
-          </a:p>
-          <a:p>
-            <a:pPr lvl="3" algn="just">
-              <a:lnSpc>
-                <a:spcPct val="100000"/>
-              </a:lnSpc>
-              <a:spcBef>
-                <a:spcPct val="0"/>
-              </a:spcBef>
-              <a:spcAft>
-                <a:spcPts val="1200"/>
-              </a:spcAft>
-            </a:pPr>
-            <a:r>
-              <a:rPr lang="en-US" sz="1600" dirty="0">
-                <a:highlight>
-                  <a:srgbClr val="000000">
-                    <a:alpha val="0"/>
-                  </a:srgbClr>
-                </a:highlight>
-                <a:latin typeface="Arial"/>
-                <a:cs typeface="Times New Roman"/>
-              </a:rPr>
-              <a:t>Diese Entwicklungsherausforderungen werden durch strukturelle Fragilität und eine hohe Exposition gegenüber Klima- und Gesundheitsrisiken verschärft – darunter zuletzt zwei schwere Zyklone im Jahr 2019 und die Covid-19-Pandemie.</a:t>
-            </a:r>
-          </a:p>
-          <a:p>
-            <a:pPr marL="342900" indent="-342900" algn="just" rtl="0">
-              <a:lnSpc>
-                <a:spcPct val="100000"/>
-              </a:lnSpc>
-              <a:spcBef>
-                <a:spcPct val="0"/>
-              </a:spcBef>
-              <a:spcAft>
-                <a:spcPts val="600"/>
-              </a:spcAft>
-              <a:buFont typeface="+mj-lt"/>
-              <a:buAutoNum type="arabicPeriod"/>
-            </a:pPr>
+          </a:p>
+          <a:p>
             <a:r>
               <a:rPr lang="en-US" sz="1600" b="1" i="0" u="none" strike="noStrike" dirty="0">
                 <a:highlight>
@@ -41342,10 +38041,12 @@
                 <a:ea typeface="Calibri"/>
                 <a:cs typeface="Times New Roman"/>
               </a:rPr>
-              <a:t>Strukturelle Fragilität. </a:t>
+              <a:t>Diese Entwicklungsherausforderungen werden durch strukturelle Fragilität und eine hohe Anfälligkeit gegenüber Klima- und Gesundheitsrisiken verschärft – darunter zuletzt zwei schwere Wirbelstürme im Jahr 2019 und die Covid-19-Pandemie.</a:t>
             </a:r>
+          </a:p>
+          <a:p>
             <a:r>
-              <a:rPr lang="en-US" sz="1600" b="0" i="0" u="none" strike="noStrike" dirty="0">
+              <a:rPr lang="en-US" sz="1600" b="1" i="0" u="none" strike="noStrike" dirty="0">
                 <a:highlight>
                   <a:srgbClr val="000000">
                     <a:alpha val="0"/>
@@ -41355,37 +38056,23 @@
                 <a:ea typeface="Calibri"/>
                 <a:cs typeface="Times New Roman"/>
               </a:rPr>
-              <a:t>Mosambiks tief verwurzelte Fragilität geht auf die Schwäche seiner Institutionen zurück, die auf historische und geographische Ursachen zurückzuführen ist und sich in wiederkehrenden Zyklen von Konflikten und Gewalt manifestiert hat. Ungleichheit und Armut verstärken die Fragilität und werden durch sie verstärkt. Der Aufstand in Cabo Delgado ist die jüngste Manifestation dieser Fragilität.</a:t>
+              <a:t>Strukturelle Fragilität. Die tief verwurzelte Fragilität Mosambiks resultiert aus der Schwäche seiner Institutionen, die auf historische und geografische Ursachen zurückgeht und sich in wiederkehrenden Konflikt- und Gewaltzyklen manifestiert hat. Ungleichheit und Armut verstärken die Fragilität und werden zugleich durch sie verstärkt. Der Aufstand in Cabo Delgado ist die jüngste Erscheinungsform dieser Fragilität.</a:t>
             </a:r>
-            <a:endParaRPr lang="pt" sz="1600" b="0" i="0" u="none" strike="noStrike" dirty="0">
-              <a:highlight>
-                <a:srgbClr val="000000">
-                  <a:alpha val="0"/>
-                </a:srgbClr>
-              </a:highlight>
-              <a:latin typeface="Arial"/>
-              <a:ea typeface="Calibri"/>
-              <a:cs typeface="Times New Roman"/>
-            </a:endParaRPr>
-          </a:p>
-          <a:p>
-            <a:pPr marL="0" indent="0" algn="just">
-              <a:lnSpc>
-                <a:spcPct val="100000"/>
-              </a:lnSpc>
-              <a:spcBef>
-                <a:spcPct val="0"/>
-              </a:spcBef>
-              <a:spcAft>
-                <a:spcPts val="600"/>
-              </a:spcAft>
-              <a:buNone/>
-            </a:pPr>
-            <a:endParaRPr lang="en-US" sz="1100" dirty="0">
-              <a:latin typeface="+mn-lt"/>
-              <a:ea typeface="Calibri" panose="020F0502020204030204" pitchFamily="34" charset="0"/>
-              <a:cs typeface="Times New Roman"/>
-            </a:endParaRPr>
+          </a:p>
+          <a:p>
+            <a:r>
+              <a:rPr lang="en-US" sz="1600" b="1" i="0" u="none" strike="noStrike" dirty="0">
+                <a:highlight>
+                  <a:srgbClr val="000000">
+                    <a:alpha val="0"/>
+                  </a:srgbClr>
+                </a:highlight>
+                <a:latin typeface="Arial"/>
+                <a:ea typeface="Calibri"/>
+                <a:cs typeface="Times New Roman"/>
+              </a:rPr>
+              <a:t/>
+            </a:r>
           </a:p>
         </p:txBody>
       </p:sp>
@@ -41579,9 +38266,8 @@
           <a:p>
             <a:r>
               <a:rPr lang="en-US"/>
-              <a:t>CPF 2023-2027. Öffentliche Version. Maputo, Mai 2022.</a:t>
+              <a:t>CPF 2023-2027. Öffentliche Fassung. Maputo, Mai 2022.</a:t>
             </a:r>
-            <a:endParaRPr lang="en-US" dirty="0"/>
           </a:p>
         </p:txBody>
       </p:sp>
@@ -41712,9 +38398,8 @@
                 </a:highlight>
                 <a:latin typeface="Arial"/>
               </a:rPr>
-              <a:t>Länderkontext: Entwicklungsherausforderungen und Chancen</a:t>
+              <a:t>Länderkontext: Entwicklungsherausforderungen und -chancen</a:t>
             </a:r>
-            <a:endParaRPr lang="en-US" sz="2400" dirty="0"/>
           </a:p>
         </p:txBody>
       </p:sp>
@@ -41746,58 +38431,22 @@
           </a:bodyPr>
           <a:lstStyle/>
           <a:p>
-            <a:pPr marL="342900" indent="-342900" algn="just">
-              <a:lnSpc>
-                <a:spcPct val="100000"/>
-              </a:lnSpc>
-              <a:spcBef>
-                <a:spcPts val="600"/>
-              </a:spcBef>
-              <a:spcAft>
-                <a:spcPts val="600"/>
-              </a:spcAft>
-              <a:buFont typeface="+mj-lt"/>
-              <a:buAutoNum type="arabicPeriod" startAt="3"/>
-            </a:pPr>
             <a:r>
               <a:rPr lang="en-US" sz="1500" b="1" dirty="0">
                 <a:latin typeface="Arial"/>
                 <a:cs typeface="Times New Roman"/>
               </a:rPr>
-              <a:t>Sehr begrenzte wirtschaftliche und räumliche Transformation in den letzten Jahrzehnten</a:t>
+              <a:t>Sehr begrenzter wirtschaftlicher und räumlicher Wandel in den vergangenen Jahrzehnten. Bis 2019 arbeiteten noch rund 70,1 % der Erwerbstätigen in der (Subsistenz-)Landwirtschaft. Der räumliche Wandel hat in jüngster Zeit zugenommen, doch rund 60 % der Bevölkerung leben weiterhin in ländlichen Gebieten – ein Hinweis auf einen langsamen Migrationsprozess trotz des erheblichen Einkommensgefälles zwischen Land und Stadt.</a:t>
             </a:r>
+          </a:p>
+          <a:p>
             <a:r>
-              <a:rPr lang="en-US" sz="1500" dirty="0">
+              <a:rPr lang="en-US" sz="1500" b="1" dirty="0">
                 <a:latin typeface="Arial"/>
                 <a:cs typeface="Times New Roman"/>
               </a:rPr>
-              <a:t>. Bis 2019 waren etwa 70,1 % der Erwerbsbevölkerung noch in der Landwirtschaft (Subsistenz) tätig. Die räumliche Transformation hat sich zuletzt beschleunigt, aber rund 60 % der Bevölkerung lebt noch immer in ländlichen Gebieten – was trotz des erheblichen Einkommensgefälles zwischen Stadt und Land auf einen langsamen Migrationsprozess hindeutet.</a:t>
+              <a:t/>
             </a:r>
-            <a:endParaRPr lang="pt-BR" sz="1500" i="0" u="none" strike="noStrike" dirty="0">
-              <a:latin typeface="Arial"/>
-              <a:ea typeface="Calibri"/>
-              <a:cs typeface="Times New Roman"/>
-            </a:endParaRPr>
-          </a:p>
-          <a:p>
-            <a:pPr marL="342900" indent="-342900" algn="just">
-              <a:lnSpc>
-                <a:spcPct val="100000"/>
-              </a:lnSpc>
-              <a:spcBef>
-                <a:spcPts val="600"/>
-              </a:spcBef>
-              <a:spcAft>
-                <a:spcPts val="600"/>
-              </a:spcAft>
-              <a:buFont typeface="+mj-lt"/>
-              <a:buAutoNum type="arabicPeriod" startAt="3"/>
-            </a:pPr>
-            <a:endParaRPr lang="pt-BR" sz="1500" b="1" dirty="0">
-              <a:latin typeface="Arial"/>
-              <a:ea typeface="Calibri"/>
-              <a:cs typeface="Times New Roman"/>
-            </a:endParaRPr>
           </a:p>
         </p:txBody>
       </p:sp>
@@ -42083,19 +38732,6 @@
             </a:lvl9pPr>
           </a:lstStyle>
           <a:p>
-            <a:pPr marL="342900" indent="-342900" algn="just">
-              <a:lnSpc>
-                <a:spcPct val="100000"/>
-              </a:lnSpc>
-              <a:spcBef>
-                <a:spcPts val="600"/>
-              </a:spcBef>
-              <a:spcAft>
-                <a:spcPts val="600"/>
-              </a:spcAft>
-              <a:buFont typeface="+mj-lt"/>
-              <a:buAutoNum type="arabicPeriod" startAt="4"/>
-            </a:pPr>
             <a:r>
               <a:rPr lang="en-US" sz="1500" b="1" dirty="0">
                 <a:highlight>
@@ -42107,22 +38743,8 @@
                 <a:ea typeface="Calibri"/>
                 <a:cs typeface="Times New Roman"/>
               </a:rPr>
-              <a:t>Das Aufkommen des Erdgases bietet eine Chance zur wirtschaftlichen Transformation, aber diese wird nicht von selbst eintreten. </a:t>
+              <a:t>Das Aufkommen von Erdgas eröffnet eine Chance für den wirtschaftlichen Wandel, doch dieser wird nicht automatisch eintreten. In einem optimistischen Szenario könnte das reale BIP bis 2033 um das 1,63-Fache höher liegen, und selbst bei einer Verzögerung der Umsetzung des Mamba-Projekts läge das reale BIP um 60 % höher als ohne LNG-Produktion. Dadurch steigt das BIP pro Kopf bis 2033 auf nahezu 1.000 USD (gegenüber geschätzten 485 USD im Jahr 2020).</a:t>
             </a:r>
-            <a:r>
-              <a:rPr lang="en-US" sz="1500" dirty="0">
-                <a:highlight>
-                  <a:srgbClr val="000000">
-                    <a:alpha val="0"/>
-                  </a:srgbClr>
-                </a:highlight>
-                <a:latin typeface="Arial"/>
-                <a:ea typeface="Calibri"/>
-                <a:cs typeface="Times New Roman"/>
-              </a:rPr>
-              <a:t>Das reale BIP könnte bis 2033 in einem optimistischen Szenario 1,63-mal höher sein, und selbst bei Verzögerungen bei der Umsetzung des Mamba-Projekts wäre das reale BIP ohne LNG-Produktion um 60 % höher. Damit würde das BIP pro Kopf bis 2033 fast 1.000 USD erreichen (ausgehend von geschätzten 485 USD für 2020).</a:t>
-            </a:r>
-            <a:endParaRPr lang="pt-BR" sz="1500" dirty="0"/>
           </a:p>
         </p:txBody>
       </p:sp>
@@ -42177,9 +38799,8 @@
           <a:p>
             <a:r>
               <a:rPr lang="en-US"/>
-              <a:t>CPF 2023-2027. Öffentliche Version. Maputo, Mai 2022.</a:t>
+              <a:t>CPF 2023-2027. Öffentliche Fassung. Maputo, Mai 2022.</a:t>
             </a:r>
-            <a:endParaRPr lang="en-US" dirty="0"/>
           </a:p>
         </p:txBody>
       </p:sp>
@@ -42301,7 +38922,6 @@
           </a:bodyPr>
           <a:lstStyle/>
           <a:p>
-            <a:pPr rtl="0"/>
             <a:r>
               <a:rPr lang="en-US" sz="2400" b="1" i="0" u="none" strike="noStrike" dirty="0">
                 <a:highlight>
@@ -42311,9 +38931,8 @@
                 </a:highlight>
                 <a:latin typeface="Arial"/>
               </a:rPr>
-              <a:t>Länderkontext: Entwicklungsherausforderungen und Chancen</a:t>
+              <a:t>Länderkontext: Entwicklungsherausforderungen und -chancen</a:t>
             </a:r>
-            <a:endParaRPr lang="en-US" sz="2400" dirty="0"/>
           </a:p>
         </p:txBody>
       </p:sp>
@@ -42345,19 +38964,6 @@
           </a:bodyPr>
           <a:lstStyle/>
           <a:p>
-            <a:pPr marL="342900" indent="-342900" algn="just" rtl="0">
-              <a:lnSpc>
-                <a:spcPct val="100000"/>
-              </a:lnSpc>
-              <a:spcBef>
-                <a:spcPct val="0"/>
-              </a:spcBef>
-              <a:spcAft>
-                <a:spcPts val="600"/>
-              </a:spcAft>
-              <a:buFont typeface="+mj-lt"/>
-              <a:buAutoNum type="arabicPeriod" startAt="5"/>
-            </a:pPr>
             <a:r>
               <a:rPr lang="en-US" sz="1600" b="1" i="0" u="none" strike="noStrike" dirty="0">
                 <a:highlight>
@@ -42369,35 +38975,10 @@
                 <a:ea typeface="Calibri"/>
                 <a:cs typeface="Times New Roman"/>
               </a:rPr>
-              <a:t>Jüngste wirtschaftliche Entwicklungen. </a:t>
+              <a:t>Jüngste wirtschaftliche Entwicklungen. Die kurzfristige makroökonomische Lage ist stabil, doch das Wachstum ist in den letzten Jahren ins Stocken geraten. Das Land weist ein hohes Risiko der Überschuldung auf, doch die Schuldenlast wird vorausschauend als tragfähig eingestuft, wenn potenzielle LNG-Einnahmen berücksichtigt werden.</a:t>
             </a:r>
-            <a:r>
-              <a:rPr lang="en-US" sz="1600" i="0" u="none" strike="noStrike" dirty="0">
-                <a:highlight>
-                  <a:srgbClr val="000000">
-                    <a:alpha val="0"/>
-                  </a:srgbClr>
-                </a:highlight>
-                <a:latin typeface="Arial"/>
-                <a:ea typeface="Calibri"/>
-                <a:cs typeface="Times New Roman"/>
-              </a:rPr>
-              <a:t>Die kurzfristige makroökonomische Lage ist stabil, das Wachstum hat jedoch in den letzten Jahren stagniert. Das Land weist ein hohes Schuldenbelastungsrisiko auf, doch wird die Verschuldung unter Berücksichtigung potenzieller LNG-Einnahmen in einem vorausschauenden Sinne als tragfähig eingestuft.</a:t>
-            </a:r>
-          </a:p>
-          <a:p>
-            <a:pPr marL="0" indent="0" algn="just" rtl="0">
-              <a:lnSpc>
-                <a:spcPct val="100000"/>
-              </a:lnSpc>
-              <a:spcBef>
-                <a:spcPct val="0"/>
-              </a:spcBef>
-              <a:spcAft>
-                <a:spcPts val="600"/>
-              </a:spcAft>
-              <a:buNone/>
-            </a:pPr>
+          </a:p>
+          <a:p>
             <a:r>
               <a:rPr lang="en-US" sz="1600" b="1" i="0" u="none" strike="noStrike" dirty="0">
                 <a:highlight>
@@ -42409,48 +38990,10 @@
                 <a:ea typeface="Calibri"/>
                 <a:cs typeface="Times New Roman"/>
               </a:rPr>
-              <a:t>	Die mittel- und langfristigen Wachstumsaussichten sind positiv, unterliegen jedoch erheblichen Risiken</a:t>
+              <a:t>	Die mittel- und langfristigen Wachstumsaussichten sind positiv, unterliegen jedoch erheblichen Risiken, darunter eine neue 	Covid-19-Welle, neue Klimaschocks, das Wiederaufflammen des Konflikts im Norden und die Auswirkungen des Krieges in der 	Ukraine.</a:t>
             </a:r>
-            <a:r>
-              <a:rPr lang="en-US" sz="1600" i="0" u="none" strike="noStrike" dirty="0">
-                <a:highlight>
-                  <a:srgbClr val="000000">
-                    <a:alpha val="0"/>
-                  </a:srgbClr>
-                </a:highlight>
-                <a:latin typeface="Arial"/>
-                <a:ea typeface="Calibri"/>
-                <a:cs typeface="Times New Roman"/>
-              </a:rPr>
-              <a:t>, darunter eine neue 	Covid-19-Welle, neue Klimaschocks, ein Wiederaufflammen des Konflikts im Norden und die Auswirkungen des Krieges in der 	Ukraine.</a:t>
-            </a:r>
-          </a:p>
-          <a:p>
-            <a:pPr marL="0" indent="0" algn="just" rtl="0">
-              <a:lnSpc>
-                <a:spcPct val="100000"/>
-              </a:lnSpc>
-              <a:spcBef>
-                <a:spcPct val="0"/>
-              </a:spcBef>
-              <a:spcAft>
-                <a:spcPts val="600"/>
-              </a:spcAft>
-              <a:buNone/>
-            </a:pPr>
-            <a:r>
-              <a:rPr lang="en-US" sz="1600" i="0" u="none" strike="noStrike" dirty="0">
-                <a:highlight>
-                  <a:srgbClr val="000000">
-                    <a:alpha val="0"/>
-                  </a:srgbClr>
-                </a:highlight>
-                <a:latin typeface="Arial"/>
-                <a:ea typeface="Calibri"/>
-                <a:cs typeface="Times New Roman"/>
-              </a:rPr>
-              <a:t>	</a:t>
-            </a:r>
+          </a:p>
+          <a:p>
             <a:r>
               <a:rPr lang="en-US" sz="1600" b="1" i="0" u="none" strike="noStrike" dirty="0">
                 <a:highlight>
@@ -42462,10 +39005,12 @@
                 <a:ea typeface="Calibri"/>
                 <a:cs typeface="Times New Roman"/>
               </a:rPr>
-              <a:t>Makroökonomische Risiken und Auswirkungen auf die Armut sind erheblich </a:t>
+              <a:t>	Die makroökonomischen Risiken und ihre Auswirkungen auf die Armut sind beträchtlich (Inflation, Zinssatz, Haushaltsdruck und 	Ausweitung des Handelsbilanzdefizits). Die Auswirkungen auf die Armut werden direkt (Lebensmittel- und Kraftstoffpreise) und indirekt 	(Schaffung von Arbeitsplätzen) sein, dürften sich jedoch auf städtische und ländliche Gebiete sowie auf 	unterschiedliche Armutsniveaus verschieden auswirken.	</a:t>
             </a:r>
+          </a:p>
+          <a:p>
             <a:r>
-              <a:rPr lang="en-US" sz="1600" i="0" u="none" strike="noStrike" dirty="0">
+              <a:rPr lang="en-US" sz="1600" b="1" i="0" u="none" strike="noStrike" dirty="0">
                 <a:highlight>
                   <a:srgbClr val="000000">
                     <a:alpha val="0"/>
@@ -42475,48 +39020,8 @@
                 <a:ea typeface="Calibri"/>
                 <a:cs typeface="Times New Roman"/>
               </a:rPr>
-              <a:t>(Inflation, Zinssätze, fiskalischer Druck und 	Zunahme des Handelsbilanzdefizits). Die Auswirkungen auf die Armut werden direkt (Nahrungsmittel- und Kraftstoffpreise) und indirekt 	(Beschäftigungsschaffung) sein, aber es wird erwartet, dass sie sich in städtischen und ländlichen Gebieten sowie bei 	verschiedenen Armutsniveaus unterschiedlich auswirken.</a:t>
+              <a:t/>
             </a:r>
-            <a:r>
-              <a:rPr lang="pt" sz="1600" dirty="0">
-                <a:highlight>
-                  <a:srgbClr val="000000">
-                    <a:alpha val="0"/>
-                  </a:srgbClr>
-                </a:highlight>
-                <a:latin typeface="Arial"/>
-                <a:cs typeface="Times New Roman"/>
-              </a:rPr>
-              <a:t>	</a:t>
-            </a:r>
-            <a:endParaRPr lang="en-US" sz="1600" dirty="0">
-              <a:highlight>
-                <a:srgbClr val="000000">
-                  <a:alpha val="0"/>
-                </a:srgbClr>
-              </a:highlight>
-              <a:latin typeface="Arial"/>
-              <a:cs typeface="Times New Roman"/>
-            </a:endParaRPr>
-          </a:p>
-          <a:p>
-            <a:pPr marL="0" indent="0" algn="just">
-              <a:lnSpc>
-                <a:spcPct val="100000"/>
-              </a:lnSpc>
-              <a:spcBef>
-                <a:spcPct val="0"/>
-              </a:spcBef>
-              <a:spcAft>
-                <a:spcPts val="600"/>
-              </a:spcAft>
-              <a:buNone/>
-            </a:pPr>
-            <a:endParaRPr lang="en-US" sz="1100" dirty="0">
-              <a:latin typeface="+mn-lt"/>
-              <a:ea typeface="Calibri" panose="020F0502020204030204" pitchFamily="34" charset="0"/>
-              <a:cs typeface="Times New Roman"/>
-            </a:endParaRPr>
           </a:p>
         </p:txBody>
       </p:sp>
@@ -42631,9 +39136,8 @@
           <a:p>
             <a:r>
               <a:rPr lang="en-US"/>
-              <a:t>CPF 2023-2027. Öffentliche Version. Maputo, Mai 2022.</a:t>
+              <a:t>CPF 2023-2027. Öffentliche Fassung. Maputo, Mai 2022.</a:t>
             </a:r>
-            <a:endParaRPr lang="en-US" dirty="0"/>
           </a:p>
         </p:txBody>
       </p:sp>
@@ -42764,9 +39268,8 @@
                 </a:highlight>
                 <a:latin typeface="Arial"/>
               </a:rPr>
-              <a:t>Systematische Länderdiagnose (SCD) der Weltbank und Empfehlungen – Zusammenfassung</a:t>
+              <a:t>Systematic Country Diagnostic (SCD) der Weltbank und Empfehlungen – Zusammenfassung</a:t>
             </a:r>
-            <a:endParaRPr lang="en-US" dirty="0"/>
           </a:p>
         </p:txBody>
       </p:sp>
@@ -42798,7 +39301,6 @@
           </a:bodyPr>
           <a:lstStyle/>
           <a:p>
-            <a:pPr algn="just" rtl="0"/>
             <a:r>
               <a:rPr lang="en-US" sz="1700" b="0" i="0" u="none" strike="noStrike" dirty="0">
                 <a:highlight>
@@ -42808,11 +39310,10 @@
                 </a:highlight>
                 <a:latin typeface="Arial"/>
               </a:rPr>
-              <a:t>Die Aktualisierung der SCD für Mosambik kam zu dem Schluss, dass die wichtigsten Herausforderungen des Landes insgesamt gegenüber der vorherigen Diagnose (2016) unverändert geblieben sind.</a:t>
+              <a:t>Die Aktualisierung des SCD für Mosambik kam zu dem Schluss, dass die wichtigsten Herausforderungen des Landes insgesamt gegenüber der vorherigen Diagnose (2016) unverändert geblieben sind.</a:t>
             </a:r>
           </a:p>
           <a:p>
-            <a:pPr algn="just" rtl="0"/>
             <a:r>
               <a:rPr lang="en-US" sz="1700" b="0" i="0" u="none" strike="noStrike" dirty="0">
                 <a:highlight>
@@ -42822,22 +39323,10 @@
                 </a:highlight>
                 <a:latin typeface="Arial"/>
               </a:rPr>
-              <a:t>Um die Entwicklung zu beschleunigen, muss Mosambik auf einen inklusiveren, nachhaltigeren und widerstandsfähigeren Entwicklungspfad (GRID) übergehen.</a:t>
+              <a:t>Um die Entwicklung zu beschleunigen, muss Mosambik auf einen stärker inklusiven, nachhaltigen und resilienten Entwicklungspfad (GRID) umsteigen.</a:t>
             </a:r>
           </a:p>
           <a:p>
-            <a:pPr algn="just" rtl="0"/>
-            <a:r>
-              <a:rPr lang="en-US" sz="1700" b="1" i="0" u="none" strike="noStrike" dirty="0">
-                <a:highlight>
-                  <a:srgbClr val="000000">
-                    <a:alpha val="0"/>
-                  </a:srgbClr>
-                </a:highlight>
-                <a:latin typeface="Arial"/>
-              </a:rPr>
-              <a:t>Beschleunigtes Wachstum ist wichtig, es besteht jedoch die Notwendigkeit, das Modell inklusiver zu gestalten</a:t>
-            </a:r>
             <a:r>
               <a:rPr lang="en-US" sz="1700" b="0" i="0" u="none" strike="noStrike" dirty="0">
                 <a:highlight>
@@ -42847,11 +39336,10 @@
                 </a:highlight>
                 <a:latin typeface="Arial"/>
               </a:rPr>
-              <a:t>. Dies erfordert eine beschleunigte strukturelle Transformation, größere und bessere Investitionen in die Bevölkerung sowie eine Reform der zentralen Institutionen zur Verbesserung der Regierungseffizienz und -führung – mit einer verbesserten Reaktion des Landes auf Klima- und Gesundheitsrisiken sowie der Prävention von Konflikten und Gewalt.</a:t>
+              <a:t>Beschleunigtes Wachstum ist wichtig, doch das Modell muss überarbeitet werden, um es inklusiver zu gestalten. Dies erfordert einen beschleunigten Strukturwandel, höhere und bessere Investitionen in die Bevölkerung sowie eine Reform der zentralen Institutionen zur Verbesserung der Effizienz und der Regierungsführung – wodurch die Reaktionsfähigkeit des Landes auf Klima- und Gesundheitsrisiken sowie die Prävention von Konflikten und Gewalt verbessert werden.</a:t>
             </a:r>
           </a:p>
           <a:p>
-            <a:pPr algn="just" rtl="0"/>
             <a:r>
               <a:rPr lang="en-US" sz="1700" b="0" i="0" u="none" strike="noStrike" dirty="0">
                 <a:highlight>
@@ -42861,9 +39349,8 @@
                 </a:highlight>
                 <a:latin typeface="Arial"/>
               </a:rPr>
-              <a:t>Die zur Erreichung dieser Ziele erforderlichen Reformen und Maßnahmen wurden in der SCD-Aktualisierung auf der Grundlage aktueller WBG-Studien identifiziert.</a:t>
+              <a:t>Die zur Erreichung dieser Ziele erforderlichen Reformen und Politiken wurden in der SCD-Aktualisierung auf Grundlage aktueller WBG-Studien ermittelt.</a:t>
             </a:r>
-            <a:endParaRPr lang="en-US" sz="1700" dirty="0"/>
           </a:p>
         </p:txBody>
       </p:sp>
@@ -42958,19 +39445,15 @@
           <a:p>
             <a:r>
               <a:rPr lang="en-US" sz="1050" dirty="0"/>
-              <a:t>Systematische Länderdiagnose (SCD) der Weltbank gemäß den 2016 identifizierten Zielen</a:t>
+              <a:t>Systematic Country Diagnostic (SCD) der Weltbank gemäß den 2016 festgelegten Zielen
+</a:t>
             </a:r>
-            <a:br/>
+          </a:p>
+          <a:p>
             <a:r>
               <a:rPr lang="en-US" sz="1050" dirty="0"/>
               <a:t/>
             </a:r>
-            <a:br/>
-            <a:r>
-              <a:rPr lang="en-US" sz="1050" dirty="0"/>
-              <a:t/>
-            </a:r>
-            <a:endParaRPr lang="pt-BR" sz="1050" dirty="0"/>
           </a:p>
         </p:txBody>
       </p:sp>
@@ -42997,9 +39480,8 @@
           <a:p>
             <a:r>
               <a:rPr lang="en-US"/>
-              <a:t>CPF 2023-2027. Öffentliche Version. Maputo, Mai 2022.</a:t>
+              <a:t>CPF 2023-2027. Öffentliche Fassung. Maputo, Mai 2022.</a:t>
             </a:r>
-            <a:endParaRPr lang="en-US" dirty="0"/>
           </a:p>
         </p:txBody>
       </p:sp>
@@ -43121,29 +39603,17 @@
           </a:bodyPr>
           <a:lstStyle/>
           <a:p>
-            <a:pPr algn="ctr"/>
             <a:r>
               <a:rPr lang="en-US" sz="4000" dirty="0"/>
-              <a:t>Präsentationsstruktur</a:t>
+              <a:t>Aufbau der Präsentation
+</a:t>
             </a:r>
-            <a:br/>
+          </a:p>
+          <a:p>
             <a:r>
               <a:rPr lang="en-US" sz="4000" dirty="0"/>
               <a:t/>
             </a:r>
-            <a:br/>
-            <a:r>
-              <a:rPr lang="en-US" sz="4000" dirty="0"/>
-              <a:t/>
-            </a:r>
-            <a:endParaRPr lang="pt" sz="4000" b="0" i="1" u="none" strike="noStrike" dirty="0">
-              <a:highlight>
-                <a:srgbClr val="000000">
-                  <a:alpha val="0"/>
-                </a:srgbClr>
-              </a:highlight>
-              <a:latin typeface="Arial"/>
-            </a:endParaRPr>
           </a:p>
         </p:txBody>
       </p:sp>
@@ -43175,19 +39645,6 @@
           </a:bodyPr>
           <a:lstStyle/>
           <a:p>
-            <a:pPr marL="1371600" lvl="3" indent="-571500">
-              <a:lnSpc>
-                <a:spcPct val="100000"/>
-              </a:lnSpc>
-              <a:spcBef>
-                <a:spcPts val="1200"/>
-              </a:spcBef>
-              <a:spcAft>
-                <a:spcPts val="1200"/>
-              </a:spcAft>
-              <a:buFont typeface="+mj-lt"/>
-              <a:buAutoNum type="romanUcPeriod"/>
-            </a:pPr>
             <a:r>
               <a:rPr lang="en-US" sz="3200" b="1" dirty="0">
                 <a:solidFill>
@@ -43196,9 +39653,11 @@
                   </a:schemeClr>
                 </a:solidFill>
               </a:rPr>
-              <a:t>Sichtweise der Weltbankgruppe auf die wichtigsten strategischen Herausforderungen des Landes   </a:t>
+              <a:t>Sicht der Weltbankgruppe auf die wichtigsten strategischen Herausforderungen des Landes   
+</a:t>
             </a:r>
-            <a:br/>
+          </a:p>
+          <a:p>
             <a:r>
               <a:rPr lang="en-US" sz="3200" b="1" dirty="0">
                 <a:solidFill>
@@ -43207,9 +39666,10 @@
                   </a:schemeClr>
                 </a:solidFill>
               </a:rPr>
-              <a:t>Wichtigste Lehren aus dem vorigen CPF (2017-2021)</a:t>
+              <a:t>Wichtigste Lehren aus dem vorherigen CPF (2017-2021)</a:t>
             </a:r>
-            <a:br/>
+          </a:p>
+          <a:p>
             <a:r>
               <a:rPr lang="en-US" sz="3200" b="1" dirty="0">
                 <a:solidFill>
@@ -43220,7 +39680,8 @@
               </a:rPr>
               <a:t>Erster Vorschlag für den CPF 2023-2027</a:t>
             </a:r>
-            <a:br/>
+          </a:p>
+          <a:p>
             <a:r>
               <a:rPr lang="en-US" sz="3200" b="1" dirty="0">
                 <a:solidFill>
@@ -43231,64 +39692,6 @@
               </a:rPr>
               <a:t/>
             </a:r>
-            <a:br/>
-            <a:r>
-              <a:rPr lang="en-US" sz="3200" b="1" dirty="0">
-                <a:solidFill>
-                  <a:schemeClr val="bg2">
-                    <a:lumMod val="90000"/>
-                  </a:schemeClr>
-                </a:solidFill>
-              </a:rPr>
-              <a:t/>
-            </a:r>
-            <a:r>
-              <a:rPr lang="en-US" sz="3200" b="1" dirty="0"/>
-              <a:t>Main lessons from the previous CPF (2017-2021)
-</a:t>
-            </a:r>
-            <a:r>
-              <a:rPr lang="en-US" sz="3200" b="1" dirty="0">
-                <a:solidFill>
-                  <a:schemeClr val="bg2">
-                    <a:lumMod val="90000"/>
-                  </a:schemeClr>
-                </a:solidFill>
-              </a:rPr>
-              <a:t>Initial Proposal for CPF 2023-2027</a:t>
-            </a:r>
-            <a:endParaRPr lang="pt-BR" sz="3200" b="1" i="0" u="none" strike="noStrike" dirty="0">
-              <a:solidFill>
-                <a:schemeClr val="bg2">
-                  <a:lumMod val="90000"/>
-                </a:schemeClr>
-              </a:solidFill>
-              <a:highlight>
-                <a:srgbClr val="000000">
-                  <a:alpha val="0"/>
-                </a:srgbClr>
-              </a:highlight>
-              <a:latin typeface="Arial"/>
-            </a:endParaRPr>
-          </a:p>
-          <a:p>
-            <a:pPr marL="1143000" lvl="3" indent="0">
-              <a:lnSpc>
-                <a:spcPct val="100000"/>
-              </a:lnSpc>
-              <a:spcBef>
-                <a:spcPts val="1200"/>
-              </a:spcBef>
-              <a:buNone/>
-            </a:pPr>
-            <a:endParaRPr lang="pt" sz="3200" b="1" i="0" u="none" strike="noStrike" dirty="0">
-              <a:highlight>
-                <a:srgbClr val="000000">
-                  <a:alpha val="0"/>
-                </a:srgbClr>
-              </a:highlight>
-              <a:latin typeface="Arial"/>
-            </a:endParaRPr>
           </a:p>
         </p:txBody>
       </p:sp>
@@ -43315,9 +39718,8 @@
           <a:p>
             <a:r>
               <a:rPr lang="en-US"/>
-              <a:t>CPF 2023-2027. Öffentliche Version. Maputo, Mai 2022.</a:t>
+              <a:t>CPF 2023-2027. Öffentliche Fassung. Maputo, Mai 2022.</a:t>
             </a:r>
-            <a:endParaRPr lang="en-US" dirty="0"/>
           </a:p>
         </p:txBody>
       </p:sp>
